--- a/reports/CopilotStudio_ハッカソン_事前相談会②_状況報告_20260724.pptx
+++ b/reports/CopilotStudio_ハッカソン_事前相談会②_状況報告_20260724.pptx
@@ -3552,7 +3552,7 @@
                 </a:solidFill>
                 <a:latin typeface="Meiryo"/>
               </a:rPr>
-              <a:t>7月22日〜24日に実施した第2回 事前相談会では、第1回後に提出された各チームの企画書を前提に、構築フェーズへ進むための「進捗確認」「技術論点の整理」「ネクストアクションの明確化」を行った。本資料では、各チームの状況を一覧・個票で整理し、あわせてメンター担当検討の材料を提示する。</a:t>
+              <a:t>7月22日〜24日に実施した第2回 事前相談会では、第1回後に提出された各チームの企画書を前提に、構築フェーズへ進むための「進捗確認」「技術論点の整理」「ネクストアクションの明確化」を行った。本資料では、各チームの状況を一覧・個票で整理し、あわせて難易度・使用アプリの種類を比較整理する。</a:t>
             </a:r>
           </a:p>
         </p:txBody>
@@ -4411,7 +4411,7 @@
                 </a:solidFill>
                 <a:latin typeface="Meiryo"/>
               </a:rPr>
-              <a:t>第2回は「企画書提出後の棚卸し」。特に外部参照禁止・M365外連携・本番移行・手順書整備など、事務局判断や横断整理が必要な論点が増加。本資料では難易度・使用アプリ・メンター担当案も比較整理する。</a:t>
+              <a:t>第2回は「企画書提出後の棚卸し」。特に外部参照禁止・M365外連携・本番移行・手順書整備など、事務局判断や横断整理が必要な論点が増加。本資料では各チームの難易度・使用アプリの種類も比較整理する。</a:t>
             </a:r>
           </a:p>
         </p:txBody>
@@ -5307,7 +5307,7 @@
             <a:avLst/>
           </a:prstGeom>
           <a:solidFill>
-            <a:srgbClr val="245A8C"/>
+            <a:srgbClr val="1F385C"/>
           </a:solidFill>
           <a:ln>
             <a:noFill/>
@@ -5340,7 +5340,7 @@
                 </a:solidFill>
                 <a:latin typeface="Meiryo"/>
               </a:rPr>
-              <a:t>メンター案：中村</a:t>
+              <a:t>第2回：実施済</a:t>
             </a:r>
           </a:p>
         </p:txBody>
@@ -7193,7 +7193,7 @@
             <a:avLst/>
           </a:prstGeom>
           <a:solidFill>
-            <a:srgbClr val="2E7D5B"/>
+            <a:srgbClr val="6B7480"/>
           </a:solidFill>
           <a:ln>
             <a:noFill/>
@@ -7226,7 +7226,7 @@
                 </a:solidFill>
                 <a:latin typeface="Meiryo"/>
               </a:rPr>
-              <a:t>メンター案：甲佐</a:t>
+              <a:t>第2回：未実施（第1回＋企画書）</a:t>
             </a:r>
           </a:p>
         </p:txBody>
@@ -9079,7 +9079,7 @@
             <a:avLst/>
           </a:prstGeom>
           <a:solidFill>
-            <a:srgbClr val="245A8C"/>
+            <a:srgbClr val="6B7480"/>
           </a:solidFill>
           <a:ln>
             <a:noFill/>
@@ -9112,7 +9112,7 @@
                 </a:solidFill>
                 <a:latin typeface="Meiryo"/>
               </a:rPr>
-              <a:t>メンター案：中村</a:t>
+              <a:t>第2回：未実施（第1回＋企画書）</a:t>
             </a:r>
           </a:p>
         </p:txBody>
@@ -10965,7 +10965,7 @@
             <a:avLst/>
           </a:prstGeom>
           <a:solidFill>
-            <a:srgbClr val="245A8C"/>
+            <a:srgbClr val="6B7480"/>
           </a:solidFill>
           <a:ln>
             <a:noFill/>
@@ -10998,7 +10998,7 @@
                 </a:solidFill>
                 <a:latin typeface="Meiryo"/>
               </a:rPr>
-              <a:t>メンター案：中村</a:t>
+              <a:t>第2回：未実施（第1回＋企画書）</a:t>
             </a:r>
           </a:p>
         </p:txBody>
@@ -12851,7 +12851,7 @@
             <a:avLst/>
           </a:prstGeom>
           <a:solidFill>
-            <a:srgbClr val="2E7D5B"/>
+            <a:srgbClr val="6B7480"/>
           </a:solidFill>
           <a:ln>
             <a:noFill/>
@@ -12884,7 +12884,7 @@
                 </a:solidFill>
                 <a:latin typeface="Meiryo"/>
               </a:rPr>
-              <a:t>メンター案：甲佐</a:t>
+              <a:t>第2回：未実施（第1回＋企画書）</a:t>
             </a:r>
           </a:p>
         </p:txBody>
@@ -14737,7 +14737,7 @@
             <a:avLst/>
           </a:prstGeom>
           <a:solidFill>
-            <a:srgbClr val="245A8C"/>
+            <a:srgbClr val="1F385C"/>
           </a:solidFill>
           <a:ln>
             <a:noFill/>
@@ -14770,7 +14770,7 @@
                 </a:solidFill>
                 <a:latin typeface="Meiryo"/>
               </a:rPr>
-              <a:t>メンター案：中村</a:t>
+              <a:t>第2回：実施済</a:t>
             </a:r>
           </a:p>
         </p:txBody>
@@ -16623,7 +16623,7 @@
             <a:avLst/>
           </a:prstGeom>
           <a:solidFill>
-            <a:srgbClr val="2E7D5B"/>
+            <a:srgbClr val="1F385C"/>
           </a:solidFill>
           <a:ln>
             <a:noFill/>
@@ -16656,7 +16656,7 @@
                 </a:solidFill>
                 <a:latin typeface="Meiryo"/>
               </a:rPr>
-              <a:t>メンター案：甲佐</a:t>
+              <a:t>第2回：実施済</a:t>
             </a:r>
           </a:p>
         </p:txBody>
@@ -18124,7 +18124,7 @@
                 </a:solidFill>
                 <a:latin typeface="Meiryo"/>
               </a:rPr>
-              <a:t>全11チームが企画書提出を経て原則1案に整理済み。進捗レベル（Lv1〜5）・難易度・メンター担当案とあわせて一覧化。</a:t>
+              <a:t>全11チームが企画書提出を経て原則1案に整理済み。進捗レベル（Lv1〜5）・難易度とあわせて一覧化。</a:t>
             </a:r>
           </a:p>
         </p:txBody>
@@ -18178,7 +18178,7 @@
         </p:nvGraphicFramePr>
         <p:xfrm>
           <a:off x="502920" y="1975104"/>
-          <a:ext cx="11201399" cy="4503420"/>
+          <a:ext cx="11201400" cy="4503420"/>
         </p:xfrm>
         <a:graphic>
           <a:graphicData uri="http://schemas.openxmlformats.org/drawingml/2006/table">
@@ -18188,11 +18188,10 @@
               </a:tblPr>
               <a:tblGrid>
                 <a:gridCol w="566928"/>
-                <a:gridCol w="1874519"/>
-                <a:gridCol w="3063240"/>
-                <a:gridCol w="3319272"/>
-                <a:gridCol w="960120"/>
-                <a:gridCol w="1417320"/>
+                <a:gridCol w="1965960"/>
+                <a:gridCol w="3200400"/>
+                <a:gridCol w="4023360"/>
+                <a:gridCol w="1444752"/>
               </a:tblGrid>
               <a:tr h="329184">
                 <a:tc>
@@ -18321,33 +18320,6 @@
                           <a:latin typeface="Meiryo"/>
                         </a:rPr>
                         <a:t>難易度</a:t>
-                      </a:r>
-                    </a:p>
-                  </a:txBody>
-                  <a:tcPr marL="63500" marR="63500" marT="25400" marB="25400" anchor="ctr">
-                    <a:solidFill>
-                      <a:srgbClr val="1F385C"/>
-                    </a:solidFill>
-                  </a:tcPr>
-                </a:tc>
-                <a:tc>
-                  <a:txBody>
-                    <a:bodyPr wrap="square"/>
-                    <a:lstStyle/>
-                    <a:p>
-                      <a:pPr algn="ctr">
-                        <a:lnSpc>
-                          <a:spcPct val="98000"/>
-                        </a:lnSpc>
-                      </a:pPr>
-                      <a:r>
-                        <a:rPr sz="1000" b="1">
-                          <a:solidFill>
-                            <a:srgbClr val="FFFFFF"/>
-                          </a:solidFill>
-                          <a:latin typeface="Meiryo"/>
-                        </a:rPr>
-                        <a:t>メンター案</a:t>
                       </a:r>
                     </a:p>
                   </a:txBody>
@@ -18494,33 +18466,6 @@
                     </a:solidFill>
                   </a:tcPr>
                 </a:tc>
-                <a:tc>
-                  <a:txBody>
-                    <a:bodyPr wrap="square"/>
-                    <a:lstStyle/>
-                    <a:p>
-                      <a:pPr algn="ctr">
-                        <a:lnSpc>
-                          <a:spcPct val="98000"/>
-                        </a:lnSpc>
-                      </a:pPr>
-                      <a:r>
-                        <a:rPr sz="950" b="1">
-                          <a:solidFill>
-                            <a:srgbClr val="245A8C"/>
-                          </a:solidFill>
-                          <a:latin typeface="Meiryo"/>
-                        </a:rPr>
-                        <a:t>中村</a:t>
-                      </a:r>
-                    </a:p>
-                  </a:txBody>
-                  <a:tcPr marL="63500" marR="63500" marT="25400" marB="25400" anchor="ctr">
-                    <a:solidFill>
-                      <a:srgbClr val="FFFFFF"/>
-                    </a:solidFill>
-                  </a:tcPr>
-                </a:tc>
               </a:tr>
               <a:tr h="379476">
                 <a:tc>
@@ -18649,33 +18594,6 @@
                           <a:latin typeface="Meiryo"/>
                         </a:rPr>
                         <a:t>中</a:t>
-                      </a:r>
-                    </a:p>
-                  </a:txBody>
-                  <a:tcPr marL="63500" marR="63500" marT="25400" marB="25400" anchor="ctr">
-                    <a:solidFill>
-                      <a:srgbClr val="F2F4F7"/>
-                    </a:solidFill>
-                  </a:tcPr>
-                </a:tc>
-                <a:tc>
-                  <a:txBody>
-                    <a:bodyPr wrap="square"/>
-                    <a:lstStyle/>
-                    <a:p>
-                      <a:pPr algn="ctr">
-                        <a:lnSpc>
-                          <a:spcPct val="98000"/>
-                        </a:lnSpc>
-                      </a:pPr>
-                      <a:r>
-                        <a:rPr sz="950" b="1">
-                          <a:solidFill>
-                            <a:srgbClr val="245A8C"/>
-                          </a:solidFill>
-                          <a:latin typeface="Meiryo"/>
-                        </a:rPr>
-                        <a:t>中村</a:t>
                       </a:r>
                     </a:p>
                   </a:txBody>
@@ -18822,33 +18740,6 @@
                     </a:solidFill>
                   </a:tcPr>
                 </a:tc>
-                <a:tc>
-                  <a:txBody>
-                    <a:bodyPr wrap="square"/>
-                    <a:lstStyle/>
-                    <a:p>
-                      <a:pPr algn="ctr">
-                        <a:lnSpc>
-                          <a:spcPct val="98000"/>
-                        </a:lnSpc>
-                      </a:pPr>
-                      <a:r>
-                        <a:rPr sz="950" b="1">
-                          <a:solidFill>
-                            <a:srgbClr val="2E7D5B"/>
-                          </a:solidFill>
-                          <a:latin typeface="Meiryo"/>
-                        </a:rPr>
-                        <a:t>甲佐</a:t>
-                      </a:r>
-                    </a:p>
-                  </a:txBody>
-                  <a:tcPr marL="63500" marR="63500" marT="25400" marB="25400" anchor="ctr">
-                    <a:solidFill>
-                      <a:srgbClr val="FFFFFF"/>
-                    </a:solidFill>
-                  </a:tcPr>
-                </a:tc>
               </a:tr>
               <a:tr h="379476">
                 <a:tc>
@@ -18977,33 +18868,6 @@
                           <a:latin typeface="Meiryo"/>
                         </a:rPr>
                         <a:t>高</a:t>
-                      </a:r>
-                    </a:p>
-                  </a:txBody>
-                  <a:tcPr marL="63500" marR="63500" marT="25400" marB="25400" anchor="ctr">
-                    <a:solidFill>
-                      <a:srgbClr val="F2F4F7"/>
-                    </a:solidFill>
-                  </a:tcPr>
-                </a:tc>
-                <a:tc>
-                  <a:txBody>
-                    <a:bodyPr wrap="square"/>
-                    <a:lstStyle/>
-                    <a:p>
-                      <a:pPr algn="ctr">
-                        <a:lnSpc>
-                          <a:spcPct val="98000"/>
-                        </a:lnSpc>
-                      </a:pPr>
-                      <a:r>
-                        <a:rPr sz="950" b="1">
-                          <a:solidFill>
-                            <a:srgbClr val="2E7D5B"/>
-                          </a:solidFill>
-                          <a:latin typeface="Meiryo"/>
-                        </a:rPr>
-                        <a:t>甲佐</a:t>
                       </a:r>
                     </a:p>
                   </a:txBody>
@@ -19150,33 +19014,6 @@
                     </a:solidFill>
                   </a:tcPr>
                 </a:tc>
-                <a:tc>
-                  <a:txBody>
-                    <a:bodyPr wrap="square"/>
-                    <a:lstStyle/>
-                    <a:p>
-                      <a:pPr algn="ctr">
-                        <a:lnSpc>
-                          <a:spcPct val="98000"/>
-                        </a:lnSpc>
-                      </a:pPr>
-                      <a:r>
-                        <a:rPr sz="950" b="1">
-                          <a:solidFill>
-                            <a:srgbClr val="245A8C"/>
-                          </a:solidFill>
-                          <a:latin typeface="Meiryo"/>
-                        </a:rPr>
-                        <a:t>中村</a:t>
-                      </a:r>
-                    </a:p>
-                  </a:txBody>
-                  <a:tcPr marL="63500" marR="63500" marT="25400" marB="25400" anchor="ctr">
-                    <a:solidFill>
-                      <a:srgbClr val="FFFFFF"/>
-                    </a:solidFill>
-                  </a:tcPr>
-                </a:tc>
               </a:tr>
               <a:tr h="379476">
                 <a:tc>
@@ -19305,33 +19142,6 @@
                           <a:latin typeface="Meiryo"/>
                         </a:rPr>
                         <a:t>中〜高</a:t>
-                      </a:r>
-                    </a:p>
-                  </a:txBody>
-                  <a:tcPr marL="63500" marR="63500" marT="25400" marB="25400" anchor="ctr">
-                    <a:solidFill>
-                      <a:srgbClr val="F2F4F7"/>
-                    </a:solidFill>
-                  </a:tcPr>
-                </a:tc>
-                <a:tc>
-                  <a:txBody>
-                    <a:bodyPr wrap="square"/>
-                    <a:lstStyle/>
-                    <a:p>
-                      <a:pPr algn="ctr">
-                        <a:lnSpc>
-                          <a:spcPct val="98000"/>
-                        </a:lnSpc>
-                      </a:pPr>
-                      <a:r>
-                        <a:rPr sz="950" b="1">
-                          <a:solidFill>
-                            <a:srgbClr val="2E7D5B"/>
-                          </a:solidFill>
-                          <a:latin typeface="Meiryo"/>
-                        </a:rPr>
-                        <a:t>甲佐</a:t>
                       </a:r>
                     </a:p>
                   </a:txBody>
@@ -19478,33 +19288,6 @@
                     </a:solidFill>
                   </a:tcPr>
                 </a:tc>
-                <a:tc>
-                  <a:txBody>
-                    <a:bodyPr wrap="square"/>
-                    <a:lstStyle/>
-                    <a:p>
-                      <a:pPr algn="ctr">
-                        <a:lnSpc>
-                          <a:spcPct val="98000"/>
-                        </a:lnSpc>
-                      </a:pPr>
-                      <a:r>
-                        <a:rPr sz="950" b="1">
-                          <a:solidFill>
-                            <a:srgbClr val="245A8C"/>
-                          </a:solidFill>
-                          <a:latin typeface="Meiryo"/>
-                        </a:rPr>
-                        <a:t>中村</a:t>
-                      </a:r>
-                    </a:p>
-                  </a:txBody>
-                  <a:tcPr marL="63500" marR="63500" marT="25400" marB="25400" anchor="ctr">
-                    <a:solidFill>
-                      <a:srgbClr val="FFFFFF"/>
-                    </a:solidFill>
-                  </a:tcPr>
-                </a:tc>
               </a:tr>
               <a:tr h="379476">
                 <a:tc>
@@ -19633,33 +19416,6 @@
                           <a:latin typeface="Meiryo"/>
                         </a:rPr>
                         <a:t>中</a:t>
-                      </a:r>
-                    </a:p>
-                  </a:txBody>
-                  <a:tcPr marL="63500" marR="63500" marT="25400" marB="25400" anchor="ctr">
-                    <a:solidFill>
-                      <a:srgbClr val="F2F4F7"/>
-                    </a:solidFill>
-                  </a:tcPr>
-                </a:tc>
-                <a:tc>
-                  <a:txBody>
-                    <a:bodyPr wrap="square"/>
-                    <a:lstStyle/>
-                    <a:p>
-                      <a:pPr algn="ctr">
-                        <a:lnSpc>
-                          <a:spcPct val="98000"/>
-                        </a:lnSpc>
-                      </a:pPr>
-                      <a:r>
-                        <a:rPr sz="950" b="1">
-                          <a:solidFill>
-                            <a:srgbClr val="245A8C"/>
-                          </a:solidFill>
-                          <a:latin typeface="Meiryo"/>
-                        </a:rPr>
-                        <a:t>中村</a:t>
                       </a:r>
                     </a:p>
                   </a:txBody>
@@ -19806,33 +19562,6 @@
                     </a:solidFill>
                   </a:tcPr>
                 </a:tc>
-                <a:tc>
-                  <a:txBody>
-                    <a:bodyPr wrap="square"/>
-                    <a:lstStyle/>
-                    <a:p>
-                      <a:pPr algn="ctr">
-                        <a:lnSpc>
-                          <a:spcPct val="98000"/>
-                        </a:lnSpc>
-                      </a:pPr>
-                      <a:r>
-                        <a:rPr sz="950" b="1">
-                          <a:solidFill>
-                            <a:srgbClr val="2E7D5B"/>
-                          </a:solidFill>
-                          <a:latin typeface="Meiryo"/>
-                        </a:rPr>
-                        <a:t>甲佐</a:t>
-                      </a:r>
-                    </a:p>
-                  </a:txBody>
-                  <a:tcPr marL="63500" marR="63500" marT="25400" marB="25400" anchor="ctr">
-                    <a:solidFill>
-                      <a:srgbClr val="FFFFFF"/>
-                    </a:solidFill>
-                  </a:tcPr>
-                </a:tc>
               </a:tr>
               <a:tr h="379476">
                 <a:tc>
@@ -19961,33 +19690,6 @@
                           <a:latin typeface="Meiryo"/>
                         </a:rPr>
                         <a:t>中</a:t>
-                      </a:r>
-                    </a:p>
-                  </a:txBody>
-                  <a:tcPr marL="63500" marR="63500" marT="25400" marB="25400" anchor="ctr">
-                    <a:solidFill>
-                      <a:srgbClr val="F2F4F7"/>
-                    </a:solidFill>
-                  </a:tcPr>
-                </a:tc>
-                <a:tc>
-                  <a:txBody>
-                    <a:bodyPr wrap="square"/>
-                    <a:lstStyle/>
-                    <a:p>
-                      <a:pPr algn="ctr">
-                        <a:lnSpc>
-                          <a:spcPct val="98000"/>
-                        </a:lnSpc>
-                      </a:pPr>
-                      <a:r>
-                        <a:rPr sz="950" b="1">
-                          <a:solidFill>
-                            <a:srgbClr val="245A8C"/>
-                          </a:solidFill>
-                          <a:latin typeface="Meiryo"/>
-                        </a:rPr>
-                        <a:t>中村</a:t>
                       </a:r>
                     </a:p>
                   </a:txBody>
@@ -20134,33 +19836,6 @@
                     </a:solidFill>
                   </a:tcPr>
                 </a:tc>
-                <a:tc>
-                  <a:txBody>
-                    <a:bodyPr wrap="square"/>
-                    <a:lstStyle/>
-                    <a:p>
-                      <a:pPr algn="ctr">
-                        <a:lnSpc>
-                          <a:spcPct val="98000"/>
-                        </a:lnSpc>
-                      </a:pPr>
-                      <a:r>
-                        <a:rPr sz="950" b="1">
-                          <a:solidFill>
-                            <a:srgbClr val="2E7D5B"/>
-                          </a:solidFill>
-                          <a:latin typeface="Meiryo"/>
-                        </a:rPr>
-                        <a:t>甲佐</a:t>
-                      </a:r>
-                    </a:p>
-                  </a:txBody>
-                  <a:tcPr marL="63500" marR="63500" marT="25400" marB="25400" anchor="ctr">
-                    <a:solidFill>
-                      <a:srgbClr val="FFFFFF"/>
-                    </a:solidFill>
-                  </a:tcPr>
-                </a:tc>
               </a:tr>
             </a:tbl>
           </a:graphicData>
@@ -23243,7 +22918,7 @@
                 </a:solidFill>
                 <a:latin typeface="Meiryo"/>
               </a:rPr>
-              <a:t>MENTOR ASSIGNMENT ｜ 担当決めの検討材料</a:t>
+              <a:t>DIFFICULTY &amp; APPS ｜ チーム別比較</a:t>
             </a:r>
           </a:p>
         </p:txBody>
@@ -23282,7 +22957,7 @@
                 </a:solidFill>
                 <a:latin typeface="Meiryo"/>
               </a:rPr>
-              <a:t>メンター担当検討（難易度・使用アプリ比較）</a:t>
+              <a:t>難易度・使用アプリの比較</a:t>
             </a:r>
           </a:p>
         </p:txBody>
@@ -23456,7 +23131,7 @@
         </p:nvSpPr>
         <p:spPr>
           <a:xfrm>
-            <a:off x="502920" y="1152144"/>
+            <a:off x="502920" y="1133856"/>
             <a:ext cx="11247120" cy="457200"/>
           </a:xfrm>
           <a:prstGeom prst="rect">
@@ -23482,7 +23157,7 @@
                 </a:solidFill>
                 <a:latin typeface="Meiryo"/>
               </a:rPr>
-              <a:t>各チームに中村・甲佐のいずれかがメンターとして伴走予定。難易度・使用アプリの種類・外部連携/制約の重さを比較し、担当案を提示（入れ替え可）。難易度・制約の重いチームを甲佐、M365標準・業務設計中心を中村に寄せた配分。</a:t>
+              <a:t>各チームの難易度・使用アプリの種類・外部連携/制約を比較整理（メンター担当検討の材料）。難易度は相談会での論点量・外部連携/制約・作り込み範囲からの暫定評価。</a:t>
             </a:r>
           </a:p>
         </p:txBody>
@@ -23496,8 +23171,8 @@
           <p:nvPr/>
         </p:nvGraphicFramePr>
         <p:xfrm>
-          <a:off x="502920" y="1737360"/>
-          <a:ext cx="11201400" cy="3913632"/>
+          <a:off x="502920" y="1700784"/>
+          <a:ext cx="11201399" cy="4114800"/>
         </p:xfrm>
         <a:graphic>
           <a:graphicData uri="http://schemas.openxmlformats.org/drawingml/2006/table">
@@ -23506,12 +23181,11 @@
                 <a:tableStyleId>{5C22544A-7EE6-4342-B048-85BDC9FD1C3A}</a:tableStyleId>
               </a:tblPr>
               <a:tblGrid>
-                <a:gridCol w="502920"/>
-                <a:gridCol w="2240280"/>
-                <a:gridCol w="868680"/>
-                <a:gridCol w="2880360"/>
-                <a:gridCol w="3108960"/>
-                <a:gridCol w="1600200"/>
+                <a:gridCol w="548640"/>
+                <a:gridCol w="2377440"/>
+                <a:gridCol w="960120"/>
+                <a:gridCol w="3566160"/>
+                <a:gridCol w="3749039"/>
               </a:tblGrid>
               <a:tr h="292608">
                 <a:tc>
@@ -23649,35 +23323,8 @@
                     </a:solidFill>
                   </a:tcPr>
                 </a:tc>
-                <a:tc>
-                  <a:txBody>
-                    <a:bodyPr wrap="square"/>
-                    <a:lstStyle/>
-                    <a:p>
-                      <a:pPr algn="ctr">
-                        <a:lnSpc>
-                          <a:spcPct val="98000"/>
-                        </a:lnSpc>
-                      </a:pPr>
-                      <a:r>
-                        <a:rPr sz="950" b="1">
-                          <a:solidFill>
-                            <a:srgbClr val="FFFFFF"/>
-                          </a:solidFill>
-                          <a:latin typeface="Meiryo"/>
-                        </a:rPr>
-                        <a:t>メンター案</a:t>
-                      </a:r>
-                    </a:p>
-                  </a:txBody>
-                  <a:tcPr marL="63500" marR="63500" marT="25400" marB="25400" anchor="ctr">
-                    <a:solidFill>
-                      <a:srgbClr val="2E8B9E"/>
-                    </a:solidFill>
-                  </a:tcPr>
-                </a:tc>
               </a:tr>
-              <a:tr h="329184">
+              <a:tr h="347472">
                 <a:tc>
                   <a:txBody>
                     <a:bodyPr wrap="square"/>
@@ -23716,7 +23363,7 @@
                         </a:lnSpc>
                       </a:pPr>
                       <a:r>
-                        <a:rPr sz="860" b="1">
+                        <a:rPr sz="880" b="1">
                           <a:solidFill>
                             <a:srgbClr val="252A31"/>
                           </a:solidFill>
@@ -23770,7 +23417,7 @@
                         </a:lnSpc>
                       </a:pPr>
                       <a:r>
-                        <a:rPr sz="819" b="0">
+                        <a:rPr sz="840" b="0">
                           <a:solidFill>
                             <a:srgbClr val="252A31"/>
                           </a:solidFill>
@@ -23797,7 +23444,7 @@
                         </a:lnSpc>
                       </a:pPr>
                       <a:r>
-                        <a:rPr sz="840" b="0">
+                        <a:rPr sz="850" b="0">
                           <a:solidFill>
                             <a:srgbClr val="252A31"/>
                           </a:solidFill>
@@ -23813,35 +23460,8 @@
                     </a:solidFill>
                   </a:tcPr>
                 </a:tc>
-                <a:tc>
-                  <a:txBody>
-                    <a:bodyPr wrap="square"/>
-                    <a:lstStyle/>
-                    <a:p>
-                      <a:pPr algn="ctr">
-                        <a:lnSpc>
-                          <a:spcPct val="98000"/>
-                        </a:lnSpc>
-                      </a:pPr>
-                      <a:r>
-                        <a:rPr sz="950" b="1">
-                          <a:solidFill>
-                            <a:srgbClr val="245A8C"/>
-                          </a:solidFill>
-                          <a:latin typeface="Meiryo"/>
-                        </a:rPr>
-                        <a:t>中村</a:t>
-                      </a:r>
-                    </a:p>
-                  </a:txBody>
-                  <a:tcPr marL="63500" marR="63500" marT="25400" marB="25400" anchor="ctr">
-                    <a:solidFill>
-                      <a:srgbClr val="FFFFFF"/>
-                    </a:solidFill>
-                  </a:tcPr>
-                </a:tc>
               </a:tr>
-              <a:tr h="329184">
+              <a:tr h="347472">
                 <a:tc>
                   <a:txBody>
                     <a:bodyPr wrap="square"/>
@@ -23880,7 +23500,7 @@
                         </a:lnSpc>
                       </a:pPr>
                       <a:r>
-                        <a:rPr sz="860" b="1">
+                        <a:rPr sz="880" b="1">
                           <a:solidFill>
                             <a:srgbClr val="252A31"/>
                           </a:solidFill>
@@ -23934,7 +23554,7 @@
                         </a:lnSpc>
                       </a:pPr>
                       <a:r>
-                        <a:rPr sz="819" b="0">
+                        <a:rPr sz="840" b="0">
                           <a:solidFill>
                             <a:srgbClr val="252A31"/>
                           </a:solidFill>
@@ -23961,7 +23581,7 @@
                         </a:lnSpc>
                       </a:pPr>
                       <a:r>
-                        <a:rPr sz="840" b="0">
+                        <a:rPr sz="850" b="0">
                           <a:solidFill>
                             <a:srgbClr val="252A31"/>
                           </a:solidFill>
@@ -23977,35 +23597,8 @@
                     </a:solidFill>
                   </a:tcPr>
                 </a:tc>
-                <a:tc>
-                  <a:txBody>
-                    <a:bodyPr wrap="square"/>
-                    <a:lstStyle/>
-                    <a:p>
-                      <a:pPr algn="ctr">
-                        <a:lnSpc>
-                          <a:spcPct val="98000"/>
-                        </a:lnSpc>
-                      </a:pPr>
-                      <a:r>
-                        <a:rPr sz="950" b="1">
-                          <a:solidFill>
-                            <a:srgbClr val="245A8C"/>
-                          </a:solidFill>
-                          <a:latin typeface="Meiryo"/>
-                        </a:rPr>
-                        <a:t>中村</a:t>
-                      </a:r>
-                    </a:p>
-                  </a:txBody>
-                  <a:tcPr marL="63500" marR="63500" marT="25400" marB="25400" anchor="ctr">
-                    <a:solidFill>
-                      <a:srgbClr val="F2F4F7"/>
-                    </a:solidFill>
-                  </a:tcPr>
-                </a:tc>
               </a:tr>
-              <a:tr h="329184">
+              <a:tr h="347472">
                 <a:tc>
                   <a:txBody>
                     <a:bodyPr wrap="square"/>
@@ -24044,7 +23637,7 @@
                         </a:lnSpc>
                       </a:pPr>
                       <a:r>
-                        <a:rPr sz="860" b="1">
+                        <a:rPr sz="880" b="1">
                           <a:solidFill>
                             <a:srgbClr val="252A31"/>
                           </a:solidFill>
@@ -24098,7 +23691,7 @@
                         </a:lnSpc>
                       </a:pPr>
                       <a:r>
-                        <a:rPr sz="819" b="0">
+                        <a:rPr sz="840" b="0">
                           <a:solidFill>
                             <a:srgbClr val="252A31"/>
                           </a:solidFill>
@@ -24125,7 +23718,7 @@
                         </a:lnSpc>
                       </a:pPr>
                       <a:r>
-                        <a:rPr sz="840" b="0">
+                        <a:rPr sz="850" b="0">
                           <a:solidFill>
                             <a:srgbClr val="252A31"/>
                           </a:solidFill>
@@ -24141,35 +23734,8 @@
                     </a:solidFill>
                   </a:tcPr>
                 </a:tc>
-                <a:tc>
-                  <a:txBody>
-                    <a:bodyPr wrap="square"/>
-                    <a:lstStyle/>
-                    <a:p>
-                      <a:pPr algn="ctr">
-                        <a:lnSpc>
-                          <a:spcPct val="98000"/>
-                        </a:lnSpc>
-                      </a:pPr>
-                      <a:r>
-                        <a:rPr sz="950" b="1">
-                          <a:solidFill>
-                            <a:srgbClr val="2E7D5B"/>
-                          </a:solidFill>
-                          <a:latin typeface="Meiryo"/>
-                        </a:rPr>
-                        <a:t>甲佐</a:t>
-                      </a:r>
-                    </a:p>
-                  </a:txBody>
-                  <a:tcPr marL="63500" marR="63500" marT="25400" marB="25400" anchor="ctr">
-                    <a:solidFill>
-                      <a:srgbClr val="FFFFFF"/>
-                    </a:solidFill>
-                  </a:tcPr>
-                </a:tc>
               </a:tr>
-              <a:tr h="329184">
+              <a:tr h="347472">
                 <a:tc>
                   <a:txBody>
                     <a:bodyPr wrap="square"/>
@@ -24208,7 +23774,7 @@
                         </a:lnSpc>
                       </a:pPr>
                       <a:r>
-                        <a:rPr sz="860" b="1">
+                        <a:rPr sz="880" b="1">
                           <a:solidFill>
                             <a:srgbClr val="252A31"/>
                           </a:solidFill>
@@ -24262,7 +23828,7 @@
                         </a:lnSpc>
                       </a:pPr>
                       <a:r>
-                        <a:rPr sz="819" b="0">
+                        <a:rPr sz="840" b="0">
                           <a:solidFill>
                             <a:srgbClr val="252A31"/>
                           </a:solidFill>
@@ -24289,7 +23855,7 @@
                         </a:lnSpc>
                       </a:pPr>
                       <a:r>
-                        <a:rPr sz="840" b="0">
+                        <a:rPr sz="850" b="0">
                           <a:solidFill>
                             <a:srgbClr val="252A31"/>
                           </a:solidFill>
@@ -24305,35 +23871,8 @@
                     </a:solidFill>
                   </a:tcPr>
                 </a:tc>
-                <a:tc>
-                  <a:txBody>
-                    <a:bodyPr wrap="square"/>
-                    <a:lstStyle/>
-                    <a:p>
-                      <a:pPr algn="ctr">
-                        <a:lnSpc>
-                          <a:spcPct val="98000"/>
-                        </a:lnSpc>
-                      </a:pPr>
-                      <a:r>
-                        <a:rPr sz="950" b="1">
-                          <a:solidFill>
-                            <a:srgbClr val="2E7D5B"/>
-                          </a:solidFill>
-                          <a:latin typeface="Meiryo"/>
-                        </a:rPr>
-                        <a:t>甲佐</a:t>
-                      </a:r>
-                    </a:p>
-                  </a:txBody>
-                  <a:tcPr marL="63500" marR="63500" marT="25400" marB="25400" anchor="ctr">
-                    <a:solidFill>
-                      <a:srgbClr val="F2F4F7"/>
-                    </a:solidFill>
-                  </a:tcPr>
-                </a:tc>
               </a:tr>
-              <a:tr h="329184">
+              <a:tr h="347472">
                 <a:tc>
                   <a:txBody>
                     <a:bodyPr wrap="square"/>
@@ -24372,7 +23911,7 @@
                         </a:lnSpc>
                       </a:pPr>
                       <a:r>
-                        <a:rPr sz="860" b="1">
+                        <a:rPr sz="880" b="1">
                           <a:solidFill>
                             <a:srgbClr val="252A31"/>
                           </a:solidFill>
@@ -24426,7 +23965,7 @@
                         </a:lnSpc>
                       </a:pPr>
                       <a:r>
-                        <a:rPr sz="819" b="0">
+                        <a:rPr sz="840" b="0">
                           <a:solidFill>
                             <a:srgbClr val="252A31"/>
                           </a:solidFill>
@@ -24453,7 +23992,7 @@
                         </a:lnSpc>
                       </a:pPr>
                       <a:r>
-                        <a:rPr sz="840" b="0">
+                        <a:rPr sz="850" b="0">
                           <a:solidFill>
                             <a:srgbClr val="252A31"/>
                           </a:solidFill>
@@ -24469,35 +24008,8 @@
                     </a:solidFill>
                   </a:tcPr>
                 </a:tc>
-                <a:tc>
-                  <a:txBody>
-                    <a:bodyPr wrap="square"/>
-                    <a:lstStyle/>
-                    <a:p>
-                      <a:pPr algn="ctr">
-                        <a:lnSpc>
-                          <a:spcPct val="98000"/>
-                        </a:lnSpc>
-                      </a:pPr>
-                      <a:r>
-                        <a:rPr sz="950" b="1">
-                          <a:solidFill>
-                            <a:srgbClr val="245A8C"/>
-                          </a:solidFill>
-                          <a:latin typeface="Meiryo"/>
-                        </a:rPr>
-                        <a:t>中村</a:t>
-                      </a:r>
-                    </a:p>
-                  </a:txBody>
-                  <a:tcPr marL="63500" marR="63500" marT="25400" marB="25400" anchor="ctr">
-                    <a:solidFill>
-                      <a:srgbClr val="FFFFFF"/>
-                    </a:solidFill>
-                  </a:tcPr>
-                </a:tc>
               </a:tr>
-              <a:tr h="329184">
+              <a:tr h="347472">
                 <a:tc>
                   <a:txBody>
                     <a:bodyPr wrap="square"/>
@@ -24536,7 +24048,7 @@
                         </a:lnSpc>
                       </a:pPr>
                       <a:r>
-                        <a:rPr sz="860" b="1">
+                        <a:rPr sz="880" b="1">
                           <a:solidFill>
                             <a:srgbClr val="252A31"/>
                           </a:solidFill>
@@ -24590,7 +24102,7 @@
                         </a:lnSpc>
                       </a:pPr>
                       <a:r>
-                        <a:rPr sz="819" b="0">
+                        <a:rPr sz="840" b="0">
                           <a:solidFill>
                             <a:srgbClr val="252A31"/>
                           </a:solidFill>
@@ -24617,7 +24129,7 @@
                         </a:lnSpc>
                       </a:pPr>
                       <a:r>
-                        <a:rPr sz="840" b="0">
+                        <a:rPr sz="850" b="0">
                           <a:solidFill>
                             <a:srgbClr val="252A31"/>
                           </a:solidFill>
@@ -24633,35 +24145,8 @@
                     </a:solidFill>
                   </a:tcPr>
                 </a:tc>
-                <a:tc>
-                  <a:txBody>
-                    <a:bodyPr wrap="square"/>
-                    <a:lstStyle/>
-                    <a:p>
-                      <a:pPr algn="ctr">
-                        <a:lnSpc>
-                          <a:spcPct val="98000"/>
-                        </a:lnSpc>
-                      </a:pPr>
-                      <a:r>
-                        <a:rPr sz="950" b="1">
-                          <a:solidFill>
-                            <a:srgbClr val="2E7D5B"/>
-                          </a:solidFill>
-                          <a:latin typeface="Meiryo"/>
-                        </a:rPr>
-                        <a:t>甲佐</a:t>
-                      </a:r>
-                    </a:p>
-                  </a:txBody>
-                  <a:tcPr marL="63500" marR="63500" marT="25400" marB="25400" anchor="ctr">
-                    <a:solidFill>
-                      <a:srgbClr val="F2F4F7"/>
-                    </a:solidFill>
-                  </a:tcPr>
-                </a:tc>
               </a:tr>
-              <a:tr h="329184">
+              <a:tr h="347472">
                 <a:tc>
                   <a:txBody>
                     <a:bodyPr wrap="square"/>
@@ -24700,7 +24185,7 @@
                         </a:lnSpc>
                       </a:pPr>
                       <a:r>
-                        <a:rPr sz="860" b="1">
+                        <a:rPr sz="880" b="1">
                           <a:solidFill>
                             <a:srgbClr val="252A31"/>
                           </a:solidFill>
@@ -24754,7 +24239,7 @@
                         </a:lnSpc>
                       </a:pPr>
                       <a:r>
-                        <a:rPr sz="819" b="0">
+                        <a:rPr sz="840" b="0">
                           <a:solidFill>
                             <a:srgbClr val="252A31"/>
                           </a:solidFill>
@@ -24781,7 +24266,7 @@
                         </a:lnSpc>
                       </a:pPr>
                       <a:r>
-                        <a:rPr sz="840" b="0">
+                        <a:rPr sz="850" b="0">
                           <a:solidFill>
                             <a:srgbClr val="252A31"/>
                           </a:solidFill>
@@ -24797,35 +24282,8 @@
                     </a:solidFill>
                   </a:tcPr>
                 </a:tc>
-                <a:tc>
-                  <a:txBody>
-                    <a:bodyPr wrap="square"/>
-                    <a:lstStyle/>
-                    <a:p>
-                      <a:pPr algn="ctr">
-                        <a:lnSpc>
-                          <a:spcPct val="98000"/>
-                        </a:lnSpc>
-                      </a:pPr>
-                      <a:r>
-                        <a:rPr sz="950" b="1">
-                          <a:solidFill>
-                            <a:srgbClr val="245A8C"/>
-                          </a:solidFill>
-                          <a:latin typeface="Meiryo"/>
-                        </a:rPr>
-                        <a:t>中村</a:t>
-                      </a:r>
-                    </a:p>
-                  </a:txBody>
-                  <a:tcPr marL="63500" marR="63500" marT="25400" marB="25400" anchor="ctr">
-                    <a:solidFill>
-                      <a:srgbClr val="FFFFFF"/>
-                    </a:solidFill>
-                  </a:tcPr>
-                </a:tc>
               </a:tr>
-              <a:tr h="329184">
+              <a:tr h="347472">
                 <a:tc>
                   <a:txBody>
                     <a:bodyPr wrap="square"/>
@@ -24864,7 +24322,7 @@
                         </a:lnSpc>
                       </a:pPr>
                       <a:r>
-                        <a:rPr sz="860" b="1">
+                        <a:rPr sz="880" b="1">
                           <a:solidFill>
                             <a:srgbClr val="252A31"/>
                           </a:solidFill>
@@ -24918,7 +24376,7 @@
                         </a:lnSpc>
                       </a:pPr>
                       <a:r>
-                        <a:rPr sz="819" b="0">
+                        <a:rPr sz="840" b="0">
                           <a:solidFill>
                             <a:srgbClr val="252A31"/>
                           </a:solidFill>
@@ -24945,7 +24403,7 @@
                         </a:lnSpc>
                       </a:pPr>
                       <a:r>
-                        <a:rPr sz="840" b="0">
+                        <a:rPr sz="850" b="0">
                           <a:solidFill>
                             <a:srgbClr val="252A31"/>
                           </a:solidFill>
@@ -24961,35 +24419,8 @@
                     </a:solidFill>
                   </a:tcPr>
                 </a:tc>
-                <a:tc>
-                  <a:txBody>
-                    <a:bodyPr wrap="square"/>
-                    <a:lstStyle/>
-                    <a:p>
-                      <a:pPr algn="ctr">
-                        <a:lnSpc>
-                          <a:spcPct val="98000"/>
-                        </a:lnSpc>
-                      </a:pPr>
-                      <a:r>
-                        <a:rPr sz="950" b="1">
-                          <a:solidFill>
-                            <a:srgbClr val="245A8C"/>
-                          </a:solidFill>
-                          <a:latin typeface="Meiryo"/>
-                        </a:rPr>
-                        <a:t>中村</a:t>
-                      </a:r>
-                    </a:p>
-                  </a:txBody>
-                  <a:tcPr marL="63500" marR="63500" marT="25400" marB="25400" anchor="ctr">
-                    <a:solidFill>
-                      <a:srgbClr val="F2F4F7"/>
-                    </a:solidFill>
-                  </a:tcPr>
-                </a:tc>
               </a:tr>
-              <a:tr h="329184">
+              <a:tr h="347472">
                 <a:tc>
                   <a:txBody>
                     <a:bodyPr wrap="square"/>
@@ -25028,7 +24459,7 @@
                         </a:lnSpc>
                       </a:pPr>
                       <a:r>
-                        <a:rPr sz="860" b="1">
+                        <a:rPr sz="880" b="1">
                           <a:solidFill>
                             <a:srgbClr val="252A31"/>
                           </a:solidFill>
@@ -25082,7 +24513,7 @@
                         </a:lnSpc>
                       </a:pPr>
                       <a:r>
-                        <a:rPr sz="819" b="0">
+                        <a:rPr sz="840" b="0">
                           <a:solidFill>
                             <a:srgbClr val="252A31"/>
                           </a:solidFill>
@@ -25109,7 +24540,7 @@
                         </a:lnSpc>
                       </a:pPr>
                       <a:r>
-                        <a:rPr sz="840" b="0">
+                        <a:rPr sz="850" b="0">
                           <a:solidFill>
                             <a:srgbClr val="252A31"/>
                           </a:solidFill>
@@ -25125,35 +24556,8 @@
                     </a:solidFill>
                   </a:tcPr>
                 </a:tc>
-                <a:tc>
-                  <a:txBody>
-                    <a:bodyPr wrap="square"/>
-                    <a:lstStyle/>
-                    <a:p>
-                      <a:pPr algn="ctr">
-                        <a:lnSpc>
-                          <a:spcPct val="98000"/>
-                        </a:lnSpc>
-                      </a:pPr>
-                      <a:r>
-                        <a:rPr sz="950" b="1">
-                          <a:solidFill>
-                            <a:srgbClr val="2E7D5B"/>
-                          </a:solidFill>
-                          <a:latin typeface="Meiryo"/>
-                        </a:rPr>
-                        <a:t>甲佐</a:t>
-                      </a:r>
-                    </a:p>
-                  </a:txBody>
-                  <a:tcPr marL="63500" marR="63500" marT="25400" marB="25400" anchor="ctr">
-                    <a:solidFill>
-                      <a:srgbClr val="FFFFFF"/>
-                    </a:solidFill>
-                  </a:tcPr>
-                </a:tc>
               </a:tr>
-              <a:tr h="329184">
+              <a:tr h="347472">
                 <a:tc>
                   <a:txBody>
                     <a:bodyPr wrap="square"/>
@@ -25192,7 +24596,7 @@
                         </a:lnSpc>
                       </a:pPr>
                       <a:r>
-                        <a:rPr sz="860" b="1">
+                        <a:rPr sz="880" b="1">
                           <a:solidFill>
                             <a:srgbClr val="252A31"/>
                           </a:solidFill>
@@ -25246,7 +24650,7 @@
                         </a:lnSpc>
                       </a:pPr>
                       <a:r>
-                        <a:rPr sz="819" b="0">
+                        <a:rPr sz="840" b="0">
                           <a:solidFill>
                             <a:srgbClr val="252A31"/>
                           </a:solidFill>
@@ -25273,7 +24677,7 @@
                         </a:lnSpc>
                       </a:pPr>
                       <a:r>
-                        <a:rPr sz="840" b="0">
+                        <a:rPr sz="850" b="0">
                           <a:solidFill>
                             <a:srgbClr val="252A31"/>
                           </a:solidFill>
@@ -25289,35 +24693,8 @@
                     </a:solidFill>
                   </a:tcPr>
                 </a:tc>
-                <a:tc>
-                  <a:txBody>
-                    <a:bodyPr wrap="square"/>
-                    <a:lstStyle/>
-                    <a:p>
-                      <a:pPr algn="ctr">
-                        <a:lnSpc>
-                          <a:spcPct val="98000"/>
-                        </a:lnSpc>
-                      </a:pPr>
-                      <a:r>
-                        <a:rPr sz="950" b="1">
-                          <a:solidFill>
-                            <a:srgbClr val="245A8C"/>
-                          </a:solidFill>
-                          <a:latin typeface="Meiryo"/>
-                        </a:rPr>
-                        <a:t>中村</a:t>
-                      </a:r>
-                    </a:p>
-                  </a:txBody>
-                  <a:tcPr marL="63500" marR="63500" marT="25400" marB="25400" anchor="ctr">
-                    <a:solidFill>
-                      <a:srgbClr val="F2F4F7"/>
-                    </a:solidFill>
-                  </a:tcPr>
-                </a:tc>
               </a:tr>
-              <a:tr h="329184">
+              <a:tr h="347472">
                 <a:tc>
                   <a:txBody>
                     <a:bodyPr wrap="square"/>
@@ -25356,7 +24733,7 @@
                         </a:lnSpc>
                       </a:pPr>
                       <a:r>
-                        <a:rPr sz="860" b="1">
+                        <a:rPr sz="880" b="1">
                           <a:solidFill>
                             <a:srgbClr val="252A31"/>
                           </a:solidFill>
@@ -25410,7 +24787,7 @@
                         </a:lnSpc>
                       </a:pPr>
                       <a:r>
-                        <a:rPr sz="819" b="0">
+                        <a:rPr sz="840" b="0">
                           <a:solidFill>
                             <a:srgbClr val="252A31"/>
                           </a:solidFill>
@@ -25437,7 +24814,7 @@
                         </a:lnSpc>
                       </a:pPr>
                       <a:r>
-                        <a:rPr sz="840" b="0">
+                        <a:rPr sz="850" b="0">
                           <a:solidFill>
                             <a:srgbClr val="252A31"/>
                           </a:solidFill>
@@ -25453,33 +24830,6 @@
                     </a:solidFill>
                   </a:tcPr>
                 </a:tc>
-                <a:tc>
-                  <a:txBody>
-                    <a:bodyPr wrap="square"/>
-                    <a:lstStyle/>
-                    <a:p>
-                      <a:pPr algn="ctr">
-                        <a:lnSpc>
-                          <a:spcPct val="98000"/>
-                        </a:lnSpc>
-                      </a:pPr>
-                      <a:r>
-                        <a:rPr sz="950" b="1">
-                          <a:solidFill>
-                            <a:srgbClr val="2E7D5B"/>
-                          </a:solidFill>
-                          <a:latin typeface="Meiryo"/>
-                        </a:rPr>
-                        <a:t>甲佐</a:t>
-                      </a:r>
-                    </a:p>
-                  </a:txBody>
-                  <a:tcPr marL="63500" marR="63500" marT="25400" marB="25400" anchor="ctr">
-                    <a:solidFill>
-                      <a:srgbClr val="FFFFFF"/>
-                    </a:solidFill>
-                  </a:tcPr>
-                </a:tc>
               </a:tr>
             </a:tbl>
           </a:graphicData>
@@ -25493,14 +24843,14 @@
         </p:nvSpPr>
         <p:spPr>
           <a:xfrm>
-            <a:off x="502920" y="5760720"/>
-            <a:ext cx="5532120" cy="548640"/>
-          </a:xfrm>
-          <a:prstGeom prst="rect">
-            <a:avLst/>
-          </a:prstGeom>
-          <a:solidFill>
-            <a:srgbClr val="E8EEF4"/>
+            <a:off x="502920" y="5943600"/>
+            <a:ext cx="11201400" cy="512064"/>
+          </a:xfrm>
+          <a:prstGeom prst="rect">
+            <a:avLst/>
+          </a:prstGeom>
+          <a:solidFill>
+            <a:srgbClr val="F2F4F7"/>
           </a:solidFill>
           <a:ln>
             <a:noFill/>
@@ -25531,58 +24881,14 @@
       </p:sp>
       <p:sp>
         <p:nvSpPr>
-          <p:cNvPr id="15" name="Rectangle 14"/>
-          <p:cNvSpPr/>
-          <p:nvPr/>
-        </p:nvSpPr>
-        <p:spPr>
-          <a:xfrm>
-            <a:off x="502920" y="5760720"/>
-            <a:ext cx="109728" cy="548640"/>
-          </a:xfrm>
-          <a:prstGeom prst="rect">
-            <a:avLst/>
-          </a:prstGeom>
-          <a:solidFill>
-            <a:srgbClr val="245A8C"/>
-          </a:solidFill>
-          <a:ln>
-            <a:noFill/>
-          </a:ln>
-          <a:effectLst/>
-        </p:spPr>
-        <p:style>
-          <a:lnRef idx="1">
-            <a:schemeClr val="accent1"/>
-          </a:lnRef>
-          <a:fillRef idx="3">
-            <a:schemeClr val="accent1"/>
-          </a:fillRef>
-          <a:effectRef idx="2">
-            <a:schemeClr val="accent1"/>
-          </a:effectRef>
-          <a:fontRef idx="minor">
-            <a:schemeClr val="lt1"/>
-          </a:fontRef>
-        </p:style>
-        <p:txBody>
-          <a:bodyPr rtlCol="0" anchor="ctr"/>
-          <a:lstStyle/>
-          <a:p>
-            <a:pPr algn="ctr"/>
-          </a:p>
-        </p:txBody>
-      </p:sp>
-      <p:sp>
-        <p:nvSpPr>
-          <p:cNvPr id="16" name="TextBox 15"/>
+          <p:cNvPr id="15" name="TextBox 14"/>
           <p:cNvSpPr txBox="1"/>
           <p:nvPr/>
         </p:nvSpPr>
         <p:spPr>
           <a:xfrm>
-            <a:off x="740664" y="5779008"/>
-            <a:ext cx="5166360" cy="512064"/>
+            <a:off x="731520" y="5961888"/>
+            <a:ext cx="10789920" cy="475488"/>
           </a:xfrm>
           <a:prstGeom prst="rect">
             <a:avLst/>
@@ -25597,176 +24903,17 @@
           <a:p>
             <a:pPr algn="l">
               <a:lnSpc>
-                <a:spcPct val="105000"/>
+                <a:spcPct val="100000"/>
               </a:lnSpc>
             </a:pPr>
             <a:r>
-              <a:rPr sz="1000" b="1" i="0">
+              <a:rPr sz="950" b="0" i="0">
                 <a:solidFill>
-                  <a:srgbClr val="245A8C"/>
+                  <a:srgbClr val="252A31"/>
                 </a:solidFill>
                 <a:latin typeface="Meiryo"/>
               </a:rPr>
-              <a:t>中村（案）：M365標準・業務設計中心</a:t>
-            </a:r>
-          </a:p>
-          <a:p>
-            <a:pPr algn="l">
-              <a:lnSpc>
-                <a:spcPct val="105000"/>
-              </a:lnSpc>
-            </a:pPr>
-            <a:r>
-              <a:rPr sz="1000" b="1" i="0">
-                <a:solidFill>
-                  <a:srgbClr val="245A8C"/>
-                </a:solidFill>
-                <a:latin typeface="Meiryo"/>
-              </a:rPr>
-              <a:t>T1・2・5・7・8・10（6チーム）</a:t>
-            </a:r>
-          </a:p>
-        </p:txBody>
-      </p:sp>
-      <p:sp>
-        <p:nvSpPr>
-          <p:cNvPr id="17" name="Rectangle 16"/>
-          <p:cNvSpPr/>
-          <p:nvPr/>
-        </p:nvSpPr>
-        <p:spPr>
-          <a:xfrm>
-            <a:off x="6172200" y="5760720"/>
-            <a:ext cx="5532120" cy="548640"/>
-          </a:xfrm>
-          <a:prstGeom prst="rect">
-            <a:avLst/>
-          </a:prstGeom>
-          <a:solidFill>
-            <a:srgbClr val="E6F1EC"/>
-          </a:solidFill>
-          <a:ln>
-            <a:noFill/>
-          </a:ln>
-          <a:effectLst/>
-        </p:spPr>
-        <p:style>
-          <a:lnRef idx="1">
-            <a:schemeClr val="accent1"/>
-          </a:lnRef>
-          <a:fillRef idx="3">
-            <a:schemeClr val="accent1"/>
-          </a:fillRef>
-          <a:effectRef idx="2">
-            <a:schemeClr val="accent1"/>
-          </a:effectRef>
-          <a:fontRef idx="minor">
-            <a:schemeClr val="lt1"/>
-          </a:fontRef>
-        </p:style>
-        <p:txBody>
-          <a:bodyPr rtlCol="0" anchor="ctr"/>
-          <a:lstStyle/>
-          <a:p>
-            <a:pPr algn="ctr"/>
-          </a:p>
-        </p:txBody>
-      </p:sp>
-      <p:sp>
-        <p:nvSpPr>
-          <p:cNvPr id="18" name="Rectangle 17"/>
-          <p:cNvSpPr/>
-          <p:nvPr/>
-        </p:nvSpPr>
-        <p:spPr>
-          <a:xfrm>
-            <a:off x="6172200" y="5760720"/>
-            <a:ext cx="109728" cy="548640"/>
-          </a:xfrm>
-          <a:prstGeom prst="rect">
-            <a:avLst/>
-          </a:prstGeom>
-          <a:solidFill>
-            <a:srgbClr val="2E7D5B"/>
-          </a:solidFill>
-          <a:ln>
-            <a:noFill/>
-          </a:ln>
-          <a:effectLst/>
-        </p:spPr>
-        <p:style>
-          <a:lnRef idx="1">
-            <a:schemeClr val="accent1"/>
-          </a:lnRef>
-          <a:fillRef idx="3">
-            <a:schemeClr val="accent1"/>
-          </a:fillRef>
-          <a:effectRef idx="2">
-            <a:schemeClr val="accent1"/>
-          </a:effectRef>
-          <a:fontRef idx="minor">
-            <a:schemeClr val="lt1"/>
-          </a:fontRef>
-        </p:style>
-        <p:txBody>
-          <a:bodyPr rtlCol="0" anchor="ctr"/>
-          <a:lstStyle/>
-          <a:p>
-            <a:pPr algn="ctr"/>
-          </a:p>
-        </p:txBody>
-      </p:sp>
-      <p:sp>
-        <p:nvSpPr>
-          <p:cNvPr id="19" name="TextBox 18"/>
-          <p:cNvSpPr txBox="1"/>
-          <p:nvPr/>
-        </p:nvSpPr>
-        <p:spPr>
-          <a:xfrm>
-            <a:off x="6409944" y="5779008"/>
-            <a:ext cx="5166360" cy="512064"/>
-          </a:xfrm>
-          <a:prstGeom prst="rect">
-            <a:avLst/>
-          </a:prstGeom>
-          <a:noFill/>
-        </p:spPr>
-        <p:txBody>
-          <a:bodyPr wrap="square" anchor="ctr" lIns="25400" rIns="25400" tIns="12700" bIns="12700">
-            <a:spAutoFit/>
-          </a:bodyPr>
-          <a:lstStyle/>
-          <a:p>
-            <a:pPr algn="l">
-              <a:lnSpc>
-                <a:spcPct val="105000"/>
-              </a:lnSpc>
-            </a:pPr>
-            <a:r>
-              <a:rPr sz="1000" b="1" i="0">
-                <a:solidFill>
-                  <a:srgbClr val="2E7D5B"/>
-                </a:solidFill>
-                <a:latin typeface="Meiryo"/>
-              </a:rPr>
-              <a:t>甲佐（案）：難易度高・制約/連携検証中心</a:t>
-            </a:r>
-          </a:p>
-          <a:p>
-            <a:pPr algn="l">
-              <a:lnSpc>
-                <a:spcPct val="105000"/>
-              </a:lnSpc>
-            </a:pPr>
-            <a:r>
-              <a:rPr sz="1000" b="1" i="0">
-                <a:solidFill>
-                  <a:srgbClr val="2E7D5B"/>
-                </a:solidFill>
-                <a:latin typeface="Meiryo"/>
-              </a:rPr>
-              <a:t>T3・4・6・9・11（5チーム）</a:t>
+              <a:t>難易度の目安 ▶ 　中：M365標準中心で実現性が高い　／　中〜高：連携・運用の検証項目が多い　／　高：外部連携・制約が大きく再設計や事務局判断を伴う　（※暫定評価・要調整）</a:t>
             </a:r>
           </a:p>
         </p:txBody>
@@ -26238,7 +25385,7 @@
                 </a:solidFill>
                 <a:latin typeface="Meiryo"/>
               </a:rPr>
-              <a:t>第2回では構築に向けた具体論点（外部Web参照制約・本番移行・運用保守・8月デモの作り方）が増加。事務局側で優先整理したいカテゴリ。</a:t>
+              <a:t>第2回の相談会（チーム1・2・3・4・5・10・11）で実際に挙がった論点のみを整理。構築に向けた具体的な進め方・制約・展開に関する相談が中心。</a:t>
             </a:r>
           </a:p>
         </p:txBody>
@@ -26253,7 +25400,7 @@
         </p:nvGraphicFramePr>
         <p:xfrm>
           <a:off x="502920" y="1554480"/>
-          <a:ext cx="11201400" cy="2944368"/>
+          <a:ext cx="11201399" cy="3090672"/>
         </p:xfrm>
         <a:graphic>
           <a:graphicData uri="http://schemas.openxmlformats.org/drawingml/2006/table">
@@ -26262,8 +25409,8 @@
                 <a:tableStyleId>{5C22544A-7EE6-4342-B048-85BDC9FD1C3A}</a:tableStyleId>
               </a:tblPr>
               <a:tblGrid>
-                <a:gridCol w="3611880"/>
-                <a:gridCol w="6035040"/>
+                <a:gridCol w="3749039"/>
+                <a:gridCol w="5897880"/>
                 <a:gridCol w="1554480"/>
               </a:tblGrid>
               <a:tr h="310896">
@@ -26284,7 +25431,7 @@
                           </a:solidFill>
                           <a:latin typeface="Meiryo"/>
                         </a:rPr>
-                        <a:t>カテゴリ</a:t>
+                        <a:t>カテゴリ（第2回で挙がった論点）</a:t>
                       </a:r>
                     </a:p>
                   </a:txBody>
@@ -26311,7 +25458,7 @@
                           </a:solidFill>
                           <a:latin typeface="Meiryo"/>
                         </a:rPr>
-                        <a:t>主な論点</a:t>
+                        <a:t>主な内容</a:t>
                       </a:r>
                     </a:p>
                   </a:txBody>
@@ -26349,7 +25496,7 @@
                   </a:tcPr>
                 </a:tc>
               </a:tr>
-              <a:tr h="329184">
+              <a:tr h="347472">
                 <a:tc>
                   <a:txBody>
                     <a:bodyPr wrap="square"/>
@@ -26361,13 +25508,13 @@
                         </a:lnSpc>
                       </a:pPr>
                       <a:r>
-                        <a:rPr sz="950" b="1">
+                        <a:rPr sz="930" b="1">
                           <a:solidFill>
                             <a:srgbClr val="1F385C"/>
                           </a:solidFill>
                           <a:latin typeface="Meiryo"/>
                         </a:rPr>
-                        <a:t>読込ファイルのセキュリティ・ガバナンス</a:t>
+                        <a:t>外部サイト参照・Web検索の制約／案の再設計</a:t>
                       </a:r>
                     </a:p>
                   </a:txBody>
@@ -26388,179 +25535,13 @@
                         </a:lnSpc>
                       </a:pPr>
                       <a:r>
-                        <a:rPr sz="900" b="0">
+                        <a:rPr sz="880" b="0">
                           <a:solidFill>
                             <a:srgbClr val="252A31"/>
                           </a:solidFill>
                           <a:latin typeface="Meiryo"/>
                         </a:rPr>
-                        <a:t>社外秘・開発中案件・営業情報・レビュー対象物を読み込ませてよいかの判断。</a:t>
-                      </a:r>
-                    </a:p>
-                  </a:txBody>
-                  <a:tcPr marL="63500" marR="63500" marT="25400" marB="25400" anchor="ctr">
-                    <a:solidFill>
-                      <a:srgbClr val="FFFFFF"/>
-                    </a:solidFill>
-                  </a:tcPr>
-                </a:tc>
-                <a:tc>
-                  <a:txBody>
-                    <a:bodyPr wrap="square"/>
-                    <a:lstStyle/>
-                    <a:p>
-                      <a:pPr algn="ctr">
-                        <a:lnSpc>
-                          <a:spcPct val="98000"/>
-                        </a:lnSpc>
-                      </a:pPr>
-                      <a:r>
-                        <a:rPr sz="900" b="1">
-                          <a:solidFill>
-                            <a:srgbClr val="252A31"/>
-                          </a:solidFill>
-                          <a:latin typeface="Meiryo"/>
-                        </a:rPr>
-                        <a:t>3, 4, 9, 11</a:t>
-                      </a:r>
-                    </a:p>
-                  </a:txBody>
-                  <a:tcPr marL="63500" marR="63500" marT="25400" marB="25400" anchor="ctr">
-                    <a:solidFill>
-                      <a:srgbClr val="FFFFFF"/>
-                    </a:solidFill>
-                  </a:tcPr>
-                </a:tc>
-              </a:tr>
-              <a:tr h="329184">
-                <a:tc>
-                  <a:txBody>
-                    <a:bodyPr wrap="square"/>
-                    <a:lstStyle/>
-                    <a:p>
-                      <a:pPr algn="l">
-                        <a:lnSpc>
-                          <a:spcPct val="98000"/>
-                        </a:lnSpc>
-                      </a:pPr>
-                      <a:r>
-                        <a:rPr sz="950" b="1">
-                          <a:solidFill>
-                            <a:srgbClr val="1F385C"/>
-                          </a:solidFill>
-                          <a:latin typeface="Meiryo"/>
-                        </a:rPr>
-                        <a:t>M365以外の製品との連携</a:t>
-                      </a:r>
-                    </a:p>
-                  </a:txBody>
-                  <a:tcPr marL="63500" marR="63500" marT="25400" marB="25400" anchor="ctr">
-                    <a:solidFill>
-                      <a:srgbClr val="F2F4F7"/>
-                    </a:solidFill>
-                  </a:tcPr>
-                </a:tc>
-                <a:tc>
-                  <a:txBody>
-                    <a:bodyPr wrap="square"/>
-                    <a:lstStyle/>
-                    <a:p>
-                      <a:pPr algn="l">
-                        <a:lnSpc>
-                          <a:spcPct val="98000"/>
-                        </a:lnSpc>
-                      </a:pPr>
-                      <a:r>
-                        <a:rPr sz="900" b="0">
-                          <a:solidFill>
-                            <a:srgbClr val="252A31"/>
-                          </a:solidFill>
-                          <a:latin typeface="Meiryo"/>
-                        </a:rPr>
-                        <a:t>Salesforce・N-MARK・CNC・J-SCRUM・共有ファイルサーバ等の取得可否。案の成否に直結。</a:t>
-                      </a:r>
-                    </a:p>
-                  </a:txBody>
-                  <a:tcPr marL="63500" marR="63500" marT="25400" marB="25400" anchor="ctr">
-                    <a:solidFill>
-                      <a:srgbClr val="F2F4F7"/>
-                    </a:solidFill>
-                  </a:tcPr>
-                </a:tc>
-                <a:tc>
-                  <a:txBody>
-                    <a:bodyPr wrap="square"/>
-                    <a:lstStyle/>
-                    <a:p>
-                      <a:pPr algn="ctr">
-                        <a:lnSpc>
-                          <a:spcPct val="98000"/>
-                        </a:lnSpc>
-                      </a:pPr>
-                      <a:r>
-                        <a:rPr sz="900" b="1">
-                          <a:solidFill>
-                            <a:srgbClr val="252A31"/>
-                          </a:solidFill>
-                          <a:latin typeface="Meiryo"/>
-                        </a:rPr>
-                        <a:t>3, 4, 6, 7, 9</a:t>
-                      </a:r>
-                    </a:p>
-                  </a:txBody>
-                  <a:tcPr marL="63500" marR="63500" marT="25400" marB="25400" anchor="ctr">
-                    <a:solidFill>
-                      <a:srgbClr val="F2F4F7"/>
-                    </a:solidFill>
-                  </a:tcPr>
-                </a:tc>
-              </a:tr>
-              <a:tr h="329184">
-                <a:tc>
-                  <a:txBody>
-                    <a:bodyPr wrap="square"/>
-                    <a:lstStyle/>
-                    <a:p>
-                      <a:pPr algn="l">
-                        <a:lnSpc>
-                          <a:spcPct val="98000"/>
-                        </a:lnSpc>
-                      </a:pPr>
-                      <a:r>
-                        <a:rPr sz="950" b="1">
-                          <a:solidFill>
-                            <a:srgbClr val="1F385C"/>
-                          </a:solidFill>
-                          <a:latin typeface="Meiryo"/>
-                        </a:rPr>
-                        <a:t>外部サイト参照・Web検索制約</a:t>
-                      </a:r>
-                    </a:p>
-                  </a:txBody>
-                  <a:tcPr marL="63500" marR="63500" marT="25400" marB="25400" anchor="ctr">
-                    <a:solidFill>
-                      <a:srgbClr val="FFFFFF"/>
-                    </a:solidFill>
-                  </a:tcPr>
-                </a:tc>
-                <a:tc>
-                  <a:txBody>
-                    <a:bodyPr wrap="square"/>
-                    <a:lstStyle/>
-                    <a:p>
-                      <a:pPr algn="l">
-                        <a:lnSpc>
-                          <a:spcPct val="98000"/>
-                        </a:lnSpc>
-                      </a:pPr>
-                      <a:r>
-                        <a:rPr sz="900" b="0">
-                          <a:solidFill>
-                            <a:srgbClr val="252A31"/>
-                          </a:solidFill>
-                          <a:latin typeface="Meiryo"/>
-                        </a:rPr>
-                        <a:t>外部Web情報取得は原則禁止。市場調査・IR取得を主機能とする案は再設計が必要。</a:t>
+                        <a:t>外部Web・IR情報の取得は原則禁止（相手先サーバ負荷・訴訟リスク）。抵触する案は練り直しが必要。代替は事前取得してナレッジ化。</a:t>
                       </a:r>
                     </a:p>
                   </a:txBody>
@@ -26598,7 +25579,7 @@
                   </a:tcPr>
                 </a:tc>
               </a:tr>
-              <a:tr h="329184">
+              <a:tr h="347472">
                 <a:tc>
                   <a:txBody>
                     <a:bodyPr wrap="square"/>
@@ -26610,13 +25591,13 @@
                         </a:lnSpc>
                       </a:pPr>
                       <a:r>
-                        <a:rPr sz="950" b="1">
+                        <a:rPr sz="930" b="1">
                           <a:solidFill>
                             <a:srgbClr val="1F385C"/>
                           </a:solidFill>
                           <a:latin typeface="Meiryo"/>
                         </a:rPr>
-                        <a:t>格納場所・アクセス制約</a:t>
+                        <a:t>開発の進め方・基本フォーマット／スケジュール提示</a:t>
                       </a:r>
                     </a:p>
                   </a:txBody>
@@ -26637,13 +25618,13 @@
                         </a:lnSpc>
                       </a:pPr>
                       <a:r>
-                        <a:rPr sz="900" b="0">
+                        <a:rPr sz="880" b="0">
                           <a:solidFill>
                             <a:srgbClr val="252A31"/>
                           </a:solidFill>
                           <a:latin typeface="Meiryo"/>
                         </a:rPr>
-                        <a:t>共有フォルダパスは直接参照困難。SharePoint格納や依頼元運用ルールの整備が必要。</a:t>
+                        <a:t>何を優先しどの手順で進めるかの基本フォーマットが欲しい。8〜9月のスケジュール案内の要望。</a:t>
                       </a:r>
                     </a:p>
                   </a:txBody>
@@ -26670,7 +25651,7 @@
                           </a:solidFill>
                           <a:latin typeface="Meiryo"/>
                         </a:rPr>
-                        <a:t>5, 6, 9, 11</a:t>
+                        <a:t>1, 5</a:t>
                       </a:r>
                     </a:p>
                   </a:txBody>
@@ -26681,7 +25662,7 @@
                   </a:tcPr>
                 </a:tc>
               </a:tr>
-              <a:tr h="329184">
+              <a:tr h="347472">
                 <a:tc>
                   <a:txBody>
                     <a:bodyPr wrap="square"/>
@@ -26693,13 +25674,13 @@
                         </a:lnSpc>
                       </a:pPr>
                       <a:r>
-                        <a:rPr sz="950" b="1">
+                        <a:rPr sz="930" b="1">
                           <a:solidFill>
                             <a:srgbClr val="1F385C"/>
                           </a:solidFill>
                           <a:latin typeface="Meiryo"/>
                         </a:rPr>
-                        <a:t>読込ファイル形式・精度</a:t>
+                        <a:t>設計相談の進め方・プロンプト見本</a:t>
                       </a:r>
                     </a:p>
                   </a:txBody>
@@ -26720,13 +25701,13 @@
                         </a:lnSpc>
                       </a:pPr>
                       <a:r>
-                        <a:rPr sz="900" b="0">
+                        <a:rPr sz="880" b="0">
                           <a:solidFill>
                             <a:srgbClr val="252A31"/>
                           </a:solidFill>
                           <a:latin typeface="Meiryo"/>
                         </a:rPr>
-                        <a:t>Excel/PDF/トランスクリプトの読取精度、レイアウト崩れ、隠れセル情報の扱い。</a:t>
+                        <a:t>成果物の作り方・使うアプリ・設定をCopilotチャットで相談する型と、プロンプト見本の提供要望。</a:t>
                       </a:r>
                     </a:p>
                   </a:txBody>
@@ -26753,7 +25734,7 @@
                           </a:solidFill>
                           <a:latin typeface="Meiryo"/>
                         </a:rPr>
-                        <a:t>2, 7, 10</a:t>
+                        <a:t>1, 2</a:t>
                       </a:r>
                     </a:p>
                   </a:txBody>
@@ -26764,7 +25745,7 @@
                   </a:tcPr>
                 </a:tc>
               </a:tr>
-              <a:tr h="329184">
+              <a:tr h="347472">
                 <a:tc>
                   <a:txBody>
                     <a:bodyPr wrap="square"/>
@@ -26776,13 +25757,13 @@
                         </a:lnSpc>
                       </a:pPr>
                       <a:r>
-                        <a:rPr sz="950" b="1">
+                        <a:rPr sz="930" b="1">
                           <a:solidFill>
                             <a:srgbClr val="1F385C"/>
                           </a:solidFill>
                           <a:latin typeface="Meiryo"/>
                         </a:rPr>
-                        <a:t>Copilot Studio／Automate の使い分け</a:t>
+                        <a:t>8月デモ設計・効果の見極め</a:t>
                       </a:r>
                     </a:p>
                   </a:txBody>
@@ -26803,13 +25784,13 @@
                         </a:lnSpc>
                       </a:pPr>
                       <a:r>
-                        <a:rPr sz="900" b="0">
+                        <a:rPr sz="880" b="0">
                           <a:solidFill>
                             <a:srgbClr val="252A31"/>
                           </a:solidFill>
                           <a:latin typeface="Meiryo"/>
                         </a:rPr>
-                        <a:t>AI判断・ルール処理・自動通知・下書き作成・管理表更新をどのアプリが担うか分解。</a:t>
+                        <a:t>タスク列を仮決め→サンプル数件→Automateで一本通すMVP。整形/ドラフトのみで効果が出るかの見極め。</a:t>
                       </a:r>
                     </a:p>
                   </a:txBody>
@@ -26836,7 +25817,7 @@
                           </a:solidFill>
                           <a:latin typeface="Meiryo"/>
                         </a:rPr>
-                        <a:t>1, 2, 5, 6, 7, 10, 11</a:t>
+                        <a:t>4, 5</a:t>
                       </a:r>
                     </a:p>
                   </a:txBody>
@@ -26847,7 +25828,7 @@
                   </a:tcPr>
                 </a:tc>
               </a:tr>
-              <a:tr h="329184">
+              <a:tr h="347472">
                 <a:tc>
                   <a:txBody>
                     <a:bodyPr wrap="square"/>
@@ -26859,13 +25840,13 @@
                         </a:lnSpc>
                       </a:pPr>
                       <a:r>
-                        <a:rPr sz="950" b="1">
+                        <a:rPr sz="930" b="1">
                           <a:solidFill>
                             <a:srgbClr val="1F385C"/>
                           </a:solidFill>
                           <a:latin typeface="Meiryo"/>
                         </a:rPr>
-                        <a:t>ライセンス・利用環境・本番移行</a:t>
+                        <a:t>Copilot回答の信頼性・検証</a:t>
                       </a:r>
                     </a:p>
                   </a:txBody>
@@ -26886,13 +25867,13 @@
                         </a:lnSpc>
                       </a:pPr>
                       <a:r>
-                        <a:rPr sz="900" b="0">
+                        <a:rPr sz="880" b="0">
                           <a:solidFill>
                             <a:srgbClr val="252A31"/>
                           </a:solidFill>
                           <a:latin typeface="Meiryo"/>
                         </a:rPr>
-                        <a:t>CSライセンス、開発→本番環境移行、社内申請フロー、年度末展開の目線。</a:t>
+                        <a:t>Copilotチャットの回答をそのまま信じてよいか。根拠提示を求め、画面操作・実検証で精度を確認。</a:t>
                       </a:r>
                     </a:p>
                   </a:txBody>
@@ -26919,7 +25900,7 @@
                           </a:solidFill>
                           <a:latin typeface="Meiryo"/>
                         </a:rPr>
-                        <a:t>3, 10, 11</a:t>
+                        <a:t>10</a:t>
                       </a:r>
                     </a:p>
                   </a:txBody>
@@ -26930,7 +25911,7 @@
                   </a:tcPr>
                 </a:tc>
               </a:tr>
-              <a:tr h="329184">
+              <a:tr h="347472">
                 <a:tc>
                   <a:txBody>
                     <a:bodyPr wrap="square"/>
@@ -26942,13 +25923,13 @@
                         </a:lnSpc>
                       </a:pPr>
                       <a:r>
-                        <a:rPr sz="950" b="1">
+                        <a:rPr sz="930" b="1">
                           <a:solidFill>
                             <a:srgbClr val="1F385C"/>
                           </a:solidFill>
                           <a:latin typeface="Meiryo"/>
                         </a:rPr>
-                        <a:t>スコープ／効果試算／デモ設計</a:t>
+                        <a:t>本番環境移行・展開時期・社内申請フロー</a:t>
                       </a:r>
                     </a:p>
                   </a:txBody>
@@ -26969,13 +25950,13 @@
                         </a:lnSpc>
                       </a:pPr>
                       <a:r>
-                        <a:rPr sz="900" b="0">
+                        <a:rPr sz="880" b="0">
                           <a:solidFill>
                             <a:srgbClr val="252A31"/>
                           </a:solidFill>
                           <a:latin typeface="Meiryo"/>
                         </a:rPr>
-                        <a:t>8月までに一本通すデモ、9月に発表準備。削減効果・導入価値・運用項目の整理。</a:t>
+                        <a:t>開発環境→本番環境移行の申請/決裁フロー、年度末（3月末）展開を見据えたスピード感・フェーズ設定。</a:t>
                       </a:r>
                     </a:p>
                   </a:txBody>
@@ -27002,7 +25983,173 @@
                           </a:solidFill>
                           <a:latin typeface="Meiryo"/>
                         </a:rPr>
-                        <a:t>1, 2, 5, 6, 10, 11</a:t>
+                        <a:t>11</a:t>
+                      </a:r>
+                    </a:p>
+                  </a:txBody>
+                  <a:tcPr marL="63500" marR="63500" marT="25400" marB="25400" anchor="ctr">
+                    <a:solidFill>
+                      <a:srgbClr val="F2F4F7"/>
+                    </a:solidFill>
+                  </a:tcPr>
+                </a:tc>
+              </a:tr>
+              <a:tr h="347472">
+                <a:tc>
+                  <a:txBody>
+                    <a:bodyPr wrap="square"/>
+                    <a:lstStyle/>
+                    <a:p>
+                      <a:pPr algn="l">
+                        <a:lnSpc>
+                          <a:spcPct val="98000"/>
+                        </a:lnSpc>
+                      </a:pPr>
+                      <a:r>
+                        <a:rPr sz="930" b="1">
+                          <a:solidFill>
+                            <a:srgbClr val="1F385C"/>
+                          </a:solidFill>
+                          <a:latin typeface="Meiryo"/>
+                        </a:rPr>
+                        <a:t>手順書・利用ルール／運用保守</a:t>
+                      </a:r>
+                    </a:p>
+                  </a:txBody>
+                  <a:tcPr marL="63500" marR="63500" marT="25400" marB="25400" anchor="ctr">
+                    <a:solidFill>
+                      <a:srgbClr val="FFFFFF"/>
+                    </a:solidFill>
+                  </a:tcPr>
+                </a:tc>
+                <a:tc>
+                  <a:txBody>
+                    <a:bodyPr wrap="square"/>
+                    <a:lstStyle/>
+                    <a:p>
+                      <a:pPr algn="l">
+                        <a:lnSpc>
+                          <a:spcPct val="98000"/>
+                        </a:lnSpc>
+                      </a:pPr>
+                      <a:r>
+                        <a:rPr sz="880" b="0">
+                          <a:solidFill>
+                            <a:srgbClr val="252A31"/>
+                          </a:solidFill>
+                          <a:latin typeface="Meiryo"/>
+                        </a:rPr>
+                        <a:t>手順書・利用ルールの整備時期（項目出し・全量把握が重要）。Copilot Studio更新に伴う運用保守の懸念。</a:t>
+                      </a:r>
+                    </a:p>
+                  </a:txBody>
+                  <a:tcPr marL="63500" marR="63500" marT="25400" marB="25400" anchor="ctr">
+                    <a:solidFill>
+                      <a:srgbClr val="FFFFFF"/>
+                    </a:solidFill>
+                  </a:tcPr>
+                </a:tc>
+                <a:tc>
+                  <a:txBody>
+                    <a:bodyPr wrap="square"/>
+                    <a:lstStyle/>
+                    <a:p>
+                      <a:pPr algn="ctr">
+                        <a:lnSpc>
+                          <a:spcPct val="98000"/>
+                        </a:lnSpc>
+                      </a:pPr>
+                      <a:r>
+                        <a:rPr sz="900" b="1">
+                          <a:solidFill>
+                            <a:srgbClr val="252A31"/>
+                          </a:solidFill>
+                          <a:latin typeface="Meiryo"/>
+                        </a:rPr>
+                        <a:t>5, 11</a:t>
+                      </a:r>
+                    </a:p>
+                  </a:txBody>
+                  <a:tcPr marL="63500" marR="63500" marT="25400" marB="25400" anchor="ctr">
+                    <a:solidFill>
+                      <a:srgbClr val="FFFFFF"/>
+                    </a:solidFill>
+                  </a:tcPr>
+                </a:tc>
+              </a:tr>
+              <a:tr h="347472">
+                <a:tc>
+                  <a:txBody>
+                    <a:bodyPr wrap="square"/>
+                    <a:lstStyle/>
+                    <a:p>
+                      <a:pPr algn="l">
+                        <a:lnSpc>
+                          <a:spcPct val="98000"/>
+                        </a:lnSpc>
+                      </a:pPr>
+                      <a:r>
+                        <a:rPr sz="930" b="1">
+                          <a:solidFill>
+                            <a:srgbClr val="1F385C"/>
+                          </a:solidFill>
+                          <a:latin typeface="Meiryo"/>
+                        </a:rPr>
+                        <a:t>メンター制・今後の進め方</a:t>
+                      </a:r>
+                    </a:p>
+                  </a:txBody>
+                  <a:tcPr marL="63500" marR="63500" marT="25400" marB="25400" anchor="ctr">
+                    <a:solidFill>
+                      <a:srgbClr val="F2F4F7"/>
+                    </a:solidFill>
+                  </a:tcPr>
+                </a:tc>
+                <a:tc>
+                  <a:txBody>
+                    <a:bodyPr wrap="square"/>
+                    <a:lstStyle/>
+                    <a:p>
+                      <a:pPr algn="l">
+                        <a:lnSpc>
+                          <a:spcPct val="98000"/>
+                        </a:lnSpc>
+                      </a:pPr>
+                      <a:r>
+                        <a:rPr sz="880" b="0">
+                          <a:solidFill>
+                            <a:srgbClr val="252A31"/>
+                          </a:solidFill>
+                          <a:latin typeface="Meiryo"/>
+                        </a:rPr>
+                        <a:t>8月以降のメンター定例（週次/隔週）の進め方を事務局から案内予定。</a:t>
+                      </a:r>
+                    </a:p>
+                  </a:txBody>
+                  <a:tcPr marL="63500" marR="63500" marT="25400" marB="25400" anchor="ctr">
+                    <a:solidFill>
+                      <a:srgbClr val="F2F4F7"/>
+                    </a:solidFill>
+                  </a:tcPr>
+                </a:tc>
+                <a:tc>
+                  <a:txBody>
+                    <a:bodyPr wrap="square"/>
+                    <a:lstStyle/>
+                    <a:p>
+                      <a:pPr algn="ctr">
+                        <a:lnSpc>
+                          <a:spcPct val="98000"/>
+                        </a:lnSpc>
+                      </a:pPr>
+                      <a:r>
+                        <a:rPr sz="900" b="1">
+                          <a:solidFill>
+                            <a:srgbClr val="252A31"/>
+                          </a:solidFill>
+                          <a:latin typeface="Meiryo"/>
+                        </a:rPr>
+                        <a:t>2, 10</a:t>
                       </a:r>
                     </a:p>
                   </a:txBody>
@@ -27025,7 +26172,7 @@
         </p:nvSpPr>
         <p:spPr>
           <a:xfrm>
-            <a:off x="502920" y="4608576"/>
+            <a:off x="502920" y="4754880"/>
             <a:ext cx="11201400" cy="566928"/>
           </a:xfrm>
           <a:prstGeom prst="rect">
@@ -27069,7 +26216,7 @@
         </p:nvSpPr>
         <p:spPr>
           <a:xfrm>
-            <a:off x="502920" y="4608576"/>
+            <a:off x="502920" y="4754880"/>
             <a:ext cx="118872" cy="566928"/>
           </a:xfrm>
           <a:prstGeom prst="rect">
@@ -27113,7 +26260,7 @@
         </p:nvSpPr>
         <p:spPr>
           <a:xfrm>
-            <a:off x="777240" y="4636008"/>
+            <a:off x="777240" y="4782312"/>
             <a:ext cx="10698480" cy="530352"/>
           </a:xfrm>
           <a:prstGeom prst="rect">
@@ -27139,7 +26286,7 @@
                 </a:solidFill>
                 <a:latin typeface="Meiryo"/>
               </a:rPr>
-              <a:t>▲ 重要：読み込ませたいファイルのOK/NG判断が怪しい場合は、自チームの見解を添えて早めに事務局へ相談。事務局判断によっては決定済み案が頓挫する可能性があり、早期確認が必要。</a:t>
+              <a:t>▲ 重要：外部Web参照・M365外システム連携・個人情報/機密情報の取り扱いはガイドライン上の制約がある。これらに依存する案は抵触時に再設計が必要となるため、可否は早めに事務局へ確認を（第2回ではチーム3・4が該当）。</a:t>
             </a:r>
           </a:p>
         </p:txBody>
@@ -30069,7 +29216,7 @@
             <a:avLst/>
           </a:prstGeom>
           <a:solidFill>
-            <a:srgbClr val="245A8C"/>
+            <a:srgbClr val="1F385C"/>
           </a:solidFill>
           <a:ln>
             <a:noFill/>
@@ -30102,7 +29249,7 @@
                 </a:solidFill>
                 <a:latin typeface="Meiryo"/>
               </a:rPr>
-              <a:t>メンター案：中村</a:t>
+              <a:t>第2回：実施済</a:t>
             </a:r>
           </a:p>
         </p:txBody>
@@ -31955,7 +31102,7 @@
             <a:avLst/>
           </a:prstGeom>
           <a:solidFill>
-            <a:srgbClr val="245A8C"/>
+            <a:srgbClr val="1F385C"/>
           </a:solidFill>
           <a:ln>
             <a:noFill/>
@@ -31988,7 +31135,7 @@
                 </a:solidFill>
                 <a:latin typeface="Meiryo"/>
               </a:rPr>
-              <a:t>メンター案：中村</a:t>
+              <a:t>第2回：実施済</a:t>
             </a:r>
           </a:p>
         </p:txBody>
@@ -33841,7 +32988,7 @@
             <a:avLst/>
           </a:prstGeom>
           <a:solidFill>
-            <a:srgbClr val="2E7D5B"/>
+            <a:srgbClr val="1F385C"/>
           </a:solidFill>
           <a:ln>
             <a:noFill/>
@@ -33874,7 +33021,7 @@
                 </a:solidFill>
                 <a:latin typeface="Meiryo"/>
               </a:rPr>
-              <a:t>メンター案：甲佐</a:t>
+              <a:t>第2回：実施済</a:t>
             </a:r>
           </a:p>
         </p:txBody>
@@ -35727,7 +34874,7 @@
             <a:avLst/>
           </a:prstGeom>
           <a:solidFill>
-            <a:srgbClr val="2E7D5B"/>
+            <a:srgbClr val="1F385C"/>
           </a:solidFill>
           <a:ln>
             <a:noFill/>
@@ -35760,7 +34907,7 @@
                 </a:solidFill>
                 <a:latin typeface="Meiryo"/>
               </a:rPr>
-              <a:t>メンター案：甲佐</a:t>
+              <a:t>第2回：実施済</a:t>
             </a:r>
           </a:p>
         </p:txBody>

--- a/reports/CopilotStudio_ハッカソン_事前相談会②_状況報告_20260724.pptx
+++ b/reports/CopilotStudio_ハッカソン_事前相談会②_状況報告_20260724.pptx
@@ -3552,7 +3552,7 @@
                 </a:solidFill>
                 <a:latin typeface="Meiryo"/>
               </a:rPr>
-              <a:t>7月22日〜24日に実施した第2回 事前相談会では、第1回後に提出された各チームの企画書を前提に、構築フェーズへ進むための「進捗確認」「技術論点の整理」「ネクストアクションの明確化」を行った。本資料では、各チームの状況を一覧・個票で整理し、あわせて難易度・使用アプリの種類を比較整理する。</a:t>
+              <a:t>7月22日〜24日に実施した第2回 事前相談会では、第1回後に提出された各チームの企画書を前提に、構築フェーズへ進むための「進捗確認」「技術論点の整理」「ネクストアクションの明確化」を行った。本資料では、各チームの状況を一覧・個票で整理し、あわせて難易度・使用アプリの種類・10月発表の見込みを比較整理する。</a:t>
             </a:r>
           </a:p>
         </p:txBody>
@@ -5247,8 +5247,8 @@
         </p:nvSpPr>
         <p:spPr>
           <a:xfrm>
-            <a:off x="4892040" y="1234440"/>
-            <a:ext cx="1920240" cy="384048"/>
+            <a:off x="4114800" y="1234440"/>
+            <a:ext cx="1554480" cy="384048"/>
           </a:xfrm>
           <a:prstGeom prst="roundRect">
             <a:avLst/>
@@ -5300,8 +5300,61 @@
         </p:nvSpPr>
         <p:spPr>
           <a:xfrm>
-            <a:off x="7040880" y="1234440"/>
-            <a:ext cx="2880360" cy="384048"/>
+            <a:off x="5806440" y="1234440"/>
+            <a:ext cx="2194560" cy="384048"/>
+          </a:xfrm>
+          <a:prstGeom prst="roundRect">
+            <a:avLst/>
+          </a:prstGeom>
+          <a:solidFill>
+            <a:srgbClr val="3F8F5B"/>
+          </a:solidFill>
+          <a:ln>
+            <a:noFill/>
+          </a:ln>
+          <a:effectLst/>
+        </p:spPr>
+        <p:style>
+          <a:lnRef idx="1">
+            <a:schemeClr val="accent1"/>
+          </a:lnRef>
+          <a:fillRef idx="3">
+            <a:schemeClr val="accent1"/>
+          </a:fillRef>
+          <a:effectRef idx="2">
+            <a:schemeClr val="accent1"/>
+          </a:effectRef>
+          <a:fontRef idx="minor">
+            <a:schemeClr val="lt1"/>
+          </a:fontRef>
+        </p:style>
+        <p:txBody>
+          <a:bodyPr rtlCol="0" anchor="ctr" wrap="square" lIns="50800" rIns="50800" tIns="12700" bIns="12700"/>
+          <a:lstStyle/>
+          <a:p>
+            <a:pPr algn="ctr"/>
+            <a:r>
+              <a:rPr sz="1050" b="1">
+                <a:solidFill>
+                  <a:srgbClr val="FFFFFF"/>
+                </a:solidFill>
+                <a:latin typeface="Meiryo"/>
+              </a:rPr>
+              <a:t>10月見込み：◎</a:t>
+            </a:r>
+          </a:p>
+        </p:txBody>
+      </p:sp>
+      <p:sp>
+        <p:nvSpPr>
+          <p:cNvPr id="22" name="Rounded Rectangle 21"/>
+          <p:cNvSpPr/>
+          <p:nvPr/>
+        </p:nvSpPr>
+        <p:spPr>
+          <a:xfrm>
+            <a:off x="8138160" y="1234440"/>
+            <a:ext cx="3200400" cy="384048"/>
           </a:xfrm>
           <a:prstGeom prst="roundRect">
             <a:avLst/>
@@ -5347,7 +5400,7 @@
       </p:sp>
       <p:sp>
         <p:nvSpPr>
-          <p:cNvPr id="22" name="Rectangle 21"/>
+          <p:cNvPr id="23" name="Rectangle 22"/>
           <p:cNvSpPr/>
           <p:nvPr/>
         </p:nvSpPr>
@@ -5391,7 +5444,7 @@
       </p:sp>
       <p:sp>
         <p:nvSpPr>
-          <p:cNvPr id="23" name="Rectangle 22"/>
+          <p:cNvPr id="24" name="Rectangle 23"/>
           <p:cNvSpPr/>
           <p:nvPr/>
         </p:nvSpPr>
@@ -5435,7 +5488,7 @@
       </p:sp>
       <p:sp>
         <p:nvSpPr>
-          <p:cNvPr id="24" name="TextBox 23"/>
+          <p:cNvPr id="25" name="TextBox 24"/>
           <p:cNvSpPr txBox="1"/>
           <p:nvPr/>
         </p:nvSpPr>
@@ -5474,7 +5527,7 @@
       </p:sp>
       <p:sp>
         <p:nvSpPr>
-          <p:cNvPr id="25" name="TextBox 24"/>
+          <p:cNvPr id="26" name="TextBox 25"/>
           <p:cNvSpPr txBox="1"/>
           <p:nvPr/>
         </p:nvSpPr>
@@ -5513,7 +5566,7 @@
       </p:sp>
       <p:sp>
         <p:nvSpPr>
-          <p:cNvPr id="26" name="Rectangle 25"/>
+          <p:cNvPr id="27" name="Rectangle 26"/>
           <p:cNvSpPr/>
           <p:nvPr/>
         </p:nvSpPr>
@@ -5557,7 +5610,7 @@
       </p:sp>
       <p:sp>
         <p:nvSpPr>
-          <p:cNvPr id="27" name="Rectangle 26"/>
+          <p:cNvPr id="28" name="Rectangle 27"/>
           <p:cNvSpPr/>
           <p:nvPr/>
         </p:nvSpPr>
@@ -5601,7 +5654,7 @@
       </p:sp>
       <p:sp>
         <p:nvSpPr>
-          <p:cNvPr id="28" name="TextBox 27"/>
+          <p:cNvPr id="29" name="TextBox 28"/>
           <p:cNvSpPr txBox="1"/>
           <p:nvPr/>
         </p:nvSpPr>
@@ -5640,7 +5693,7 @@
       </p:sp>
       <p:sp>
         <p:nvSpPr>
-          <p:cNvPr id="29" name="TextBox 28"/>
+          <p:cNvPr id="30" name="TextBox 29"/>
           <p:cNvSpPr txBox="1"/>
           <p:nvPr/>
         </p:nvSpPr>
@@ -5679,7 +5732,7 @@
       </p:sp>
       <p:sp>
         <p:nvSpPr>
-          <p:cNvPr id="30" name="Rectangle 29"/>
+          <p:cNvPr id="31" name="Rectangle 30"/>
           <p:cNvSpPr/>
           <p:nvPr/>
         </p:nvSpPr>
@@ -5723,7 +5776,7 @@
       </p:sp>
       <p:sp>
         <p:nvSpPr>
-          <p:cNvPr id="31" name="Rectangle 30"/>
+          <p:cNvPr id="32" name="Rectangle 31"/>
           <p:cNvSpPr/>
           <p:nvPr/>
         </p:nvSpPr>
@@ -5767,7 +5820,7 @@
       </p:sp>
       <p:sp>
         <p:nvSpPr>
-          <p:cNvPr id="32" name="TextBox 31"/>
+          <p:cNvPr id="33" name="TextBox 32"/>
           <p:cNvSpPr txBox="1"/>
           <p:nvPr/>
         </p:nvSpPr>
@@ -5806,7 +5859,7 @@
       </p:sp>
       <p:sp>
         <p:nvSpPr>
-          <p:cNvPr id="33" name="TextBox 32"/>
+          <p:cNvPr id="34" name="TextBox 33"/>
           <p:cNvSpPr txBox="1"/>
           <p:nvPr/>
         </p:nvSpPr>
@@ -5845,7 +5898,7 @@
       </p:sp>
       <p:sp>
         <p:nvSpPr>
-          <p:cNvPr id="34" name="Rectangle 33"/>
+          <p:cNvPr id="35" name="Rectangle 34"/>
           <p:cNvSpPr/>
           <p:nvPr/>
         </p:nvSpPr>
@@ -5889,7 +5942,7 @@
       </p:sp>
       <p:sp>
         <p:nvSpPr>
-          <p:cNvPr id="35" name="Rectangle 34"/>
+          <p:cNvPr id="36" name="Rectangle 35"/>
           <p:cNvSpPr/>
           <p:nvPr/>
         </p:nvSpPr>
@@ -5933,7 +5986,7 @@
       </p:sp>
       <p:sp>
         <p:nvSpPr>
-          <p:cNvPr id="36" name="TextBox 35"/>
+          <p:cNvPr id="37" name="TextBox 36"/>
           <p:cNvSpPr txBox="1"/>
           <p:nvPr/>
         </p:nvSpPr>
@@ -5972,7 +6025,7 @@
       </p:sp>
       <p:sp>
         <p:nvSpPr>
-          <p:cNvPr id="37" name="TextBox 36"/>
+          <p:cNvPr id="38" name="TextBox 37"/>
           <p:cNvSpPr txBox="1"/>
           <p:nvPr/>
         </p:nvSpPr>
@@ -6011,7 +6064,7 @@
       </p:sp>
       <p:sp>
         <p:nvSpPr>
-          <p:cNvPr id="38" name="Rectangle 37"/>
+          <p:cNvPr id="39" name="Rectangle 38"/>
           <p:cNvSpPr/>
           <p:nvPr/>
         </p:nvSpPr>
@@ -6055,7 +6108,7 @@
       </p:sp>
       <p:sp>
         <p:nvSpPr>
-          <p:cNvPr id="39" name="Rectangle 38"/>
+          <p:cNvPr id="40" name="Rectangle 39"/>
           <p:cNvSpPr/>
           <p:nvPr/>
         </p:nvSpPr>
@@ -6099,7 +6152,7 @@
       </p:sp>
       <p:sp>
         <p:nvSpPr>
-          <p:cNvPr id="40" name="TextBox 39"/>
+          <p:cNvPr id="41" name="TextBox 40"/>
           <p:cNvSpPr txBox="1"/>
           <p:nvPr/>
         </p:nvSpPr>
@@ -6138,7 +6191,7 @@
       </p:sp>
       <p:sp>
         <p:nvSpPr>
-          <p:cNvPr id="41" name="TextBox 40"/>
+          <p:cNvPr id="42" name="TextBox 41"/>
           <p:cNvSpPr txBox="1"/>
           <p:nvPr/>
         </p:nvSpPr>
@@ -6177,7 +6230,7 @@
       </p:sp>
       <p:sp>
         <p:nvSpPr>
-          <p:cNvPr id="42" name="Rectangle 41"/>
+          <p:cNvPr id="43" name="Rectangle 42"/>
           <p:cNvSpPr/>
           <p:nvPr/>
         </p:nvSpPr>
@@ -6221,7 +6274,7 @@
       </p:sp>
       <p:sp>
         <p:nvSpPr>
-          <p:cNvPr id="43" name="Rectangle 42"/>
+          <p:cNvPr id="44" name="Rectangle 43"/>
           <p:cNvSpPr/>
           <p:nvPr/>
         </p:nvSpPr>
@@ -6265,7 +6318,7 @@
       </p:sp>
       <p:sp>
         <p:nvSpPr>
-          <p:cNvPr id="44" name="TextBox 43"/>
+          <p:cNvPr id="45" name="TextBox 44"/>
           <p:cNvSpPr txBox="1"/>
           <p:nvPr/>
         </p:nvSpPr>
@@ -6304,7 +6357,7 @@
       </p:sp>
       <p:sp>
         <p:nvSpPr>
-          <p:cNvPr id="45" name="TextBox 44"/>
+          <p:cNvPr id="46" name="TextBox 45"/>
           <p:cNvSpPr txBox="1"/>
           <p:nvPr/>
         </p:nvSpPr>
@@ -7133,8 +7186,8 @@
         </p:nvSpPr>
         <p:spPr>
           <a:xfrm>
-            <a:off x="4892040" y="1234440"/>
-            <a:ext cx="1920240" cy="384048"/>
+            <a:off x="4114800" y="1234440"/>
+            <a:ext cx="1554480" cy="384048"/>
           </a:xfrm>
           <a:prstGeom prst="roundRect">
             <a:avLst/>
@@ -7186,8 +7239,61 @@
         </p:nvSpPr>
         <p:spPr>
           <a:xfrm>
-            <a:off x="7040880" y="1234440"/>
-            <a:ext cx="2880360" cy="384048"/>
+            <a:off x="5806440" y="1234440"/>
+            <a:ext cx="2194560" cy="384048"/>
+          </a:xfrm>
+          <a:prstGeom prst="roundRect">
+            <a:avLst/>
+          </a:prstGeom>
+          <a:solidFill>
+            <a:srgbClr val="2E8B9E"/>
+          </a:solidFill>
+          <a:ln>
+            <a:noFill/>
+          </a:ln>
+          <a:effectLst/>
+        </p:spPr>
+        <p:style>
+          <a:lnRef idx="1">
+            <a:schemeClr val="accent1"/>
+          </a:lnRef>
+          <a:fillRef idx="3">
+            <a:schemeClr val="accent1"/>
+          </a:fillRef>
+          <a:effectRef idx="2">
+            <a:schemeClr val="accent1"/>
+          </a:effectRef>
+          <a:fontRef idx="minor">
+            <a:schemeClr val="lt1"/>
+          </a:fontRef>
+        </p:style>
+        <p:txBody>
+          <a:bodyPr rtlCol="0" anchor="ctr" wrap="square" lIns="50800" rIns="50800" tIns="12700" bIns="12700"/>
+          <a:lstStyle/>
+          <a:p>
+            <a:pPr algn="ctr"/>
+            <a:r>
+              <a:rPr sz="1050" b="1">
+                <a:solidFill>
+                  <a:srgbClr val="FFFFFF"/>
+                </a:solidFill>
+                <a:latin typeface="Meiryo"/>
+              </a:rPr>
+              <a:t>10月見込み：○</a:t>
+            </a:r>
+          </a:p>
+        </p:txBody>
+      </p:sp>
+      <p:sp>
+        <p:nvSpPr>
+          <p:cNvPr id="22" name="Rounded Rectangle 21"/>
+          <p:cNvSpPr/>
+          <p:nvPr/>
+        </p:nvSpPr>
+        <p:spPr>
+          <a:xfrm>
+            <a:off x="8138160" y="1234440"/>
+            <a:ext cx="3200400" cy="384048"/>
           </a:xfrm>
           <a:prstGeom prst="roundRect">
             <a:avLst/>
@@ -7233,7 +7339,7 @@
       </p:sp>
       <p:sp>
         <p:nvSpPr>
-          <p:cNvPr id="22" name="Rectangle 21"/>
+          <p:cNvPr id="23" name="Rectangle 22"/>
           <p:cNvSpPr/>
           <p:nvPr/>
         </p:nvSpPr>
@@ -7277,7 +7383,7 @@
       </p:sp>
       <p:sp>
         <p:nvSpPr>
-          <p:cNvPr id="23" name="Rectangle 22"/>
+          <p:cNvPr id="24" name="Rectangle 23"/>
           <p:cNvSpPr/>
           <p:nvPr/>
         </p:nvSpPr>
@@ -7321,7 +7427,7 @@
       </p:sp>
       <p:sp>
         <p:nvSpPr>
-          <p:cNvPr id="24" name="TextBox 23"/>
+          <p:cNvPr id="25" name="TextBox 24"/>
           <p:cNvSpPr txBox="1"/>
           <p:nvPr/>
         </p:nvSpPr>
@@ -7360,7 +7466,7 @@
       </p:sp>
       <p:sp>
         <p:nvSpPr>
-          <p:cNvPr id="25" name="TextBox 24"/>
+          <p:cNvPr id="26" name="TextBox 25"/>
           <p:cNvSpPr txBox="1"/>
           <p:nvPr/>
         </p:nvSpPr>
@@ -7399,7 +7505,7 @@
       </p:sp>
       <p:sp>
         <p:nvSpPr>
-          <p:cNvPr id="26" name="Rectangle 25"/>
+          <p:cNvPr id="27" name="Rectangle 26"/>
           <p:cNvSpPr/>
           <p:nvPr/>
         </p:nvSpPr>
@@ -7443,7 +7549,7 @@
       </p:sp>
       <p:sp>
         <p:nvSpPr>
-          <p:cNvPr id="27" name="Rectangle 26"/>
+          <p:cNvPr id="28" name="Rectangle 27"/>
           <p:cNvSpPr/>
           <p:nvPr/>
         </p:nvSpPr>
@@ -7487,7 +7593,7 @@
       </p:sp>
       <p:sp>
         <p:nvSpPr>
-          <p:cNvPr id="28" name="TextBox 27"/>
+          <p:cNvPr id="29" name="TextBox 28"/>
           <p:cNvSpPr txBox="1"/>
           <p:nvPr/>
         </p:nvSpPr>
@@ -7526,7 +7632,7 @@
       </p:sp>
       <p:sp>
         <p:nvSpPr>
-          <p:cNvPr id="29" name="TextBox 28"/>
+          <p:cNvPr id="30" name="TextBox 29"/>
           <p:cNvSpPr txBox="1"/>
           <p:nvPr/>
         </p:nvSpPr>
@@ -7565,7 +7671,7 @@
       </p:sp>
       <p:sp>
         <p:nvSpPr>
-          <p:cNvPr id="30" name="Rectangle 29"/>
+          <p:cNvPr id="31" name="Rectangle 30"/>
           <p:cNvSpPr/>
           <p:nvPr/>
         </p:nvSpPr>
@@ -7609,7 +7715,7 @@
       </p:sp>
       <p:sp>
         <p:nvSpPr>
-          <p:cNvPr id="31" name="Rectangle 30"/>
+          <p:cNvPr id="32" name="Rectangle 31"/>
           <p:cNvSpPr/>
           <p:nvPr/>
         </p:nvSpPr>
@@ -7653,7 +7759,7 @@
       </p:sp>
       <p:sp>
         <p:nvSpPr>
-          <p:cNvPr id="32" name="TextBox 31"/>
+          <p:cNvPr id="33" name="TextBox 32"/>
           <p:cNvSpPr txBox="1"/>
           <p:nvPr/>
         </p:nvSpPr>
@@ -7692,7 +7798,7 @@
       </p:sp>
       <p:sp>
         <p:nvSpPr>
-          <p:cNvPr id="33" name="TextBox 32"/>
+          <p:cNvPr id="34" name="TextBox 33"/>
           <p:cNvSpPr txBox="1"/>
           <p:nvPr/>
         </p:nvSpPr>
@@ -7731,7 +7837,7 @@
       </p:sp>
       <p:sp>
         <p:nvSpPr>
-          <p:cNvPr id="34" name="Rectangle 33"/>
+          <p:cNvPr id="35" name="Rectangle 34"/>
           <p:cNvSpPr/>
           <p:nvPr/>
         </p:nvSpPr>
@@ -7775,7 +7881,7 @@
       </p:sp>
       <p:sp>
         <p:nvSpPr>
-          <p:cNvPr id="35" name="Rectangle 34"/>
+          <p:cNvPr id="36" name="Rectangle 35"/>
           <p:cNvSpPr/>
           <p:nvPr/>
         </p:nvSpPr>
@@ -7819,7 +7925,7 @@
       </p:sp>
       <p:sp>
         <p:nvSpPr>
-          <p:cNvPr id="36" name="TextBox 35"/>
+          <p:cNvPr id="37" name="TextBox 36"/>
           <p:cNvSpPr txBox="1"/>
           <p:nvPr/>
         </p:nvSpPr>
@@ -7858,7 +7964,7 @@
       </p:sp>
       <p:sp>
         <p:nvSpPr>
-          <p:cNvPr id="37" name="TextBox 36"/>
+          <p:cNvPr id="38" name="TextBox 37"/>
           <p:cNvSpPr txBox="1"/>
           <p:nvPr/>
         </p:nvSpPr>
@@ -7897,7 +8003,7 @@
       </p:sp>
       <p:sp>
         <p:nvSpPr>
-          <p:cNvPr id="38" name="Rectangle 37"/>
+          <p:cNvPr id="39" name="Rectangle 38"/>
           <p:cNvSpPr/>
           <p:nvPr/>
         </p:nvSpPr>
@@ -7941,7 +8047,7 @@
       </p:sp>
       <p:sp>
         <p:nvSpPr>
-          <p:cNvPr id="39" name="Rectangle 38"/>
+          <p:cNvPr id="40" name="Rectangle 39"/>
           <p:cNvSpPr/>
           <p:nvPr/>
         </p:nvSpPr>
@@ -7985,7 +8091,7 @@
       </p:sp>
       <p:sp>
         <p:nvSpPr>
-          <p:cNvPr id="40" name="TextBox 39"/>
+          <p:cNvPr id="41" name="TextBox 40"/>
           <p:cNvSpPr txBox="1"/>
           <p:nvPr/>
         </p:nvSpPr>
@@ -8024,7 +8130,7 @@
       </p:sp>
       <p:sp>
         <p:nvSpPr>
-          <p:cNvPr id="41" name="TextBox 40"/>
+          <p:cNvPr id="42" name="TextBox 41"/>
           <p:cNvSpPr txBox="1"/>
           <p:nvPr/>
         </p:nvSpPr>
@@ -8063,7 +8169,7 @@
       </p:sp>
       <p:sp>
         <p:nvSpPr>
-          <p:cNvPr id="42" name="Rectangle 41"/>
+          <p:cNvPr id="43" name="Rectangle 42"/>
           <p:cNvSpPr/>
           <p:nvPr/>
         </p:nvSpPr>
@@ -8107,7 +8213,7 @@
       </p:sp>
       <p:sp>
         <p:nvSpPr>
-          <p:cNvPr id="43" name="Rectangle 42"/>
+          <p:cNvPr id="44" name="Rectangle 43"/>
           <p:cNvSpPr/>
           <p:nvPr/>
         </p:nvSpPr>
@@ -8151,7 +8257,7 @@
       </p:sp>
       <p:sp>
         <p:nvSpPr>
-          <p:cNvPr id="44" name="TextBox 43"/>
+          <p:cNvPr id="45" name="TextBox 44"/>
           <p:cNvSpPr txBox="1"/>
           <p:nvPr/>
         </p:nvSpPr>
@@ -8190,7 +8296,7 @@
       </p:sp>
       <p:sp>
         <p:nvSpPr>
-          <p:cNvPr id="45" name="TextBox 44"/>
+          <p:cNvPr id="46" name="TextBox 45"/>
           <p:cNvSpPr txBox="1"/>
           <p:nvPr/>
         </p:nvSpPr>
@@ -9019,8 +9125,8 @@
         </p:nvSpPr>
         <p:spPr>
           <a:xfrm>
-            <a:off x="4892040" y="1234440"/>
-            <a:ext cx="1920240" cy="384048"/>
+            <a:off x="4114800" y="1234440"/>
+            <a:ext cx="1554480" cy="384048"/>
           </a:xfrm>
           <a:prstGeom prst="roundRect">
             <a:avLst/>
@@ -9072,8 +9178,61 @@
         </p:nvSpPr>
         <p:spPr>
           <a:xfrm>
-            <a:off x="7040880" y="1234440"/>
-            <a:ext cx="2880360" cy="384048"/>
+            <a:off x="5806440" y="1234440"/>
+            <a:ext cx="2194560" cy="384048"/>
+          </a:xfrm>
+          <a:prstGeom prst="roundRect">
+            <a:avLst/>
+          </a:prstGeom>
+          <a:solidFill>
+            <a:srgbClr val="3F8F5B"/>
+          </a:solidFill>
+          <a:ln>
+            <a:noFill/>
+          </a:ln>
+          <a:effectLst/>
+        </p:spPr>
+        <p:style>
+          <a:lnRef idx="1">
+            <a:schemeClr val="accent1"/>
+          </a:lnRef>
+          <a:fillRef idx="3">
+            <a:schemeClr val="accent1"/>
+          </a:fillRef>
+          <a:effectRef idx="2">
+            <a:schemeClr val="accent1"/>
+          </a:effectRef>
+          <a:fontRef idx="minor">
+            <a:schemeClr val="lt1"/>
+          </a:fontRef>
+        </p:style>
+        <p:txBody>
+          <a:bodyPr rtlCol="0" anchor="ctr" wrap="square" lIns="50800" rIns="50800" tIns="12700" bIns="12700"/>
+          <a:lstStyle/>
+          <a:p>
+            <a:pPr algn="ctr"/>
+            <a:r>
+              <a:rPr sz="1050" b="1">
+                <a:solidFill>
+                  <a:srgbClr val="FFFFFF"/>
+                </a:solidFill>
+                <a:latin typeface="Meiryo"/>
+              </a:rPr>
+              <a:t>10月見込み：◎</a:t>
+            </a:r>
+          </a:p>
+        </p:txBody>
+      </p:sp>
+      <p:sp>
+        <p:nvSpPr>
+          <p:cNvPr id="22" name="Rounded Rectangle 21"/>
+          <p:cNvSpPr/>
+          <p:nvPr/>
+        </p:nvSpPr>
+        <p:spPr>
+          <a:xfrm>
+            <a:off x="8138160" y="1234440"/>
+            <a:ext cx="3200400" cy="384048"/>
           </a:xfrm>
           <a:prstGeom prst="roundRect">
             <a:avLst/>
@@ -9119,7 +9278,7 @@
       </p:sp>
       <p:sp>
         <p:nvSpPr>
-          <p:cNvPr id="22" name="Rectangle 21"/>
+          <p:cNvPr id="23" name="Rectangle 22"/>
           <p:cNvSpPr/>
           <p:nvPr/>
         </p:nvSpPr>
@@ -9163,7 +9322,7 @@
       </p:sp>
       <p:sp>
         <p:nvSpPr>
-          <p:cNvPr id="23" name="Rectangle 22"/>
+          <p:cNvPr id="24" name="Rectangle 23"/>
           <p:cNvSpPr/>
           <p:nvPr/>
         </p:nvSpPr>
@@ -9207,7 +9366,7 @@
       </p:sp>
       <p:sp>
         <p:nvSpPr>
-          <p:cNvPr id="24" name="TextBox 23"/>
+          <p:cNvPr id="25" name="TextBox 24"/>
           <p:cNvSpPr txBox="1"/>
           <p:nvPr/>
         </p:nvSpPr>
@@ -9246,7 +9405,7 @@
       </p:sp>
       <p:sp>
         <p:nvSpPr>
-          <p:cNvPr id="25" name="TextBox 24"/>
+          <p:cNvPr id="26" name="TextBox 25"/>
           <p:cNvSpPr txBox="1"/>
           <p:nvPr/>
         </p:nvSpPr>
@@ -9285,7 +9444,7 @@
       </p:sp>
       <p:sp>
         <p:nvSpPr>
-          <p:cNvPr id="26" name="Rectangle 25"/>
+          <p:cNvPr id="27" name="Rectangle 26"/>
           <p:cNvSpPr/>
           <p:nvPr/>
         </p:nvSpPr>
@@ -9329,7 +9488,7 @@
       </p:sp>
       <p:sp>
         <p:nvSpPr>
-          <p:cNvPr id="27" name="Rectangle 26"/>
+          <p:cNvPr id="28" name="Rectangle 27"/>
           <p:cNvSpPr/>
           <p:nvPr/>
         </p:nvSpPr>
@@ -9373,7 +9532,7 @@
       </p:sp>
       <p:sp>
         <p:nvSpPr>
-          <p:cNvPr id="28" name="TextBox 27"/>
+          <p:cNvPr id="29" name="TextBox 28"/>
           <p:cNvSpPr txBox="1"/>
           <p:nvPr/>
         </p:nvSpPr>
@@ -9412,7 +9571,7 @@
       </p:sp>
       <p:sp>
         <p:nvSpPr>
-          <p:cNvPr id="29" name="TextBox 28"/>
+          <p:cNvPr id="30" name="TextBox 29"/>
           <p:cNvSpPr txBox="1"/>
           <p:nvPr/>
         </p:nvSpPr>
@@ -9451,7 +9610,7 @@
       </p:sp>
       <p:sp>
         <p:nvSpPr>
-          <p:cNvPr id="30" name="Rectangle 29"/>
+          <p:cNvPr id="31" name="Rectangle 30"/>
           <p:cNvSpPr/>
           <p:nvPr/>
         </p:nvSpPr>
@@ -9495,7 +9654,7 @@
       </p:sp>
       <p:sp>
         <p:nvSpPr>
-          <p:cNvPr id="31" name="Rectangle 30"/>
+          <p:cNvPr id="32" name="Rectangle 31"/>
           <p:cNvSpPr/>
           <p:nvPr/>
         </p:nvSpPr>
@@ -9539,7 +9698,7 @@
       </p:sp>
       <p:sp>
         <p:nvSpPr>
-          <p:cNvPr id="32" name="TextBox 31"/>
+          <p:cNvPr id="33" name="TextBox 32"/>
           <p:cNvSpPr txBox="1"/>
           <p:nvPr/>
         </p:nvSpPr>
@@ -9578,7 +9737,7 @@
       </p:sp>
       <p:sp>
         <p:nvSpPr>
-          <p:cNvPr id="33" name="TextBox 32"/>
+          <p:cNvPr id="34" name="TextBox 33"/>
           <p:cNvSpPr txBox="1"/>
           <p:nvPr/>
         </p:nvSpPr>
@@ -9617,7 +9776,7 @@
       </p:sp>
       <p:sp>
         <p:nvSpPr>
-          <p:cNvPr id="34" name="Rectangle 33"/>
+          <p:cNvPr id="35" name="Rectangle 34"/>
           <p:cNvSpPr/>
           <p:nvPr/>
         </p:nvSpPr>
@@ -9661,7 +9820,7 @@
       </p:sp>
       <p:sp>
         <p:nvSpPr>
-          <p:cNvPr id="35" name="Rectangle 34"/>
+          <p:cNvPr id="36" name="Rectangle 35"/>
           <p:cNvSpPr/>
           <p:nvPr/>
         </p:nvSpPr>
@@ -9705,7 +9864,7 @@
       </p:sp>
       <p:sp>
         <p:nvSpPr>
-          <p:cNvPr id="36" name="TextBox 35"/>
+          <p:cNvPr id="37" name="TextBox 36"/>
           <p:cNvSpPr txBox="1"/>
           <p:nvPr/>
         </p:nvSpPr>
@@ -9744,7 +9903,7 @@
       </p:sp>
       <p:sp>
         <p:nvSpPr>
-          <p:cNvPr id="37" name="TextBox 36"/>
+          <p:cNvPr id="38" name="TextBox 37"/>
           <p:cNvSpPr txBox="1"/>
           <p:nvPr/>
         </p:nvSpPr>
@@ -9783,7 +9942,7 @@
       </p:sp>
       <p:sp>
         <p:nvSpPr>
-          <p:cNvPr id="38" name="Rectangle 37"/>
+          <p:cNvPr id="39" name="Rectangle 38"/>
           <p:cNvSpPr/>
           <p:nvPr/>
         </p:nvSpPr>
@@ -9827,7 +9986,7 @@
       </p:sp>
       <p:sp>
         <p:nvSpPr>
-          <p:cNvPr id="39" name="Rectangle 38"/>
+          <p:cNvPr id="40" name="Rectangle 39"/>
           <p:cNvSpPr/>
           <p:nvPr/>
         </p:nvSpPr>
@@ -9871,7 +10030,7 @@
       </p:sp>
       <p:sp>
         <p:nvSpPr>
-          <p:cNvPr id="40" name="TextBox 39"/>
+          <p:cNvPr id="41" name="TextBox 40"/>
           <p:cNvSpPr txBox="1"/>
           <p:nvPr/>
         </p:nvSpPr>
@@ -9910,7 +10069,7 @@
       </p:sp>
       <p:sp>
         <p:nvSpPr>
-          <p:cNvPr id="41" name="TextBox 40"/>
+          <p:cNvPr id="42" name="TextBox 41"/>
           <p:cNvSpPr txBox="1"/>
           <p:nvPr/>
         </p:nvSpPr>
@@ -9949,7 +10108,7 @@
       </p:sp>
       <p:sp>
         <p:nvSpPr>
-          <p:cNvPr id="42" name="Rectangle 41"/>
+          <p:cNvPr id="43" name="Rectangle 42"/>
           <p:cNvSpPr/>
           <p:nvPr/>
         </p:nvSpPr>
@@ -9993,7 +10152,7 @@
       </p:sp>
       <p:sp>
         <p:nvSpPr>
-          <p:cNvPr id="43" name="Rectangle 42"/>
+          <p:cNvPr id="44" name="Rectangle 43"/>
           <p:cNvSpPr/>
           <p:nvPr/>
         </p:nvSpPr>
@@ -10037,7 +10196,7 @@
       </p:sp>
       <p:sp>
         <p:nvSpPr>
-          <p:cNvPr id="44" name="TextBox 43"/>
+          <p:cNvPr id="45" name="TextBox 44"/>
           <p:cNvSpPr txBox="1"/>
           <p:nvPr/>
         </p:nvSpPr>
@@ -10076,7 +10235,7 @@
       </p:sp>
       <p:sp>
         <p:nvSpPr>
-          <p:cNvPr id="45" name="TextBox 44"/>
+          <p:cNvPr id="46" name="TextBox 45"/>
           <p:cNvSpPr txBox="1"/>
           <p:nvPr/>
         </p:nvSpPr>
@@ -10905,8 +11064,8 @@
         </p:nvSpPr>
         <p:spPr>
           <a:xfrm>
-            <a:off x="4892040" y="1234440"/>
-            <a:ext cx="1920240" cy="384048"/>
+            <a:off x="4114800" y="1234440"/>
+            <a:ext cx="1554480" cy="384048"/>
           </a:xfrm>
           <a:prstGeom prst="roundRect">
             <a:avLst/>
@@ -10958,8 +11117,61 @@
         </p:nvSpPr>
         <p:spPr>
           <a:xfrm>
-            <a:off x="7040880" y="1234440"/>
-            <a:ext cx="2880360" cy="384048"/>
+            <a:off x="5806440" y="1234440"/>
+            <a:ext cx="2194560" cy="384048"/>
+          </a:xfrm>
+          <a:prstGeom prst="roundRect">
+            <a:avLst/>
+          </a:prstGeom>
+          <a:solidFill>
+            <a:srgbClr val="2E8B9E"/>
+          </a:solidFill>
+          <a:ln>
+            <a:noFill/>
+          </a:ln>
+          <a:effectLst/>
+        </p:spPr>
+        <p:style>
+          <a:lnRef idx="1">
+            <a:schemeClr val="accent1"/>
+          </a:lnRef>
+          <a:fillRef idx="3">
+            <a:schemeClr val="accent1"/>
+          </a:fillRef>
+          <a:effectRef idx="2">
+            <a:schemeClr val="accent1"/>
+          </a:effectRef>
+          <a:fontRef idx="minor">
+            <a:schemeClr val="lt1"/>
+          </a:fontRef>
+        </p:style>
+        <p:txBody>
+          <a:bodyPr rtlCol="0" anchor="ctr" wrap="square" lIns="50800" rIns="50800" tIns="12700" bIns="12700"/>
+          <a:lstStyle/>
+          <a:p>
+            <a:pPr algn="ctr"/>
+            <a:r>
+              <a:rPr sz="1050" b="1">
+                <a:solidFill>
+                  <a:srgbClr val="FFFFFF"/>
+                </a:solidFill>
+                <a:latin typeface="Meiryo"/>
+              </a:rPr>
+              <a:t>10月見込み：○</a:t>
+            </a:r>
+          </a:p>
+        </p:txBody>
+      </p:sp>
+      <p:sp>
+        <p:nvSpPr>
+          <p:cNvPr id="22" name="Rounded Rectangle 21"/>
+          <p:cNvSpPr/>
+          <p:nvPr/>
+        </p:nvSpPr>
+        <p:spPr>
+          <a:xfrm>
+            <a:off x="8138160" y="1234440"/>
+            <a:ext cx="3200400" cy="384048"/>
           </a:xfrm>
           <a:prstGeom prst="roundRect">
             <a:avLst/>
@@ -11005,7 +11217,7 @@
       </p:sp>
       <p:sp>
         <p:nvSpPr>
-          <p:cNvPr id="22" name="Rectangle 21"/>
+          <p:cNvPr id="23" name="Rectangle 22"/>
           <p:cNvSpPr/>
           <p:nvPr/>
         </p:nvSpPr>
@@ -11049,7 +11261,7 @@
       </p:sp>
       <p:sp>
         <p:nvSpPr>
-          <p:cNvPr id="23" name="Rectangle 22"/>
+          <p:cNvPr id="24" name="Rectangle 23"/>
           <p:cNvSpPr/>
           <p:nvPr/>
         </p:nvSpPr>
@@ -11093,7 +11305,7 @@
       </p:sp>
       <p:sp>
         <p:nvSpPr>
-          <p:cNvPr id="24" name="TextBox 23"/>
+          <p:cNvPr id="25" name="TextBox 24"/>
           <p:cNvSpPr txBox="1"/>
           <p:nvPr/>
         </p:nvSpPr>
@@ -11132,7 +11344,7 @@
       </p:sp>
       <p:sp>
         <p:nvSpPr>
-          <p:cNvPr id="25" name="TextBox 24"/>
+          <p:cNvPr id="26" name="TextBox 25"/>
           <p:cNvSpPr txBox="1"/>
           <p:nvPr/>
         </p:nvSpPr>
@@ -11171,7 +11383,7 @@
       </p:sp>
       <p:sp>
         <p:nvSpPr>
-          <p:cNvPr id="26" name="Rectangle 25"/>
+          <p:cNvPr id="27" name="Rectangle 26"/>
           <p:cNvSpPr/>
           <p:nvPr/>
         </p:nvSpPr>
@@ -11215,7 +11427,7 @@
       </p:sp>
       <p:sp>
         <p:nvSpPr>
-          <p:cNvPr id="27" name="Rectangle 26"/>
+          <p:cNvPr id="28" name="Rectangle 27"/>
           <p:cNvSpPr/>
           <p:nvPr/>
         </p:nvSpPr>
@@ -11259,7 +11471,7 @@
       </p:sp>
       <p:sp>
         <p:nvSpPr>
-          <p:cNvPr id="28" name="TextBox 27"/>
+          <p:cNvPr id="29" name="TextBox 28"/>
           <p:cNvSpPr txBox="1"/>
           <p:nvPr/>
         </p:nvSpPr>
@@ -11298,7 +11510,7 @@
       </p:sp>
       <p:sp>
         <p:nvSpPr>
-          <p:cNvPr id="29" name="TextBox 28"/>
+          <p:cNvPr id="30" name="TextBox 29"/>
           <p:cNvSpPr txBox="1"/>
           <p:nvPr/>
         </p:nvSpPr>
@@ -11337,7 +11549,7 @@
       </p:sp>
       <p:sp>
         <p:nvSpPr>
-          <p:cNvPr id="30" name="Rectangle 29"/>
+          <p:cNvPr id="31" name="Rectangle 30"/>
           <p:cNvSpPr/>
           <p:nvPr/>
         </p:nvSpPr>
@@ -11381,7 +11593,7 @@
       </p:sp>
       <p:sp>
         <p:nvSpPr>
-          <p:cNvPr id="31" name="Rectangle 30"/>
+          <p:cNvPr id="32" name="Rectangle 31"/>
           <p:cNvSpPr/>
           <p:nvPr/>
         </p:nvSpPr>
@@ -11425,7 +11637,7 @@
       </p:sp>
       <p:sp>
         <p:nvSpPr>
-          <p:cNvPr id="32" name="TextBox 31"/>
+          <p:cNvPr id="33" name="TextBox 32"/>
           <p:cNvSpPr txBox="1"/>
           <p:nvPr/>
         </p:nvSpPr>
@@ -11464,7 +11676,7 @@
       </p:sp>
       <p:sp>
         <p:nvSpPr>
-          <p:cNvPr id="33" name="TextBox 32"/>
+          <p:cNvPr id="34" name="TextBox 33"/>
           <p:cNvSpPr txBox="1"/>
           <p:nvPr/>
         </p:nvSpPr>
@@ -11503,7 +11715,7 @@
       </p:sp>
       <p:sp>
         <p:nvSpPr>
-          <p:cNvPr id="34" name="Rectangle 33"/>
+          <p:cNvPr id="35" name="Rectangle 34"/>
           <p:cNvSpPr/>
           <p:nvPr/>
         </p:nvSpPr>
@@ -11547,7 +11759,7 @@
       </p:sp>
       <p:sp>
         <p:nvSpPr>
-          <p:cNvPr id="35" name="Rectangle 34"/>
+          <p:cNvPr id="36" name="Rectangle 35"/>
           <p:cNvSpPr/>
           <p:nvPr/>
         </p:nvSpPr>
@@ -11591,7 +11803,7 @@
       </p:sp>
       <p:sp>
         <p:nvSpPr>
-          <p:cNvPr id="36" name="TextBox 35"/>
+          <p:cNvPr id="37" name="TextBox 36"/>
           <p:cNvSpPr txBox="1"/>
           <p:nvPr/>
         </p:nvSpPr>
@@ -11630,7 +11842,7 @@
       </p:sp>
       <p:sp>
         <p:nvSpPr>
-          <p:cNvPr id="37" name="TextBox 36"/>
+          <p:cNvPr id="38" name="TextBox 37"/>
           <p:cNvSpPr txBox="1"/>
           <p:nvPr/>
         </p:nvSpPr>
@@ -11669,7 +11881,7 @@
       </p:sp>
       <p:sp>
         <p:nvSpPr>
-          <p:cNvPr id="38" name="Rectangle 37"/>
+          <p:cNvPr id="39" name="Rectangle 38"/>
           <p:cNvSpPr/>
           <p:nvPr/>
         </p:nvSpPr>
@@ -11713,7 +11925,7 @@
       </p:sp>
       <p:sp>
         <p:nvSpPr>
-          <p:cNvPr id="39" name="Rectangle 38"/>
+          <p:cNvPr id="40" name="Rectangle 39"/>
           <p:cNvSpPr/>
           <p:nvPr/>
         </p:nvSpPr>
@@ -11757,7 +11969,7 @@
       </p:sp>
       <p:sp>
         <p:nvSpPr>
-          <p:cNvPr id="40" name="TextBox 39"/>
+          <p:cNvPr id="41" name="TextBox 40"/>
           <p:cNvSpPr txBox="1"/>
           <p:nvPr/>
         </p:nvSpPr>
@@ -11796,7 +12008,7 @@
       </p:sp>
       <p:sp>
         <p:nvSpPr>
-          <p:cNvPr id="41" name="TextBox 40"/>
+          <p:cNvPr id="42" name="TextBox 41"/>
           <p:cNvSpPr txBox="1"/>
           <p:nvPr/>
         </p:nvSpPr>
@@ -11835,7 +12047,7 @@
       </p:sp>
       <p:sp>
         <p:nvSpPr>
-          <p:cNvPr id="42" name="Rectangle 41"/>
+          <p:cNvPr id="43" name="Rectangle 42"/>
           <p:cNvSpPr/>
           <p:nvPr/>
         </p:nvSpPr>
@@ -11879,7 +12091,7 @@
       </p:sp>
       <p:sp>
         <p:nvSpPr>
-          <p:cNvPr id="43" name="Rectangle 42"/>
+          <p:cNvPr id="44" name="Rectangle 43"/>
           <p:cNvSpPr/>
           <p:nvPr/>
         </p:nvSpPr>
@@ -11923,7 +12135,7 @@
       </p:sp>
       <p:sp>
         <p:nvSpPr>
-          <p:cNvPr id="44" name="TextBox 43"/>
+          <p:cNvPr id="45" name="TextBox 44"/>
           <p:cNvSpPr txBox="1"/>
           <p:nvPr/>
         </p:nvSpPr>
@@ -11962,7 +12174,7 @@
       </p:sp>
       <p:sp>
         <p:nvSpPr>
-          <p:cNvPr id="45" name="TextBox 44"/>
+          <p:cNvPr id="46" name="TextBox 45"/>
           <p:cNvSpPr txBox="1"/>
           <p:nvPr/>
         </p:nvSpPr>
@@ -12791,8 +13003,8 @@
         </p:nvSpPr>
         <p:spPr>
           <a:xfrm>
-            <a:off x="4892040" y="1234440"/>
-            <a:ext cx="1920240" cy="384048"/>
+            <a:off x="4114800" y="1234440"/>
+            <a:ext cx="1554480" cy="384048"/>
           </a:xfrm>
           <a:prstGeom prst="roundRect">
             <a:avLst/>
@@ -12844,8 +13056,61 @@
         </p:nvSpPr>
         <p:spPr>
           <a:xfrm>
-            <a:off x="7040880" y="1234440"/>
-            <a:ext cx="2880360" cy="384048"/>
+            <a:off x="5806440" y="1234440"/>
+            <a:ext cx="2194560" cy="384048"/>
+          </a:xfrm>
+          <a:prstGeom prst="roundRect">
+            <a:avLst/>
+          </a:prstGeom>
+          <a:solidFill>
+            <a:srgbClr val="C98A1B"/>
+          </a:solidFill>
+          <a:ln>
+            <a:noFill/>
+          </a:ln>
+          <a:effectLst/>
+        </p:spPr>
+        <p:style>
+          <a:lnRef idx="1">
+            <a:schemeClr val="accent1"/>
+          </a:lnRef>
+          <a:fillRef idx="3">
+            <a:schemeClr val="accent1"/>
+          </a:fillRef>
+          <a:effectRef idx="2">
+            <a:schemeClr val="accent1"/>
+          </a:effectRef>
+          <a:fontRef idx="minor">
+            <a:schemeClr val="lt1"/>
+          </a:fontRef>
+        </p:style>
+        <p:txBody>
+          <a:bodyPr rtlCol="0" anchor="ctr" wrap="square" lIns="50800" rIns="50800" tIns="12700" bIns="12700"/>
+          <a:lstStyle/>
+          <a:p>
+            <a:pPr algn="ctr"/>
+            <a:r>
+              <a:rPr sz="1050" b="1">
+                <a:solidFill>
+                  <a:srgbClr val="FFFFFF"/>
+                </a:solidFill>
+                <a:latin typeface="Meiryo"/>
+              </a:rPr>
+              <a:t>10月見込み：△</a:t>
+            </a:r>
+          </a:p>
+        </p:txBody>
+      </p:sp>
+      <p:sp>
+        <p:nvSpPr>
+          <p:cNvPr id="22" name="Rounded Rectangle 21"/>
+          <p:cNvSpPr/>
+          <p:nvPr/>
+        </p:nvSpPr>
+        <p:spPr>
+          <a:xfrm>
+            <a:off x="8138160" y="1234440"/>
+            <a:ext cx="3200400" cy="384048"/>
           </a:xfrm>
           <a:prstGeom prst="roundRect">
             <a:avLst/>
@@ -12891,7 +13156,7 @@
       </p:sp>
       <p:sp>
         <p:nvSpPr>
-          <p:cNvPr id="22" name="Rectangle 21"/>
+          <p:cNvPr id="23" name="Rectangle 22"/>
           <p:cNvSpPr/>
           <p:nvPr/>
         </p:nvSpPr>
@@ -12935,7 +13200,7 @@
       </p:sp>
       <p:sp>
         <p:nvSpPr>
-          <p:cNvPr id="23" name="Rectangle 22"/>
+          <p:cNvPr id="24" name="Rectangle 23"/>
           <p:cNvSpPr/>
           <p:nvPr/>
         </p:nvSpPr>
@@ -12979,7 +13244,7 @@
       </p:sp>
       <p:sp>
         <p:nvSpPr>
-          <p:cNvPr id="24" name="TextBox 23"/>
+          <p:cNvPr id="25" name="TextBox 24"/>
           <p:cNvSpPr txBox="1"/>
           <p:nvPr/>
         </p:nvSpPr>
@@ -13018,7 +13283,7 @@
       </p:sp>
       <p:sp>
         <p:nvSpPr>
-          <p:cNvPr id="25" name="TextBox 24"/>
+          <p:cNvPr id="26" name="TextBox 25"/>
           <p:cNvSpPr txBox="1"/>
           <p:nvPr/>
         </p:nvSpPr>
@@ -13057,7 +13322,7 @@
       </p:sp>
       <p:sp>
         <p:nvSpPr>
-          <p:cNvPr id="26" name="Rectangle 25"/>
+          <p:cNvPr id="27" name="Rectangle 26"/>
           <p:cNvSpPr/>
           <p:nvPr/>
         </p:nvSpPr>
@@ -13101,7 +13366,7 @@
       </p:sp>
       <p:sp>
         <p:nvSpPr>
-          <p:cNvPr id="27" name="Rectangle 26"/>
+          <p:cNvPr id="28" name="Rectangle 27"/>
           <p:cNvSpPr/>
           <p:nvPr/>
         </p:nvSpPr>
@@ -13145,7 +13410,7 @@
       </p:sp>
       <p:sp>
         <p:nvSpPr>
-          <p:cNvPr id="28" name="TextBox 27"/>
+          <p:cNvPr id="29" name="TextBox 28"/>
           <p:cNvSpPr txBox="1"/>
           <p:nvPr/>
         </p:nvSpPr>
@@ -13184,7 +13449,7 @@
       </p:sp>
       <p:sp>
         <p:nvSpPr>
-          <p:cNvPr id="29" name="TextBox 28"/>
+          <p:cNvPr id="30" name="TextBox 29"/>
           <p:cNvSpPr txBox="1"/>
           <p:nvPr/>
         </p:nvSpPr>
@@ -13223,7 +13488,7 @@
       </p:sp>
       <p:sp>
         <p:nvSpPr>
-          <p:cNvPr id="30" name="Rectangle 29"/>
+          <p:cNvPr id="31" name="Rectangle 30"/>
           <p:cNvSpPr/>
           <p:nvPr/>
         </p:nvSpPr>
@@ -13267,7 +13532,7 @@
       </p:sp>
       <p:sp>
         <p:nvSpPr>
-          <p:cNvPr id="31" name="Rectangle 30"/>
+          <p:cNvPr id="32" name="Rectangle 31"/>
           <p:cNvSpPr/>
           <p:nvPr/>
         </p:nvSpPr>
@@ -13311,7 +13576,7 @@
       </p:sp>
       <p:sp>
         <p:nvSpPr>
-          <p:cNvPr id="32" name="TextBox 31"/>
+          <p:cNvPr id="33" name="TextBox 32"/>
           <p:cNvSpPr txBox="1"/>
           <p:nvPr/>
         </p:nvSpPr>
@@ -13350,7 +13615,7 @@
       </p:sp>
       <p:sp>
         <p:nvSpPr>
-          <p:cNvPr id="33" name="TextBox 32"/>
+          <p:cNvPr id="34" name="TextBox 33"/>
           <p:cNvSpPr txBox="1"/>
           <p:nvPr/>
         </p:nvSpPr>
@@ -13389,7 +13654,7 @@
       </p:sp>
       <p:sp>
         <p:nvSpPr>
-          <p:cNvPr id="34" name="Rectangle 33"/>
+          <p:cNvPr id="35" name="Rectangle 34"/>
           <p:cNvSpPr/>
           <p:nvPr/>
         </p:nvSpPr>
@@ -13433,7 +13698,7 @@
       </p:sp>
       <p:sp>
         <p:nvSpPr>
-          <p:cNvPr id="35" name="Rectangle 34"/>
+          <p:cNvPr id="36" name="Rectangle 35"/>
           <p:cNvSpPr/>
           <p:nvPr/>
         </p:nvSpPr>
@@ -13477,7 +13742,7 @@
       </p:sp>
       <p:sp>
         <p:nvSpPr>
-          <p:cNvPr id="36" name="TextBox 35"/>
+          <p:cNvPr id="37" name="TextBox 36"/>
           <p:cNvSpPr txBox="1"/>
           <p:nvPr/>
         </p:nvSpPr>
@@ -13516,7 +13781,7 @@
       </p:sp>
       <p:sp>
         <p:nvSpPr>
-          <p:cNvPr id="37" name="TextBox 36"/>
+          <p:cNvPr id="38" name="TextBox 37"/>
           <p:cNvSpPr txBox="1"/>
           <p:nvPr/>
         </p:nvSpPr>
@@ -13555,7 +13820,7 @@
       </p:sp>
       <p:sp>
         <p:nvSpPr>
-          <p:cNvPr id="38" name="Rectangle 37"/>
+          <p:cNvPr id="39" name="Rectangle 38"/>
           <p:cNvSpPr/>
           <p:nvPr/>
         </p:nvSpPr>
@@ -13599,7 +13864,7 @@
       </p:sp>
       <p:sp>
         <p:nvSpPr>
-          <p:cNvPr id="39" name="Rectangle 38"/>
+          <p:cNvPr id="40" name="Rectangle 39"/>
           <p:cNvSpPr/>
           <p:nvPr/>
         </p:nvSpPr>
@@ -13643,7 +13908,7 @@
       </p:sp>
       <p:sp>
         <p:nvSpPr>
-          <p:cNvPr id="40" name="TextBox 39"/>
+          <p:cNvPr id="41" name="TextBox 40"/>
           <p:cNvSpPr txBox="1"/>
           <p:nvPr/>
         </p:nvSpPr>
@@ -13682,7 +13947,7 @@
       </p:sp>
       <p:sp>
         <p:nvSpPr>
-          <p:cNvPr id="41" name="TextBox 40"/>
+          <p:cNvPr id="42" name="TextBox 41"/>
           <p:cNvSpPr txBox="1"/>
           <p:nvPr/>
         </p:nvSpPr>
@@ -13721,7 +13986,7 @@
       </p:sp>
       <p:sp>
         <p:nvSpPr>
-          <p:cNvPr id="42" name="Rectangle 41"/>
+          <p:cNvPr id="43" name="Rectangle 42"/>
           <p:cNvSpPr/>
           <p:nvPr/>
         </p:nvSpPr>
@@ -13765,7 +14030,7 @@
       </p:sp>
       <p:sp>
         <p:nvSpPr>
-          <p:cNvPr id="43" name="Rectangle 42"/>
+          <p:cNvPr id="44" name="Rectangle 43"/>
           <p:cNvSpPr/>
           <p:nvPr/>
         </p:nvSpPr>
@@ -13809,7 +14074,7 @@
       </p:sp>
       <p:sp>
         <p:nvSpPr>
-          <p:cNvPr id="44" name="TextBox 43"/>
+          <p:cNvPr id="45" name="TextBox 44"/>
           <p:cNvSpPr txBox="1"/>
           <p:nvPr/>
         </p:nvSpPr>
@@ -13848,7 +14113,7 @@
       </p:sp>
       <p:sp>
         <p:nvSpPr>
-          <p:cNvPr id="45" name="TextBox 44"/>
+          <p:cNvPr id="46" name="TextBox 45"/>
           <p:cNvSpPr txBox="1"/>
           <p:nvPr/>
         </p:nvSpPr>
@@ -14677,8 +14942,8 @@
         </p:nvSpPr>
         <p:spPr>
           <a:xfrm>
-            <a:off x="4892040" y="1234440"/>
-            <a:ext cx="1920240" cy="384048"/>
+            <a:off x="4114800" y="1234440"/>
+            <a:ext cx="1554480" cy="384048"/>
           </a:xfrm>
           <a:prstGeom prst="roundRect">
             <a:avLst/>
@@ -14730,8 +14995,61 @@
         </p:nvSpPr>
         <p:spPr>
           <a:xfrm>
-            <a:off x="7040880" y="1234440"/>
-            <a:ext cx="2880360" cy="384048"/>
+            <a:off x="5806440" y="1234440"/>
+            <a:ext cx="2194560" cy="384048"/>
+          </a:xfrm>
+          <a:prstGeom prst="roundRect">
+            <a:avLst/>
+          </a:prstGeom>
+          <a:solidFill>
+            <a:srgbClr val="2E8B9E"/>
+          </a:solidFill>
+          <a:ln>
+            <a:noFill/>
+          </a:ln>
+          <a:effectLst/>
+        </p:spPr>
+        <p:style>
+          <a:lnRef idx="1">
+            <a:schemeClr val="accent1"/>
+          </a:lnRef>
+          <a:fillRef idx="3">
+            <a:schemeClr val="accent1"/>
+          </a:fillRef>
+          <a:effectRef idx="2">
+            <a:schemeClr val="accent1"/>
+          </a:effectRef>
+          <a:fontRef idx="minor">
+            <a:schemeClr val="lt1"/>
+          </a:fontRef>
+        </p:style>
+        <p:txBody>
+          <a:bodyPr rtlCol="0" anchor="ctr" wrap="square" lIns="50800" rIns="50800" tIns="12700" bIns="12700"/>
+          <a:lstStyle/>
+          <a:p>
+            <a:pPr algn="ctr"/>
+            <a:r>
+              <a:rPr sz="1050" b="1">
+                <a:solidFill>
+                  <a:srgbClr val="FFFFFF"/>
+                </a:solidFill>
+                <a:latin typeface="Meiryo"/>
+              </a:rPr>
+              <a:t>10月見込み：○</a:t>
+            </a:r>
+          </a:p>
+        </p:txBody>
+      </p:sp>
+      <p:sp>
+        <p:nvSpPr>
+          <p:cNvPr id="22" name="Rounded Rectangle 21"/>
+          <p:cNvSpPr/>
+          <p:nvPr/>
+        </p:nvSpPr>
+        <p:spPr>
+          <a:xfrm>
+            <a:off x="8138160" y="1234440"/>
+            <a:ext cx="3200400" cy="384048"/>
           </a:xfrm>
           <a:prstGeom prst="roundRect">
             <a:avLst/>
@@ -14777,7 +15095,7 @@
       </p:sp>
       <p:sp>
         <p:nvSpPr>
-          <p:cNvPr id="22" name="Rectangle 21"/>
+          <p:cNvPr id="23" name="Rectangle 22"/>
           <p:cNvSpPr/>
           <p:nvPr/>
         </p:nvSpPr>
@@ -14821,7 +15139,7 @@
       </p:sp>
       <p:sp>
         <p:nvSpPr>
-          <p:cNvPr id="23" name="Rectangle 22"/>
+          <p:cNvPr id="24" name="Rectangle 23"/>
           <p:cNvSpPr/>
           <p:nvPr/>
         </p:nvSpPr>
@@ -14865,7 +15183,7 @@
       </p:sp>
       <p:sp>
         <p:nvSpPr>
-          <p:cNvPr id="24" name="TextBox 23"/>
+          <p:cNvPr id="25" name="TextBox 24"/>
           <p:cNvSpPr txBox="1"/>
           <p:nvPr/>
         </p:nvSpPr>
@@ -14904,7 +15222,7 @@
       </p:sp>
       <p:sp>
         <p:nvSpPr>
-          <p:cNvPr id="25" name="TextBox 24"/>
+          <p:cNvPr id="26" name="TextBox 25"/>
           <p:cNvSpPr txBox="1"/>
           <p:nvPr/>
         </p:nvSpPr>
@@ -14943,7 +15261,7 @@
       </p:sp>
       <p:sp>
         <p:nvSpPr>
-          <p:cNvPr id="26" name="Rectangle 25"/>
+          <p:cNvPr id="27" name="Rectangle 26"/>
           <p:cNvSpPr/>
           <p:nvPr/>
         </p:nvSpPr>
@@ -14987,7 +15305,7 @@
       </p:sp>
       <p:sp>
         <p:nvSpPr>
-          <p:cNvPr id="27" name="Rectangle 26"/>
+          <p:cNvPr id="28" name="Rectangle 27"/>
           <p:cNvSpPr/>
           <p:nvPr/>
         </p:nvSpPr>
@@ -15031,7 +15349,7 @@
       </p:sp>
       <p:sp>
         <p:nvSpPr>
-          <p:cNvPr id="28" name="TextBox 27"/>
+          <p:cNvPr id="29" name="TextBox 28"/>
           <p:cNvSpPr txBox="1"/>
           <p:nvPr/>
         </p:nvSpPr>
@@ -15070,7 +15388,7 @@
       </p:sp>
       <p:sp>
         <p:nvSpPr>
-          <p:cNvPr id="29" name="TextBox 28"/>
+          <p:cNvPr id="30" name="TextBox 29"/>
           <p:cNvSpPr txBox="1"/>
           <p:nvPr/>
         </p:nvSpPr>
@@ -15109,7 +15427,7 @@
       </p:sp>
       <p:sp>
         <p:nvSpPr>
-          <p:cNvPr id="30" name="Rectangle 29"/>
+          <p:cNvPr id="31" name="Rectangle 30"/>
           <p:cNvSpPr/>
           <p:nvPr/>
         </p:nvSpPr>
@@ -15153,7 +15471,7 @@
       </p:sp>
       <p:sp>
         <p:nvSpPr>
-          <p:cNvPr id="31" name="Rectangle 30"/>
+          <p:cNvPr id="32" name="Rectangle 31"/>
           <p:cNvSpPr/>
           <p:nvPr/>
         </p:nvSpPr>
@@ -15197,7 +15515,7 @@
       </p:sp>
       <p:sp>
         <p:nvSpPr>
-          <p:cNvPr id="32" name="TextBox 31"/>
+          <p:cNvPr id="33" name="TextBox 32"/>
           <p:cNvSpPr txBox="1"/>
           <p:nvPr/>
         </p:nvSpPr>
@@ -15236,7 +15554,7 @@
       </p:sp>
       <p:sp>
         <p:nvSpPr>
-          <p:cNvPr id="33" name="TextBox 32"/>
+          <p:cNvPr id="34" name="TextBox 33"/>
           <p:cNvSpPr txBox="1"/>
           <p:nvPr/>
         </p:nvSpPr>
@@ -15275,7 +15593,7 @@
       </p:sp>
       <p:sp>
         <p:nvSpPr>
-          <p:cNvPr id="34" name="Rectangle 33"/>
+          <p:cNvPr id="35" name="Rectangle 34"/>
           <p:cNvSpPr/>
           <p:nvPr/>
         </p:nvSpPr>
@@ -15319,7 +15637,7 @@
       </p:sp>
       <p:sp>
         <p:nvSpPr>
-          <p:cNvPr id="35" name="Rectangle 34"/>
+          <p:cNvPr id="36" name="Rectangle 35"/>
           <p:cNvSpPr/>
           <p:nvPr/>
         </p:nvSpPr>
@@ -15363,7 +15681,7 @@
       </p:sp>
       <p:sp>
         <p:nvSpPr>
-          <p:cNvPr id="36" name="TextBox 35"/>
+          <p:cNvPr id="37" name="TextBox 36"/>
           <p:cNvSpPr txBox="1"/>
           <p:nvPr/>
         </p:nvSpPr>
@@ -15402,7 +15720,7 @@
       </p:sp>
       <p:sp>
         <p:nvSpPr>
-          <p:cNvPr id="37" name="TextBox 36"/>
+          <p:cNvPr id="38" name="TextBox 37"/>
           <p:cNvSpPr txBox="1"/>
           <p:nvPr/>
         </p:nvSpPr>
@@ -15441,7 +15759,7 @@
       </p:sp>
       <p:sp>
         <p:nvSpPr>
-          <p:cNvPr id="38" name="Rectangle 37"/>
+          <p:cNvPr id="39" name="Rectangle 38"/>
           <p:cNvSpPr/>
           <p:nvPr/>
         </p:nvSpPr>
@@ -15485,7 +15803,7 @@
       </p:sp>
       <p:sp>
         <p:nvSpPr>
-          <p:cNvPr id="39" name="Rectangle 38"/>
+          <p:cNvPr id="40" name="Rectangle 39"/>
           <p:cNvSpPr/>
           <p:nvPr/>
         </p:nvSpPr>
@@ -15529,7 +15847,7 @@
       </p:sp>
       <p:sp>
         <p:nvSpPr>
-          <p:cNvPr id="40" name="TextBox 39"/>
+          <p:cNvPr id="41" name="TextBox 40"/>
           <p:cNvSpPr txBox="1"/>
           <p:nvPr/>
         </p:nvSpPr>
@@ -15568,7 +15886,7 @@
       </p:sp>
       <p:sp>
         <p:nvSpPr>
-          <p:cNvPr id="41" name="TextBox 40"/>
+          <p:cNvPr id="42" name="TextBox 41"/>
           <p:cNvSpPr txBox="1"/>
           <p:nvPr/>
         </p:nvSpPr>
@@ -15607,7 +15925,7 @@
       </p:sp>
       <p:sp>
         <p:nvSpPr>
-          <p:cNvPr id="42" name="Rectangle 41"/>
+          <p:cNvPr id="43" name="Rectangle 42"/>
           <p:cNvSpPr/>
           <p:nvPr/>
         </p:nvSpPr>
@@ -15651,7 +15969,7 @@
       </p:sp>
       <p:sp>
         <p:nvSpPr>
-          <p:cNvPr id="43" name="Rectangle 42"/>
+          <p:cNvPr id="44" name="Rectangle 43"/>
           <p:cNvSpPr/>
           <p:nvPr/>
         </p:nvSpPr>
@@ -15695,7 +16013,7 @@
       </p:sp>
       <p:sp>
         <p:nvSpPr>
-          <p:cNvPr id="44" name="TextBox 43"/>
+          <p:cNvPr id="45" name="TextBox 44"/>
           <p:cNvSpPr txBox="1"/>
           <p:nvPr/>
         </p:nvSpPr>
@@ -15734,7 +16052,7 @@
       </p:sp>
       <p:sp>
         <p:nvSpPr>
-          <p:cNvPr id="45" name="TextBox 44"/>
+          <p:cNvPr id="46" name="TextBox 45"/>
           <p:cNvSpPr txBox="1"/>
           <p:nvPr/>
         </p:nvSpPr>
@@ -16563,8 +16881,8 @@
         </p:nvSpPr>
         <p:spPr>
           <a:xfrm>
-            <a:off x="4892040" y="1234440"/>
-            <a:ext cx="1920240" cy="384048"/>
+            <a:off x="4114800" y="1234440"/>
+            <a:ext cx="1554480" cy="384048"/>
           </a:xfrm>
           <a:prstGeom prst="roundRect">
             <a:avLst/>
@@ -16616,8 +16934,61 @@
         </p:nvSpPr>
         <p:spPr>
           <a:xfrm>
-            <a:off x="7040880" y="1234440"/>
-            <a:ext cx="2880360" cy="384048"/>
+            <a:off x="5806440" y="1234440"/>
+            <a:ext cx="2194560" cy="384048"/>
+          </a:xfrm>
+          <a:prstGeom prst="roundRect">
+            <a:avLst/>
+          </a:prstGeom>
+          <a:solidFill>
+            <a:srgbClr val="2E8B9E"/>
+          </a:solidFill>
+          <a:ln>
+            <a:noFill/>
+          </a:ln>
+          <a:effectLst/>
+        </p:spPr>
+        <p:style>
+          <a:lnRef idx="1">
+            <a:schemeClr val="accent1"/>
+          </a:lnRef>
+          <a:fillRef idx="3">
+            <a:schemeClr val="accent1"/>
+          </a:fillRef>
+          <a:effectRef idx="2">
+            <a:schemeClr val="accent1"/>
+          </a:effectRef>
+          <a:fontRef idx="minor">
+            <a:schemeClr val="lt1"/>
+          </a:fontRef>
+        </p:style>
+        <p:txBody>
+          <a:bodyPr rtlCol="0" anchor="ctr" wrap="square" lIns="50800" rIns="50800" tIns="12700" bIns="12700"/>
+          <a:lstStyle/>
+          <a:p>
+            <a:pPr algn="ctr"/>
+            <a:r>
+              <a:rPr sz="1050" b="1">
+                <a:solidFill>
+                  <a:srgbClr val="FFFFFF"/>
+                </a:solidFill>
+                <a:latin typeface="Meiryo"/>
+              </a:rPr>
+              <a:t>10月見込み：○</a:t>
+            </a:r>
+          </a:p>
+        </p:txBody>
+      </p:sp>
+      <p:sp>
+        <p:nvSpPr>
+          <p:cNvPr id="22" name="Rounded Rectangle 21"/>
+          <p:cNvSpPr/>
+          <p:nvPr/>
+        </p:nvSpPr>
+        <p:spPr>
+          <a:xfrm>
+            <a:off x="8138160" y="1234440"/>
+            <a:ext cx="3200400" cy="384048"/>
           </a:xfrm>
           <a:prstGeom prst="roundRect">
             <a:avLst/>
@@ -16663,7 +17034,7 @@
       </p:sp>
       <p:sp>
         <p:nvSpPr>
-          <p:cNvPr id="22" name="Rectangle 21"/>
+          <p:cNvPr id="23" name="Rectangle 22"/>
           <p:cNvSpPr/>
           <p:nvPr/>
         </p:nvSpPr>
@@ -16707,7 +17078,7 @@
       </p:sp>
       <p:sp>
         <p:nvSpPr>
-          <p:cNvPr id="23" name="Rectangle 22"/>
+          <p:cNvPr id="24" name="Rectangle 23"/>
           <p:cNvSpPr/>
           <p:nvPr/>
         </p:nvSpPr>
@@ -16751,7 +17122,7 @@
       </p:sp>
       <p:sp>
         <p:nvSpPr>
-          <p:cNvPr id="24" name="TextBox 23"/>
+          <p:cNvPr id="25" name="TextBox 24"/>
           <p:cNvSpPr txBox="1"/>
           <p:nvPr/>
         </p:nvSpPr>
@@ -16790,7 +17161,7 @@
       </p:sp>
       <p:sp>
         <p:nvSpPr>
-          <p:cNvPr id="25" name="TextBox 24"/>
+          <p:cNvPr id="26" name="TextBox 25"/>
           <p:cNvSpPr txBox="1"/>
           <p:nvPr/>
         </p:nvSpPr>
@@ -16829,7 +17200,7 @@
       </p:sp>
       <p:sp>
         <p:nvSpPr>
-          <p:cNvPr id="26" name="Rectangle 25"/>
+          <p:cNvPr id="27" name="Rectangle 26"/>
           <p:cNvSpPr/>
           <p:nvPr/>
         </p:nvSpPr>
@@ -16873,7 +17244,7 @@
       </p:sp>
       <p:sp>
         <p:nvSpPr>
-          <p:cNvPr id="27" name="Rectangle 26"/>
+          <p:cNvPr id="28" name="Rectangle 27"/>
           <p:cNvSpPr/>
           <p:nvPr/>
         </p:nvSpPr>
@@ -16917,7 +17288,7 @@
       </p:sp>
       <p:sp>
         <p:nvSpPr>
-          <p:cNvPr id="28" name="TextBox 27"/>
+          <p:cNvPr id="29" name="TextBox 28"/>
           <p:cNvSpPr txBox="1"/>
           <p:nvPr/>
         </p:nvSpPr>
@@ -16956,7 +17327,7 @@
       </p:sp>
       <p:sp>
         <p:nvSpPr>
-          <p:cNvPr id="29" name="TextBox 28"/>
+          <p:cNvPr id="30" name="TextBox 29"/>
           <p:cNvSpPr txBox="1"/>
           <p:nvPr/>
         </p:nvSpPr>
@@ -16995,7 +17366,7 @@
       </p:sp>
       <p:sp>
         <p:nvSpPr>
-          <p:cNvPr id="30" name="Rectangle 29"/>
+          <p:cNvPr id="31" name="Rectangle 30"/>
           <p:cNvSpPr/>
           <p:nvPr/>
         </p:nvSpPr>
@@ -17039,7 +17410,7 @@
       </p:sp>
       <p:sp>
         <p:nvSpPr>
-          <p:cNvPr id="31" name="Rectangle 30"/>
+          <p:cNvPr id="32" name="Rectangle 31"/>
           <p:cNvSpPr/>
           <p:nvPr/>
         </p:nvSpPr>
@@ -17083,7 +17454,7 @@
       </p:sp>
       <p:sp>
         <p:nvSpPr>
-          <p:cNvPr id="32" name="TextBox 31"/>
+          <p:cNvPr id="33" name="TextBox 32"/>
           <p:cNvSpPr txBox="1"/>
           <p:nvPr/>
         </p:nvSpPr>
@@ -17122,7 +17493,7 @@
       </p:sp>
       <p:sp>
         <p:nvSpPr>
-          <p:cNvPr id="33" name="TextBox 32"/>
+          <p:cNvPr id="34" name="TextBox 33"/>
           <p:cNvSpPr txBox="1"/>
           <p:nvPr/>
         </p:nvSpPr>
@@ -17161,7 +17532,7 @@
       </p:sp>
       <p:sp>
         <p:nvSpPr>
-          <p:cNvPr id="34" name="Rectangle 33"/>
+          <p:cNvPr id="35" name="Rectangle 34"/>
           <p:cNvSpPr/>
           <p:nvPr/>
         </p:nvSpPr>
@@ -17205,7 +17576,7 @@
       </p:sp>
       <p:sp>
         <p:nvSpPr>
-          <p:cNvPr id="35" name="Rectangle 34"/>
+          <p:cNvPr id="36" name="Rectangle 35"/>
           <p:cNvSpPr/>
           <p:nvPr/>
         </p:nvSpPr>
@@ -17249,7 +17620,7 @@
       </p:sp>
       <p:sp>
         <p:nvSpPr>
-          <p:cNvPr id="36" name="TextBox 35"/>
+          <p:cNvPr id="37" name="TextBox 36"/>
           <p:cNvSpPr txBox="1"/>
           <p:nvPr/>
         </p:nvSpPr>
@@ -17288,7 +17659,7 @@
       </p:sp>
       <p:sp>
         <p:nvSpPr>
-          <p:cNvPr id="37" name="TextBox 36"/>
+          <p:cNvPr id="38" name="TextBox 37"/>
           <p:cNvSpPr txBox="1"/>
           <p:nvPr/>
         </p:nvSpPr>
@@ -17327,7 +17698,7 @@
       </p:sp>
       <p:sp>
         <p:nvSpPr>
-          <p:cNvPr id="38" name="Rectangle 37"/>
+          <p:cNvPr id="39" name="Rectangle 38"/>
           <p:cNvSpPr/>
           <p:nvPr/>
         </p:nvSpPr>
@@ -17371,7 +17742,7 @@
       </p:sp>
       <p:sp>
         <p:nvSpPr>
-          <p:cNvPr id="39" name="Rectangle 38"/>
+          <p:cNvPr id="40" name="Rectangle 39"/>
           <p:cNvSpPr/>
           <p:nvPr/>
         </p:nvSpPr>
@@ -17415,7 +17786,7 @@
       </p:sp>
       <p:sp>
         <p:nvSpPr>
-          <p:cNvPr id="40" name="TextBox 39"/>
+          <p:cNvPr id="41" name="TextBox 40"/>
           <p:cNvSpPr txBox="1"/>
           <p:nvPr/>
         </p:nvSpPr>
@@ -17454,7 +17825,7 @@
       </p:sp>
       <p:sp>
         <p:nvSpPr>
-          <p:cNvPr id="41" name="TextBox 40"/>
+          <p:cNvPr id="42" name="TextBox 41"/>
           <p:cNvSpPr txBox="1"/>
           <p:nvPr/>
         </p:nvSpPr>
@@ -17493,7 +17864,7 @@
       </p:sp>
       <p:sp>
         <p:nvSpPr>
-          <p:cNvPr id="42" name="Rectangle 41"/>
+          <p:cNvPr id="43" name="Rectangle 42"/>
           <p:cNvSpPr/>
           <p:nvPr/>
         </p:nvSpPr>
@@ -17537,7 +17908,7 @@
       </p:sp>
       <p:sp>
         <p:nvSpPr>
-          <p:cNvPr id="43" name="Rectangle 42"/>
+          <p:cNvPr id="44" name="Rectangle 43"/>
           <p:cNvSpPr/>
           <p:nvPr/>
         </p:nvSpPr>
@@ -17581,7 +17952,7 @@
       </p:sp>
       <p:sp>
         <p:nvSpPr>
-          <p:cNvPr id="44" name="TextBox 43"/>
+          <p:cNvPr id="45" name="TextBox 44"/>
           <p:cNvSpPr txBox="1"/>
           <p:nvPr/>
         </p:nvSpPr>
@@ -17620,7 +17991,7 @@
       </p:sp>
       <p:sp>
         <p:nvSpPr>
-          <p:cNvPr id="45" name="TextBox 44"/>
+          <p:cNvPr id="46" name="TextBox 45"/>
           <p:cNvSpPr txBox="1"/>
           <p:nvPr/>
         </p:nvSpPr>
@@ -18124,7 +18495,7 @@
                 </a:solidFill>
                 <a:latin typeface="Meiryo"/>
               </a:rPr>
-              <a:t>全11チームが企画書提出を経て原則1案に整理済み。進捗レベル（Lv1〜5）・難易度とあわせて一覧化。</a:t>
+              <a:t>全11チームが企画書提出を経て原則1案に整理済み。進捗レベル・難易度・10月発表の見込みとあわせて一覧化。</a:t>
             </a:r>
           </a:p>
         </p:txBody>
@@ -18163,7 +18534,7 @@
                 </a:solidFill>
                 <a:latin typeface="Meiryo"/>
               </a:rPr>
-              <a:t>進捗レベル ▶ Lv1:未絞込／Lv2:2案まで／Lv3:1案確定・理解途上／Lv4:To-Be・アーキ具体化／Lv5:定量効果まで概ね完成　　第2回実施済み＝1・2・3・4・5・10・11（他は第1回＋企画書で暫定）</a:t>
+              <a:t>進捗レベル ▶ Lv1:未絞込／Lv2:2案まで／Lv3:1案確定・理解途上／Lv4:To-Be・アーキ具体化／Lv5:定量効果まで概ね完成　／　10月見込み ◎:順調 ○:概ね ○ △:要フォロー　（第2回実施済＝1・2・3・4・5・10・11）</a:t>
             </a:r>
           </a:p>
         </p:txBody>
@@ -18187,11 +18558,12 @@
                 <a:tableStyleId>{5C22544A-7EE6-4342-B048-85BDC9FD1C3A}</a:tableStyleId>
               </a:tblPr>
               <a:tblGrid>
-                <a:gridCol w="566928"/>
-                <a:gridCol w="1965960"/>
-                <a:gridCol w="3200400"/>
-                <a:gridCol w="4023360"/>
-                <a:gridCol w="1444752"/>
+                <a:gridCol w="502920"/>
+                <a:gridCol w="1828800"/>
+                <a:gridCol w="2834640"/>
+                <a:gridCol w="3611880"/>
+                <a:gridCol w="822960"/>
+                <a:gridCol w="1600200"/>
               </a:tblGrid>
               <a:tr h="329184">
                 <a:tc>
@@ -18205,7 +18577,7 @@
                         </a:lnSpc>
                       </a:pPr>
                       <a:r>
-                        <a:rPr sz="1000" b="1">
+                        <a:rPr sz="950" b="1">
                           <a:solidFill>
                             <a:srgbClr val="FFFFFF"/>
                           </a:solidFill>
@@ -18232,7 +18604,7 @@
                         </a:lnSpc>
                       </a:pPr>
                       <a:r>
-                        <a:rPr sz="1000" b="1">
+                        <a:rPr sz="950" b="1">
                           <a:solidFill>
                             <a:srgbClr val="FFFFFF"/>
                           </a:solidFill>
@@ -18259,7 +18631,7 @@
                         </a:lnSpc>
                       </a:pPr>
                       <a:r>
-                        <a:rPr sz="1000" b="1">
+                        <a:rPr sz="950" b="1">
                           <a:solidFill>
                             <a:srgbClr val="FFFFFF"/>
                           </a:solidFill>
@@ -18286,7 +18658,7 @@
                         </a:lnSpc>
                       </a:pPr>
                       <a:r>
-                        <a:rPr sz="1000" b="1">
+                        <a:rPr sz="950" b="1">
                           <a:solidFill>
                             <a:srgbClr val="FFFFFF"/>
                           </a:solidFill>
@@ -18313,13 +18685,40 @@
                         </a:lnSpc>
                       </a:pPr>
                       <a:r>
-                        <a:rPr sz="1000" b="1">
+                        <a:rPr sz="950" b="1">
                           <a:solidFill>
                             <a:srgbClr val="FFFFFF"/>
                           </a:solidFill>
                           <a:latin typeface="Meiryo"/>
                         </a:rPr>
                         <a:t>難易度</a:t>
+                      </a:r>
+                    </a:p>
+                  </a:txBody>
+                  <a:tcPr marL="63500" marR="63500" marT="25400" marB="25400" anchor="ctr">
+                    <a:solidFill>
+                      <a:srgbClr val="1F385C"/>
+                    </a:solidFill>
+                  </a:tcPr>
+                </a:tc>
+                <a:tc>
+                  <a:txBody>
+                    <a:bodyPr wrap="square"/>
+                    <a:lstStyle/>
+                    <a:p>
+                      <a:pPr algn="ctr">
+                        <a:lnSpc>
+                          <a:spcPct val="98000"/>
+                        </a:lnSpc>
+                      </a:pPr>
+                      <a:r>
+                        <a:rPr sz="950" b="1">
+                          <a:solidFill>
+                            <a:srgbClr val="FFFFFF"/>
+                          </a:solidFill>
+                          <a:latin typeface="Meiryo"/>
+                        </a:rPr>
+                        <a:t>10月発表 見込み</a:t>
                       </a:r>
                     </a:p>
                   </a:txBody>
@@ -18396,7 +18795,7 @@
                         </a:lnSpc>
                       </a:pPr>
                       <a:r>
-                        <a:rPr sz="900" b="1">
+                        <a:rPr sz="880" b="1">
                           <a:solidFill>
                             <a:srgbClr val="252A31"/>
                           </a:solidFill>
@@ -18457,6 +18856,33 @@
                           <a:latin typeface="Meiryo"/>
                         </a:rPr>
                         <a:t>中</a:t>
+                      </a:r>
+                    </a:p>
+                  </a:txBody>
+                  <a:tcPr marL="63500" marR="63500" marT="25400" marB="25400" anchor="ctr">
+                    <a:solidFill>
+                      <a:srgbClr val="FFFFFF"/>
+                    </a:solidFill>
+                  </a:tcPr>
+                </a:tc>
+                <a:tc>
+                  <a:txBody>
+                    <a:bodyPr wrap="square"/>
+                    <a:lstStyle/>
+                    <a:p>
+                      <a:pPr algn="ctr">
+                        <a:lnSpc>
+                          <a:spcPct val="98000"/>
+                        </a:lnSpc>
+                      </a:pPr>
+                      <a:r>
+                        <a:rPr sz="900" b="1">
+                          <a:solidFill>
+                            <a:srgbClr val="2E8B9E"/>
+                          </a:solidFill>
+                          <a:latin typeface="Meiryo"/>
+                        </a:rPr>
+                        <a:t>○ 概ね順調</a:t>
                       </a:r>
                     </a:p>
                   </a:txBody>
@@ -18533,7 +18959,7 @@
                         </a:lnSpc>
                       </a:pPr>
                       <a:r>
-                        <a:rPr sz="900" b="1">
+                        <a:rPr sz="880" b="1">
                           <a:solidFill>
                             <a:srgbClr val="252A31"/>
                           </a:solidFill>
@@ -18594,6 +19020,33 @@
                           <a:latin typeface="Meiryo"/>
                         </a:rPr>
                         <a:t>中</a:t>
+                      </a:r>
+                    </a:p>
+                  </a:txBody>
+                  <a:tcPr marL="63500" marR="63500" marT="25400" marB="25400" anchor="ctr">
+                    <a:solidFill>
+                      <a:srgbClr val="F2F4F7"/>
+                    </a:solidFill>
+                  </a:tcPr>
+                </a:tc>
+                <a:tc>
+                  <a:txBody>
+                    <a:bodyPr wrap="square"/>
+                    <a:lstStyle/>
+                    <a:p>
+                      <a:pPr algn="ctr">
+                        <a:lnSpc>
+                          <a:spcPct val="98000"/>
+                        </a:lnSpc>
+                      </a:pPr>
+                      <a:r>
+                        <a:rPr sz="900" b="1">
+                          <a:solidFill>
+                            <a:srgbClr val="2E8B9E"/>
+                          </a:solidFill>
+                          <a:latin typeface="Meiryo"/>
+                        </a:rPr>
+                        <a:t>○ 概ね順調</a:t>
                       </a:r>
                     </a:p>
                   </a:txBody>
@@ -18670,7 +19123,7 @@
                         </a:lnSpc>
                       </a:pPr>
                       <a:r>
-                        <a:rPr sz="900" b="1">
+                        <a:rPr sz="880" b="1">
                           <a:solidFill>
                             <a:srgbClr val="252A31"/>
                           </a:solidFill>
@@ -18731,6 +19184,33 @@
                           <a:latin typeface="Meiryo"/>
                         </a:rPr>
                         <a:t>高</a:t>
+                      </a:r>
+                    </a:p>
+                  </a:txBody>
+                  <a:tcPr marL="63500" marR="63500" marT="25400" marB="25400" anchor="ctr">
+                    <a:solidFill>
+                      <a:srgbClr val="FFFFFF"/>
+                    </a:solidFill>
+                  </a:tcPr>
+                </a:tc>
+                <a:tc>
+                  <a:txBody>
+                    <a:bodyPr wrap="square"/>
+                    <a:lstStyle/>
+                    <a:p>
+                      <a:pPr algn="ctr">
+                        <a:lnSpc>
+                          <a:spcPct val="98000"/>
+                        </a:lnSpc>
+                      </a:pPr>
+                      <a:r>
+                        <a:rPr sz="900" b="1">
+                          <a:solidFill>
+                            <a:srgbClr val="C98A1B"/>
+                          </a:solidFill>
+                          <a:latin typeface="Meiryo"/>
+                        </a:rPr>
+                        <a:t>△ 要フォロー</a:t>
                       </a:r>
                     </a:p>
                   </a:txBody>
@@ -18807,7 +19287,7 @@
                         </a:lnSpc>
                       </a:pPr>
                       <a:r>
-                        <a:rPr sz="900" b="1">
+                        <a:rPr sz="880" b="1">
                           <a:solidFill>
                             <a:srgbClr val="252A31"/>
                           </a:solidFill>
@@ -18868,6 +19348,33 @@
                           <a:latin typeface="Meiryo"/>
                         </a:rPr>
                         <a:t>高</a:t>
+                      </a:r>
+                    </a:p>
+                  </a:txBody>
+                  <a:tcPr marL="63500" marR="63500" marT="25400" marB="25400" anchor="ctr">
+                    <a:solidFill>
+                      <a:srgbClr val="F2F4F7"/>
+                    </a:solidFill>
+                  </a:tcPr>
+                </a:tc>
+                <a:tc>
+                  <a:txBody>
+                    <a:bodyPr wrap="square"/>
+                    <a:lstStyle/>
+                    <a:p>
+                      <a:pPr algn="ctr">
+                        <a:lnSpc>
+                          <a:spcPct val="98000"/>
+                        </a:lnSpc>
+                      </a:pPr>
+                      <a:r>
+                        <a:rPr sz="900" b="1">
+                          <a:solidFill>
+                            <a:srgbClr val="C98A1B"/>
+                          </a:solidFill>
+                          <a:latin typeface="Meiryo"/>
+                        </a:rPr>
+                        <a:t>△ 要フォロー</a:t>
                       </a:r>
                     </a:p>
                   </a:txBody>
@@ -18944,7 +19451,7 @@
                         </a:lnSpc>
                       </a:pPr>
                       <a:r>
-                        <a:rPr sz="900" b="1">
+                        <a:rPr sz="880" b="1">
                           <a:solidFill>
                             <a:srgbClr val="252A31"/>
                           </a:solidFill>
@@ -19005,6 +19512,33 @@
                           <a:latin typeface="Meiryo"/>
                         </a:rPr>
                         <a:t>中</a:t>
+                      </a:r>
+                    </a:p>
+                  </a:txBody>
+                  <a:tcPr marL="63500" marR="63500" marT="25400" marB="25400" anchor="ctr">
+                    <a:solidFill>
+                      <a:srgbClr val="FFFFFF"/>
+                    </a:solidFill>
+                  </a:tcPr>
+                </a:tc>
+                <a:tc>
+                  <a:txBody>
+                    <a:bodyPr wrap="square"/>
+                    <a:lstStyle/>
+                    <a:p>
+                      <a:pPr algn="ctr">
+                        <a:lnSpc>
+                          <a:spcPct val="98000"/>
+                        </a:lnSpc>
+                      </a:pPr>
+                      <a:r>
+                        <a:rPr sz="900" b="1">
+                          <a:solidFill>
+                            <a:srgbClr val="3F8F5B"/>
+                          </a:solidFill>
+                          <a:latin typeface="Meiryo"/>
+                        </a:rPr>
+                        <a:t>◎ 順調</a:t>
                       </a:r>
                     </a:p>
                   </a:txBody>
@@ -19081,7 +19615,7 @@
                         </a:lnSpc>
                       </a:pPr>
                       <a:r>
-                        <a:rPr sz="900" b="1">
+                        <a:rPr sz="880" b="1">
                           <a:solidFill>
                             <a:srgbClr val="252A31"/>
                           </a:solidFill>
@@ -19142,6 +19676,33 @@
                           <a:latin typeface="Meiryo"/>
                         </a:rPr>
                         <a:t>中〜高</a:t>
+                      </a:r>
+                    </a:p>
+                  </a:txBody>
+                  <a:tcPr marL="63500" marR="63500" marT="25400" marB="25400" anchor="ctr">
+                    <a:solidFill>
+                      <a:srgbClr val="F2F4F7"/>
+                    </a:solidFill>
+                  </a:tcPr>
+                </a:tc>
+                <a:tc>
+                  <a:txBody>
+                    <a:bodyPr wrap="square"/>
+                    <a:lstStyle/>
+                    <a:p>
+                      <a:pPr algn="ctr">
+                        <a:lnSpc>
+                          <a:spcPct val="98000"/>
+                        </a:lnSpc>
+                      </a:pPr>
+                      <a:r>
+                        <a:rPr sz="900" b="1">
+                          <a:solidFill>
+                            <a:srgbClr val="2E8B9E"/>
+                          </a:solidFill>
+                          <a:latin typeface="Meiryo"/>
+                        </a:rPr>
+                        <a:t>○ 概ね順調</a:t>
                       </a:r>
                     </a:p>
                   </a:txBody>
@@ -19218,7 +19779,7 @@
                         </a:lnSpc>
                       </a:pPr>
                       <a:r>
-                        <a:rPr sz="900" b="1">
+                        <a:rPr sz="880" b="1">
                           <a:solidFill>
                             <a:srgbClr val="252A31"/>
                           </a:solidFill>
@@ -19279,6 +19840,33 @@
                           <a:latin typeface="Meiryo"/>
                         </a:rPr>
                         <a:t>中</a:t>
+                      </a:r>
+                    </a:p>
+                  </a:txBody>
+                  <a:tcPr marL="63500" marR="63500" marT="25400" marB="25400" anchor="ctr">
+                    <a:solidFill>
+                      <a:srgbClr val="FFFFFF"/>
+                    </a:solidFill>
+                  </a:tcPr>
+                </a:tc>
+                <a:tc>
+                  <a:txBody>
+                    <a:bodyPr wrap="square"/>
+                    <a:lstStyle/>
+                    <a:p>
+                      <a:pPr algn="ctr">
+                        <a:lnSpc>
+                          <a:spcPct val="98000"/>
+                        </a:lnSpc>
+                      </a:pPr>
+                      <a:r>
+                        <a:rPr sz="900" b="1">
+                          <a:solidFill>
+                            <a:srgbClr val="3F8F5B"/>
+                          </a:solidFill>
+                          <a:latin typeface="Meiryo"/>
+                        </a:rPr>
+                        <a:t>◎ 順調</a:t>
                       </a:r>
                     </a:p>
                   </a:txBody>
@@ -19355,7 +19943,7 @@
                         </a:lnSpc>
                       </a:pPr>
                       <a:r>
-                        <a:rPr sz="900" b="1">
+                        <a:rPr sz="880" b="1">
                           <a:solidFill>
                             <a:srgbClr val="252A31"/>
                           </a:solidFill>
@@ -19416,6 +20004,33 @@
                           <a:latin typeface="Meiryo"/>
                         </a:rPr>
                         <a:t>中</a:t>
+                      </a:r>
+                    </a:p>
+                  </a:txBody>
+                  <a:tcPr marL="63500" marR="63500" marT="25400" marB="25400" anchor="ctr">
+                    <a:solidFill>
+                      <a:srgbClr val="F2F4F7"/>
+                    </a:solidFill>
+                  </a:tcPr>
+                </a:tc>
+                <a:tc>
+                  <a:txBody>
+                    <a:bodyPr wrap="square"/>
+                    <a:lstStyle/>
+                    <a:p>
+                      <a:pPr algn="ctr">
+                        <a:lnSpc>
+                          <a:spcPct val="98000"/>
+                        </a:lnSpc>
+                      </a:pPr>
+                      <a:r>
+                        <a:rPr sz="900" b="1">
+                          <a:solidFill>
+                            <a:srgbClr val="2E8B9E"/>
+                          </a:solidFill>
+                          <a:latin typeface="Meiryo"/>
+                        </a:rPr>
+                        <a:t>○ 概ね順調</a:t>
                       </a:r>
                     </a:p>
                   </a:txBody>
@@ -19492,7 +20107,7 @@
                         </a:lnSpc>
                       </a:pPr>
                       <a:r>
-                        <a:rPr sz="900" b="1">
+                        <a:rPr sz="880" b="1">
                           <a:solidFill>
                             <a:srgbClr val="252A31"/>
                           </a:solidFill>
@@ -19553,6 +20168,33 @@
                           <a:latin typeface="Meiryo"/>
                         </a:rPr>
                         <a:t>中〜高</a:t>
+                      </a:r>
+                    </a:p>
+                  </a:txBody>
+                  <a:tcPr marL="63500" marR="63500" marT="25400" marB="25400" anchor="ctr">
+                    <a:solidFill>
+                      <a:srgbClr val="FFFFFF"/>
+                    </a:solidFill>
+                  </a:tcPr>
+                </a:tc>
+                <a:tc>
+                  <a:txBody>
+                    <a:bodyPr wrap="square"/>
+                    <a:lstStyle/>
+                    <a:p>
+                      <a:pPr algn="ctr">
+                        <a:lnSpc>
+                          <a:spcPct val="98000"/>
+                        </a:lnSpc>
+                      </a:pPr>
+                      <a:r>
+                        <a:rPr sz="900" b="1">
+                          <a:solidFill>
+                            <a:srgbClr val="C98A1B"/>
+                          </a:solidFill>
+                          <a:latin typeface="Meiryo"/>
+                        </a:rPr>
+                        <a:t>△ 要フォロー</a:t>
                       </a:r>
                     </a:p>
                   </a:txBody>
@@ -19629,7 +20271,7 @@
                         </a:lnSpc>
                       </a:pPr>
                       <a:r>
-                        <a:rPr sz="900" b="1">
+                        <a:rPr sz="880" b="1">
                           <a:solidFill>
                             <a:srgbClr val="252A31"/>
                           </a:solidFill>
@@ -19690,6 +20332,33 @@
                           <a:latin typeface="Meiryo"/>
                         </a:rPr>
                         <a:t>中</a:t>
+                      </a:r>
+                    </a:p>
+                  </a:txBody>
+                  <a:tcPr marL="63500" marR="63500" marT="25400" marB="25400" anchor="ctr">
+                    <a:solidFill>
+                      <a:srgbClr val="F2F4F7"/>
+                    </a:solidFill>
+                  </a:tcPr>
+                </a:tc>
+                <a:tc>
+                  <a:txBody>
+                    <a:bodyPr wrap="square"/>
+                    <a:lstStyle/>
+                    <a:p>
+                      <a:pPr algn="ctr">
+                        <a:lnSpc>
+                          <a:spcPct val="98000"/>
+                        </a:lnSpc>
+                      </a:pPr>
+                      <a:r>
+                        <a:rPr sz="900" b="1">
+                          <a:solidFill>
+                            <a:srgbClr val="2E8B9E"/>
+                          </a:solidFill>
+                          <a:latin typeface="Meiryo"/>
+                        </a:rPr>
+                        <a:t>○ 概ね順調</a:t>
                       </a:r>
                     </a:p>
                   </a:txBody>
@@ -19766,7 +20435,7 @@
                         </a:lnSpc>
                       </a:pPr>
                       <a:r>
-                        <a:rPr sz="900" b="1">
+                        <a:rPr sz="880" b="1">
                           <a:solidFill>
                             <a:srgbClr val="252A31"/>
                           </a:solidFill>
@@ -19836,6 +20505,33 @@
                     </a:solidFill>
                   </a:tcPr>
                 </a:tc>
+                <a:tc>
+                  <a:txBody>
+                    <a:bodyPr wrap="square"/>
+                    <a:lstStyle/>
+                    <a:p>
+                      <a:pPr algn="ctr">
+                        <a:lnSpc>
+                          <a:spcPct val="98000"/>
+                        </a:lnSpc>
+                      </a:pPr>
+                      <a:r>
+                        <a:rPr sz="900" b="1">
+                          <a:solidFill>
+                            <a:srgbClr val="2E8B9E"/>
+                          </a:solidFill>
+                          <a:latin typeface="Meiryo"/>
+                        </a:rPr>
+                        <a:t>○ 概ね順調</a:t>
+                      </a:r>
+                    </a:p>
+                  </a:txBody>
+                  <a:tcPr marL="63500" marR="63500" marT="25400" marB="25400" anchor="ctr">
+                    <a:solidFill>
+                      <a:srgbClr val="FFFFFF"/>
+                    </a:solidFill>
+                  </a:tcPr>
+                </a:tc>
               </a:tr>
             </a:tbl>
           </a:graphicData>
@@ -19849,7 +20545,7 @@
         </p:nvSpPr>
         <p:spPr>
           <a:xfrm>
-            <a:off x="1179576" y="2420874"/>
+            <a:off x="1115568" y="2420874"/>
             <a:ext cx="256032" cy="146304"/>
           </a:xfrm>
           <a:prstGeom prst="chevron">
@@ -19893,7 +20589,7 @@
         </p:nvSpPr>
         <p:spPr>
           <a:xfrm>
-            <a:off x="1399032" y="2420874"/>
+            <a:off x="1335024" y="2420874"/>
             <a:ext cx="256032" cy="146304"/>
           </a:xfrm>
           <a:prstGeom prst="chevron">
@@ -19937,7 +20633,7 @@
         </p:nvSpPr>
         <p:spPr>
           <a:xfrm>
-            <a:off x="1618488" y="2420874"/>
+            <a:off x="1554480" y="2420874"/>
             <a:ext cx="256032" cy="146304"/>
           </a:xfrm>
           <a:prstGeom prst="chevron">
@@ -19981,7 +20677,7 @@
         </p:nvSpPr>
         <p:spPr>
           <a:xfrm>
-            <a:off x="1837944" y="2420874"/>
+            <a:off x="1773936" y="2420874"/>
             <a:ext cx="256032" cy="146304"/>
           </a:xfrm>
           <a:prstGeom prst="chevron">
@@ -20025,7 +20721,7 @@
         </p:nvSpPr>
         <p:spPr>
           <a:xfrm>
-            <a:off x="2057400" y="2420874"/>
+            <a:off x="1993392" y="2420874"/>
             <a:ext cx="256032" cy="146304"/>
           </a:xfrm>
           <a:prstGeom prst="chevron">
@@ -20069,7 +20765,7 @@
         </p:nvSpPr>
         <p:spPr>
           <a:xfrm>
-            <a:off x="2304288" y="2393442"/>
+            <a:off x="2240280" y="2393442"/>
             <a:ext cx="457200" cy="219456"/>
           </a:xfrm>
           <a:prstGeom prst="rect">
@@ -20108,7 +20804,7 @@
         </p:nvSpPr>
         <p:spPr>
           <a:xfrm>
-            <a:off x="1179576" y="2800350"/>
+            <a:off x="1115568" y="2800350"/>
             <a:ext cx="256032" cy="146304"/>
           </a:xfrm>
           <a:prstGeom prst="chevron">
@@ -20152,7 +20848,7 @@
         </p:nvSpPr>
         <p:spPr>
           <a:xfrm>
-            <a:off x="1399032" y="2800350"/>
+            <a:off x="1335024" y="2800350"/>
             <a:ext cx="256032" cy="146304"/>
           </a:xfrm>
           <a:prstGeom prst="chevron">
@@ -20196,7 +20892,7 @@
         </p:nvSpPr>
         <p:spPr>
           <a:xfrm>
-            <a:off x="1618488" y="2800350"/>
+            <a:off x="1554480" y="2800350"/>
             <a:ext cx="256032" cy="146304"/>
           </a:xfrm>
           <a:prstGeom prst="chevron">
@@ -20240,7 +20936,7 @@
         </p:nvSpPr>
         <p:spPr>
           <a:xfrm>
-            <a:off x="1837944" y="2800350"/>
+            <a:off x="1773936" y="2800350"/>
             <a:ext cx="256032" cy="146304"/>
           </a:xfrm>
           <a:prstGeom prst="chevron">
@@ -20284,7 +20980,7 @@
         </p:nvSpPr>
         <p:spPr>
           <a:xfrm>
-            <a:off x="2057400" y="2800350"/>
+            <a:off x="1993392" y="2800350"/>
             <a:ext cx="256032" cy="146304"/>
           </a:xfrm>
           <a:prstGeom prst="chevron">
@@ -20328,7 +21024,7 @@
         </p:nvSpPr>
         <p:spPr>
           <a:xfrm>
-            <a:off x="2304288" y="2772918"/>
+            <a:off x="2240280" y="2772918"/>
             <a:ext cx="457200" cy="219456"/>
           </a:xfrm>
           <a:prstGeom prst="rect">
@@ -20367,7 +21063,7 @@
         </p:nvSpPr>
         <p:spPr>
           <a:xfrm>
-            <a:off x="1179576" y="3179826"/>
+            <a:off x="1115568" y="3179826"/>
             <a:ext cx="256032" cy="146304"/>
           </a:xfrm>
           <a:prstGeom prst="chevron">
@@ -20411,7 +21107,7 @@
         </p:nvSpPr>
         <p:spPr>
           <a:xfrm>
-            <a:off x="1399032" y="3179826"/>
+            <a:off x="1335024" y="3179826"/>
             <a:ext cx="256032" cy="146304"/>
           </a:xfrm>
           <a:prstGeom prst="chevron">
@@ -20455,7 +21151,7 @@
         </p:nvSpPr>
         <p:spPr>
           <a:xfrm>
-            <a:off x="1618488" y="3179826"/>
+            <a:off x="1554480" y="3179826"/>
             <a:ext cx="256032" cy="146304"/>
           </a:xfrm>
           <a:prstGeom prst="chevron">
@@ -20499,7 +21195,7 @@
         </p:nvSpPr>
         <p:spPr>
           <a:xfrm>
-            <a:off x="1837944" y="3179826"/>
+            <a:off x="1773936" y="3179826"/>
             <a:ext cx="256032" cy="146304"/>
           </a:xfrm>
           <a:prstGeom prst="chevron">
@@ -20543,7 +21239,7 @@
         </p:nvSpPr>
         <p:spPr>
           <a:xfrm>
-            <a:off x="2057400" y="3179826"/>
+            <a:off x="1993392" y="3179826"/>
             <a:ext cx="256032" cy="146304"/>
           </a:xfrm>
           <a:prstGeom prst="chevron">
@@ -20587,7 +21283,7 @@
         </p:nvSpPr>
         <p:spPr>
           <a:xfrm>
-            <a:off x="2304288" y="3152394"/>
+            <a:off x="2240280" y="3152394"/>
             <a:ext cx="457200" cy="219456"/>
           </a:xfrm>
           <a:prstGeom prst="rect">
@@ -20626,7 +21322,7 @@
         </p:nvSpPr>
         <p:spPr>
           <a:xfrm>
-            <a:off x="1179576" y="3559302"/>
+            <a:off x="1115568" y="3559302"/>
             <a:ext cx="256032" cy="146304"/>
           </a:xfrm>
           <a:prstGeom prst="chevron">
@@ -20670,7 +21366,7 @@
         </p:nvSpPr>
         <p:spPr>
           <a:xfrm>
-            <a:off x="1399032" y="3559302"/>
+            <a:off x="1335024" y="3559302"/>
             <a:ext cx="256032" cy="146304"/>
           </a:xfrm>
           <a:prstGeom prst="chevron">
@@ -20714,7 +21410,7 @@
         </p:nvSpPr>
         <p:spPr>
           <a:xfrm>
-            <a:off x="1618488" y="3559302"/>
+            <a:off x="1554480" y="3559302"/>
             <a:ext cx="256032" cy="146304"/>
           </a:xfrm>
           <a:prstGeom prst="chevron">
@@ -20758,7 +21454,7 @@
         </p:nvSpPr>
         <p:spPr>
           <a:xfrm>
-            <a:off x="1837944" y="3559302"/>
+            <a:off x="1773936" y="3559302"/>
             <a:ext cx="256032" cy="146304"/>
           </a:xfrm>
           <a:prstGeom prst="chevron">
@@ -20802,7 +21498,7 @@
         </p:nvSpPr>
         <p:spPr>
           <a:xfrm>
-            <a:off x="2057400" y="3559302"/>
+            <a:off x="1993392" y="3559302"/>
             <a:ext cx="256032" cy="146304"/>
           </a:xfrm>
           <a:prstGeom prst="chevron">
@@ -20846,7 +21542,7 @@
         </p:nvSpPr>
         <p:spPr>
           <a:xfrm>
-            <a:off x="2304288" y="3531870"/>
+            <a:off x="2240280" y="3531870"/>
             <a:ext cx="457200" cy="219456"/>
           </a:xfrm>
           <a:prstGeom prst="rect">
@@ -20885,7 +21581,7 @@
         </p:nvSpPr>
         <p:spPr>
           <a:xfrm>
-            <a:off x="1179576" y="3938778"/>
+            <a:off x="1115568" y="3938778"/>
             <a:ext cx="256032" cy="146304"/>
           </a:xfrm>
           <a:prstGeom prst="chevron">
@@ -20929,7 +21625,7 @@
         </p:nvSpPr>
         <p:spPr>
           <a:xfrm>
-            <a:off x="1399032" y="3938778"/>
+            <a:off x="1335024" y="3938778"/>
             <a:ext cx="256032" cy="146304"/>
           </a:xfrm>
           <a:prstGeom prst="chevron">
@@ -20973,7 +21669,7 @@
         </p:nvSpPr>
         <p:spPr>
           <a:xfrm>
-            <a:off x="1618488" y="3938778"/>
+            <a:off x="1554480" y="3938778"/>
             <a:ext cx="256032" cy="146304"/>
           </a:xfrm>
           <a:prstGeom prst="chevron">
@@ -21017,7 +21713,7 @@
         </p:nvSpPr>
         <p:spPr>
           <a:xfrm>
-            <a:off x="1837944" y="3938778"/>
+            <a:off x="1773936" y="3938778"/>
             <a:ext cx="256032" cy="146304"/>
           </a:xfrm>
           <a:prstGeom prst="chevron">
@@ -21061,7 +21757,7 @@
         </p:nvSpPr>
         <p:spPr>
           <a:xfrm>
-            <a:off x="2057400" y="3938778"/>
+            <a:off x="1993392" y="3938778"/>
             <a:ext cx="256032" cy="146304"/>
           </a:xfrm>
           <a:prstGeom prst="chevron">
@@ -21105,7 +21801,7 @@
         </p:nvSpPr>
         <p:spPr>
           <a:xfrm>
-            <a:off x="2304288" y="3911346"/>
+            <a:off x="2240280" y="3911346"/>
             <a:ext cx="457200" cy="219456"/>
           </a:xfrm>
           <a:prstGeom prst="rect">
@@ -21144,7 +21840,7 @@
         </p:nvSpPr>
         <p:spPr>
           <a:xfrm>
-            <a:off x="1179576" y="4318254"/>
+            <a:off x="1115568" y="4318254"/>
             <a:ext cx="256032" cy="146304"/>
           </a:xfrm>
           <a:prstGeom prst="chevron">
@@ -21188,7 +21884,7 @@
         </p:nvSpPr>
         <p:spPr>
           <a:xfrm>
-            <a:off x="1399032" y="4318254"/>
+            <a:off x="1335024" y="4318254"/>
             <a:ext cx="256032" cy="146304"/>
           </a:xfrm>
           <a:prstGeom prst="chevron">
@@ -21232,7 +21928,7 @@
         </p:nvSpPr>
         <p:spPr>
           <a:xfrm>
-            <a:off x="1618488" y="4318254"/>
+            <a:off x="1554480" y="4318254"/>
             <a:ext cx="256032" cy="146304"/>
           </a:xfrm>
           <a:prstGeom prst="chevron">
@@ -21276,7 +21972,7 @@
         </p:nvSpPr>
         <p:spPr>
           <a:xfrm>
-            <a:off x="1837944" y="4318254"/>
+            <a:off x="1773936" y="4318254"/>
             <a:ext cx="256032" cy="146304"/>
           </a:xfrm>
           <a:prstGeom prst="chevron">
@@ -21320,7 +22016,7 @@
         </p:nvSpPr>
         <p:spPr>
           <a:xfrm>
-            <a:off x="2057400" y="4318254"/>
+            <a:off x="1993392" y="4318254"/>
             <a:ext cx="256032" cy="146304"/>
           </a:xfrm>
           <a:prstGeom prst="chevron">
@@ -21364,7 +22060,7 @@
         </p:nvSpPr>
         <p:spPr>
           <a:xfrm>
-            <a:off x="2304288" y="4290822"/>
+            <a:off x="2240280" y="4290822"/>
             <a:ext cx="457200" cy="219456"/>
           </a:xfrm>
           <a:prstGeom prst="rect">
@@ -21403,7 +22099,7 @@
         </p:nvSpPr>
         <p:spPr>
           <a:xfrm>
-            <a:off x="1179576" y="4697730"/>
+            <a:off x="1115568" y="4697730"/>
             <a:ext cx="256032" cy="146304"/>
           </a:xfrm>
           <a:prstGeom prst="chevron">
@@ -21447,7 +22143,7 @@
         </p:nvSpPr>
         <p:spPr>
           <a:xfrm>
-            <a:off x="1399032" y="4697730"/>
+            <a:off x="1335024" y="4697730"/>
             <a:ext cx="256032" cy="146304"/>
           </a:xfrm>
           <a:prstGeom prst="chevron">
@@ -21491,7 +22187,7 @@
         </p:nvSpPr>
         <p:spPr>
           <a:xfrm>
-            <a:off x="1618488" y="4697730"/>
+            <a:off x="1554480" y="4697730"/>
             <a:ext cx="256032" cy="146304"/>
           </a:xfrm>
           <a:prstGeom prst="chevron">
@@ -21535,7 +22231,7 @@
         </p:nvSpPr>
         <p:spPr>
           <a:xfrm>
-            <a:off x="1837944" y="4697730"/>
+            <a:off x="1773936" y="4697730"/>
             <a:ext cx="256032" cy="146304"/>
           </a:xfrm>
           <a:prstGeom prst="chevron">
@@ -21579,7 +22275,7 @@
         </p:nvSpPr>
         <p:spPr>
           <a:xfrm>
-            <a:off x="2057400" y="4697730"/>
+            <a:off x="1993392" y="4697730"/>
             <a:ext cx="256032" cy="146304"/>
           </a:xfrm>
           <a:prstGeom prst="chevron">
@@ -21623,7 +22319,7 @@
         </p:nvSpPr>
         <p:spPr>
           <a:xfrm>
-            <a:off x="2304288" y="4670298"/>
+            <a:off x="2240280" y="4670298"/>
             <a:ext cx="457200" cy="219456"/>
           </a:xfrm>
           <a:prstGeom prst="rect">
@@ -21662,7 +22358,7 @@
         </p:nvSpPr>
         <p:spPr>
           <a:xfrm>
-            <a:off x="1179576" y="5077206"/>
+            <a:off x="1115568" y="5077206"/>
             <a:ext cx="256032" cy="146304"/>
           </a:xfrm>
           <a:prstGeom prst="chevron">
@@ -21706,7 +22402,7 @@
         </p:nvSpPr>
         <p:spPr>
           <a:xfrm>
-            <a:off x="1399032" y="5077206"/>
+            <a:off x="1335024" y="5077206"/>
             <a:ext cx="256032" cy="146304"/>
           </a:xfrm>
           <a:prstGeom prst="chevron">
@@ -21750,7 +22446,7 @@
         </p:nvSpPr>
         <p:spPr>
           <a:xfrm>
-            <a:off x="1618488" y="5077206"/>
+            <a:off x="1554480" y="5077206"/>
             <a:ext cx="256032" cy="146304"/>
           </a:xfrm>
           <a:prstGeom prst="chevron">
@@ -21794,7 +22490,7 @@
         </p:nvSpPr>
         <p:spPr>
           <a:xfrm>
-            <a:off x="1837944" y="5077206"/>
+            <a:off x="1773936" y="5077206"/>
             <a:ext cx="256032" cy="146304"/>
           </a:xfrm>
           <a:prstGeom prst="chevron">
@@ -21838,7 +22534,7 @@
         </p:nvSpPr>
         <p:spPr>
           <a:xfrm>
-            <a:off x="2057400" y="5077206"/>
+            <a:off x="1993392" y="5077206"/>
             <a:ext cx="256032" cy="146304"/>
           </a:xfrm>
           <a:prstGeom prst="chevron">
@@ -21882,7 +22578,7 @@
         </p:nvSpPr>
         <p:spPr>
           <a:xfrm>
-            <a:off x="2304288" y="5049774"/>
+            <a:off x="2240280" y="5049774"/>
             <a:ext cx="457200" cy="219456"/>
           </a:xfrm>
           <a:prstGeom prst="rect">
@@ -21921,7 +22617,7 @@
         </p:nvSpPr>
         <p:spPr>
           <a:xfrm>
-            <a:off x="1179576" y="5456682"/>
+            <a:off x="1115568" y="5456682"/>
             <a:ext cx="256032" cy="146304"/>
           </a:xfrm>
           <a:prstGeom prst="chevron">
@@ -21965,7 +22661,7 @@
         </p:nvSpPr>
         <p:spPr>
           <a:xfrm>
-            <a:off x="1399032" y="5456682"/>
+            <a:off x="1335024" y="5456682"/>
             <a:ext cx="256032" cy="146304"/>
           </a:xfrm>
           <a:prstGeom prst="chevron">
@@ -22009,7 +22705,7 @@
         </p:nvSpPr>
         <p:spPr>
           <a:xfrm>
-            <a:off x="1618488" y="5456682"/>
+            <a:off x="1554480" y="5456682"/>
             <a:ext cx="256032" cy="146304"/>
           </a:xfrm>
           <a:prstGeom prst="chevron">
@@ -22053,7 +22749,7 @@
         </p:nvSpPr>
         <p:spPr>
           <a:xfrm>
-            <a:off x="1837944" y="5456682"/>
+            <a:off x="1773936" y="5456682"/>
             <a:ext cx="256032" cy="146304"/>
           </a:xfrm>
           <a:prstGeom prst="chevron">
@@ -22097,7 +22793,7 @@
         </p:nvSpPr>
         <p:spPr>
           <a:xfrm>
-            <a:off x="2057400" y="5456682"/>
+            <a:off x="1993392" y="5456682"/>
             <a:ext cx="256032" cy="146304"/>
           </a:xfrm>
           <a:prstGeom prst="chevron">
@@ -22141,7 +22837,7 @@
         </p:nvSpPr>
         <p:spPr>
           <a:xfrm>
-            <a:off x="2304288" y="5429250"/>
+            <a:off x="2240280" y="5429250"/>
             <a:ext cx="457200" cy="219456"/>
           </a:xfrm>
           <a:prstGeom prst="rect">
@@ -22180,7 +22876,7 @@
         </p:nvSpPr>
         <p:spPr>
           <a:xfrm>
-            <a:off x="1179576" y="5836158"/>
+            <a:off x="1115568" y="5836158"/>
             <a:ext cx="256032" cy="146304"/>
           </a:xfrm>
           <a:prstGeom prst="chevron">
@@ -22224,7 +22920,7 @@
         </p:nvSpPr>
         <p:spPr>
           <a:xfrm>
-            <a:off x="1399032" y="5836158"/>
+            <a:off x="1335024" y="5836158"/>
             <a:ext cx="256032" cy="146304"/>
           </a:xfrm>
           <a:prstGeom prst="chevron">
@@ -22268,7 +22964,7 @@
         </p:nvSpPr>
         <p:spPr>
           <a:xfrm>
-            <a:off x="1618488" y="5836158"/>
+            <a:off x="1554480" y="5836158"/>
             <a:ext cx="256032" cy="146304"/>
           </a:xfrm>
           <a:prstGeom prst="chevron">
@@ -22312,7 +23008,7 @@
         </p:nvSpPr>
         <p:spPr>
           <a:xfrm>
-            <a:off x="1837944" y="5836158"/>
+            <a:off x="1773936" y="5836158"/>
             <a:ext cx="256032" cy="146304"/>
           </a:xfrm>
           <a:prstGeom prst="chevron">
@@ -22356,7 +23052,7 @@
         </p:nvSpPr>
         <p:spPr>
           <a:xfrm>
-            <a:off x="2057400" y="5836158"/>
+            <a:off x="1993392" y="5836158"/>
             <a:ext cx="256032" cy="146304"/>
           </a:xfrm>
           <a:prstGeom prst="chevron">
@@ -22400,7 +23096,7 @@
         </p:nvSpPr>
         <p:spPr>
           <a:xfrm>
-            <a:off x="2304288" y="5808726"/>
+            <a:off x="2240280" y="5808726"/>
             <a:ext cx="457200" cy="219456"/>
           </a:xfrm>
           <a:prstGeom prst="rect">
@@ -22439,7 +23135,7 @@
         </p:nvSpPr>
         <p:spPr>
           <a:xfrm>
-            <a:off x="1179576" y="6215634"/>
+            <a:off x="1115568" y="6215634"/>
             <a:ext cx="256032" cy="146304"/>
           </a:xfrm>
           <a:prstGeom prst="chevron">
@@ -22483,7 +23179,7 @@
         </p:nvSpPr>
         <p:spPr>
           <a:xfrm>
-            <a:off x="1399032" y="6215634"/>
+            <a:off x="1335024" y="6215634"/>
             <a:ext cx="256032" cy="146304"/>
           </a:xfrm>
           <a:prstGeom prst="chevron">
@@ -22527,7 +23223,7 @@
         </p:nvSpPr>
         <p:spPr>
           <a:xfrm>
-            <a:off x="1618488" y="6215634"/>
+            <a:off x="1554480" y="6215634"/>
             <a:ext cx="256032" cy="146304"/>
           </a:xfrm>
           <a:prstGeom prst="chevron">
@@ -22571,7 +23267,7 @@
         </p:nvSpPr>
         <p:spPr>
           <a:xfrm>
-            <a:off x="1837944" y="6215634"/>
+            <a:off x="1773936" y="6215634"/>
             <a:ext cx="256032" cy="146304"/>
           </a:xfrm>
           <a:prstGeom prst="chevron">
@@ -22615,7 +23311,7 @@
         </p:nvSpPr>
         <p:spPr>
           <a:xfrm>
-            <a:off x="2057400" y="6215634"/>
+            <a:off x="1993392" y="6215634"/>
             <a:ext cx="256032" cy="146304"/>
           </a:xfrm>
           <a:prstGeom prst="chevron">
@@ -22659,7 +23355,7 @@
         </p:nvSpPr>
         <p:spPr>
           <a:xfrm>
-            <a:off x="2304288" y="6188202"/>
+            <a:off x="2240280" y="6188202"/>
             <a:ext cx="457200" cy="219456"/>
           </a:xfrm>
           <a:prstGeom prst="rect">
@@ -23131,8 +23827,8 @@
         </p:nvSpPr>
         <p:spPr>
           <a:xfrm>
-            <a:off x="502920" y="1133856"/>
-            <a:ext cx="11247120" cy="457200"/>
+            <a:off x="502920" y="1115568"/>
+            <a:ext cx="11247120" cy="384048"/>
           </a:xfrm>
           <a:prstGeom prst="rect">
             <a:avLst/>
@@ -23147,17 +23843,17 @@
           <a:p>
             <a:pPr algn="l">
               <a:lnSpc>
-                <a:spcPct val="112000"/>
+                <a:spcPct val="110000"/>
               </a:lnSpc>
             </a:pPr>
             <a:r>
-              <a:rPr sz="1050" b="0" i="0">
+              <a:rPr sz="1000" b="0" i="0">
                 <a:solidFill>
                   <a:srgbClr val="252A31"/>
                 </a:solidFill>
                 <a:latin typeface="Meiryo"/>
               </a:rPr>
-              <a:t>各チームの難易度・使用アプリの種類・外部連携/制約を比較整理（メンター担当検討の材料）。難易度は相談会での論点量・外部連携/制約・作り込み範囲からの暫定評価。</a:t>
+              <a:t>各チームの使用アプリを列（アプリ別）で可視化し、難易度・アプリ数（ボリューム）とあわせて比較（メンター担当検討の材料）。色タイル＝使用アプリ。全チームがCopilot Studioを使用。</a:t>
             </a:r>
           </a:p>
         </p:txBody>
@@ -23171,8 +23867,8 @@
           <p:nvPr/>
         </p:nvGraphicFramePr>
         <p:xfrm>
-          <a:off x="502920" y="1700784"/>
-          <a:ext cx="11201399" cy="4114800"/>
+          <a:off x="502920" y="1609344"/>
+          <a:ext cx="11201400" cy="4197096"/>
         </p:xfrm>
         <a:graphic>
           <a:graphicData uri="http://schemas.openxmlformats.org/drawingml/2006/table">
@@ -23181,13 +23877,22 @@
                 <a:tableStyleId>{5C22544A-7EE6-4342-B048-85BDC9FD1C3A}</a:tableStyleId>
               </a:tblPr>
               <a:tblGrid>
+                <a:gridCol w="457200"/>
+                <a:gridCol w="1783080"/>
+                <a:gridCol w="640080"/>
+                <a:gridCol w="777240"/>
+                <a:gridCol w="777240"/>
+                <a:gridCol w="777240"/>
+                <a:gridCol w="777240"/>
+                <a:gridCol w="777240"/>
+                <a:gridCol w="777240"/>
+                <a:gridCol w="777240"/>
+                <a:gridCol w="777240"/>
+                <a:gridCol w="777240"/>
+                <a:gridCol w="777240"/>
                 <a:gridCol w="548640"/>
-                <a:gridCol w="2377440"/>
-                <a:gridCol w="960120"/>
-                <a:gridCol w="3566160"/>
-                <a:gridCol w="3749039"/>
               </a:tblGrid>
-              <a:tr h="292608">
+              <a:tr h="475488">
                 <a:tc>
                   <a:txBody>
                     <a:bodyPr wrap="square"/>
@@ -23199,7 +23904,7 @@
                         </a:lnSpc>
                       </a:pPr>
                       <a:r>
-                        <a:rPr sz="950" b="1">
+                        <a:rPr sz="850" b="1">
                           <a:solidFill>
                             <a:srgbClr val="FFFFFF"/>
                           </a:solidFill>
@@ -23211,7 +23916,7 @@
                   </a:txBody>
                   <a:tcPr marL="63500" marR="63500" marT="25400" marB="25400" anchor="ctr">
                     <a:solidFill>
-                      <a:srgbClr val="2E8B9E"/>
+                      <a:srgbClr val="1F385C"/>
                     </a:solidFill>
                   </a:tcPr>
                 </a:tc>
@@ -23226,7 +23931,7 @@
                         </a:lnSpc>
                       </a:pPr>
                       <a:r>
-                        <a:rPr sz="950" b="1">
+                        <a:rPr sz="850" b="1">
                           <a:solidFill>
                             <a:srgbClr val="FFFFFF"/>
                           </a:solidFill>
@@ -23238,7 +23943,7 @@
                   </a:txBody>
                   <a:tcPr marL="63500" marR="63500" marT="25400" marB="25400" anchor="ctr">
                     <a:solidFill>
-                      <a:srgbClr val="2E8B9E"/>
+                      <a:srgbClr val="1F385C"/>
                     </a:solidFill>
                   </a:tcPr>
                 </a:tc>
@@ -23253,7 +23958,7 @@
                         </a:lnSpc>
                       </a:pPr>
                       <a:r>
-                        <a:rPr sz="950" b="1">
+                        <a:rPr sz="850" b="1">
                           <a:solidFill>
                             <a:srgbClr val="FFFFFF"/>
                           </a:solidFill>
@@ -23265,7 +23970,7 @@
                   </a:txBody>
                   <a:tcPr marL="63500" marR="63500" marT="25400" marB="25400" anchor="ctr">
                     <a:solidFill>
-                      <a:srgbClr val="2E8B9E"/>
+                      <a:srgbClr val="1F385C"/>
                     </a:solidFill>
                   </a:tcPr>
                 </a:tc>
@@ -23280,19 +23985,35 @@
                         </a:lnSpc>
                       </a:pPr>
                       <a:r>
-                        <a:rPr sz="950" b="1">
+                        <a:rPr sz="700" b="1">
                           <a:solidFill>
                             <a:srgbClr val="FFFFFF"/>
                           </a:solidFill>
                           <a:latin typeface="Meiryo"/>
                         </a:rPr>
-                        <a:t>主要アプリ（種類数）</a:t>
+                        <a:t>Copilot</a:t>
+                      </a:r>
+                    </a:p>
+                    <a:p>
+                      <a:pPr algn="ctr">
+                        <a:lnSpc>
+                          <a:spcPct val="98000"/>
+                        </a:lnSpc>
+                      </a:pPr>
+                      <a:r>
+                        <a:rPr sz="700" b="1">
+                          <a:solidFill>
+                            <a:srgbClr val="FFFFFF"/>
+                          </a:solidFill>
+                          <a:latin typeface="Meiryo"/>
+                        </a:rPr>
+                        <a:t>Studio</a:t>
                       </a:r>
                     </a:p>
                   </a:txBody>
                   <a:tcPr marL="63500" marR="63500" marT="25400" marB="25400" anchor="ctr">
                     <a:solidFill>
-                      <a:srgbClr val="2E8B9E"/>
+                      <a:srgbClr val="745CA6"/>
                     </a:solidFill>
                   </a:tcPr>
                 </a:tc>
@@ -23307,24 +24028,38 @@
                         </a:lnSpc>
                       </a:pPr>
                       <a:r>
-                        <a:rPr sz="950" b="1">
+                        <a:rPr sz="700" b="1">
                           <a:solidFill>
                             <a:srgbClr val="FFFFFF"/>
                           </a:solidFill>
                           <a:latin typeface="Meiryo"/>
                         </a:rPr>
-                        <a:t>外部連携・制約</a:t>
+                        <a:t>Power</a:t>
+                      </a:r>
+                    </a:p>
+                    <a:p>
+                      <a:pPr algn="ctr">
+                        <a:lnSpc>
+                          <a:spcPct val="98000"/>
+                        </a:lnSpc>
+                      </a:pPr>
+                      <a:r>
+                        <a:rPr sz="700" b="1">
+                          <a:solidFill>
+                            <a:srgbClr val="FFFFFF"/>
+                          </a:solidFill>
+                          <a:latin typeface="Meiryo"/>
+                        </a:rPr>
+                        <a:t>Automate</a:t>
                       </a:r>
                     </a:p>
                   </a:txBody>
                   <a:tcPr marL="63500" marR="63500" marT="25400" marB="25400" anchor="ctr">
                     <a:solidFill>
-                      <a:srgbClr val="2E8B9E"/>
+                      <a:srgbClr val="0B72C4"/>
                     </a:solidFill>
                   </a:tcPr>
                 </a:tc>
-              </a:tr>
-              <a:tr h="347472">
                 <a:tc>
                   <a:txBody>
                     <a:bodyPr wrap="square"/>
@@ -23336,7 +24071,332 @@
                         </a:lnSpc>
                       </a:pPr>
                       <a:r>
-                        <a:rPr sz="1000" b="1">
+                        <a:rPr sz="700" b="1">
+                          <a:solidFill>
+                            <a:srgbClr val="FFFFFF"/>
+                          </a:solidFill>
+                          <a:latin typeface="Meiryo"/>
+                        </a:rPr>
+                        <a:t>Share</a:t>
+                      </a:r>
+                    </a:p>
+                    <a:p>
+                      <a:pPr algn="ctr">
+                        <a:lnSpc>
+                          <a:spcPct val="98000"/>
+                        </a:lnSpc>
+                      </a:pPr>
+                      <a:r>
+                        <a:rPr sz="700" b="1">
+                          <a:solidFill>
+                            <a:srgbClr val="FFFFFF"/>
+                          </a:solidFill>
+                          <a:latin typeface="Meiryo"/>
+                        </a:rPr>
+                        <a:t>Point</a:t>
+                      </a:r>
+                    </a:p>
+                  </a:txBody>
+                  <a:tcPr marL="63500" marR="63500" marT="25400" marB="25400" anchor="ctr">
+                    <a:solidFill>
+                      <a:srgbClr val="036C70"/>
+                    </a:solidFill>
+                  </a:tcPr>
+                </a:tc>
+                <a:tc>
+                  <a:txBody>
+                    <a:bodyPr wrap="square"/>
+                    <a:lstStyle/>
+                    <a:p>
+                      <a:pPr algn="ctr">
+                        <a:lnSpc>
+                          <a:spcPct val="98000"/>
+                        </a:lnSpc>
+                      </a:pPr>
+                      <a:r>
+                        <a:rPr sz="700" b="1">
+                          <a:solidFill>
+                            <a:srgbClr val="FFFFFF"/>
+                          </a:solidFill>
+                          <a:latin typeface="Meiryo"/>
+                        </a:rPr>
+                        <a:t>Teams</a:t>
+                      </a:r>
+                    </a:p>
+                  </a:txBody>
+                  <a:tcPr marL="63500" marR="63500" marT="25400" marB="25400" anchor="ctr">
+                    <a:solidFill>
+                      <a:srgbClr val="4B53BC"/>
+                    </a:solidFill>
+                  </a:tcPr>
+                </a:tc>
+                <a:tc>
+                  <a:txBody>
+                    <a:bodyPr wrap="square"/>
+                    <a:lstStyle/>
+                    <a:p>
+                      <a:pPr algn="ctr">
+                        <a:lnSpc>
+                          <a:spcPct val="98000"/>
+                        </a:lnSpc>
+                      </a:pPr>
+                      <a:r>
+                        <a:rPr sz="700" b="1">
+                          <a:solidFill>
+                            <a:srgbClr val="FFFFFF"/>
+                          </a:solidFill>
+                          <a:latin typeface="Meiryo"/>
+                        </a:rPr>
+                        <a:t>Outlook</a:t>
+                      </a:r>
+                    </a:p>
+                  </a:txBody>
+                  <a:tcPr marL="63500" marR="63500" marT="25400" marB="25400" anchor="ctr">
+                    <a:solidFill>
+                      <a:srgbClr val="0A6FC2"/>
+                    </a:solidFill>
+                  </a:tcPr>
+                </a:tc>
+                <a:tc>
+                  <a:txBody>
+                    <a:bodyPr wrap="square"/>
+                    <a:lstStyle/>
+                    <a:p>
+                      <a:pPr algn="ctr">
+                        <a:lnSpc>
+                          <a:spcPct val="98000"/>
+                        </a:lnSpc>
+                      </a:pPr>
+                      <a:r>
+                        <a:rPr sz="700" b="1">
+                          <a:solidFill>
+                            <a:srgbClr val="FFFFFF"/>
+                          </a:solidFill>
+                          <a:latin typeface="Meiryo"/>
+                        </a:rPr>
+                        <a:t>Forms</a:t>
+                      </a:r>
+                    </a:p>
+                  </a:txBody>
+                  <a:tcPr marL="63500" marR="63500" marT="25400" marB="25400" anchor="ctr">
+                    <a:solidFill>
+                      <a:srgbClr val="1F8A70"/>
+                    </a:solidFill>
+                  </a:tcPr>
+                </a:tc>
+                <a:tc>
+                  <a:txBody>
+                    <a:bodyPr wrap="square"/>
+                    <a:lstStyle/>
+                    <a:p>
+                      <a:pPr algn="ctr">
+                        <a:lnSpc>
+                          <a:spcPct val="98000"/>
+                        </a:lnSpc>
+                      </a:pPr>
+                      <a:r>
+                        <a:rPr sz="700" b="1">
+                          <a:solidFill>
+                            <a:srgbClr val="252A31"/>
+                          </a:solidFill>
+                          <a:latin typeface="Meiryo"/>
+                        </a:rPr>
+                        <a:t>Power</a:t>
+                      </a:r>
+                    </a:p>
+                    <a:p>
+                      <a:pPr algn="ctr">
+                        <a:lnSpc>
+                          <a:spcPct val="98000"/>
+                        </a:lnSpc>
+                      </a:pPr>
+                      <a:r>
+                        <a:rPr sz="700" b="1">
+                          <a:solidFill>
+                            <a:srgbClr val="252A31"/>
+                          </a:solidFill>
+                          <a:latin typeface="Meiryo"/>
+                        </a:rPr>
+                        <a:t>BI</a:t>
+                      </a:r>
+                    </a:p>
+                  </a:txBody>
+                  <a:tcPr marL="63500" marR="63500" marT="25400" marB="25400" anchor="ctr">
+                    <a:solidFill>
+                      <a:srgbClr val="E3B10A"/>
+                    </a:solidFill>
+                  </a:tcPr>
+                </a:tc>
+                <a:tc>
+                  <a:txBody>
+                    <a:bodyPr wrap="square"/>
+                    <a:lstStyle/>
+                    <a:p>
+                      <a:pPr algn="ctr">
+                        <a:lnSpc>
+                          <a:spcPct val="98000"/>
+                        </a:lnSpc>
+                      </a:pPr>
+                      <a:r>
+                        <a:rPr sz="700" b="1">
+                          <a:solidFill>
+                            <a:srgbClr val="FFFFFF"/>
+                          </a:solidFill>
+                          <a:latin typeface="Meiryo"/>
+                        </a:rPr>
+                        <a:t>Excel</a:t>
+                      </a:r>
+                    </a:p>
+                  </a:txBody>
+                  <a:tcPr marL="63500" marR="63500" marT="25400" marB="25400" anchor="ctr">
+                    <a:solidFill>
+                      <a:srgbClr val="217346"/>
+                    </a:solidFill>
+                  </a:tcPr>
+                </a:tc>
+                <a:tc>
+                  <a:txBody>
+                    <a:bodyPr wrap="square"/>
+                    <a:lstStyle/>
+                    <a:p>
+                      <a:pPr algn="ctr">
+                        <a:lnSpc>
+                          <a:spcPct val="98000"/>
+                        </a:lnSpc>
+                      </a:pPr>
+                      <a:r>
+                        <a:rPr sz="700" b="1">
+                          <a:solidFill>
+                            <a:srgbClr val="FFFFFF"/>
+                          </a:solidFill>
+                          <a:latin typeface="Meiryo"/>
+                        </a:rPr>
+                        <a:t>Word/</a:t>
+                      </a:r>
+                    </a:p>
+                    <a:p>
+                      <a:pPr algn="ctr">
+                        <a:lnSpc>
+                          <a:spcPct val="98000"/>
+                        </a:lnSpc>
+                      </a:pPr>
+                      <a:r>
+                        <a:rPr sz="700" b="1">
+                          <a:solidFill>
+                            <a:srgbClr val="FFFFFF"/>
+                          </a:solidFill>
+                          <a:latin typeface="Meiryo"/>
+                        </a:rPr>
+                        <a:t>PPT</a:t>
+                      </a:r>
+                    </a:p>
+                  </a:txBody>
+                  <a:tcPr marL="63500" marR="63500" marT="25400" marB="25400" anchor="ctr">
+                    <a:solidFill>
+                      <a:srgbClr val="B0472A"/>
+                    </a:solidFill>
+                  </a:tcPr>
+                </a:tc>
+                <a:tc>
+                  <a:txBody>
+                    <a:bodyPr wrap="square"/>
+                    <a:lstStyle/>
+                    <a:p>
+                      <a:pPr algn="ctr">
+                        <a:lnSpc>
+                          <a:spcPct val="98000"/>
+                        </a:lnSpc>
+                      </a:pPr>
+                      <a:r>
+                        <a:rPr sz="700" b="1">
+                          <a:solidFill>
+                            <a:srgbClr val="FFFFFF"/>
+                          </a:solidFill>
+                          <a:latin typeface="Meiryo"/>
+                        </a:rPr>
+                        <a:t>外部/</a:t>
+                      </a:r>
+                    </a:p>
+                    <a:p>
+                      <a:pPr algn="ctr">
+                        <a:lnSpc>
+                          <a:spcPct val="98000"/>
+                        </a:lnSpc>
+                      </a:pPr>
+                      <a:r>
+                        <a:rPr sz="700" b="1">
+                          <a:solidFill>
+                            <a:srgbClr val="FFFFFF"/>
+                          </a:solidFill>
+                          <a:latin typeface="Meiryo"/>
+                        </a:rPr>
+                        <a:t>その他</a:t>
+                      </a:r>
+                    </a:p>
+                  </a:txBody>
+                  <a:tcPr marL="63500" marR="63500" marT="25400" marB="25400" anchor="ctr">
+                    <a:solidFill>
+                      <a:srgbClr val="6B7280"/>
+                    </a:solidFill>
+                  </a:tcPr>
+                </a:tc>
+                <a:tc>
+                  <a:txBody>
+                    <a:bodyPr wrap="square"/>
+                    <a:lstStyle/>
+                    <a:p>
+                      <a:pPr algn="ctr">
+                        <a:lnSpc>
+                          <a:spcPct val="98000"/>
+                        </a:lnSpc>
+                      </a:pPr>
+                      <a:r>
+                        <a:rPr sz="750" b="1">
+                          <a:solidFill>
+                            <a:srgbClr val="FFFFFF"/>
+                          </a:solidFill>
+                          <a:latin typeface="Meiryo"/>
+                        </a:rPr>
+                        <a:t>アプリ</a:t>
+                      </a:r>
+                    </a:p>
+                    <a:p>
+                      <a:pPr algn="ctr">
+                        <a:lnSpc>
+                          <a:spcPct val="98000"/>
+                        </a:lnSpc>
+                      </a:pPr>
+                      <a:r>
+                        <a:rPr sz="750" b="1">
+                          <a:solidFill>
+                            <a:srgbClr val="FFFFFF"/>
+                          </a:solidFill>
+                          <a:latin typeface="Meiryo"/>
+                        </a:rPr>
+                        <a:t>数</a:t>
+                      </a:r>
+                    </a:p>
+                  </a:txBody>
+                  <a:tcPr marL="63500" marR="63500" marT="25400" marB="25400" anchor="ctr">
+                    <a:solidFill>
+                      <a:srgbClr val="1F385C"/>
+                    </a:solidFill>
+                  </a:tcPr>
+                </a:tc>
+              </a:tr>
+              <a:tr h="338328">
+                <a:tc>
+                  <a:txBody>
+                    <a:bodyPr wrap="square"/>
+                    <a:lstStyle/>
+                    <a:p>
+                      <a:pPr algn="ctr">
+                        <a:lnSpc>
+                          <a:spcPct val="98000"/>
+                        </a:lnSpc>
+                      </a:pPr>
+                      <a:r>
+                        <a:rPr sz="950" b="1">
                           <a:solidFill>
                             <a:srgbClr val="1F385C"/>
                           </a:solidFill>
@@ -23363,7 +24423,7 @@
                         </a:lnSpc>
                       </a:pPr>
                       <a:r>
-                        <a:rPr sz="880" b="1">
+                        <a:rPr sz="800" b="1">
                           <a:solidFill>
                             <a:srgbClr val="252A31"/>
                           </a:solidFill>
@@ -23390,7 +24450,7 @@
                         </a:lnSpc>
                       </a:pPr>
                       <a:r>
-                        <a:rPr sz="950" b="1">
+                        <a:rPr sz="900" b="1">
                           <a:solidFill>
                             <a:srgbClr val="2E8B9E"/>
                           </a:solidFill>
@@ -23411,19 +24471,100 @@
                     <a:bodyPr wrap="square"/>
                     <a:lstStyle/>
                     <a:p>
+                      <a:pPr algn="ctr">
+                        <a:lnSpc>
+                          <a:spcPct val="98000"/>
+                        </a:lnSpc>
+                      </a:pPr>
+                      <a:r>
+                        <a:rPr sz="900" b="1">
+                          <a:solidFill>
+                            <a:srgbClr val="FFFFFF"/>
+                          </a:solidFill>
+                          <a:latin typeface="Meiryo"/>
+                        </a:rPr>
+                        <a:t>●</a:t>
+                      </a:r>
+                    </a:p>
+                  </a:txBody>
+                  <a:tcPr marL="63500" marR="63500" marT="25400" marB="25400" anchor="ctr">
+                    <a:solidFill>
+                      <a:srgbClr val="745CA6"/>
+                    </a:solidFill>
+                  </a:tcPr>
+                </a:tc>
+                <a:tc>
+                  <a:txBody>
+                    <a:bodyPr wrap="square"/>
+                    <a:lstStyle/>
+                    <a:p>
                       <a:pPr algn="l">
                         <a:lnSpc>
                           <a:spcPct val="98000"/>
                         </a:lnSpc>
                       </a:pPr>
                       <a:r>
-                        <a:rPr sz="840" b="0">
+                        <a:rPr sz="800" b="0">
                           <a:solidFill>
                             <a:srgbClr val="252A31"/>
                           </a:solidFill>
                           <a:latin typeface="Meiryo"/>
                         </a:rPr>
-                        <a:t>CS・Chat・Excel・SP（4）</a:t>
+                        <a:t/>
+                      </a:r>
+                    </a:p>
+                  </a:txBody>
+                  <a:tcPr marL="63500" marR="63500" marT="25400" marB="25400" anchor="ctr">
+                    <a:solidFill>
+                      <a:srgbClr val="FFFFFF"/>
+                    </a:solidFill>
+                  </a:tcPr>
+                </a:tc>
+                <a:tc>
+                  <a:txBody>
+                    <a:bodyPr wrap="square"/>
+                    <a:lstStyle/>
+                    <a:p>
+                      <a:pPr algn="ctr">
+                        <a:lnSpc>
+                          <a:spcPct val="98000"/>
+                        </a:lnSpc>
+                      </a:pPr>
+                      <a:r>
+                        <a:rPr sz="900" b="1">
+                          <a:solidFill>
+                            <a:srgbClr val="FFFFFF"/>
+                          </a:solidFill>
+                          <a:latin typeface="Meiryo"/>
+                        </a:rPr>
+                        <a:t>●</a:t>
+                      </a:r>
+                    </a:p>
+                  </a:txBody>
+                  <a:tcPr marL="63500" marR="63500" marT="25400" marB="25400" anchor="ctr">
+                    <a:solidFill>
+                      <a:srgbClr val="036C70"/>
+                    </a:solidFill>
+                  </a:tcPr>
+                </a:tc>
+                <a:tc>
+                  <a:txBody>
+                    <a:bodyPr wrap="square"/>
+                    <a:lstStyle/>
+                    <a:p>
+                      <a:pPr algn="l">
+                        <a:lnSpc>
+                          <a:spcPct val="98000"/>
+                        </a:lnSpc>
+                      </a:pPr>
+                      <a:r>
+                        <a:rPr sz="800" b="0">
+                          <a:solidFill>
+                            <a:srgbClr val="252A31"/>
+                          </a:solidFill>
+                          <a:latin typeface="Meiryo"/>
+                        </a:rPr>
+                        <a:t/>
                       </a:r>
                     </a:p>
                   </a:txBody>
@@ -23444,13 +24585,13 @@
                         </a:lnSpc>
                       </a:pPr>
                       <a:r>
-                        <a:rPr sz="850" b="0">
+                        <a:rPr sz="800" b="0">
                           <a:solidFill>
                             <a:srgbClr val="252A31"/>
                           </a:solidFill>
                           <a:latin typeface="Meiryo"/>
                         </a:rPr>
-                        <a:t>M365内中心／判定基準の作り込みが肝</a:t>
+                        <a:t/>
                       </a:r>
                     </a:p>
                   </a:txBody>
@@ -23460,8 +24601,60 @@
                     </a:solidFill>
                   </a:tcPr>
                 </a:tc>
-              </a:tr>
-              <a:tr h="347472">
+                <a:tc>
+                  <a:txBody>
+                    <a:bodyPr wrap="square"/>
+                    <a:lstStyle/>
+                    <a:p>
+                      <a:pPr algn="l">
+                        <a:lnSpc>
+                          <a:spcPct val="98000"/>
+                        </a:lnSpc>
+                      </a:pPr>
+                      <a:r>
+                        <a:rPr sz="800" b="0">
+                          <a:solidFill>
+                            <a:srgbClr val="252A31"/>
+                          </a:solidFill>
+                          <a:latin typeface="Meiryo"/>
+                        </a:rPr>
+                        <a:t/>
+                      </a:r>
+                    </a:p>
+                  </a:txBody>
+                  <a:tcPr marL="63500" marR="63500" marT="25400" marB="25400" anchor="ctr">
+                    <a:solidFill>
+                      <a:srgbClr val="FFFFFF"/>
+                    </a:solidFill>
+                  </a:tcPr>
+                </a:tc>
+                <a:tc>
+                  <a:txBody>
+                    <a:bodyPr wrap="square"/>
+                    <a:lstStyle/>
+                    <a:p>
+                      <a:pPr algn="l">
+                        <a:lnSpc>
+                          <a:spcPct val="98000"/>
+                        </a:lnSpc>
+                      </a:pPr>
+                      <a:r>
+                        <a:rPr sz="800" b="0">
+                          <a:solidFill>
+                            <a:srgbClr val="252A31"/>
+                          </a:solidFill>
+                          <a:latin typeface="Meiryo"/>
+                        </a:rPr>
+                        <a:t/>
+                      </a:r>
+                    </a:p>
+                  </a:txBody>
+                  <a:tcPr marL="63500" marR="63500" marT="25400" marB="25400" anchor="ctr">
+                    <a:solidFill>
+                      <a:srgbClr val="FFFFFF"/>
+                    </a:solidFill>
+                  </a:tcPr>
+                </a:tc>
                 <a:tc>
                   <a:txBody>
                     <a:bodyPr wrap="square"/>
@@ -23473,7 +24666,117 @@
                         </a:lnSpc>
                       </a:pPr>
                       <a:r>
-                        <a:rPr sz="1000" b="1">
+                        <a:rPr sz="900" b="1">
+                          <a:solidFill>
+                            <a:srgbClr val="FFFFFF"/>
+                          </a:solidFill>
+                          <a:latin typeface="Meiryo"/>
+                        </a:rPr>
+                        <a:t>●</a:t>
+                      </a:r>
+                    </a:p>
+                  </a:txBody>
+                  <a:tcPr marL="63500" marR="63500" marT="25400" marB="25400" anchor="ctr">
+                    <a:solidFill>
+                      <a:srgbClr val="217346"/>
+                    </a:solidFill>
+                  </a:tcPr>
+                </a:tc>
+                <a:tc>
+                  <a:txBody>
+                    <a:bodyPr wrap="square"/>
+                    <a:lstStyle/>
+                    <a:p>
+                      <a:pPr algn="l">
+                        <a:lnSpc>
+                          <a:spcPct val="98000"/>
+                        </a:lnSpc>
+                      </a:pPr>
+                      <a:r>
+                        <a:rPr sz="800" b="0">
+                          <a:solidFill>
+                            <a:srgbClr val="252A31"/>
+                          </a:solidFill>
+                          <a:latin typeface="Meiryo"/>
+                        </a:rPr>
+                        <a:t/>
+                      </a:r>
+                    </a:p>
+                  </a:txBody>
+                  <a:tcPr marL="63500" marR="63500" marT="25400" marB="25400" anchor="ctr">
+                    <a:solidFill>
+                      <a:srgbClr val="FFFFFF"/>
+                    </a:solidFill>
+                  </a:tcPr>
+                </a:tc>
+                <a:tc>
+                  <a:txBody>
+                    <a:bodyPr wrap="square"/>
+                    <a:lstStyle/>
+                    <a:p>
+                      <a:pPr algn="l">
+                        <a:lnSpc>
+                          <a:spcPct val="98000"/>
+                        </a:lnSpc>
+                      </a:pPr>
+                      <a:r>
+                        <a:rPr sz="800" b="0">
+                          <a:solidFill>
+                            <a:srgbClr val="252A31"/>
+                          </a:solidFill>
+                          <a:latin typeface="Meiryo"/>
+                        </a:rPr>
+                        <a:t/>
+                      </a:r>
+                    </a:p>
+                  </a:txBody>
+                  <a:tcPr marL="63500" marR="63500" marT="25400" marB="25400" anchor="ctr">
+                    <a:solidFill>
+                      <a:srgbClr val="FFFFFF"/>
+                    </a:solidFill>
+                  </a:tcPr>
+                </a:tc>
+                <a:tc>
+                  <a:txBody>
+                    <a:bodyPr wrap="square"/>
+                    <a:lstStyle/>
+                    <a:p>
+                      <a:pPr algn="ctr">
+                        <a:lnSpc>
+                          <a:spcPct val="98000"/>
+                        </a:lnSpc>
+                      </a:pPr>
+                      <a:r>
+                        <a:rPr sz="950" b="1">
+                          <a:solidFill>
+                            <a:srgbClr val="1F385C"/>
+                          </a:solidFill>
+                          <a:latin typeface="Meiryo"/>
+                        </a:rPr>
+                        <a:t>3</a:t>
+                      </a:r>
+                    </a:p>
+                  </a:txBody>
+                  <a:tcPr marL="63500" marR="63500" marT="25400" marB="25400" anchor="ctr">
+                    <a:solidFill>
+                      <a:srgbClr val="FFFFFF"/>
+                    </a:solidFill>
+                  </a:tcPr>
+                </a:tc>
+              </a:tr>
+              <a:tr h="338328">
+                <a:tc>
+                  <a:txBody>
+                    <a:bodyPr wrap="square"/>
+                    <a:lstStyle/>
+                    <a:p>
+                      <a:pPr algn="ctr">
+                        <a:lnSpc>
+                          <a:spcPct val="98000"/>
+                        </a:lnSpc>
+                      </a:pPr>
+                      <a:r>
+                        <a:rPr sz="950" b="1">
                           <a:solidFill>
                             <a:srgbClr val="1F385C"/>
                           </a:solidFill>
@@ -23500,7 +24803,7 @@
                         </a:lnSpc>
                       </a:pPr>
                       <a:r>
-                        <a:rPr sz="880" b="1">
+                        <a:rPr sz="800" b="1">
                           <a:solidFill>
                             <a:srgbClr val="252A31"/>
                           </a:solidFill>
@@ -23527,7 +24830,7 @@
                         </a:lnSpc>
                       </a:pPr>
                       <a:r>
-                        <a:rPr sz="950" b="1">
+                        <a:rPr sz="900" b="1">
                           <a:solidFill>
                             <a:srgbClr val="2E8B9E"/>
                           </a:solidFill>
@@ -23548,19 +24851,127 @@
                     <a:bodyPr wrap="square"/>
                     <a:lstStyle/>
                     <a:p>
+                      <a:pPr algn="ctr">
+                        <a:lnSpc>
+                          <a:spcPct val="98000"/>
+                        </a:lnSpc>
+                      </a:pPr>
+                      <a:r>
+                        <a:rPr sz="900" b="1">
+                          <a:solidFill>
+                            <a:srgbClr val="FFFFFF"/>
+                          </a:solidFill>
+                          <a:latin typeface="Meiryo"/>
+                        </a:rPr>
+                        <a:t>●</a:t>
+                      </a:r>
+                    </a:p>
+                  </a:txBody>
+                  <a:tcPr marL="63500" marR="63500" marT="25400" marB="25400" anchor="ctr">
+                    <a:solidFill>
+                      <a:srgbClr val="745CA6"/>
+                    </a:solidFill>
+                  </a:tcPr>
+                </a:tc>
+                <a:tc>
+                  <a:txBody>
+                    <a:bodyPr wrap="square"/>
+                    <a:lstStyle/>
+                    <a:p>
+                      <a:pPr algn="ctr">
+                        <a:lnSpc>
+                          <a:spcPct val="98000"/>
+                        </a:lnSpc>
+                      </a:pPr>
+                      <a:r>
+                        <a:rPr sz="900" b="1">
+                          <a:solidFill>
+                            <a:srgbClr val="FFFFFF"/>
+                          </a:solidFill>
+                          <a:latin typeface="Meiryo"/>
+                        </a:rPr>
+                        <a:t>●</a:t>
+                      </a:r>
+                    </a:p>
+                  </a:txBody>
+                  <a:tcPr marL="63500" marR="63500" marT="25400" marB="25400" anchor="ctr">
+                    <a:solidFill>
+                      <a:srgbClr val="0B72C4"/>
+                    </a:solidFill>
+                  </a:tcPr>
+                </a:tc>
+                <a:tc>
+                  <a:txBody>
+                    <a:bodyPr wrap="square"/>
+                    <a:lstStyle/>
+                    <a:p>
+                      <a:pPr algn="ctr">
+                        <a:lnSpc>
+                          <a:spcPct val="98000"/>
+                        </a:lnSpc>
+                      </a:pPr>
+                      <a:r>
+                        <a:rPr sz="900" b="1">
+                          <a:solidFill>
+                            <a:srgbClr val="FFFFFF"/>
+                          </a:solidFill>
+                          <a:latin typeface="Meiryo"/>
+                        </a:rPr>
+                        <a:t>●</a:t>
+                      </a:r>
+                    </a:p>
+                  </a:txBody>
+                  <a:tcPr marL="63500" marR="63500" marT="25400" marB="25400" anchor="ctr">
+                    <a:solidFill>
+                      <a:srgbClr val="036C70"/>
+                    </a:solidFill>
+                  </a:tcPr>
+                </a:tc>
+                <a:tc>
+                  <a:txBody>
+                    <a:bodyPr wrap="square"/>
+                    <a:lstStyle/>
+                    <a:p>
+                      <a:pPr algn="ctr">
+                        <a:lnSpc>
+                          <a:spcPct val="98000"/>
+                        </a:lnSpc>
+                      </a:pPr>
+                      <a:r>
+                        <a:rPr sz="900" b="1">
+                          <a:solidFill>
+                            <a:srgbClr val="FFFFFF"/>
+                          </a:solidFill>
+                          <a:latin typeface="Meiryo"/>
+                        </a:rPr>
+                        <a:t>●</a:t>
+                      </a:r>
+                    </a:p>
+                  </a:txBody>
+                  <a:tcPr marL="63500" marR="63500" marT="25400" marB="25400" anchor="ctr">
+                    <a:solidFill>
+                      <a:srgbClr val="4B53BC"/>
+                    </a:solidFill>
+                  </a:tcPr>
+                </a:tc>
+                <a:tc>
+                  <a:txBody>
+                    <a:bodyPr wrap="square"/>
+                    <a:lstStyle/>
+                    <a:p>
                       <a:pPr algn="l">
                         <a:lnSpc>
                           <a:spcPct val="98000"/>
                         </a:lnSpc>
                       </a:pPr>
                       <a:r>
-                        <a:rPr sz="840" b="0">
+                        <a:rPr sz="800" b="0">
                           <a:solidFill>
                             <a:srgbClr val="252A31"/>
                           </a:solidFill>
                           <a:latin typeface="Meiryo"/>
                         </a:rPr>
-                        <a:t>CS・SP・Teams・PA（4）</a:t>
+                        <a:t/>
                       </a:r>
                     </a:p>
                   </a:txBody>
@@ -23581,13 +24992,13 @@
                         </a:lnSpc>
                       </a:pPr>
                       <a:r>
-                        <a:rPr sz="850" b="0">
+                        <a:rPr sz="800" b="0">
                           <a:solidFill>
                             <a:srgbClr val="252A31"/>
                           </a:solidFill>
                           <a:latin typeface="Meiryo"/>
                         </a:rPr>
-                        <a:t>FAQ・ガイド整備が成否を左右</a:t>
+                        <a:t/>
                       </a:r>
                     </a:p>
                   </a:txBody>
@@ -23597,8 +25008,114 @@
                     </a:solidFill>
                   </a:tcPr>
                 </a:tc>
-              </a:tr>
-              <a:tr h="347472">
+                <a:tc>
+                  <a:txBody>
+                    <a:bodyPr wrap="square"/>
+                    <a:lstStyle/>
+                    <a:p>
+                      <a:pPr algn="l">
+                        <a:lnSpc>
+                          <a:spcPct val="98000"/>
+                        </a:lnSpc>
+                      </a:pPr>
+                      <a:r>
+                        <a:rPr sz="800" b="0">
+                          <a:solidFill>
+                            <a:srgbClr val="252A31"/>
+                          </a:solidFill>
+                          <a:latin typeface="Meiryo"/>
+                        </a:rPr>
+                        <a:t/>
+                      </a:r>
+                    </a:p>
+                  </a:txBody>
+                  <a:tcPr marL="63500" marR="63500" marT="25400" marB="25400" anchor="ctr">
+                    <a:solidFill>
+                      <a:srgbClr val="F2F4F7"/>
+                    </a:solidFill>
+                  </a:tcPr>
+                </a:tc>
+                <a:tc>
+                  <a:txBody>
+                    <a:bodyPr wrap="square"/>
+                    <a:lstStyle/>
+                    <a:p>
+                      <a:pPr algn="l">
+                        <a:lnSpc>
+                          <a:spcPct val="98000"/>
+                        </a:lnSpc>
+                      </a:pPr>
+                      <a:r>
+                        <a:rPr sz="800" b="0">
+                          <a:solidFill>
+                            <a:srgbClr val="252A31"/>
+                          </a:solidFill>
+                          <a:latin typeface="Meiryo"/>
+                        </a:rPr>
+                        <a:t/>
+                      </a:r>
+                    </a:p>
+                  </a:txBody>
+                  <a:tcPr marL="63500" marR="63500" marT="25400" marB="25400" anchor="ctr">
+                    <a:solidFill>
+                      <a:srgbClr val="F2F4F7"/>
+                    </a:solidFill>
+                  </a:tcPr>
+                </a:tc>
+                <a:tc>
+                  <a:txBody>
+                    <a:bodyPr wrap="square"/>
+                    <a:lstStyle/>
+                    <a:p>
+                      <a:pPr algn="l">
+                        <a:lnSpc>
+                          <a:spcPct val="98000"/>
+                        </a:lnSpc>
+                      </a:pPr>
+                      <a:r>
+                        <a:rPr sz="800" b="0">
+                          <a:solidFill>
+                            <a:srgbClr val="252A31"/>
+                          </a:solidFill>
+                          <a:latin typeface="Meiryo"/>
+                        </a:rPr>
+                        <a:t/>
+                      </a:r>
+                    </a:p>
+                  </a:txBody>
+                  <a:tcPr marL="63500" marR="63500" marT="25400" marB="25400" anchor="ctr">
+                    <a:solidFill>
+                      <a:srgbClr val="F2F4F7"/>
+                    </a:solidFill>
+                  </a:tcPr>
+                </a:tc>
+                <a:tc>
+                  <a:txBody>
+                    <a:bodyPr wrap="square"/>
+                    <a:lstStyle/>
+                    <a:p>
+                      <a:pPr algn="l">
+                        <a:lnSpc>
+                          <a:spcPct val="98000"/>
+                        </a:lnSpc>
+                      </a:pPr>
+                      <a:r>
+                        <a:rPr sz="800" b="0">
+                          <a:solidFill>
+                            <a:srgbClr val="252A31"/>
+                          </a:solidFill>
+                          <a:latin typeface="Meiryo"/>
+                        </a:rPr>
+                        <a:t/>
+                      </a:r>
+                    </a:p>
+                  </a:txBody>
+                  <a:tcPr marL="63500" marR="63500" marT="25400" marB="25400" anchor="ctr">
+                    <a:solidFill>
+                      <a:srgbClr val="F2F4F7"/>
+                    </a:solidFill>
+                  </a:tcPr>
+                </a:tc>
                 <a:tc>
                   <a:txBody>
                     <a:bodyPr wrap="square"/>
@@ -23610,7 +25127,36 @@
                         </a:lnSpc>
                       </a:pPr>
                       <a:r>
-                        <a:rPr sz="1000" b="1">
+                        <a:rPr sz="950" b="1">
+                          <a:solidFill>
+                            <a:srgbClr val="1F385C"/>
+                          </a:solidFill>
+                          <a:latin typeface="Meiryo"/>
+                        </a:rPr>
+                        <a:t>4</a:t>
+                      </a:r>
+                    </a:p>
+                  </a:txBody>
+                  <a:tcPr marL="63500" marR="63500" marT="25400" marB="25400" anchor="ctr">
+                    <a:solidFill>
+                      <a:srgbClr val="F2F4F7"/>
+                    </a:solidFill>
+                  </a:tcPr>
+                </a:tc>
+              </a:tr>
+              <a:tr h="338328">
+                <a:tc>
+                  <a:txBody>
+                    <a:bodyPr wrap="square"/>
+                    <a:lstStyle/>
+                    <a:p>
+                      <a:pPr algn="ctr">
+                        <a:lnSpc>
+                          <a:spcPct val="98000"/>
+                        </a:lnSpc>
+                      </a:pPr>
+                      <a:r>
+                        <a:rPr sz="950" b="1">
                           <a:solidFill>
                             <a:srgbClr val="1F385C"/>
                           </a:solidFill>
@@ -23637,7 +25183,7 @@
                         </a:lnSpc>
                       </a:pPr>
                       <a:r>
-                        <a:rPr sz="880" b="1">
+                        <a:rPr sz="800" b="1">
                           <a:solidFill>
                             <a:srgbClr val="252A31"/>
                           </a:solidFill>
@@ -23664,7 +25210,7 @@
                         </a:lnSpc>
                       </a:pPr>
                       <a:r>
-                        <a:rPr sz="950" b="1">
+                        <a:rPr sz="900" b="1">
                           <a:solidFill>
                             <a:srgbClr val="B03A2E"/>
                           </a:solidFill>
@@ -23685,19 +25231,100 @@
                     <a:bodyPr wrap="square"/>
                     <a:lstStyle/>
                     <a:p>
+                      <a:pPr algn="ctr">
+                        <a:lnSpc>
+                          <a:spcPct val="98000"/>
+                        </a:lnSpc>
+                      </a:pPr>
+                      <a:r>
+                        <a:rPr sz="900" b="1">
+                          <a:solidFill>
+                            <a:srgbClr val="FFFFFF"/>
+                          </a:solidFill>
+                          <a:latin typeface="Meiryo"/>
+                        </a:rPr>
+                        <a:t>●</a:t>
+                      </a:r>
+                    </a:p>
+                  </a:txBody>
+                  <a:tcPr marL="63500" marR="63500" marT="25400" marB="25400" anchor="ctr">
+                    <a:solidFill>
+                      <a:srgbClr val="745CA6"/>
+                    </a:solidFill>
+                  </a:tcPr>
+                </a:tc>
+                <a:tc>
+                  <a:txBody>
+                    <a:bodyPr wrap="square"/>
+                    <a:lstStyle/>
+                    <a:p>
+                      <a:pPr algn="ctr">
+                        <a:lnSpc>
+                          <a:spcPct val="98000"/>
+                        </a:lnSpc>
+                      </a:pPr>
+                      <a:r>
+                        <a:rPr sz="900" b="1">
+                          <a:solidFill>
+                            <a:srgbClr val="FFFFFF"/>
+                          </a:solidFill>
+                          <a:latin typeface="Meiryo"/>
+                        </a:rPr>
+                        <a:t>●</a:t>
+                      </a:r>
+                    </a:p>
+                  </a:txBody>
+                  <a:tcPr marL="63500" marR="63500" marT="25400" marB="25400" anchor="ctr">
+                    <a:solidFill>
+                      <a:srgbClr val="0B72C4"/>
+                    </a:solidFill>
+                  </a:tcPr>
+                </a:tc>
+                <a:tc>
+                  <a:txBody>
+                    <a:bodyPr wrap="square"/>
+                    <a:lstStyle/>
+                    <a:p>
+                      <a:pPr algn="ctr">
+                        <a:lnSpc>
+                          <a:spcPct val="98000"/>
+                        </a:lnSpc>
+                      </a:pPr>
+                      <a:r>
+                        <a:rPr sz="900" b="1">
+                          <a:solidFill>
+                            <a:srgbClr val="FFFFFF"/>
+                          </a:solidFill>
+                          <a:latin typeface="Meiryo"/>
+                        </a:rPr>
+                        <a:t>●</a:t>
+                      </a:r>
+                    </a:p>
+                  </a:txBody>
+                  <a:tcPr marL="63500" marR="63500" marT="25400" marB="25400" anchor="ctr">
+                    <a:solidFill>
+                      <a:srgbClr val="036C70"/>
+                    </a:solidFill>
+                  </a:tcPr>
+                </a:tc>
+                <a:tc>
+                  <a:txBody>
+                    <a:bodyPr wrap="square"/>
+                    <a:lstStyle/>
+                    <a:p>
                       <a:pPr algn="l">
                         <a:lnSpc>
                           <a:spcPct val="98000"/>
                         </a:lnSpc>
                       </a:pPr>
                       <a:r>
-                        <a:rPr sz="840" b="0">
+                        <a:rPr sz="800" b="0">
                           <a:solidFill>
                             <a:srgbClr val="252A31"/>
                           </a:solidFill>
                           <a:latin typeface="Meiryo"/>
                         </a:rPr>
-                        <a:t>PA・PQuery・SP・PBI・CS・SF等（6+）</a:t>
+                        <a:t/>
                       </a:r>
                     </a:p>
                   </a:txBody>
@@ -23718,13 +25345,13 @@
                         </a:lnSpc>
                       </a:pPr>
                       <a:r>
-                        <a:rPr sz="850" b="0">
+                        <a:rPr sz="800" b="0">
                           <a:solidFill>
                             <a:srgbClr val="252A31"/>
                           </a:solidFill>
                           <a:latin typeface="Meiryo"/>
                         </a:rPr>
-                        <a:t>外部Web・Salesforce等の取得制約が大</a:t>
+                        <a:t/>
                       </a:r>
                     </a:p>
                   </a:txBody>
@@ -23734,8 +25361,33 @@
                     </a:solidFill>
                   </a:tcPr>
                 </a:tc>
-              </a:tr>
-              <a:tr h="347472">
+                <a:tc>
+                  <a:txBody>
+                    <a:bodyPr wrap="square"/>
+                    <a:lstStyle/>
+                    <a:p>
+                      <a:pPr algn="l">
+                        <a:lnSpc>
+                          <a:spcPct val="98000"/>
+                        </a:lnSpc>
+                      </a:pPr>
+                      <a:r>
+                        <a:rPr sz="800" b="0">
+                          <a:solidFill>
+                            <a:srgbClr val="252A31"/>
+                          </a:solidFill>
+                          <a:latin typeface="Meiryo"/>
+                        </a:rPr>
+                        <a:t/>
+                      </a:r>
+                    </a:p>
+                  </a:txBody>
+                  <a:tcPr marL="63500" marR="63500" marT="25400" marB="25400" anchor="ctr">
+                    <a:solidFill>
+                      <a:srgbClr val="FFFFFF"/>
+                    </a:solidFill>
+                  </a:tcPr>
+                </a:tc>
                 <a:tc>
                   <a:txBody>
                     <a:bodyPr wrap="square"/>
@@ -23747,7 +25399,144 @@
                         </a:lnSpc>
                       </a:pPr>
                       <a:r>
-                        <a:rPr sz="1000" b="1">
+                        <a:rPr sz="900" b="1">
+                          <a:solidFill>
+                            <a:srgbClr val="252A31"/>
+                          </a:solidFill>
+                          <a:latin typeface="Meiryo"/>
+                        </a:rPr>
+                        <a:t>●</a:t>
+                      </a:r>
+                    </a:p>
+                  </a:txBody>
+                  <a:tcPr marL="63500" marR="63500" marT="25400" marB="25400" anchor="ctr">
+                    <a:solidFill>
+                      <a:srgbClr val="E3B10A"/>
+                    </a:solidFill>
+                  </a:tcPr>
+                </a:tc>
+                <a:tc>
+                  <a:txBody>
+                    <a:bodyPr wrap="square"/>
+                    <a:lstStyle/>
+                    <a:p>
+                      <a:pPr algn="l">
+                        <a:lnSpc>
+                          <a:spcPct val="98000"/>
+                        </a:lnSpc>
+                      </a:pPr>
+                      <a:r>
+                        <a:rPr sz="800" b="0">
+                          <a:solidFill>
+                            <a:srgbClr val="252A31"/>
+                          </a:solidFill>
+                          <a:latin typeface="Meiryo"/>
+                        </a:rPr>
+                        <a:t/>
+                      </a:r>
+                    </a:p>
+                  </a:txBody>
+                  <a:tcPr marL="63500" marR="63500" marT="25400" marB="25400" anchor="ctr">
+                    <a:solidFill>
+                      <a:srgbClr val="FFFFFF"/>
+                    </a:solidFill>
+                  </a:tcPr>
+                </a:tc>
+                <a:tc>
+                  <a:txBody>
+                    <a:bodyPr wrap="square"/>
+                    <a:lstStyle/>
+                    <a:p>
+                      <a:pPr algn="l">
+                        <a:lnSpc>
+                          <a:spcPct val="98000"/>
+                        </a:lnSpc>
+                      </a:pPr>
+                      <a:r>
+                        <a:rPr sz="800" b="0">
+                          <a:solidFill>
+                            <a:srgbClr val="252A31"/>
+                          </a:solidFill>
+                          <a:latin typeface="Meiryo"/>
+                        </a:rPr>
+                        <a:t/>
+                      </a:r>
+                    </a:p>
+                  </a:txBody>
+                  <a:tcPr marL="63500" marR="63500" marT="25400" marB="25400" anchor="ctr">
+                    <a:solidFill>
+                      <a:srgbClr val="FFFFFF"/>
+                    </a:solidFill>
+                  </a:tcPr>
+                </a:tc>
+                <a:tc>
+                  <a:txBody>
+                    <a:bodyPr wrap="square"/>
+                    <a:lstStyle/>
+                    <a:p>
+                      <a:pPr algn="ctr">
+                        <a:lnSpc>
+                          <a:spcPct val="98000"/>
+                        </a:lnSpc>
+                      </a:pPr>
+                      <a:r>
+                        <a:rPr sz="900" b="1">
+                          <a:solidFill>
+                            <a:srgbClr val="FFFFFF"/>
+                          </a:solidFill>
+                          <a:latin typeface="Meiryo"/>
+                        </a:rPr>
+                        <a:t>●</a:t>
+                      </a:r>
+                    </a:p>
+                  </a:txBody>
+                  <a:tcPr marL="63500" marR="63500" marT="25400" marB="25400" anchor="ctr">
+                    <a:solidFill>
+                      <a:srgbClr val="6B7280"/>
+                    </a:solidFill>
+                  </a:tcPr>
+                </a:tc>
+                <a:tc>
+                  <a:txBody>
+                    <a:bodyPr wrap="square"/>
+                    <a:lstStyle/>
+                    <a:p>
+                      <a:pPr algn="ctr">
+                        <a:lnSpc>
+                          <a:spcPct val="98000"/>
+                        </a:lnSpc>
+                      </a:pPr>
+                      <a:r>
+                        <a:rPr sz="950" b="1">
+                          <a:solidFill>
+                            <a:srgbClr val="1F385C"/>
+                          </a:solidFill>
+                          <a:latin typeface="Meiryo"/>
+                        </a:rPr>
+                        <a:t>5</a:t>
+                      </a:r>
+                    </a:p>
+                  </a:txBody>
+                  <a:tcPr marL="63500" marR="63500" marT="25400" marB="25400" anchor="ctr">
+                    <a:solidFill>
+                      <a:srgbClr val="FFFFFF"/>
+                    </a:solidFill>
+                  </a:tcPr>
+                </a:tc>
+              </a:tr>
+              <a:tr h="338328">
+                <a:tc>
+                  <a:txBody>
+                    <a:bodyPr wrap="square"/>
+                    <a:lstStyle/>
+                    <a:p>
+                      <a:pPr algn="ctr">
+                        <a:lnSpc>
+                          <a:spcPct val="98000"/>
+                        </a:lnSpc>
+                      </a:pPr>
+                      <a:r>
+                        <a:rPr sz="950" b="1">
                           <a:solidFill>
                             <a:srgbClr val="1F385C"/>
                           </a:solidFill>
@@ -23774,7 +25563,7 @@
                         </a:lnSpc>
                       </a:pPr>
                       <a:r>
-                        <a:rPr sz="880" b="1">
+                        <a:rPr sz="800" b="1">
                           <a:solidFill>
                             <a:srgbClr val="252A31"/>
                           </a:solidFill>
@@ -23801,7 +25590,7 @@
                         </a:lnSpc>
                       </a:pPr>
                       <a:r>
-                        <a:rPr sz="950" b="1">
+                        <a:rPr sz="900" b="1">
                           <a:solidFill>
                             <a:srgbClr val="B03A2E"/>
                           </a:solidFill>
@@ -23822,19 +25611,127 @@
                     <a:bodyPr wrap="square"/>
                     <a:lstStyle/>
                     <a:p>
+                      <a:pPr algn="ctr">
+                        <a:lnSpc>
+                          <a:spcPct val="98000"/>
+                        </a:lnSpc>
+                      </a:pPr>
+                      <a:r>
+                        <a:rPr sz="900" b="1">
+                          <a:solidFill>
+                            <a:srgbClr val="FFFFFF"/>
+                          </a:solidFill>
+                          <a:latin typeface="Meiryo"/>
+                        </a:rPr>
+                        <a:t>●</a:t>
+                      </a:r>
+                    </a:p>
+                  </a:txBody>
+                  <a:tcPr marL="63500" marR="63500" marT="25400" marB="25400" anchor="ctr">
+                    <a:solidFill>
+                      <a:srgbClr val="745CA6"/>
+                    </a:solidFill>
+                  </a:tcPr>
+                </a:tc>
+                <a:tc>
+                  <a:txBody>
+                    <a:bodyPr wrap="square"/>
+                    <a:lstStyle/>
+                    <a:p>
+                      <a:pPr algn="ctr">
+                        <a:lnSpc>
+                          <a:spcPct val="98000"/>
+                        </a:lnSpc>
+                      </a:pPr>
+                      <a:r>
+                        <a:rPr sz="900" b="1">
+                          <a:solidFill>
+                            <a:srgbClr val="FFFFFF"/>
+                          </a:solidFill>
+                          <a:latin typeface="Meiryo"/>
+                        </a:rPr>
+                        <a:t>●</a:t>
+                      </a:r>
+                    </a:p>
+                  </a:txBody>
+                  <a:tcPr marL="63500" marR="63500" marT="25400" marB="25400" anchor="ctr">
+                    <a:solidFill>
+                      <a:srgbClr val="0B72C4"/>
+                    </a:solidFill>
+                  </a:tcPr>
+                </a:tc>
+                <a:tc>
+                  <a:txBody>
+                    <a:bodyPr wrap="square"/>
+                    <a:lstStyle/>
+                    <a:p>
+                      <a:pPr algn="ctr">
+                        <a:lnSpc>
+                          <a:spcPct val="98000"/>
+                        </a:lnSpc>
+                      </a:pPr>
+                      <a:r>
+                        <a:rPr sz="900" b="1">
+                          <a:solidFill>
+                            <a:srgbClr val="FFFFFF"/>
+                          </a:solidFill>
+                          <a:latin typeface="Meiryo"/>
+                        </a:rPr>
+                        <a:t>●</a:t>
+                      </a:r>
+                    </a:p>
+                  </a:txBody>
+                  <a:tcPr marL="63500" marR="63500" marT="25400" marB="25400" anchor="ctr">
+                    <a:solidFill>
+                      <a:srgbClr val="036C70"/>
+                    </a:solidFill>
+                  </a:tcPr>
+                </a:tc>
+                <a:tc>
+                  <a:txBody>
+                    <a:bodyPr wrap="square"/>
+                    <a:lstStyle/>
+                    <a:p>
+                      <a:pPr algn="ctr">
+                        <a:lnSpc>
+                          <a:spcPct val="98000"/>
+                        </a:lnSpc>
+                      </a:pPr>
+                      <a:r>
+                        <a:rPr sz="900" b="1">
+                          <a:solidFill>
+                            <a:srgbClr val="FFFFFF"/>
+                          </a:solidFill>
+                          <a:latin typeface="Meiryo"/>
+                        </a:rPr>
+                        <a:t>●</a:t>
+                      </a:r>
+                    </a:p>
+                  </a:txBody>
+                  <a:tcPr marL="63500" marR="63500" marT="25400" marB="25400" anchor="ctr">
+                    <a:solidFill>
+                      <a:srgbClr val="4B53BC"/>
+                    </a:solidFill>
+                  </a:tcPr>
+                </a:tc>
+                <a:tc>
+                  <a:txBody>
+                    <a:bodyPr wrap="square"/>
+                    <a:lstStyle/>
+                    <a:p>
                       <a:pPr algn="l">
                         <a:lnSpc>
                           <a:spcPct val="98000"/>
                         </a:lnSpc>
                       </a:pPr>
                       <a:r>
-                        <a:rPr sz="840" b="0">
+                        <a:rPr sz="800" b="0">
                           <a:solidFill>
                             <a:srgbClr val="252A31"/>
                           </a:solidFill>
                           <a:latin typeface="Meiryo"/>
                         </a:rPr>
-                        <a:t>CS・PA・SP・Teams・Word/PPT（5-6）</a:t>
+                        <a:t/>
                       </a:r>
                     </a:p>
                   </a:txBody>
@@ -23855,13 +25752,13 @@
                         </a:lnSpc>
                       </a:pPr>
                       <a:r>
-                        <a:rPr sz="850" b="0">
+                        <a:rPr sz="800" b="0">
                           <a:solidFill>
                             <a:srgbClr val="252A31"/>
                           </a:solidFill>
                           <a:latin typeface="Meiryo"/>
                         </a:rPr>
-                        <a:t>外部Web参照禁止で案の再設計が必要</a:t>
+                        <a:t/>
                       </a:r>
                     </a:p>
                   </a:txBody>
@@ -23871,8 +25768,60 @@
                     </a:solidFill>
                   </a:tcPr>
                 </a:tc>
-              </a:tr>
-              <a:tr h="347472">
+                <a:tc>
+                  <a:txBody>
+                    <a:bodyPr wrap="square"/>
+                    <a:lstStyle/>
+                    <a:p>
+                      <a:pPr algn="l">
+                        <a:lnSpc>
+                          <a:spcPct val="98000"/>
+                        </a:lnSpc>
+                      </a:pPr>
+                      <a:r>
+                        <a:rPr sz="800" b="0">
+                          <a:solidFill>
+                            <a:srgbClr val="252A31"/>
+                          </a:solidFill>
+                          <a:latin typeface="Meiryo"/>
+                        </a:rPr>
+                        <a:t/>
+                      </a:r>
+                    </a:p>
+                  </a:txBody>
+                  <a:tcPr marL="63500" marR="63500" marT="25400" marB="25400" anchor="ctr">
+                    <a:solidFill>
+                      <a:srgbClr val="F2F4F7"/>
+                    </a:solidFill>
+                  </a:tcPr>
+                </a:tc>
+                <a:tc>
+                  <a:txBody>
+                    <a:bodyPr wrap="square"/>
+                    <a:lstStyle/>
+                    <a:p>
+                      <a:pPr algn="l">
+                        <a:lnSpc>
+                          <a:spcPct val="98000"/>
+                        </a:lnSpc>
+                      </a:pPr>
+                      <a:r>
+                        <a:rPr sz="800" b="0">
+                          <a:solidFill>
+                            <a:srgbClr val="252A31"/>
+                          </a:solidFill>
+                          <a:latin typeface="Meiryo"/>
+                        </a:rPr>
+                        <a:t/>
+                      </a:r>
+                    </a:p>
+                  </a:txBody>
+                  <a:tcPr marL="63500" marR="63500" marT="25400" marB="25400" anchor="ctr">
+                    <a:solidFill>
+                      <a:srgbClr val="F2F4F7"/>
+                    </a:solidFill>
+                  </a:tcPr>
+                </a:tc>
                 <a:tc>
                   <a:txBody>
                     <a:bodyPr wrap="square"/>
@@ -23884,7 +25833,90 @@
                         </a:lnSpc>
                       </a:pPr>
                       <a:r>
-                        <a:rPr sz="1000" b="1">
+                        <a:rPr sz="900" b="1">
+                          <a:solidFill>
+                            <a:srgbClr val="FFFFFF"/>
+                          </a:solidFill>
+                          <a:latin typeface="Meiryo"/>
+                        </a:rPr>
+                        <a:t>●</a:t>
+                      </a:r>
+                    </a:p>
+                  </a:txBody>
+                  <a:tcPr marL="63500" marR="63500" marT="25400" marB="25400" anchor="ctr">
+                    <a:solidFill>
+                      <a:srgbClr val="B0472A"/>
+                    </a:solidFill>
+                  </a:tcPr>
+                </a:tc>
+                <a:tc>
+                  <a:txBody>
+                    <a:bodyPr wrap="square"/>
+                    <a:lstStyle/>
+                    <a:p>
+                      <a:pPr algn="ctr">
+                        <a:lnSpc>
+                          <a:spcPct val="98000"/>
+                        </a:lnSpc>
+                      </a:pPr>
+                      <a:r>
+                        <a:rPr sz="900" b="1">
+                          <a:solidFill>
+                            <a:srgbClr val="FFFFFF"/>
+                          </a:solidFill>
+                          <a:latin typeface="Meiryo"/>
+                        </a:rPr>
+                        <a:t>●</a:t>
+                      </a:r>
+                    </a:p>
+                  </a:txBody>
+                  <a:tcPr marL="63500" marR="63500" marT="25400" marB="25400" anchor="ctr">
+                    <a:solidFill>
+                      <a:srgbClr val="6B7280"/>
+                    </a:solidFill>
+                  </a:tcPr>
+                </a:tc>
+                <a:tc>
+                  <a:txBody>
+                    <a:bodyPr wrap="square"/>
+                    <a:lstStyle/>
+                    <a:p>
+                      <a:pPr algn="ctr">
+                        <a:lnSpc>
+                          <a:spcPct val="98000"/>
+                        </a:lnSpc>
+                      </a:pPr>
+                      <a:r>
+                        <a:rPr sz="950" b="1">
+                          <a:solidFill>
+                            <a:srgbClr val="1F385C"/>
+                          </a:solidFill>
+                          <a:latin typeface="Meiryo"/>
+                        </a:rPr>
+                        <a:t>6</a:t>
+                      </a:r>
+                    </a:p>
+                  </a:txBody>
+                  <a:tcPr marL="63500" marR="63500" marT="25400" marB="25400" anchor="ctr">
+                    <a:solidFill>
+                      <a:srgbClr val="F2F4F7"/>
+                    </a:solidFill>
+                  </a:tcPr>
+                </a:tc>
+              </a:tr>
+              <a:tr h="338328">
+                <a:tc>
+                  <a:txBody>
+                    <a:bodyPr wrap="square"/>
+                    <a:lstStyle/>
+                    <a:p>
+                      <a:pPr algn="ctr">
+                        <a:lnSpc>
+                          <a:spcPct val="98000"/>
+                        </a:lnSpc>
+                      </a:pPr>
+                      <a:r>
+                        <a:rPr sz="950" b="1">
                           <a:solidFill>
                             <a:srgbClr val="1F385C"/>
                           </a:solidFill>
@@ -23911,7 +25943,7 @@
                         </a:lnSpc>
                       </a:pPr>
                       <a:r>
-                        <a:rPr sz="880" b="1">
+                        <a:rPr sz="800" b="1">
                           <a:solidFill>
                             <a:srgbClr val="252A31"/>
                           </a:solidFill>
@@ -23938,7 +25970,7 @@
                         </a:lnSpc>
                       </a:pPr>
                       <a:r>
-                        <a:rPr sz="950" b="1">
+                        <a:rPr sz="900" b="1">
                           <a:solidFill>
                             <a:srgbClr val="2E8B9E"/>
                           </a:solidFill>
@@ -23959,19 +25991,181 @@
                     <a:bodyPr wrap="square"/>
                     <a:lstStyle/>
                     <a:p>
+                      <a:pPr algn="ctr">
+                        <a:lnSpc>
+                          <a:spcPct val="98000"/>
+                        </a:lnSpc>
+                      </a:pPr>
+                      <a:r>
+                        <a:rPr sz="900" b="1">
+                          <a:solidFill>
+                            <a:srgbClr val="FFFFFF"/>
+                          </a:solidFill>
+                          <a:latin typeface="Meiryo"/>
+                        </a:rPr>
+                        <a:t>●</a:t>
+                      </a:r>
+                    </a:p>
+                  </a:txBody>
+                  <a:tcPr marL="63500" marR="63500" marT="25400" marB="25400" anchor="ctr">
+                    <a:solidFill>
+                      <a:srgbClr val="745CA6"/>
+                    </a:solidFill>
+                  </a:tcPr>
+                </a:tc>
+                <a:tc>
+                  <a:txBody>
+                    <a:bodyPr wrap="square"/>
+                    <a:lstStyle/>
+                    <a:p>
+                      <a:pPr algn="ctr">
+                        <a:lnSpc>
+                          <a:spcPct val="98000"/>
+                        </a:lnSpc>
+                      </a:pPr>
+                      <a:r>
+                        <a:rPr sz="900" b="1">
+                          <a:solidFill>
+                            <a:srgbClr val="FFFFFF"/>
+                          </a:solidFill>
+                          <a:latin typeface="Meiryo"/>
+                        </a:rPr>
+                        <a:t>●</a:t>
+                      </a:r>
+                    </a:p>
+                  </a:txBody>
+                  <a:tcPr marL="63500" marR="63500" marT="25400" marB="25400" anchor="ctr">
+                    <a:solidFill>
+                      <a:srgbClr val="0B72C4"/>
+                    </a:solidFill>
+                  </a:tcPr>
+                </a:tc>
+                <a:tc>
+                  <a:txBody>
+                    <a:bodyPr wrap="square"/>
+                    <a:lstStyle/>
+                    <a:p>
                       <a:pPr algn="l">
                         <a:lnSpc>
                           <a:spcPct val="98000"/>
                         </a:lnSpc>
                       </a:pPr>
                       <a:r>
-                        <a:rPr sz="840" b="0">
+                        <a:rPr sz="800" b="0">
                           <a:solidFill>
                             <a:srgbClr val="252A31"/>
                           </a:solidFill>
                           <a:latin typeface="Meiryo"/>
                         </a:rPr>
-                        <a:t>CS・Forms・PA・Teams・DB（5）</a:t>
+                        <a:t/>
+                      </a:r>
+                    </a:p>
+                  </a:txBody>
+                  <a:tcPr marL="63500" marR="63500" marT="25400" marB="25400" anchor="ctr">
+                    <a:solidFill>
+                      <a:srgbClr val="FFFFFF"/>
+                    </a:solidFill>
+                  </a:tcPr>
+                </a:tc>
+                <a:tc>
+                  <a:txBody>
+                    <a:bodyPr wrap="square"/>
+                    <a:lstStyle/>
+                    <a:p>
+                      <a:pPr algn="ctr">
+                        <a:lnSpc>
+                          <a:spcPct val="98000"/>
+                        </a:lnSpc>
+                      </a:pPr>
+                      <a:r>
+                        <a:rPr sz="900" b="1">
+                          <a:solidFill>
+                            <a:srgbClr val="FFFFFF"/>
+                          </a:solidFill>
+                          <a:latin typeface="Meiryo"/>
+                        </a:rPr>
+                        <a:t>●</a:t>
+                      </a:r>
+                    </a:p>
+                  </a:txBody>
+                  <a:tcPr marL="63500" marR="63500" marT="25400" marB="25400" anchor="ctr">
+                    <a:solidFill>
+                      <a:srgbClr val="4B53BC"/>
+                    </a:solidFill>
+                  </a:tcPr>
+                </a:tc>
+                <a:tc>
+                  <a:txBody>
+                    <a:bodyPr wrap="square"/>
+                    <a:lstStyle/>
+                    <a:p>
+                      <a:pPr algn="l">
+                        <a:lnSpc>
+                          <a:spcPct val="98000"/>
+                        </a:lnSpc>
+                      </a:pPr>
+                      <a:r>
+                        <a:rPr sz="800" b="0">
+                          <a:solidFill>
+                            <a:srgbClr val="252A31"/>
+                          </a:solidFill>
+                          <a:latin typeface="Meiryo"/>
+                        </a:rPr>
+                        <a:t/>
+                      </a:r>
+                    </a:p>
+                  </a:txBody>
+                  <a:tcPr marL="63500" marR="63500" marT="25400" marB="25400" anchor="ctr">
+                    <a:solidFill>
+                      <a:srgbClr val="FFFFFF"/>
+                    </a:solidFill>
+                  </a:tcPr>
+                </a:tc>
+                <a:tc>
+                  <a:txBody>
+                    <a:bodyPr wrap="square"/>
+                    <a:lstStyle/>
+                    <a:p>
+                      <a:pPr algn="ctr">
+                        <a:lnSpc>
+                          <a:spcPct val="98000"/>
+                        </a:lnSpc>
+                      </a:pPr>
+                      <a:r>
+                        <a:rPr sz="900" b="1">
+                          <a:solidFill>
+                            <a:srgbClr val="FFFFFF"/>
+                          </a:solidFill>
+                          <a:latin typeface="Meiryo"/>
+                        </a:rPr>
+                        <a:t>●</a:t>
+                      </a:r>
+                    </a:p>
+                  </a:txBody>
+                  <a:tcPr marL="63500" marR="63500" marT="25400" marB="25400" anchor="ctr">
+                    <a:solidFill>
+                      <a:srgbClr val="1F8A70"/>
+                    </a:solidFill>
+                  </a:tcPr>
+                </a:tc>
+                <a:tc>
+                  <a:txBody>
+                    <a:bodyPr wrap="square"/>
+                    <a:lstStyle/>
+                    <a:p>
+                      <a:pPr algn="l">
+                        <a:lnSpc>
+                          <a:spcPct val="98000"/>
+                        </a:lnSpc>
+                      </a:pPr>
+                      <a:r>
+                        <a:rPr sz="800" b="0">
+                          <a:solidFill>
+                            <a:srgbClr val="252A31"/>
+                          </a:solidFill>
+                          <a:latin typeface="Meiryo"/>
+                        </a:rPr>
+                        <a:t/>
                       </a:r>
                     </a:p>
                   </a:txBody>
@@ -23992,13 +26186,13 @@
                         </a:lnSpc>
                       </a:pPr>
                       <a:r>
-                        <a:rPr sz="850" b="0">
+                        <a:rPr sz="800" b="0">
                           <a:solidFill>
                             <a:srgbClr val="252A31"/>
                           </a:solidFill>
                           <a:latin typeface="Meiryo"/>
                         </a:rPr>
-                        <a:t>M365標準のみ／制約は小さい</a:t>
+                        <a:t/>
                       </a:r>
                     </a:p>
                   </a:txBody>
@@ -24008,8 +26202,60 @@
                     </a:solidFill>
                   </a:tcPr>
                 </a:tc>
-              </a:tr>
-              <a:tr h="347472">
+                <a:tc>
+                  <a:txBody>
+                    <a:bodyPr wrap="square"/>
+                    <a:lstStyle/>
+                    <a:p>
+                      <a:pPr algn="l">
+                        <a:lnSpc>
+                          <a:spcPct val="98000"/>
+                        </a:lnSpc>
+                      </a:pPr>
+                      <a:r>
+                        <a:rPr sz="800" b="0">
+                          <a:solidFill>
+                            <a:srgbClr val="252A31"/>
+                          </a:solidFill>
+                          <a:latin typeface="Meiryo"/>
+                        </a:rPr>
+                        <a:t/>
+                      </a:r>
+                    </a:p>
+                  </a:txBody>
+                  <a:tcPr marL="63500" marR="63500" marT="25400" marB="25400" anchor="ctr">
+                    <a:solidFill>
+                      <a:srgbClr val="FFFFFF"/>
+                    </a:solidFill>
+                  </a:tcPr>
+                </a:tc>
+                <a:tc>
+                  <a:txBody>
+                    <a:bodyPr wrap="square"/>
+                    <a:lstStyle/>
+                    <a:p>
+                      <a:pPr algn="l">
+                        <a:lnSpc>
+                          <a:spcPct val="98000"/>
+                        </a:lnSpc>
+                      </a:pPr>
+                      <a:r>
+                        <a:rPr sz="800" b="0">
+                          <a:solidFill>
+                            <a:srgbClr val="252A31"/>
+                          </a:solidFill>
+                          <a:latin typeface="Meiryo"/>
+                        </a:rPr>
+                        <a:t/>
+                      </a:r>
+                    </a:p>
+                  </a:txBody>
+                  <a:tcPr marL="63500" marR="63500" marT="25400" marB="25400" anchor="ctr">
+                    <a:solidFill>
+                      <a:srgbClr val="FFFFFF"/>
+                    </a:solidFill>
+                  </a:tcPr>
+                </a:tc>
                 <a:tc>
                   <a:txBody>
                     <a:bodyPr wrap="square"/>
@@ -24021,7 +26267,36 @@
                         </a:lnSpc>
                       </a:pPr>
                       <a:r>
-                        <a:rPr sz="1000" b="1">
+                        <a:rPr sz="950" b="1">
+                          <a:solidFill>
+                            <a:srgbClr val="1F385C"/>
+                          </a:solidFill>
+                          <a:latin typeface="Meiryo"/>
+                        </a:rPr>
+                        <a:t>4</a:t>
+                      </a:r>
+                    </a:p>
+                  </a:txBody>
+                  <a:tcPr marL="63500" marR="63500" marT="25400" marB="25400" anchor="ctr">
+                    <a:solidFill>
+                      <a:srgbClr val="FFFFFF"/>
+                    </a:solidFill>
+                  </a:tcPr>
+                </a:tc>
+              </a:tr>
+              <a:tr h="338328">
+                <a:tc>
+                  <a:txBody>
+                    <a:bodyPr wrap="square"/>
+                    <a:lstStyle/>
+                    <a:p>
+                      <a:pPr algn="ctr">
+                        <a:lnSpc>
+                          <a:spcPct val="98000"/>
+                        </a:lnSpc>
+                      </a:pPr>
+                      <a:r>
+                        <a:rPr sz="950" b="1">
                           <a:solidFill>
                             <a:srgbClr val="1F385C"/>
                           </a:solidFill>
@@ -24048,7 +26323,7 @@
                         </a:lnSpc>
                       </a:pPr>
                       <a:r>
-                        <a:rPr sz="880" b="1">
+                        <a:rPr sz="800" b="1">
                           <a:solidFill>
                             <a:srgbClr val="252A31"/>
                           </a:solidFill>
@@ -24075,7 +26350,7 @@
                         </a:lnSpc>
                       </a:pPr>
                       <a:r>
-                        <a:rPr sz="950" b="1">
+                        <a:rPr sz="900" b="1">
                           <a:solidFill>
                             <a:srgbClr val="C98A1B"/>
                           </a:solidFill>
@@ -24096,19 +26371,154 @@
                     <a:bodyPr wrap="square"/>
                     <a:lstStyle/>
                     <a:p>
+                      <a:pPr algn="ctr">
+                        <a:lnSpc>
+                          <a:spcPct val="98000"/>
+                        </a:lnSpc>
+                      </a:pPr>
+                      <a:r>
+                        <a:rPr sz="900" b="1">
+                          <a:solidFill>
+                            <a:srgbClr val="FFFFFF"/>
+                          </a:solidFill>
+                          <a:latin typeface="Meiryo"/>
+                        </a:rPr>
+                        <a:t>●</a:t>
+                      </a:r>
+                    </a:p>
+                  </a:txBody>
+                  <a:tcPr marL="63500" marR="63500" marT="25400" marB="25400" anchor="ctr">
+                    <a:solidFill>
+                      <a:srgbClr val="745CA6"/>
+                    </a:solidFill>
+                  </a:tcPr>
+                </a:tc>
+                <a:tc>
+                  <a:txBody>
+                    <a:bodyPr wrap="square"/>
+                    <a:lstStyle/>
+                    <a:p>
+                      <a:pPr algn="ctr">
+                        <a:lnSpc>
+                          <a:spcPct val="98000"/>
+                        </a:lnSpc>
+                      </a:pPr>
+                      <a:r>
+                        <a:rPr sz="900" b="1">
+                          <a:solidFill>
+                            <a:srgbClr val="FFFFFF"/>
+                          </a:solidFill>
+                          <a:latin typeface="Meiryo"/>
+                        </a:rPr>
+                        <a:t>●</a:t>
+                      </a:r>
+                    </a:p>
+                  </a:txBody>
+                  <a:tcPr marL="63500" marR="63500" marT="25400" marB="25400" anchor="ctr">
+                    <a:solidFill>
+                      <a:srgbClr val="0B72C4"/>
+                    </a:solidFill>
+                  </a:tcPr>
+                </a:tc>
+                <a:tc>
+                  <a:txBody>
+                    <a:bodyPr wrap="square"/>
+                    <a:lstStyle/>
+                    <a:p>
+                      <a:pPr algn="ctr">
+                        <a:lnSpc>
+                          <a:spcPct val="98000"/>
+                        </a:lnSpc>
+                      </a:pPr>
+                      <a:r>
+                        <a:rPr sz="900" b="1">
+                          <a:solidFill>
+                            <a:srgbClr val="FFFFFF"/>
+                          </a:solidFill>
+                          <a:latin typeface="Meiryo"/>
+                        </a:rPr>
+                        <a:t>●</a:t>
+                      </a:r>
+                    </a:p>
+                  </a:txBody>
+                  <a:tcPr marL="63500" marR="63500" marT="25400" marB="25400" anchor="ctr">
+                    <a:solidFill>
+                      <a:srgbClr val="036C70"/>
+                    </a:solidFill>
+                  </a:tcPr>
+                </a:tc>
+                <a:tc>
+                  <a:txBody>
+                    <a:bodyPr wrap="square"/>
+                    <a:lstStyle/>
+                    <a:p>
+                      <a:pPr algn="ctr">
+                        <a:lnSpc>
+                          <a:spcPct val="98000"/>
+                        </a:lnSpc>
+                      </a:pPr>
+                      <a:r>
+                        <a:rPr sz="900" b="1">
+                          <a:solidFill>
+                            <a:srgbClr val="FFFFFF"/>
+                          </a:solidFill>
+                          <a:latin typeface="Meiryo"/>
+                        </a:rPr>
+                        <a:t>●</a:t>
+                      </a:r>
+                    </a:p>
+                  </a:txBody>
+                  <a:tcPr marL="63500" marR="63500" marT="25400" marB="25400" anchor="ctr">
+                    <a:solidFill>
+                      <a:srgbClr val="4B53BC"/>
+                    </a:solidFill>
+                  </a:tcPr>
+                </a:tc>
+                <a:tc>
+                  <a:txBody>
+                    <a:bodyPr wrap="square"/>
+                    <a:lstStyle/>
+                    <a:p>
+                      <a:pPr algn="ctr">
+                        <a:lnSpc>
+                          <a:spcPct val="98000"/>
+                        </a:lnSpc>
+                      </a:pPr>
+                      <a:r>
+                        <a:rPr sz="900" b="1">
+                          <a:solidFill>
+                            <a:srgbClr val="FFFFFF"/>
+                          </a:solidFill>
+                          <a:latin typeface="Meiryo"/>
+                        </a:rPr>
+                        <a:t>●</a:t>
+                      </a:r>
+                    </a:p>
+                  </a:txBody>
+                  <a:tcPr marL="63500" marR="63500" marT="25400" marB="25400" anchor="ctr">
+                    <a:solidFill>
+                      <a:srgbClr val="0A6FC2"/>
+                    </a:solidFill>
+                  </a:tcPr>
+                </a:tc>
+                <a:tc>
+                  <a:txBody>
+                    <a:bodyPr wrap="square"/>
+                    <a:lstStyle/>
+                    <a:p>
                       <a:pPr algn="l">
                         <a:lnSpc>
                           <a:spcPct val="98000"/>
                         </a:lnSpc>
                       </a:pPr>
                       <a:r>
-                        <a:rPr sz="840" b="0">
+                        <a:rPr sz="800" b="0">
                           <a:solidFill>
                             <a:srgbClr val="252A31"/>
                           </a:solidFill>
                           <a:latin typeface="Meiryo"/>
                         </a:rPr>
-                        <a:t>CS・PA・SP/OneDrive・Outlook・Teams・PPT（6）</a:t>
+                        <a:t/>
                       </a:r>
                     </a:p>
                   </a:txBody>
@@ -24129,13 +26539,13 @@
                         </a:lnSpc>
                       </a:pPr>
                       <a:r>
-                        <a:rPr sz="850" b="0">
+                        <a:rPr sz="800" b="0">
                           <a:solidFill>
                             <a:srgbClr val="252A31"/>
                           </a:solidFill>
                           <a:latin typeface="Meiryo"/>
                         </a:rPr>
-                        <a:t>ファイルサーバ／PPT自動生成の検証</a:t>
+                        <a:t/>
                       </a:r>
                     </a:p>
                   </a:txBody>
@@ -24145,8 +26555,33 @@
                     </a:solidFill>
                   </a:tcPr>
                 </a:tc>
-              </a:tr>
-              <a:tr h="347472">
+                <a:tc>
+                  <a:txBody>
+                    <a:bodyPr wrap="square"/>
+                    <a:lstStyle/>
+                    <a:p>
+                      <a:pPr algn="l">
+                        <a:lnSpc>
+                          <a:spcPct val="98000"/>
+                        </a:lnSpc>
+                      </a:pPr>
+                      <a:r>
+                        <a:rPr sz="800" b="0">
+                          <a:solidFill>
+                            <a:srgbClr val="252A31"/>
+                          </a:solidFill>
+                          <a:latin typeface="Meiryo"/>
+                        </a:rPr>
+                        <a:t/>
+                      </a:r>
+                    </a:p>
+                  </a:txBody>
+                  <a:tcPr marL="63500" marR="63500" marT="25400" marB="25400" anchor="ctr">
+                    <a:solidFill>
+                      <a:srgbClr val="F2F4F7"/>
+                    </a:solidFill>
+                  </a:tcPr>
+                </a:tc>
                 <a:tc>
                   <a:txBody>
                     <a:bodyPr wrap="square"/>
@@ -24158,7 +26593,90 @@
                         </a:lnSpc>
                       </a:pPr>
                       <a:r>
-                        <a:rPr sz="1000" b="1">
+                        <a:rPr sz="900" b="1">
+                          <a:solidFill>
+                            <a:srgbClr val="FFFFFF"/>
+                          </a:solidFill>
+                          <a:latin typeface="Meiryo"/>
+                        </a:rPr>
+                        <a:t>●</a:t>
+                      </a:r>
+                    </a:p>
+                  </a:txBody>
+                  <a:tcPr marL="63500" marR="63500" marT="25400" marB="25400" anchor="ctr">
+                    <a:solidFill>
+                      <a:srgbClr val="B0472A"/>
+                    </a:solidFill>
+                  </a:tcPr>
+                </a:tc>
+                <a:tc>
+                  <a:txBody>
+                    <a:bodyPr wrap="square"/>
+                    <a:lstStyle/>
+                    <a:p>
+                      <a:pPr algn="l">
+                        <a:lnSpc>
+                          <a:spcPct val="98000"/>
+                        </a:lnSpc>
+                      </a:pPr>
+                      <a:r>
+                        <a:rPr sz="800" b="0">
+                          <a:solidFill>
+                            <a:srgbClr val="252A31"/>
+                          </a:solidFill>
+                          <a:latin typeface="Meiryo"/>
+                        </a:rPr>
+                        <a:t/>
+                      </a:r>
+                    </a:p>
+                  </a:txBody>
+                  <a:tcPr marL="63500" marR="63500" marT="25400" marB="25400" anchor="ctr">
+                    <a:solidFill>
+                      <a:srgbClr val="F2F4F7"/>
+                    </a:solidFill>
+                  </a:tcPr>
+                </a:tc>
+                <a:tc>
+                  <a:txBody>
+                    <a:bodyPr wrap="square"/>
+                    <a:lstStyle/>
+                    <a:p>
+                      <a:pPr algn="ctr">
+                        <a:lnSpc>
+                          <a:spcPct val="98000"/>
+                        </a:lnSpc>
+                      </a:pPr>
+                      <a:r>
+                        <a:rPr sz="950" b="1">
+                          <a:solidFill>
+                            <a:srgbClr val="1F385C"/>
+                          </a:solidFill>
+                          <a:latin typeface="Meiryo"/>
+                        </a:rPr>
+                        <a:t>6</a:t>
+                      </a:r>
+                    </a:p>
+                  </a:txBody>
+                  <a:tcPr marL="63500" marR="63500" marT="25400" marB="25400" anchor="ctr">
+                    <a:solidFill>
+                      <a:srgbClr val="F2F4F7"/>
+                    </a:solidFill>
+                  </a:tcPr>
+                </a:tc>
+              </a:tr>
+              <a:tr h="338328">
+                <a:tc>
+                  <a:txBody>
+                    <a:bodyPr wrap="square"/>
+                    <a:lstStyle/>
+                    <a:p>
+                      <a:pPr algn="ctr">
+                        <a:lnSpc>
+                          <a:spcPct val="98000"/>
+                        </a:lnSpc>
+                      </a:pPr>
+                      <a:r>
+                        <a:rPr sz="950" b="1">
                           <a:solidFill>
                             <a:srgbClr val="1F385C"/>
                           </a:solidFill>
@@ -24185,7 +26703,7 @@
                         </a:lnSpc>
                       </a:pPr>
                       <a:r>
-                        <a:rPr sz="880" b="1">
+                        <a:rPr sz="800" b="1">
                           <a:solidFill>
                             <a:srgbClr val="252A31"/>
                           </a:solidFill>
@@ -24212,7 +26730,7 @@
                         </a:lnSpc>
                       </a:pPr>
                       <a:r>
-                        <a:rPr sz="950" b="1">
+                        <a:rPr sz="900" b="1">
                           <a:solidFill>
                             <a:srgbClr val="2E8B9E"/>
                           </a:solidFill>
@@ -24233,19 +26751,100 @@
                     <a:bodyPr wrap="square"/>
                     <a:lstStyle/>
                     <a:p>
+                      <a:pPr algn="ctr">
+                        <a:lnSpc>
+                          <a:spcPct val="98000"/>
+                        </a:lnSpc>
+                      </a:pPr>
+                      <a:r>
+                        <a:rPr sz="900" b="1">
+                          <a:solidFill>
+                            <a:srgbClr val="FFFFFF"/>
+                          </a:solidFill>
+                          <a:latin typeface="Meiryo"/>
+                        </a:rPr>
+                        <a:t>●</a:t>
+                      </a:r>
+                    </a:p>
+                  </a:txBody>
+                  <a:tcPr marL="63500" marR="63500" marT="25400" marB="25400" anchor="ctr">
+                    <a:solidFill>
+                      <a:srgbClr val="745CA6"/>
+                    </a:solidFill>
+                  </a:tcPr>
+                </a:tc>
+                <a:tc>
+                  <a:txBody>
+                    <a:bodyPr wrap="square"/>
+                    <a:lstStyle/>
+                    <a:p>
                       <a:pPr algn="l">
                         <a:lnSpc>
                           <a:spcPct val="98000"/>
                         </a:lnSpc>
                       </a:pPr>
                       <a:r>
-                        <a:rPr sz="840" b="0">
+                        <a:rPr sz="800" b="0">
                           <a:solidFill>
                             <a:srgbClr val="252A31"/>
                           </a:solidFill>
                           <a:latin typeface="Meiryo"/>
                         </a:rPr>
-                        <a:t>CS・SP・Excel/CSV（3-4）</a:t>
+                        <a:t/>
+                      </a:r>
+                    </a:p>
+                  </a:txBody>
+                  <a:tcPr marL="63500" marR="63500" marT="25400" marB="25400" anchor="ctr">
+                    <a:solidFill>
+                      <a:srgbClr val="FFFFFF"/>
+                    </a:solidFill>
+                  </a:tcPr>
+                </a:tc>
+                <a:tc>
+                  <a:txBody>
+                    <a:bodyPr wrap="square"/>
+                    <a:lstStyle/>
+                    <a:p>
+                      <a:pPr algn="ctr">
+                        <a:lnSpc>
+                          <a:spcPct val="98000"/>
+                        </a:lnSpc>
+                      </a:pPr>
+                      <a:r>
+                        <a:rPr sz="900" b="1">
+                          <a:solidFill>
+                            <a:srgbClr val="FFFFFF"/>
+                          </a:solidFill>
+                          <a:latin typeface="Meiryo"/>
+                        </a:rPr>
+                        <a:t>●</a:t>
+                      </a:r>
+                    </a:p>
+                  </a:txBody>
+                  <a:tcPr marL="63500" marR="63500" marT="25400" marB="25400" anchor="ctr">
+                    <a:solidFill>
+                      <a:srgbClr val="036C70"/>
+                    </a:solidFill>
+                  </a:tcPr>
+                </a:tc>
+                <a:tc>
+                  <a:txBody>
+                    <a:bodyPr wrap="square"/>
+                    <a:lstStyle/>
+                    <a:p>
+                      <a:pPr algn="l">
+                        <a:lnSpc>
+                          <a:spcPct val="98000"/>
+                        </a:lnSpc>
+                      </a:pPr>
+                      <a:r>
+                        <a:rPr sz="800" b="0">
+                          <a:solidFill>
+                            <a:srgbClr val="252A31"/>
+                          </a:solidFill>
+                          <a:latin typeface="Meiryo"/>
+                        </a:rPr>
+                        <a:t/>
                       </a:r>
                     </a:p>
                   </a:txBody>
@@ -24266,13 +26865,13 @@
                         </a:lnSpc>
                       </a:pPr>
                       <a:r>
-                        <a:rPr sz="850" b="0">
+                        <a:rPr sz="800" b="0">
                           <a:solidFill>
                             <a:srgbClr val="252A31"/>
                           </a:solidFill>
                           <a:latin typeface="Meiryo"/>
                         </a:rPr>
-                        <a:t>外部連携なし（人手取得データ前提）</a:t>
+                        <a:t/>
                       </a:r>
                     </a:p>
                   </a:txBody>
@@ -24282,8 +26881,60 @@
                     </a:solidFill>
                   </a:tcPr>
                 </a:tc>
-              </a:tr>
-              <a:tr h="347472">
+                <a:tc>
+                  <a:txBody>
+                    <a:bodyPr wrap="square"/>
+                    <a:lstStyle/>
+                    <a:p>
+                      <a:pPr algn="l">
+                        <a:lnSpc>
+                          <a:spcPct val="98000"/>
+                        </a:lnSpc>
+                      </a:pPr>
+                      <a:r>
+                        <a:rPr sz="800" b="0">
+                          <a:solidFill>
+                            <a:srgbClr val="252A31"/>
+                          </a:solidFill>
+                          <a:latin typeface="Meiryo"/>
+                        </a:rPr>
+                        <a:t/>
+                      </a:r>
+                    </a:p>
+                  </a:txBody>
+                  <a:tcPr marL="63500" marR="63500" marT="25400" marB="25400" anchor="ctr">
+                    <a:solidFill>
+                      <a:srgbClr val="FFFFFF"/>
+                    </a:solidFill>
+                  </a:tcPr>
+                </a:tc>
+                <a:tc>
+                  <a:txBody>
+                    <a:bodyPr wrap="square"/>
+                    <a:lstStyle/>
+                    <a:p>
+                      <a:pPr algn="l">
+                        <a:lnSpc>
+                          <a:spcPct val="98000"/>
+                        </a:lnSpc>
+                      </a:pPr>
+                      <a:r>
+                        <a:rPr sz="800" b="0">
+                          <a:solidFill>
+                            <a:srgbClr val="252A31"/>
+                          </a:solidFill>
+                          <a:latin typeface="Meiryo"/>
+                        </a:rPr>
+                        <a:t/>
+                      </a:r>
+                    </a:p>
+                  </a:txBody>
+                  <a:tcPr marL="63500" marR="63500" marT="25400" marB="25400" anchor="ctr">
+                    <a:solidFill>
+                      <a:srgbClr val="FFFFFF"/>
+                    </a:solidFill>
+                  </a:tcPr>
+                </a:tc>
                 <a:tc>
                   <a:txBody>
                     <a:bodyPr wrap="square"/>
@@ -24295,7 +26946,117 @@
                         </a:lnSpc>
                       </a:pPr>
                       <a:r>
-                        <a:rPr sz="1000" b="1">
+                        <a:rPr sz="900" b="1">
+                          <a:solidFill>
+                            <a:srgbClr val="FFFFFF"/>
+                          </a:solidFill>
+                          <a:latin typeface="Meiryo"/>
+                        </a:rPr>
+                        <a:t>●</a:t>
+                      </a:r>
+                    </a:p>
+                  </a:txBody>
+                  <a:tcPr marL="63500" marR="63500" marT="25400" marB="25400" anchor="ctr">
+                    <a:solidFill>
+                      <a:srgbClr val="217346"/>
+                    </a:solidFill>
+                  </a:tcPr>
+                </a:tc>
+                <a:tc>
+                  <a:txBody>
+                    <a:bodyPr wrap="square"/>
+                    <a:lstStyle/>
+                    <a:p>
+                      <a:pPr algn="l">
+                        <a:lnSpc>
+                          <a:spcPct val="98000"/>
+                        </a:lnSpc>
+                      </a:pPr>
+                      <a:r>
+                        <a:rPr sz="800" b="0">
+                          <a:solidFill>
+                            <a:srgbClr val="252A31"/>
+                          </a:solidFill>
+                          <a:latin typeface="Meiryo"/>
+                        </a:rPr>
+                        <a:t/>
+                      </a:r>
+                    </a:p>
+                  </a:txBody>
+                  <a:tcPr marL="63500" marR="63500" marT="25400" marB="25400" anchor="ctr">
+                    <a:solidFill>
+                      <a:srgbClr val="FFFFFF"/>
+                    </a:solidFill>
+                  </a:tcPr>
+                </a:tc>
+                <a:tc>
+                  <a:txBody>
+                    <a:bodyPr wrap="square"/>
+                    <a:lstStyle/>
+                    <a:p>
+                      <a:pPr algn="ctr">
+                        <a:lnSpc>
+                          <a:spcPct val="98000"/>
+                        </a:lnSpc>
+                      </a:pPr>
+                      <a:r>
+                        <a:rPr sz="900" b="1">
+                          <a:solidFill>
+                            <a:srgbClr val="FFFFFF"/>
+                          </a:solidFill>
+                          <a:latin typeface="Meiryo"/>
+                        </a:rPr>
+                        <a:t>●</a:t>
+                      </a:r>
+                    </a:p>
+                  </a:txBody>
+                  <a:tcPr marL="63500" marR="63500" marT="25400" marB="25400" anchor="ctr">
+                    <a:solidFill>
+                      <a:srgbClr val="6B7280"/>
+                    </a:solidFill>
+                  </a:tcPr>
+                </a:tc>
+                <a:tc>
+                  <a:txBody>
+                    <a:bodyPr wrap="square"/>
+                    <a:lstStyle/>
+                    <a:p>
+                      <a:pPr algn="ctr">
+                        <a:lnSpc>
+                          <a:spcPct val="98000"/>
+                        </a:lnSpc>
+                      </a:pPr>
+                      <a:r>
+                        <a:rPr sz="950" b="1">
+                          <a:solidFill>
+                            <a:srgbClr val="1F385C"/>
+                          </a:solidFill>
+                          <a:latin typeface="Meiryo"/>
+                        </a:rPr>
+                        <a:t>4</a:t>
+                      </a:r>
+                    </a:p>
+                  </a:txBody>
+                  <a:tcPr marL="63500" marR="63500" marT="25400" marB="25400" anchor="ctr">
+                    <a:solidFill>
+                      <a:srgbClr val="FFFFFF"/>
+                    </a:solidFill>
+                  </a:tcPr>
+                </a:tc>
+              </a:tr>
+              <a:tr h="338328">
+                <a:tc>
+                  <a:txBody>
+                    <a:bodyPr wrap="square"/>
+                    <a:lstStyle/>
+                    <a:p>
+                      <a:pPr algn="ctr">
+                        <a:lnSpc>
+                          <a:spcPct val="98000"/>
+                        </a:lnSpc>
+                      </a:pPr>
+                      <a:r>
+                        <a:rPr sz="950" b="1">
                           <a:solidFill>
                             <a:srgbClr val="1F385C"/>
                           </a:solidFill>
@@ -24322,7 +27083,7 @@
                         </a:lnSpc>
                       </a:pPr>
                       <a:r>
-                        <a:rPr sz="880" b="1">
+                        <a:rPr sz="800" b="1">
                           <a:solidFill>
                             <a:srgbClr val="252A31"/>
                           </a:solidFill>
@@ -24349,7 +27110,7 @@
                         </a:lnSpc>
                       </a:pPr>
                       <a:r>
-                        <a:rPr sz="950" b="1">
+                        <a:rPr sz="900" b="1">
                           <a:solidFill>
                             <a:srgbClr val="2E8B9E"/>
                           </a:solidFill>
@@ -24370,19 +27131,154 @@
                     <a:bodyPr wrap="square"/>
                     <a:lstStyle/>
                     <a:p>
+                      <a:pPr algn="ctr">
+                        <a:lnSpc>
+                          <a:spcPct val="98000"/>
+                        </a:lnSpc>
+                      </a:pPr>
+                      <a:r>
+                        <a:rPr sz="900" b="1">
+                          <a:solidFill>
+                            <a:srgbClr val="FFFFFF"/>
+                          </a:solidFill>
+                          <a:latin typeface="Meiryo"/>
+                        </a:rPr>
+                        <a:t>●</a:t>
+                      </a:r>
+                    </a:p>
+                  </a:txBody>
+                  <a:tcPr marL="63500" marR="63500" marT="25400" marB="25400" anchor="ctr">
+                    <a:solidFill>
+                      <a:srgbClr val="745CA6"/>
+                    </a:solidFill>
+                  </a:tcPr>
+                </a:tc>
+                <a:tc>
+                  <a:txBody>
+                    <a:bodyPr wrap="square"/>
+                    <a:lstStyle/>
+                    <a:p>
+                      <a:pPr algn="ctr">
+                        <a:lnSpc>
+                          <a:spcPct val="98000"/>
+                        </a:lnSpc>
+                      </a:pPr>
+                      <a:r>
+                        <a:rPr sz="900" b="1">
+                          <a:solidFill>
+                            <a:srgbClr val="FFFFFF"/>
+                          </a:solidFill>
+                          <a:latin typeface="Meiryo"/>
+                        </a:rPr>
+                        <a:t>●</a:t>
+                      </a:r>
+                    </a:p>
+                  </a:txBody>
+                  <a:tcPr marL="63500" marR="63500" marT="25400" marB="25400" anchor="ctr">
+                    <a:solidFill>
+                      <a:srgbClr val="0B72C4"/>
+                    </a:solidFill>
+                  </a:tcPr>
+                </a:tc>
+                <a:tc>
+                  <a:txBody>
+                    <a:bodyPr wrap="square"/>
+                    <a:lstStyle/>
+                    <a:p>
+                      <a:pPr algn="ctr">
+                        <a:lnSpc>
+                          <a:spcPct val="98000"/>
+                        </a:lnSpc>
+                      </a:pPr>
+                      <a:r>
+                        <a:rPr sz="900" b="1">
+                          <a:solidFill>
+                            <a:srgbClr val="FFFFFF"/>
+                          </a:solidFill>
+                          <a:latin typeface="Meiryo"/>
+                        </a:rPr>
+                        <a:t>●</a:t>
+                      </a:r>
+                    </a:p>
+                  </a:txBody>
+                  <a:tcPr marL="63500" marR="63500" marT="25400" marB="25400" anchor="ctr">
+                    <a:solidFill>
+                      <a:srgbClr val="036C70"/>
+                    </a:solidFill>
+                  </a:tcPr>
+                </a:tc>
+                <a:tc>
+                  <a:txBody>
+                    <a:bodyPr wrap="square"/>
+                    <a:lstStyle/>
+                    <a:p>
+                      <a:pPr algn="ctr">
+                        <a:lnSpc>
+                          <a:spcPct val="98000"/>
+                        </a:lnSpc>
+                      </a:pPr>
+                      <a:r>
+                        <a:rPr sz="900" b="1">
+                          <a:solidFill>
+                            <a:srgbClr val="FFFFFF"/>
+                          </a:solidFill>
+                          <a:latin typeface="Meiryo"/>
+                        </a:rPr>
+                        <a:t>●</a:t>
+                      </a:r>
+                    </a:p>
+                  </a:txBody>
+                  <a:tcPr marL="63500" marR="63500" marT="25400" marB="25400" anchor="ctr">
+                    <a:solidFill>
+                      <a:srgbClr val="4B53BC"/>
+                    </a:solidFill>
+                  </a:tcPr>
+                </a:tc>
+                <a:tc>
+                  <a:txBody>
+                    <a:bodyPr wrap="square"/>
+                    <a:lstStyle/>
+                    <a:p>
+                      <a:pPr algn="ctr">
+                        <a:lnSpc>
+                          <a:spcPct val="98000"/>
+                        </a:lnSpc>
+                      </a:pPr>
+                      <a:r>
+                        <a:rPr sz="900" b="1">
+                          <a:solidFill>
+                            <a:srgbClr val="FFFFFF"/>
+                          </a:solidFill>
+                          <a:latin typeface="Meiryo"/>
+                        </a:rPr>
+                        <a:t>●</a:t>
+                      </a:r>
+                    </a:p>
+                  </a:txBody>
+                  <a:tcPr marL="63500" marR="63500" marT="25400" marB="25400" anchor="ctr">
+                    <a:solidFill>
+                      <a:srgbClr val="0A6FC2"/>
+                    </a:solidFill>
+                  </a:tcPr>
+                </a:tc>
+                <a:tc>
+                  <a:txBody>
+                    <a:bodyPr wrap="square"/>
+                    <a:lstStyle/>
+                    <a:p>
                       <a:pPr algn="l">
                         <a:lnSpc>
                           <a:spcPct val="98000"/>
                         </a:lnSpc>
                       </a:pPr>
                       <a:r>
-                        <a:rPr sz="840" b="0">
+                        <a:rPr sz="800" b="0">
                           <a:solidFill>
                             <a:srgbClr val="252A31"/>
                           </a:solidFill>
                           <a:latin typeface="Meiryo"/>
                         </a:rPr>
-                        <a:t>CS・PA・Outlook・Teams・SP（5）</a:t>
+                        <a:t/>
                       </a:r>
                     </a:p>
                   </a:txBody>
@@ -24403,13 +27299,13 @@
                         </a:lnSpc>
                       </a:pPr>
                       <a:r>
-                        <a:rPr sz="850" b="0">
+                        <a:rPr sz="800" b="0">
                           <a:solidFill>
                             <a:srgbClr val="252A31"/>
                           </a:solidFill>
                           <a:latin typeface="Meiryo"/>
                         </a:rPr>
-                        <a:t>予定表・会議室・メール権限の整備</a:t>
+                        <a:t/>
                       </a:r>
                     </a:p>
                   </a:txBody>
@@ -24419,8 +27315,87 @@
                     </a:solidFill>
                   </a:tcPr>
                 </a:tc>
-              </a:tr>
-              <a:tr h="347472">
+                <a:tc>
+                  <a:txBody>
+                    <a:bodyPr wrap="square"/>
+                    <a:lstStyle/>
+                    <a:p>
+                      <a:pPr algn="l">
+                        <a:lnSpc>
+                          <a:spcPct val="98000"/>
+                        </a:lnSpc>
+                      </a:pPr>
+                      <a:r>
+                        <a:rPr sz="800" b="0">
+                          <a:solidFill>
+                            <a:srgbClr val="252A31"/>
+                          </a:solidFill>
+                          <a:latin typeface="Meiryo"/>
+                        </a:rPr>
+                        <a:t/>
+                      </a:r>
+                    </a:p>
+                  </a:txBody>
+                  <a:tcPr marL="63500" marR="63500" marT="25400" marB="25400" anchor="ctr">
+                    <a:solidFill>
+                      <a:srgbClr val="F2F4F7"/>
+                    </a:solidFill>
+                  </a:tcPr>
+                </a:tc>
+                <a:tc>
+                  <a:txBody>
+                    <a:bodyPr wrap="square"/>
+                    <a:lstStyle/>
+                    <a:p>
+                      <a:pPr algn="l">
+                        <a:lnSpc>
+                          <a:spcPct val="98000"/>
+                        </a:lnSpc>
+                      </a:pPr>
+                      <a:r>
+                        <a:rPr sz="800" b="0">
+                          <a:solidFill>
+                            <a:srgbClr val="252A31"/>
+                          </a:solidFill>
+                          <a:latin typeface="Meiryo"/>
+                        </a:rPr>
+                        <a:t/>
+                      </a:r>
+                    </a:p>
+                  </a:txBody>
+                  <a:tcPr marL="63500" marR="63500" marT="25400" marB="25400" anchor="ctr">
+                    <a:solidFill>
+                      <a:srgbClr val="F2F4F7"/>
+                    </a:solidFill>
+                  </a:tcPr>
+                </a:tc>
+                <a:tc>
+                  <a:txBody>
+                    <a:bodyPr wrap="square"/>
+                    <a:lstStyle/>
+                    <a:p>
+                      <a:pPr algn="l">
+                        <a:lnSpc>
+                          <a:spcPct val="98000"/>
+                        </a:lnSpc>
+                      </a:pPr>
+                      <a:r>
+                        <a:rPr sz="800" b="0">
+                          <a:solidFill>
+                            <a:srgbClr val="252A31"/>
+                          </a:solidFill>
+                          <a:latin typeface="Meiryo"/>
+                        </a:rPr>
+                        <a:t/>
+                      </a:r>
+                    </a:p>
+                  </a:txBody>
+                  <a:tcPr marL="63500" marR="63500" marT="25400" marB="25400" anchor="ctr">
+                    <a:solidFill>
+                      <a:srgbClr val="F2F4F7"/>
+                    </a:solidFill>
+                  </a:tcPr>
+                </a:tc>
                 <a:tc>
                   <a:txBody>
                     <a:bodyPr wrap="square"/>
@@ -24432,7 +27407,36 @@
                         </a:lnSpc>
                       </a:pPr>
                       <a:r>
-                        <a:rPr sz="1000" b="1">
+                        <a:rPr sz="950" b="1">
+                          <a:solidFill>
+                            <a:srgbClr val="1F385C"/>
+                          </a:solidFill>
+                          <a:latin typeface="Meiryo"/>
+                        </a:rPr>
+                        <a:t>5</a:t>
+                      </a:r>
+                    </a:p>
+                  </a:txBody>
+                  <a:tcPr marL="63500" marR="63500" marT="25400" marB="25400" anchor="ctr">
+                    <a:solidFill>
+                      <a:srgbClr val="F2F4F7"/>
+                    </a:solidFill>
+                  </a:tcPr>
+                </a:tc>
+              </a:tr>
+              <a:tr h="338328">
+                <a:tc>
+                  <a:txBody>
+                    <a:bodyPr wrap="square"/>
+                    <a:lstStyle/>
+                    <a:p>
+                      <a:pPr algn="ctr">
+                        <a:lnSpc>
+                          <a:spcPct val="98000"/>
+                        </a:lnSpc>
+                      </a:pPr>
+                      <a:r>
+                        <a:rPr sz="950" b="1">
                           <a:solidFill>
                             <a:srgbClr val="1F385C"/>
                           </a:solidFill>
@@ -24459,7 +27463,7 @@
                         </a:lnSpc>
                       </a:pPr>
                       <a:r>
-                        <a:rPr sz="880" b="1">
+                        <a:rPr sz="800" b="1">
                           <a:solidFill>
                             <a:srgbClr val="252A31"/>
                           </a:solidFill>
@@ -24486,7 +27490,7 @@
                         </a:lnSpc>
                       </a:pPr>
                       <a:r>
-                        <a:rPr sz="950" b="1">
+                        <a:rPr sz="900" b="1">
                           <a:solidFill>
                             <a:srgbClr val="C98A1B"/>
                           </a:solidFill>
@@ -24507,19 +27511,154 @@
                     <a:bodyPr wrap="square"/>
                     <a:lstStyle/>
                     <a:p>
+                      <a:pPr algn="ctr">
+                        <a:lnSpc>
+                          <a:spcPct val="98000"/>
+                        </a:lnSpc>
+                      </a:pPr>
+                      <a:r>
+                        <a:rPr sz="900" b="1">
+                          <a:solidFill>
+                            <a:srgbClr val="FFFFFF"/>
+                          </a:solidFill>
+                          <a:latin typeface="Meiryo"/>
+                        </a:rPr>
+                        <a:t>●</a:t>
+                      </a:r>
+                    </a:p>
+                  </a:txBody>
+                  <a:tcPr marL="63500" marR="63500" marT="25400" marB="25400" anchor="ctr">
+                    <a:solidFill>
+                      <a:srgbClr val="745CA6"/>
+                    </a:solidFill>
+                  </a:tcPr>
+                </a:tc>
+                <a:tc>
+                  <a:txBody>
+                    <a:bodyPr wrap="square"/>
+                    <a:lstStyle/>
+                    <a:p>
+                      <a:pPr algn="ctr">
+                        <a:lnSpc>
+                          <a:spcPct val="98000"/>
+                        </a:lnSpc>
+                      </a:pPr>
+                      <a:r>
+                        <a:rPr sz="900" b="1">
+                          <a:solidFill>
+                            <a:srgbClr val="FFFFFF"/>
+                          </a:solidFill>
+                          <a:latin typeface="Meiryo"/>
+                        </a:rPr>
+                        <a:t>●</a:t>
+                      </a:r>
+                    </a:p>
+                  </a:txBody>
+                  <a:tcPr marL="63500" marR="63500" marT="25400" marB="25400" anchor="ctr">
+                    <a:solidFill>
+                      <a:srgbClr val="0B72C4"/>
+                    </a:solidFill>
+                  </a:tcPr>
+                </a:tc>
+                <a:tc>
+                  <a:txBody>
+                    <a:bodyPr wrap="square"/>
+                    <a:lstStyle/>
+                    <a:p>
+                      <a:pPr algn="ctr">
+                        <a:lnSpc>
+                          <a:spcPct val="98000"/>
+                        </a:lnSpc>
+                      </a:pPr>
+                      <a:r>
+                        <a:rPr sz="900" b="1">
+                          <a:solidFill>
+                            <a:srgbClr val="FFFFFF"/>
+                          </a:solidFill>
+                          <a:latin typeface="Meiryo"/>
+                        </a:rPr>
+                        <a:t>●</a:t>
+                      </a:r>
+                    </a:p>
+                  </a:txBody>
+                  <a:tcPr marL="63500" marR="63500" marT="25400" marB="25400" anchor="ctr">
+                    <a:solidFill>
+                      <a:srgbClr val="036C70"/>
+                    </a:solidFill>
+                  </a:tcPr>
+                </a:tc>
+                <a:tc>
+                  <a:txBody>
+                    <a:bodyPr wrap="square"/>
+                    <a:lstStyle/>
+                    <a:p>
+                      <a:pPr algn="ctr">
+                        <a:lnSpc>
+                          <a:spcPct val="98000"/>
+                        </a:lnSpc>
+                      </a:pPr>
+                      <a:r>
+                        <a:rPr sz="900" b="1">
+                          <a:solidFill>
+                            <a:srgbClr val="FFFFFF"/>
+                          </a:solidFill>
+                          <a:latin typeface="Meiryo"/>
+                        </a:rPr>
+                        <a:t>●</a:t>
+                      </a:r>
+                    </a:p>
+                  </a:txBody>
+                  <a:tcPr marL="63500" marR="63500" marT="25400" marB="25400" anchor="ctr">
+                    <a:solidFill>
+                      <a:srgbClr val="4B53BC"/>
+                    </a:solidFill>
+                  </a:tcPr>
+                </a:tc>
+                <a:tc>
+                  <a:txBody>
+                    <a:bodyPr wrap="square"/>
+                    <a:lstStyle/>
+                    <a:p>
+                      <a:pPr algn="ctr">
+                        <a:lnSpc>
+                          <a:spcPct val="98000"/>
+                        </a:lnSpc>
+                      </a:pPr>
+                      <a:r>
+                        <a:rPr sz="900" b="1">
+                          <a:solidFill>
+                            <a:srgbClr val="FFFFFF"/>
+                          </a:solidFill>
+                          <a:latin typeface="Meiryo"/>
+                        </a:rPr>
+                        <a:t>●</a:t>
+                      </a:r>
+                    </a:p>
+                  </a:txBody>
+                  <a:tcPr marL="63500" marR="63500" marT="25400" marB="25400" anchor="ctr">
+                    <a:solidFill>
+                      <a:srgbClr val="0A6FC2"/>
+                    </a:solidFill>
+                  </a:tcPr>
+                </a:tc>
+                <a:tc>
+                  <a:txBody>
+                    <a:bodyPr wrap="square"/>
+                    <a:lstStyle/>
+                    <a:p>
                       <a:pPr algn="l">
                         <a:lnSpc>
                           <a:spcPct val="98000"/>
                         </a:lnSpc>
                       </a:pPr>
                       <a:r>
-                        <a:rPr sz="840" b="0">
+                        <a:rPr sz="800" b="0">
                           <a:solidFill>
                             <a:srgbClr val="252A31"/>
                           </a:solidFill>
                           <a:latin typeface="Meiryo"/>
                         </a:rPr>
-                        <a:t>CS・PA・Outlook・Excel・Teams・共有サーバ（6）</a:t>
+                        <a:t/>
                       </a:r>
                     </a:p>
                   </a:txBody>
@@ -24540,13 +27679,13 @@
                         </a:lnSpc>
                       </a:pPr>
                       <a:r>
-                        <a:rPr sz="850" b="0">
+                        <a:rPr sz="800" b="0">
                           <a:solidFill>
                             <a:srgbClr val="252A31"/>
                           </a:solidFill>
                           <a:latin typeface="Meiryo"/>
                         </a:rPr>
-                        <a:t>社外秘・共有サーバ・メール送信可否</a:t>
+                        <a:t/>
                       </a:r>
                     </a:p>
                   </a:txBody>
@@ -24556,8 +27695,6 @@
                     </a:solidFill>
                   </a:tcPr>
                 </a:tc>
-              </a:tr>
-              <a:tr h="347472">
                 <a:tc>
                   <a:txBody>
                     <a:bodyPr wrap="square"/>
@@ -24569,7 +27706,117 @@
                         </a:lnSpc>
                       </a:pPr>
                       <a:r>
-                        <a:rPr sz="1000" b="1">
+                        <a:rPr sz="900" b="1">
+                          <a:solidFill>
+                            <a:srgbClr val="FFFFFF"/>
+                          </a:solidFill>
+                          <a:latin typeface="Meiryo"/>
+                        </a:rPr>
+                        <a:t>●</a:t>
+                      </a:r>
+                    </a:p>
+                  </a:txBody>
+                  <a:tcPr marL="63500" marR="63500" marT="25400" marB="25400" anchor="ctr">
+                    <a:solidFill>
+                      <a:srgbClr val="217346"/>
+                    </a:solidFill>
+                  </a:tcPr>
+                </a:tc>
+                <a:tc>
+                  <a:txBody>
+                    <a:bodyPr wrap="square"/>
+                    <a:lstStyle/>
+                    <a:p>
+                      <a:pPr algn="l">
+                        <a:lnSpc>
+                          <a:spcPct val="98000"/>
+                        </a:lnSpc>
+                      </a:pPr>
+                      <a:r>
+                        <a:rPr sz="800" b="0">
+                          <a:solidFill>
+                            <a:srgbClr val="252A31"/>
+                          </a:solidFill>
+                          <a:latin typeface="Meiryo"/>
+                        </a:rPr>
+                        <a:t/>
+                      </a:r>
+                    </a:p>
+                  </a:txBody>
+                  <a:tcPr marL="63500" marR="63500" marT="25400" marB="25400" anchor="ctr">
+                    <a:solidFill>
+                      <a:srgbClr val="FFFFFF"/>
+                    </a:solidFill>
+                  </a:tcPr>
+                </a:tc>
+                <a:tc>
+                  <a:txBody>
+                    <a:bodyPr wrap="square"/>
+                    <a:lstStyle/>
+                    <a:p>
+                      <a:pPr algn="ctr">
+                        <a:lnSpc>
+                          <a:spcPct val="98000"/>
+                        </a:lnSpc>
+                      </a:pPr>
+                      <a:r>
+                        <a:rPr sz="900" b="1">
+                          <a:solidFill>
+                            <a:srgbClr val="FFFFFF"/>
+                          </a:solidFill>
+                          <a:latin typeface="Meiryo"/>
+                        </a:rPr>
+                        <a:t>●</a:t>
+                      </a:r>
+                    </a:p>
+                  </a:txBody>
+                  <a:tcPr marL="63500" marR="63500" marT="25400" marB="25400" anchor="ctr">
+                    <a:solidFill>
+                      <a:srgbClr val="6B7280"/>
+                    </a:solidFill>
+                  </a:tcPr>
+                </a:tc>
+                <a:tc>
+                  <a:txBody>
+                    <a:bodyPr wrap="square"/>
+                    <a:lstStyle/>
+                    <a:p>
+                      <a:pPr algn="ctr">
+                        <a:lnSpc>
+                          <a:spcPct val="98000"/>
+                        </a:lnSpc>
+                      </a:pPr>
+                      <a:r>
+                        <a:rPr sz="950" b="1">
+                          <a:solidFill>
+                            <a:srgbClr val="1F385C"/>
+                          </a:solidFill>
+                          <a:latin typeface="Meiryo"/>
+                        </a:rPr>
+                        <a:t>7</a:t>
+                      </a:r>
+                    </a:p>
+                  </a:txBody>
+                  <a:tcPr marL="63500" marR="63500" marT="25400" marB="25400" anchor="ctr">
+                    <a:solidFill>
+                      <a:srgbClr val="FFFFFF"/>
+                    </a:solidFill>
+                  </a:tcPr>
+                </a:tc>
+              </a:tr>
+              <a:tr h="338328">
+                <a:tc>
+                  <a:txBody>
+                    <a:bodyPr wrap="square"/>
+                    <a:lstStyle/>
+                    <a:p>
+                      <a:pPr algn="ctr">
+                        <a:lnSpc>
+                          <a:spcPct val="98000"/>
+                        </a:lnSpc>
+                      </a:pPr>
+                      <a:r>
+                        <a:rPr sz="950" b="1">
                           <a:solidFill>
                             <a:srgbClr val="1F385C"/>
                           </a:solidFill>
@@ -24596,7 +27843,7 @@
                         </a:lnSpc>
                       </a:pPr>
                       <a:r>
-                        <a:rPr sz="880" b="1">
+                        <a:rPr sz="800" b="1">
                           <a:solidFill>
                             <a:srgbClr val="252A31"/>
                           </a:solidFill>
@@ -24623,7 +27870,7 @@
                         </a:lnSpc>
                       </a:pPr>
                       <a:r>
-                        <a:rPr sz="950" b="1">
+                        <a:rPr sz="900" b="1">
                           <a:solidFill>
                             <a:srgbClr val="2E8B9E"/>
                           </a:solidFill>
@@ -24644,19 +27891,127 @@
                     <a:bodyPr wrap="square"/>
                     <a:lstStyle/>
                     <a:p>
+                      <a:pPr algn="ctr">
+                        <a:lnSpc>
+                          <a:spcPct val="98000"/>
+                        </a:lnSpc>
+                      </a:pPr>
+                      <a:r>
+                        <a:rPr sz="900" b="1">
+                          <a:solidFill>
+                            <a:srgbClr val="FFFFFF"/>
+                          </a:solidFill>
+                          <a:latin typeface="Meiryo"/>
+                        </a:rPr>
+                        <a:t>●</a:t>
+                      </a:r>
+                    </a:p>
+                  </a:txBody>
+                  <a:tcPr marL="63500" marR="63500" marT="25400" marB="25400" anchor="ctr">
+                    <a:solidFill>
+                      <a:srgbClr val="745CA6"/>
+                    </a:solidFill>
+                  </a:tcPr>
+                </a:tc>
+                <a:tc>
+                  <a:txBody>
+                    <a:bodyPr wrap="square"/>
+                    <a:lstStyle/>
+                    <a:p>
                       <a:pPr algn="l">
                         <a:lnSpc>
                           <a:spcPct val="98000"/>
                         </a:lnSpc>
                       </a:pPr>
                       <a:r>
-                        <a:rPr sz="840" b="0">
+                        <a:rPr sz="800" b="0">
                           <a:solidFill>
                             <a:srgbClr val="252A31"/>
                           </a:solidFill>
                           <a:latin typeface="Meiryo"/>
                         </a:rPr>
-                        <a:t>CS・Teams・SP・Word（4）</a:t>
+                        <a:t/>
+                      </a:r>
+                    </a:p>
+                  </a:txBody>
+                  <a:tcPr marL="63500" marR="63500" marT="25400" marB="25400" anchor="ctr">
+                    <a:solidFill>
+                      <a:srgbClr val="F2F4F7"/>
+                    </a:solidFill>
+                  </a:tcPr>
+                </a:tc>
+                <a:tc>
+                  <a:txBody>
+                    <a:bodyPr wrap="square"/>
+                    <a:lstStyle/>
+                    <a:p>
+                      <a:pPr algn="ctr">
+                        <a:lnSpc>
+                          <a:spcPct val="98000"/>
+                        </a:lnSpc>
+                      </a:pPr>
+                      <a:r>
+                        <a:rPr sz="900" b="1">
+                          <a:solidFill>
+                            <a:srgbClr val="FFFFFF"/>
+                          </a:solidFill>
+                          <a:latin typeface="Meiryo"/>
+                        </a:rPr>
+                        <a:t>●</a:t>
+                      </a:r>
+                    </a:p>
+                  </a:txBody>
+                  <a:tcPr marL="63500" marR="63500" marT="25400" marB="25400" anchor="ctr">
+                    <a:solidFill>
+                      <a:srgbClr val="036C70"/>
+                    </a:solidFill>
+                  </a:tcPr>
+                </a:tc>
+                <a:tc>
+                  <a:txBody>
+                    <a:bodyPr wrap="square"/>
+                    <a:lstStyle/>
+                    <a:p>
+                      <a:pPr algn="ctr">
+                        <a:lnSpc>
+                          <a:spcPct val="98000"/>
+                        </a:lnSpc>
+                      </a:pPr>
+                      <a:r>
+                        <a:rPr sz="900" b="1">
+                          <a:solidFill>
+                            <a:srgbClr val="FFFFFF"/>
+                          </a:solidFill>
+                          <a:latin typeface="Meiryo"/>
+                        </a:rPr>
+                        <a:t>●</a:t>
+                      </a:r>
+                    </a:p>
+                  </a:txBody>
+                  <a:tcPr marL="63500" marR="63500" marT="25400" marB="25400" anchor="ctr">
+                    <a:solidFill>
+                      <a:srgbClr val="4B53BC"/>
+                    </a:solidFill>
+                  </a:tcPr>
+                </a:tc>
+                <a:tc>
+                  <a:txBody>
+                    <a:bodyPr wrap="square"/>
+                    <a:lstStyle/>
+                    <a:p>
+                      <a:pPr algn="l">
+                        <a:lnSpc>
+                          <a:spcPct val="98000"/>
+                        </a:lnSpc>
+                      </a:pPr>
+                      <a:r>
+                        <a:rPr sz="800" b="0">
+                          <a:solidFill>
+                            <a:srgbClr val="252A31"/>
+                          </a:solidFill>
+                          <a:latin typeface="Meiryo"/>
+                        </a:rPr>
+                        <a:t/>
                       </a:r>
                     </a:p>
                   </a:txBody>
@@ -24677,13 +28032,13 @@
                         </a:lnSpc>
                       </a:pPr>
                       <a:r>
-                        <a:rPr sz="850" b="0">
+                        <a:rPr sz="800" b="0">
                           <a:solidFill>
                             <a:srgbClr val="252A31"/>
                           </a:solidFill>
                           <a:latin typeface="Meiryo"/>
                         </a:rPr>
-                        <a:t>トランスクリプト取得権限・転記精度</a:t>
+                        <a:t/>
                       </a:r>
                     </a:p>
                   </a:txBody>
@@ -24693,8 +28048,60 @@
                     </a:solidFill>
                   </a:tcPr>
                 </a:tc>
-              </a:tr>
-              <a:tr h="347472">
+                <a:tc>
+                  <a:txBody>
+                    <a:bodyPr wrap="square"/>
+                    <a:lstStyle/>
+                    <a:p>
+                      <a:pPr algn="l">
+                        <a:lnSpc>
+                          <a:spcPct val="98000"/>
+                        </a:lnSpc>
+                      </a:pPr>
+                      <a:r>
+                        <a:rPr sz="800" b="0">
+                          <a:solidFill>
+                            <a:srgbClr val="252A31"/>
+                          </a:solidFill>
+                          <a:latin typeface="Meiryo"/>
+                        </a:rPr>
+                        <a:t/>
+                      </a:r>
+                    </a:p>
+                  </a:txBody>
+                  <a:tcPr marL="63500" marR="63500" marT="25400" marB="25400" anchor="ctr">
+                    <a:solidFill>
+                      <a:srgbClr val="F2F4F7"/>
+                    </a:solidFill>
+                  </a:tcPr>
+                </a:tc>
+                <a:tc>
+                  <a:txBody>
+                    <a:bodyPr wrap="square"/>
+                    <a:lstStyle/>
+                    <a:p>
+                      <a:pPr algn="l">
+                        <a:lnSpc>
+                          <a:spcPct val="98000"/>
+                        </a:lnSpc>
+                      </a:pPr>
+                      <a:r>
+                        <a:rPr sz="800" b="0">
+                          <a:solidFill>
+                            <a:srgbClr val="252A31"/>
+                          </a:solidFill>
+                          <a:latin typeface="Meiryo"/>
+                        </a:rPr>
+                        <a:t/>
+                      </a:r>
+                    </a:p>
+                  </a:txBody>
+                  <a:tcPr marL="63500" marR="63500" marT="25400" marB="25400" anchor="ctr">
+                    <a:solidFill>
+                      <a:srgbClr val="F2F4F7"/>
+                    </a:solidFill>
+                  </a:tcPr>
+                </a:tc>
                 <a:tc>
                   <a:txBody>
                     <a:bodyPr wrap="square"/>
@@ -24706,7 +28113,90 @@
                         </a:lnSpc>
                       </a:pPr>
                       <a:r>
-                        <a:rPr sz="1000" b="1">
+                        <a:rPr sz="900" b="1">
+                          <a:solidFill>
+                            <a:srgbClr val="FFFFFF"/>
+                          </a:solidFill>
+                          <a:latin typeface="Meiryo"/>
+                        </a:rPr>
+                        <a:t>●</a:t>
+                      </a:r>
+                    </a:p>
+                  </a:txBody>
+                  <a:tcPr marL="63500" marR="63500" marT="25400" marB="25400" anchor="ctr">
+                    <a:solidFill>
+                      <a:srgbClr val="B0472A"/>
+                    </a:solidFill>
+                  </a:tcPr>
+                </a:tc>
+                <a:tc>
+                  <a:txBody>
+                    <a:bodyPr wrap="square"/>
+                    <a:lstStyle/>
+                    <a:p>
+                      <a:pPr algn="l">
+                        <a:lnSpc>
+                          <a:spcPct val="98000"/>
+                        </a:lnSpc>
+                      </a:pPr>
+                      <a:r>
+                        <a:rPr sz="800" b="0">
+                          <a:solidFill>
+                            <a:srgbClr val="252A31"/>
+                          </a:solidFill>
+                          <a:latin typeface="Meiryo"/>
+                        </a:rPr>
+                        <a:t/>
+                      </a:r>
+                    </a:p>
+                  </a:txBody>
+                  <a:tcPr marL="63500" marR="63500" marT="25400" marB="25400" anchor="ctr">
+                    <a:solidFill>
+                      <a:srgbClr val="F2F4F7"/>
+                    </a:solidFill>
+                  </a:tcPr>
+                </a:tc>
+                <a:tc>
+                  <a:txBody>
+                    <a:bodyPr wrap="square"/>
+                    <a:lstStyle/>
+                    <a:p>
+                      <a:pPr algn="ctr">
+                        <a:lnSpc>
+                          <a:spcPct val="98000"/>
+                        </a:lnSpc>
+                      </a:pPr>
+                      <a:r>
+                        <a:rPr sz="950" b="1">
+                          <a:solidFill>
+                            <a:srgbClr val="1F385C"/>
+                          </a:solidFill>
+                          <a:latin typeface="Meiryo"/>
+                        </a:rPr>
+                        <a:t>4</a:t>
+                      </a:r>
+                    </a:p>
+                  </a:txBody>
+                  <a:tcPr marL="63500" marR="63500" marT="25400" marB="25400" anchor="ctr">
+                    <a:solidFill>
+                      <a:srgbClr val="F2F4F7"/>
+                    </a:solidFill>
+                  </a:tcPr>
+                </a:tc>
+              </a:tr>
+              <a:tr h="338328">
+                <a:tc>
+                  <a:txBody>
+                    <a:bodyPr wrap="square"/>
+                    <a:lstStyle/>
+                    <a:p>
+                      <a:pPr algn="ctr">
+                        <a:lnSpc>
+                          <a:spcPct val="98000"/>
+                        </a:lnSpc>
+                      </a:pPr>
+                      <a:r>
+                        <a:rPr sz="950" b="1">
                           <a:solidFill>
                             <a:srgbClr val="1F385C"/>
                           </a:solidFill>
@@ -24733,7 +28223,7 @@
                         </a:lnSpc>
                       </a:pPr>
                       <a:r>
-                        <a:rPr sz="880" b="1">
+                        <a:rPr sz="800" b="1">
                           <a:solidFill>
                             <a:srgbClr val="252A31"/>
                           </a:solidFill>
@@ -24760,7 +28250,7 @@
                         </a:lnSpc>
                       </a:pPr>
                       <a:r>
-                        <a:rPr sz="950" b="1">
+                        <a:rPr sz="900" b="1">
                           <a:solidFill>
                             <a:srgbClr val="C98A1B"/>
                           </a:solidFill>
@@ -24781,19 +28271,127 @@
                     <a:bodyPr wrap="square"/>
                     <a:lstStyle/>
                     <a:p>
+                      <a:pPr algn="ctr">
+                        <a:lnSpc>
+                          <a:spcPct val="98000"/>
+                        </a:lnSpc>
+                      </a:pPr>
+                      <a:r>
+                        <a:rPr sz="900" b="1">
+                          <a:solidFill>
+                            <a:srgbClr val="FFFFFF"/>
+                          </a:solidFill>
+                          <a:latin typeface="Meiryo"/>
+                        </a:rPr>
+                        <a:t>●</a:t>
+                      </a:r>
+                    </a:p>
+                  </a:txBody>
+                  <a:tcPr marL="63500" marR="63500" marT="25400" marB="25400" anchor="ctr">
+                    <a:solidFill>
+                      <a:srgbClr val="745CA6"/>
+                    </a:solidFill>
+                  </a:tcPr>
+                </a:tc>
+                <a:tc>
+                  <a:txBody>
+                    <a:bodyPr wrap="square"/>
+                    <a:lstStyle/>
+                    <a:p>
                       <a:pPr algn="l">
                         <a:lnSpc>
                           <a:spcPct val="98000"/>
                         </a:lnSpc>
                       </a:pPr>
                       <a:r>
-                        <a:rPr sz="840" b="0">
+                        <a:rPr sz="800" b="0">
                           <a:solidFill>
                             <a:srgbClr val="252A31"/>
                           </a:solidFill>
                           <a:latin typeface="Meiryo"/>
                         </a:rPr>
-                        <a:t>CS・SP・Teams・FAQ（3-4）</a:t>
+                        <a:t/>
+                      </a:r>
+                    </a:p>
+                  </a:txBody>
+                  <a:tcPr marL="63500" marR="63500" marT="25400" marB="25400" anchor="ctr">
+                    <a:solidFill>
+                      <a:srgbClr val="FFFFFF"/>
+                    </a:solidFill>
+                  </a:tcPr>
+                </a:tc>
+                <a:tc>
+                  <a:txBody>
+                    <a:bodyPr wrap="square"/>
+                    <a:lstStyle/>
+                    <a:p>
+                      <a:pPr algn="ctr">
+                        <a:lnSpc>
+                          <a:spcPct val="98000"/>
+                        </a:lnSpc>
+                      </a:pPr>
+                      <a:r>
+                        <a:rPr sz="900" b="1">
+                          <a:solidFill>
+                            <a:srgbClr val="FFFFFF"/>
+                          </a:solidFill>
+                          <a:latin typeface="Meiryo"/>
+                        </a:rPr>
+                        <a:t>●</a:t>
+                      </a:r>
+                    </a:p>
+                  </a:txBody>
+                  <a:tcPr marL="63500" marR="63500" marT="25400" marB="25400" anchor="ctr">
+                    <a:solidFill>
+                      <a:srgbClr val="036C70"/>
+                    </a:solidFill>
+                  </a:tcPr>
+                </a:tc>
+                <a:tc>
+                  <a:txBody>
+                    <a:bodyPr wrap="square"/>
+                    <a:lstStyle/>
+                    <a:p>
+                      <a:pPr algn="ctr">
+                        <a:lnSpc>
+                          <a:spcPct val="98000"/>
+                        </a:lnSpc>
+                      </a:pPr>
+                      <a:r>
+                        <a:rPr sz="900" b="1">
+                          <a:solidFill>
+                            <a:srgbClr val="FFFFFF"/>
+                          </a:solidFill>
+                          <a:latin typeface="Meiryo"/>
+                        </a:rPr>
+                        <a:t>●</a:t>
+                      </a:r>
+                    </a:p>
+                  </a:txBody>
+                  <a:tcPr marL="63500" marR="63500" marT="25400" marB="25400" anchor="ctr">
+                    <a:solidFill>
+                      <a:srgbClr val="4B53BC"/>
+                    </a:solidFill>
+                  </a:tcPr>
+                </a:tc>
+                <a:tc>
+                  <a:txBody>
+                    <a:bodyPr wrap="square"/>
+                    <a:lstStyle/>
+                    <a:p>
+                      <a:pPr algn="l">
+                        <a:lnSpc>
+                          <a:spcPct val="98000"/>
+                        </a:lnSpc>
+                      </a:pPr>
+                      <a:r>
+                        <a:rPr sz="800" b="0">
+                          <a:solidFill>
+                            <a:srgbClr val="252A31"/>
+                          </a:solidFill>
+                          <a:latin typeface="Meiryo"/>
+                        </a:rPr>
+                        <a:t/>
                       </a:r>
                     </a:p>
                   </a:txBody>
@@ -24814,13 +28412,148 @@
                         </a:lnSpc>
                       </a:pPr>
                       <a:r>
-                        <a:rPr sz="850" b="0">
+                        <a:rPr sz="800" b="0">
                           <a:solidFill>
                             <a:srgbClr val="252A31"/>
                           </a:solidFill>
                           <a:latin typeface="Meiryo"/>
                         </a:rPr>
-                        <a:t>本番移行・FAQ品質・運用保守</a:t>
+                        <a:t/>
+                      </a:r>
+                    </a:p>
+                  </a:txBody>
+                  <a:tcPr marL="63500" marR="63500" marT="25400" marB="25400" anchor="ctr">
+                    <a:solidFill>
+                      <a:srgbClr val="FFFFFF"/>
+                    </a:solidFill>
+                  </a:tcPr>
+                </a:tc>
+                <a:tc>
+                  <a:txBody>
+                    <a:bodyPr wrap="square"/>
+                    <a:lstStyle/>
+                    <a:p>
+                      <a:pPr algn="l">
+                        <a:lnSpc>
+                          <a:spcPct val="98000"/>
+                        </a:lnSpc>
+                      </a:pPr>
+                      <a:r>
+                        <a:rPr sz="800" b="0">
+                          <a:solidFill>
+                            <a:srgbClr val="252A31"/>
+                          </a:solidFill>
+                          <a:latin typeface="Meiryo"/>
+                        </a:rPr>
+                        <a:t/>
+                      </a:r>
+                    </a:p>
+                  </a:txBody>
+                  <a:tcPr marL="63500" marR="63500" marT="25400" marB="25400" anchor="ctr">
+                    <a:solidFill>
+                      <a:srgbClr val="FFFFFF"/>
+                    </a:solidFill>
+                  </a:tcPr>
+                </a:tc>
+                <a:tc>
+                  <a:txBody>
+                    <a:bodyPr wrap="square"/>
+                    <a:lstStyle/>
+                    <a:p>
+                      <a:pPr algn="l">
+                        <a:lnSpc>
+                          <a:spcPct val="98000"/>
+                        </a:lnSpc>
+                      </a:pPr>
+                      <a:r>
+                        <a:rPr sz="800" b="0">
+                          <a:solidFill>
+                            <a:srgbClr val="252A31"/>
+                          </a:solidFill>
+                          <a:latin typeface="Meiryo"/>
+                        </a:rPr>
+                        <a:t/>
+                      </a:r>
+                    </a:p>
+                  </a:txBody>
+                  <a:tcPr marL="63500" marR="63500" marT="25400" marB="25400" anchor="ctr">
+                    <a:solidFill>
+                      <a:srgbClr val="FFFFFF"/>
+                    </a:solidFill>
+                  </a:tcPr>
+                </a:tc>
+                <a:tc>
+                  <a:txBody>
+                    <a:bodyPr wrap="square"/>
+                    <a:lstStyle/>
+                    <a:p>
+                      <a:pPr algn="l">
+                        <a:lnSpc>
+                          <a:spcPct val="98000"/>
+                        </a:lnSpc>
+                      </a:pPr>
+                      <a:r>
+                        <a:rPr sz="800" b="0">
+                          <a:solidFill>
+                            <a:srgbClr val="252A31"/>
+                          </a:solidFill>
+                          <a:latin typeface="Meiryo"/>
+                        </a:rPr>
+                        <a:t/>
+                      </a:r>
+                    </a:p>
+                  </a:txBody>
+                  <a:tcPr marL="63500" marR="63500" marT="25400" marB="25400" anchor="ctr">
+                    <a:solidFill>
+                      <a:srgbClr val="FFFFFF"/>
+                    </a:solidFill>
+                  </a:tcPr>
+                </a:tc>
+                <a:tc>
+                  <a:txBody>
+                    <a:bodyPr wrap="square"/>
+                    <a:lstStyle/>
+                    <a:p>
+                      <a:pPr algn="l">
+                        <a:lnSpc>
+                          <a:spcPct val="98000"/>
+                        </a:lnSpc>
+                      </a:pPr>
+                      <a:r>
+                        <a:rPr sz="800" b="0">
+                          <a:solidFill>
+                            <a:srgbClr val="252A31"/>
+                          </a:solidFill>
+                          <a:latin typeface="Meiryo"/>
+                        </a:rPr>
+                        <a:t/>
+                      </a:r>
+                    </a:p>
+                  </a:txBody>
+                  <a:tcPr marL="63500" marR="63500" marT="25400" marB="25400" anchor="ctr">
+                    <a:solidFill>
+                      <a:srgbClr val="FFFFFF"/>
+                    </a:solidFill>
+                  </a:tcPr>
+                </a:tc>
+                <a:tc>
+                  <a:txBody>
+                    <a:bodyPr wrap="square"/>
+                    <a:lstStyle/>
+                    <a:p>
+                      <a:pPr algn="ctr">
+                        <a:lnSpc>
+                          <a:spcPct val="98000"/>
+                        </a:lnSpc>
+                      </a:pPr>
+                      <a:r>
+                        <a:rPr sz="950" b="1">
+                          <a:solidFill>
+                            <a:srgbClr val="1F385C"/>
+                          </a:solidFill>
+                          <a:latin typeface="Meiryo"/>
+                        </a:rPr>
+                        <a:t>3</a:t>
                       </a:r>
                     </a:p>
                   </a:txBody>
@@ -24843,8 +28576,8 @@
         </p:nvSpPr>
         <p:spPr>
           <a:xfrm>
-            <a:off x="502920" y="5943600"/>
-            <a:ext cx="11201400" cy="512064"/>
+            <a:off x="502920" y="5916168"/>
+            <a:ext cx="11201400" cy="457200"/>
           </a:xfrm>
           <a:prstGeom prst="rect">
             <a:avLst/>
@@ -24887,8 +28620,8 @@
         </p:nvSpPr>
         <p:spPr>
           <a:xfrm>
-            <a:off x="731520" y="5961888"/>
-            <a:ext cx="10789920" cy="475488"/>
+            <a:off x="731520" y="5925312"/>
+            <a:ext cx="10789920" cy="438912"/>
           </a:xfrm>
           <a:prstGeom prst="rect">
             <a:avLst/>
@@ -24907,13 +28640,13 @@
               </a:lnSpc>
             </a:pPr>
             <a:r>
-              <a:rPr sz="950" b="0" i="0">
+              <a:rPr sz="900" b="0" i="0">
                 <a:solidFill>
                   <a:srgbClr val="252A31"/>
                 </a:solidFill>
                 <a:latin typeface="Meiryo"/>
               </a:rPr>
-              <a:t>難易度の目安 ▶ 　中：M365標準中心で実現性が高い　／　中〜高：連携・運用の検証項目が多い　／　高：外部連携・制約が大きく再設計や事務局判断を伴う　（※暫定評価・要調整）</a:t>
+              <a:t>●＝使用アプリ（列見出しの色が各アプリ）。「アプリ数」＝使用アプリの種類数（実装ボリュームの目安）。難易度・見込みは暫定評価・要調整。</a:t>
             </a:r>
           </a:p>
         </p:txBody>
@@ -29156,8 +32889,8 @@
         </p:nvSpPr>
         <p:spPr>
           <a:xfrm>
-            <a:off x="4892040" y="1234440"/>
-            <a:ext cx="1920240" cy="384048"/>
+            <a:off x="4114800" y="1234440"/>
+            <a:ext cx="1554480" cy="384048"/>
           </a:xfrm>
           <a:prstGeom prst="roundRect">
             <a:avLst/>
@@ -29209,8 +32942,61 @@
         </p:nvSpPr>
         <p:spPr>
           <a:xfrm>
-            <a:off x="7040880" y="1234440"/>
-            <a:ext cx="2880360" cy="384048"/>
+            <a:off x="5806440" y="1234440"/>
+            <a:ext cx="2194560" cy="384048"/>
+          </a:xfrm>
+          <a:prstGeom prst="roundRect">
+            <a:avLst/>
+          </a:prstGeom>
+          <a:solidFill>
+            <a:srgbClr val="2E8B9E"/>
+          </a:solidFill>
+          <a:ln>
+            <a:noFill/>
+          </a:ln>
+          <a:effectLst/>
+        </p:spPr>
+        <p:style>
+          <a:lnRef idx="1">
+            <a:schemeClr val="accent1"/>
+          </a:lnRef>
+          <a:fillRef idx="3">
+            <a:schemeClr val="accent1"/>
+          </a:fillRef>
+          <a:effectRef idx="2">
+            <a:schemeClr val="accent1"/>
+          </a:effectRef>
+          <a:fontRef idx="minor">
+            <a:schemeClr val="lt1"/>
+          </a:fontRef>
+        </p:style>
+        <p:txBody>
+          <a:bodyPr rtlCol="0" anchor="ctr" wrap="square" lIns="50800" rIns="50800" tIns="12700" bIns="12700"/>
+          <a:lstStyle/>
+          <a:p>
+            <a:pPr algn="ctr"/>
+            <a:r>
+              <a:rPr sz="1050" b="1">
+                <a:solidFill>
+                  <a:srgbClr val="FFFFFF"/>
+                </a:solidFill>
+                <a:latin typeface="Meiryo"/>
+              </a:rPr>
+              <a:t>10月見込み：○</a:t>
+            </a:r>
+          </a:p>
+        </p:txBody>
+      </p:sp>
+      <p:sp>
+        <p:nvSpPr>
+          <p:cNvPr id="22" name="Rounded Rectangle 21"/>
+          <p:cNvSpPr/>
+          <p:nvPr/>
+        </p:nvSpPr>
+        <p:spPr>
+          <a:xfrm>
+            <a:off x="8138160" y="1234440"/>
+            <a:ext cx="3200400" cy="384048"/>
           </a:xfrm>
           <a:prstGeom prst="roundRect">
             <a:avLst/>
@@ -29256,7 +33042,7 @@
       </p:sp>
       <p:sp>
         <p:nvSpPr>
-          <p:cNvPr id="22" name="Rectangle 21"/>
+          <p:cNvPr id="23" name="Rectangle 22"/>
           <p:cNvSpPr/>
           <p:nvPr/>
         </p:nvSpPr>
@@ -29300,7 +33086,7 @@
       </p:sp>
       <p:sp>
         <p:nvSpPr>
-          <p:cNvPr id="23" name="Rectangle 22"/>
+          <p:cNvPr id="24" name="Rectangle 23"/>
           <p:cNvSpPr/>
           <p:nvPr/>
         </p:nvSpPr>
@@ -29344,7 +33130,7 @@
       </p:sp>
       <p:sp>
         <p:nvSpPr>
-          <p:cNvPr id="24" name="TextBox 23"/>
+          <p:cNvPr id="25" name="TextBox 24"/>
           <p:cNvSpPr txBox="1"/>
           <p:nvPr/>
         </p:nvSpPr>
@@ -29383,7 +33169,7 @@
       </p:sp>
       <p:sp>
         <p:nvSpPr>
-          <p:cNvPr id="25" name="TextBox 24"/>
+          <p:cNvPr id="26" name="TextBox 25"/>
           <p:cNvSpPr txBox="1"/>
           <p:nvPr/>
         </p:nvSpPr>
@@ -29422,7 +33208,7 @@
       </p:sp>
       <p:sp>
         <p:nvSpPr>
-          <p:cNvPr id="26" name="Rectangle 25"/>
+          <p:cNvPr id="27" name="Rectangle 26"/>
           <p:cNvSpPr/>
           <p:nvPr/>
         </p:nvSpPr>
@@ -29466,7 +33252,7 @@
       </p:sp>
       <p:sp>
         <p:nvSpPr>
-          <p:cNvPr id="27" name="Rectangle 26"/>
+          <p:cNvPr id="28" name="Rectangle 27"/>
           <p:cNvSpPr/>
           <p:nvPr/>
         </p:nvSpPr>
@@ -29510,7 +33296,7 @@
       </p:sp>
       <p:sp>
         <p:nvSpPr>
-          <p:cNvPr id="28" name="TextBox 27"/>
+          <p:cNvPr id="29" name="TextBox 28"/>
           <p:cNvSpPr txBox="1"/>
           <p:nvPr/>
         </p:nvSpPr>
@@ -29549,7 +33335,7 @@
       </p:sp>
       <p:sp>
         <p:nvSpPr>
-          <p:cNvPr id="29" name="TextBox 28"/>
+          <p:cNvPr id="30" name="TextBox 29"/>
           <p:cNvSpPr txBox="1"/>
           <p:nvPr/>
         </p:nvSpPr>
@@ -29588,7 +33374,7 @@
       </p:sp>
       <p:sp>
         <p:nvSpPr>
-          <p:cNvPr id="30" name="Rectangle 29"/>
+          <p:cNvPr id="31" name="Rectangle 30"/>
           <p:cNvSpPr/>
           <p:nvPr/>
         </p:nvSpPr>
@@ -29632,7 +33418,7 @@
       </p:sp>
       <p:sp>
         <p:nvSpPr>
-          <p:cNvPr id="31" name="Rectangle 30"/>
+          <p:cNvPr id="32" name="Rectangle 31"/>
           <p:cNvSpPr/>
           <p:nvPr/>
         </p:nvSpPr>
@@ -29676,7 +33462,7 @@
       </p:sp>
       <p:sp>
         <p:nvSpPr>
-          <p:cNvPr id="32" name="TextBox 31"/>
+          <p:cNvPr id="33" name="TextBox 32"/>
           <p:cNvSpPr txBox="1"/>
           <p:nvPr/>
         </p:nvSpPr>
@@ -29715,7 +33501,7 @@
       </p:sp>
       <p:sp>
         <p:nvSpPr>
-          <p:cNvPr id="33" name="TextBox 32"/>
+          <p:cNvPr id="34" name="TextBox 33"/>
           <p:cNvSpPr txBox="1"/>
           <p:nvPr/>
         </p:nvSpPr>
@@ -29754,7 +33540,7 @@
       </p:sp>
       <p:sp>
         <p:nvSpPr>
-          <p:cNvPr id="34" name="Rectangle 33"/>
+          <p:cNvPr id="35" name="Rectangle 34"/>
           <p:cNvSpPr/>
           <p:nvPr/>
         </p:nvSpPr>
@@ -29798,7 +33584,7 @@
       </p:sp>
       <p:sp>
         <p:nvSpPr>
-          <p:cNvPr id="35" name="Rectangle 34"/>
+          <p:cNvPr id="36" name="Rectangle 35"/>
           <p:cNvSpPr/>
           <p:nvPr/>
         </p:nvSpPr>
@@ -29842,7 +33628,7 @@
       </p:sp>
       <p:sp>
         <p:nvSpPr>
-          <p:cNvPr id="36" name="TextBox 35"/>
+          <p:cNvPr id="37" name="TextBox 36"/>
           <p:cNvSpPr txBox="1"/>
           <p:nvPr/>
         </p:nvSpPr>
@@ -29881,7 +33667,7 @@
       </p:sp>
       <p:sp>
         <p:nvSpPr>
-          <p:cNvPr id="37" name="TextBox 36"/>
+          <p:cNvPr id="38" name="TextBox 37"/>
           <p:cNvSpPr txBox="1"/>
           <p:nvPr/>
         </p:nvSpPr>
@@ -29920,7 +33706,7 @@
       </p:sp>
       <p:sp>
         <p:nvSpPr>
-          <p:cNvPr id="38" name="Rectangle 37"/>
+          <p:cNvPr id="39" name="Rectangle 38"/>
           <p:cNvSpPr/>
           <p:nvPr/>
         </p:nvSpPr>
@@ -29964,7 +33750,7 @@
       </p:sp>
       <p:sp>
         <p:nvSpPr>
-          <p:cNvPr id="39" name="Rectangle 38"/>
+          <p:cNvPr id="40" name="Rectangle 39"/>
           <p:cNvSpPr/>
           <p:nvPr/>
         </p:nvSpPr>
@@ -30008,7 +33794,7 @@
       </p:sp>
       <p:sp>
         <p:nvSpPr>
-          <p:cNvPr id="40" name="TextBox 39"/>
+          <p:cNvPr id="41" name="TextBox 40"/>
           <p:cNvSpPr txBox="1"/>
           <p:nvPr/>
         </p:nvSpPr>
@@ -30047,7 +33833,7 @@
       </p:sp>
       <p:sp>
         <p:nvSpPr>
-          <p:cNvPr id="41" name="TextBox 40"/>
+          <p:cNvPr id="42" name="TextBox 41"/>
           <p:cNvSpPr txBox="1"/>
           <p:nvPr/>
         </p:nvSpPr>
@@ -30086,7 +33872,7 @@
       </p:sp>
       <p:sp>
         <p:nvSpPr>
-          <p:cNvPr id="42" name="Rectangle 41"/>
+          <p:cNvPr id="43" name="Rectangle 42"/>
           <p:cNvSpPr/>
           <p:nvPr/>
         </p:nvSpPr>
@@ -30130,7 +33916,7 @@
       </p:sp>
       <p:sp>
         <p:nvSpPr>
-          <p:cNvPr id="43" name="Rectangle 42"/>
+          <p:cNvPr id="44" name="Rectangle 43"/>
           <p:cNvSpPr/>
           <p:nvPr/>
         </p:nvSpPr>
@@ -30174,7 +33960,7 @@
       </p:sp>
       <p:sp>
         <p:nvSpPr>
-          <p:cNvPr id="44" name="TextBox 43"/>
+          <p:cNvPr id="45" name="TextBox 44"/>
           <p:cNvSpPr txBox="1"/>
           <p:nvPr/>
         </p:nvSpPr>
@@ -30213,7 +33999,7 @@
       </p:sp>
       <p:sp>
         <p:nvSpPr>
-          <p:cNvPr id="45" name="TextBox 44"/>
+          <p:cNvPr id="46" name="TextBox 45"/>
           <p:cNvSpPr txBox="1"/>
           <p:nvPr/>
         </p:nvSpPr>
@@ -31042,8 +34828,8 @@
         </p:nvSpPr>
         <p:spPr>
           <a:xfrm>
-            <a:off x="4892040" y="1234440"/>
-            <a:ext cx="1920240" cy="384048"/>
+            <a:off x="4114800" y="1234440"/>
+            <a:ext cx="1554480" cy="384048"/>
           </a:xfrm>
           <a:prstGeom prst="roundRect">
             <a:avLst/>
@@ -31095,8 +34881,61 @@
         </p:nvSpPr>
         <p:spPr>
           <a:xfrm>
-            <a:off x="7040880" y="1234440"/>
-            <a:ext cx="2880360" cy="384048"/>
+            <a:off x="5806440" y="1234440"/>
+            <a:ext cx="2194560" cy="384048"/>
+          </a:xfrm>
+          <a:prstGeom prst="roundRect">
+            <a:avLst/>
+          </a:prstGeom>
+          <a:solidFill>
+            <a:srgbClr val="2E8B9E"/>
+          </a:solidFill>
+          <a:ln>
+            <a:noFill/>
+          </a:ln>
+          <a:effectLst/>
+        </p:spPr>
+        <p:style>
+          <a:lnRef idx="1">
+            <a:schemeClr val="accent1"/>
+          </a:lnRef>
+          <a:fillRef idx="3">
+            <a:schemeClr val="accent1"/>
+          </a:fillRef>
+          <a:effectRef idx="2">
+            <a:schemeClr val="accent1"/>
+          </a:effectRef>
+          <a:fontRef idx="minor">
+            <a:schemeClr val="lt1"/>
+          </a:fontRef>
+        </p:style>
+        <p:txBody>
+          <a:bodyPr rtlCol="0" anchor="ctr" wrap="square" lIns="50800" rIns="50800" tIns="12700" bIns="12700"/>
+          <a:lstStyle/>
+          <a:p>
+            <a:pPr algn="ctr"/>
+            <a:r>
+              <a:rPr sz="1050" b="1">
+                <a:solidFill>
+                  <a:srgbClr val="FFFFFF"/>
+                </a:solidFill>
+                <a:latin typeface="Meiryo"/>
+              </a:rPr>
+              <a:t>10月見込み：○</a:t>
+            </a:r>
+          </a:p>
+        </p:txBody>
+      </p:sp>
+      <p:sp>
+        <p:nvSpPr>
+          <p:cNvPr id="22" name="Rounded Rectangle 21"/>
+          <p:cNvSpPr/>
+          <p:nvPr/>
+        </p:nvSpPr>
+        <p:spPr>
+          <a:xfrm>
+            <a:off x="8138160" y="1234440"/>
+            <a:ext cx="3200400" cy="384048"/>
           </a:xfrm>
           <a:prstGeom prst="roundRect">
             <a:avLst/>
@@ -31142,7 +34981,7 @@
       </p:sp>
       <p:sp>
         <p:nvSpPr>
-          <p:cNvPr id="22" name="Rectangle 21"/>
+          <p:cNvPr id="23" name="Rectangle 22"/>
           <p:cNvSpPr/>
           <p:nvPr/>
         </p:nvSpPr>
@@ -31186,7 +35025,7 @@
       </p:sp>
       <p:sp>
         <p:nvSpPr>
-          <p:cNvPr id="23" name="Rectangle 22"/>
+          <p:cNvPr id="24" name="Rectangle 23"/>
           <p:cNvSpPr/>
           <p:nvPr/>
         </p:nvSpPr>
@@ -31230,7 +35069,7 @@
       </p:sp>
       <p:sp>
         <p:nvSpPr>
-          <p:cNvPr id="24" name="TextBox 23"/>
+          <p:cNvPr id="25" name="TextBox 24"/>
           <p:cNvSpPr txBox="1"/>
           <p:nvPr/>
         </p:nvSpPr>
@@ -31269,7 +35108,7 @@
       </p:sp>
       <p:sp>
         <p:nvSpPr>
-          <p:cNvPr id="25" name="TextBox 24"/>
+          <p:cNvPr id="26" name="TextBox 25"/>
           <p:cNvSpPr txBox="1"/>
           <p:nvPr/>
         </p:nvSpPr>
@@ -31308,7 +35147,7 @@
       </p:sp>
       <p:sp>
         <p:nvSpPr>
-          <p:cNvPr id="26" name="Rectangle 25"/>
+          <p:cNvPr id="27" name="Rectangle 26"/>
           <p:cNvSpPr/>
           <p:nvPr/>
         </p:nvSpPr>
@@ -31352,7 +35191,7 @@
       </p:sp>
       <p:sp>
         <p:nvSpPr>
-          <p:cNvPr id="27" name="Rectangle 26"/>
+          <p:cNvPr id="28" name="Rectangle 27"/>
           <p:cNvSpPr/>
           <p:nvPr/>
         </p:nvSpPr>
@@ -31396,7 +35235,7 @@
       </p:sp>
       <p:sp>
         <p:nvSpPr>
-          <p:cNvPr id="28" name="TextBox 27"/>
+          <p:cNvPr id="29" name="TextBox 28"/>
           <p:cNvSpPr txBox="1"/>
           <p:nvPr/>
         </p:nvSpPr>
@@ -31435,7 +35274,7 @@
       </p:sp>
       <p:sp>
         <p:nvSpPr>
-          <p:cNvPr id="29" name="TextBox 28"/>
+          <p:cNvPr id="30" name="TextBox 29"/>
           <p:cNvSpPr txBox="1"/>
           <p:nvPr/>
         </p:nvSpPr>
@@ -31474,7 +35313,7 @@
       </p:sp>
       <p:sp>
         <p:nvSpPr>
-          <p:cNvPr id="30" name="Rectangle 29"/>
+          <p:cNvPr id="31" name="Rectangle 30"/>
           <p:cNvSpPr/>
           <p:nvPr/>
         </p:nvSpPr>
@@ -31518,7 +35357,7 @@
       </p:sp>
       <p:sp>
         <p:nvSpPr>
-          <p:cNvPr id="31" name="Rectangle 30"/>
+          <p:cNvPr id="32" name="Rectangle 31"/>
           <p:cNvSpPr/>
           <p:nvPr/>
         </p:nvSpPr>
@@ -31562,7 +35401,7 @@
       </p:sp>
       <p:sp>
         <p:nvSpPr>
-          <p:cNvPr id="32" name="TextBox 31"/>
+          <p:cNvPr id="33" name="TextBox 32"/>
           <p:cNvSpPr txBox="1"/>
           <p:nvPr/>
         </p:nvSpPr>
@@ -31601,7 +35440,7 @@
       </p:sp>
       <p:sp>
         <p:nvSpPr>
-          <p:cNvPr id="33" name="TextBox 32"/>
+          <p:cNvPr id="34" name="TextBox 33"/>
           <p:cNvSpPr txBox="1"/>
           <p:nvPr/>
         </p:nvSpPr>
@@ -31640,7 +35479,7 @@
       </p:sp>
       <p:sp>
         <p:nvSpPr>
-          <p:cNvPr id="34" name="Rectangle 33"/>
+          <p:cNvPr id="35" name="Rectangle 34"/>
           <p:cNvSpPr/>
           <p:nvPr/>
         </p:nvSpPr>
@@ -31684,7 +35523,7 @@
       </p:sp>
       <p:sp>
         <p:nvSpPr>
-          <p:cNvPr id="35" name="Rectangle 34"/>
+          <p:cNvPr id="36" name="Rectangle 35"/>
           <p:cNvSpPr/>
           <p:nvPr/>
         </p:nvSpPr>
@@ -31728,7 +35567,7 @@
       </p:sp>
       <p:sp>
         <p:nvSpPr>
-          <p:cNvPr id="36" name="TextBox 35"/>
+          <p:cNvPr id="37" name="TextBox 36"/>
           <p:cNvSpPr txBox="1"/>
           <p:nvPr/>
         </p:nvSpPr>
@@ -31767,7 +35606,7 @@
       </p:sp>
       <p:sp>
         <p:nvSpPr>
-          <p:cNvPr id="37" name="TextBox 36"/>
+          <p:cNvPr id="38" name="TextBox 37"/>
           <p:cNvSpPr txBox="1"/>
           <p:nvPr/>
         </p:nvSpPr>
@@ -31806,7 +35645,7 @@
       </p:sp>
       <p:sp>
         <p:nvSpPr>
-          <p:cNvPr id="38" name="Rectangle 37"/>
+          <p:cNvPr id="39" name="Rectangle 38"/>
           <p:cNvSpPr/>
           <p:nvPr/>
         </p:nvSpPr>
@@ -31850,7 +35689,7 @@
       </p:sp>
       <p:sp>
         <p:nvSpPr>
-          <p:cNvPr id="39" name="Rectangle 38"/>
+          <p:cNvPr id="40" name="Rectangle 39"/>
           <p:cNvSpPr/>
           <p:nvPr/>
         </p:nvSpPr>
@@ -31894,7 +35733,7 @@
       </p:sp>
       <p:sp>
         <p:nvSpPr>
-          <p:cNvPr id="40" name="TextBox 39"/>
+          <p:cNvPr id="41" name="TextBox 40"/>
           <p:cNvSpPr txBox="1"/>
           <p:nvPr/>
         </p:nvSpPr>
@@ -31933,7 +35772,7 @@
       </p:sp>
       <p:sp>
         <p:nvSpPr>
-          <p:cNvPr id="41" name="TextBox 40"/>
+          <p:cNvPr id="42" name="TextBox 41"/>
           <p:cNvSpPr txBox="1"/>
           <p:nvPr/>
         </p:nvSpPr>
@@ -31972,7 +35811,7 @@
       </p:sp>
       <p:sp>
         <p:nvSpPr>
-          <p:cNvPr id="42" name="Rectangle 41"/>
+          <p:cNvPr id="43" name="Rectangle 42"/>
           <p:cNvSpPr/>
           <p:nvPr/>
         </p:nvSpPr>
@@ -32016,7 +35855,7 @@
       </p:sp>
       <p:sp>
         <p:nvSpPr>
-          <p:cNvPr id="43" name="Rectangle 42"/>
+          <p:cNvPr id="44" name="Rectangle 43"/>
           <p:cNvSpPr/>
           <p:nvPr/>
         </p:nvSpPr>
@@ -32060,7 +35899,7 @@
       </p:sp>
       <p:sp>
         <p:nvSpPr>
-          <p:cNvPr id="44" name="TextBox 43"/>
+          <p:cNvPr id="45" name="TextBox 44"/>
           <p:cNvSpPr txBox="1"/>
           <p:nvPr/>
         </p:nvSpPr>
@@ -32099,7 +35938,7 @@
       </p:sp>
       <p:sp>
         <p:nvSpPr>
-          <p:cNvPr id="45" name="TextBox 44"/>
+          <p:cNvPr id="46" name="TextBox 45"/>
           <p:cNvSpPr txBox="1"/>
           <p:nvPr/>
         </p:nvSpPr>
@@ -32928,8 +36767,8 @@
         </p:nvSpPr>
         <p:spPr>
           <a:xfrm>
-            <a:off x="4892040" y="1234440"/>
-            <a:ext cx="1920240" cy="384048"/>
+            <a:off x="4114800" y="1234440"/>
+            <a:ext cx="1554480" cy="384048"/>
           </a:xfrm>
           <a:prstGeom prst="roundRect">
             <a:avLst/>
@@ -32981,8 +36820,61 @@
         </p:nvSpPr>
         <p:spPr>
           <a:xfrm>
-            <a:off x="7040880" y="1234440"/>
-            <a:ext cx="2880360" cy="384048"/>
+            <a:off x="5806440" y="1234440"/>
+            <a:ext cx="2194560" cy="384048"/>
+          </a:xfrm>
+          <a:prstGeom prst="roundRect">
+            <a:avLst/>
+          </a:prstGeom>
+          <a:solidFill>
+            <a:srgbClr val="C98A1B"/>
+          </a:solidFill>
+          <a:ln>
+            <a:noFill/>
+          </a:ln>
+          <a:effectLst/>
+        </p:spPr>
+        <p:style>
+          <a:lnRef idx="1">
+            <a:schemeClr val="accent1"/>
+          </a:lnRef>
+          <a:fillRef idx="3">
+            <a:schemeClr val="accent1"/>
+          </a:fillRef>
+          <a:effectRef idx="2">
+            <a:schemeClr val="accent1"/>
+          </a:effectRef>
+          <a:fontRef idx="minor">
+            <a:schemeClr val="lt1"/>
+          </a:fontRef>
+        </p:style>
+        <p:txBody>
+          <a:bodyPr rtlCol="0" anchor="ctr" wrap="square" lIns="50800" rIns="50800" tIns="12700" bIns="12700"/>
+          <a:lstStyle/>
+          <a:p>
+            <a:pPr algn="ctr"/>
+            <a:r>
+              <a:rPr sz="1050" b="1">
+                <a:solidFill>
+                  <a:srgbClr val="FFFFFF"/>
+                </a:solidFill>
+                <a:latin typeface="Meiryo"/>
+              </a:rPr>
+              <a:t>10月見込み：△</a:t>
+            </a:r>
+          </a:p>
+        </p:txBody>
+      </p:sp>
+      <p:sp>
+        <p:nvSpPr>
+          <p:cNvPr id="22" name="Rounded Rectangle 21"/>
+          <p:cNvSpPr/>
+          <p:nvPr/>
+        </p:nvSpPr>
+        <p:spPr>
+          <a:xfrm>
+            <a:off x="8138160" y="1234440"/>
+            <a:ext cx="3200400" cy="384048"/>
           </a:xfrm>
           <a:prstGeom prst="roundRect">
             <a:avLst/>
@@ -33028,7 +36920,7 @@
       </p:sp>
       <p:sp>
         <p:nvSpPr>
-          <p:cNvPr id="22" name="Rectangle 21"/>
+          <p:cNvPr id="23" name="Rectangle 22"/>
           <p:cNvSpPr/>
           <p:nvPr/>
         </p:nvSpPr>
@@ -33072,7 +36964,7 @@
       </p:sp>
       <p:sp>
         <p:nvSpPr>
-          <p:cNvPr id="23" name="Rectangle 22"/>
+          <p:cNvPr id="24" name="Rectangle 23"/>
           <p:cNvSpPr/>
           <p:nvPr/>
         </p:nvSpPr>
@@ -33116,7 +37008,7 @@
       </p:sp>
       <p:sp>
         <p:nvSpPr>
-          <p:cNvPr id="24" name="TextBox 23"/>
+          <p:cNvPr id="25" name="TextBox 24"/>
           <p:cNvSpPr txBox="1"/>
           <p:nvPr/>
         </p:nvSpPr>
@@ -33155,7 +37047,7 @@
       </p:sp>
       <p:sp>
         <p:nvSpPr>
-          <p:cNvPr id="25" name="TextBox 24"/>
+          <p:cNvPr id="26" name="TextBox 25"/>
           <p:cNvSpPr txBox="1"/>
           <p:nvPr/>
         </p:nvSpPr>
@@ -33194,7 +37086,7 @@
       </p:sp>
       <p:sp>
         <p:nvSpPr>
-          <p:cNvPr id="26" name="Rectangle 25"/>
+          <p:cNvPr id="27" name="Rectangle 26"/>
           <p:cNvSpPr/>
           <p:nvPr/>
         </p:nvSpPr>
@@ -33238,7 +37130,7 @@
       </p:sp>
       <p:sp>
         <p:nvSpPr>
-          <p:cNvPr id="27" name="Rectangle 26"/>
+          <p:cNvPr id="28" name="Rectangle 27"/>
           <p:cNvSpPr/>
           <p:nvPr/>
         </p:nvSpPr>
@@ -33282,7 +37174,7 @@
       </p:sp>
       <p:sp>
         <p:nvSpPr>
-          <p:cNvPr id="28" name="TextBox 27"/>
+          <p:cNvPr id="29" name="TextBox 28"/>
           <p:cNvSpPr txBox="1"/>
           <p:nvPr/>
         </p:nvSpPr>
@@ -33321,7 +37213,7 @@
       </p:sp>
       <p:sp>
         <p:nvSpPr>
-          <p:cNvPr id="29" name="TextBox 28"/>
+          <p:cNvPr id="30" name="TextBox 29"/>
           <p:cNvSpPr txBox="1"/>
           <p:nvPr/>
         </p:nvSpPr>
@@ -33360,7 +37252,7 @@
       </p:sp>
       <p:sp>
         <p:nvSpPr>
-          <p:cNvPr id="30" name="Rectangle 29"/>
+          <p:cNvPr id="31" name="Rectangle 30"/>
           <p:cNvSpPr/>
           <p:nvPr/>
         </p:nvSpPr>
@@ -33404,7 +37296,7 @@
       </p:sp>
       <p:sp>
         <p:nvSpPr>
-          <p:cNvPr id="31" name="Rectangle 30"/>
+          <p:cNvPr id="32" name="Rectangle 31"/>
           <p:cNvSpPr/>
           <p:nvPr/>
         </p:nvSpPr>
@@ -33448,7 +37340,7 @@
       </p:sp>
       <p:sp>
         <p:nvSpPr>
-          <p:cNvPr id="32" name="TextBox 31"/>
+          <p:cNvPr id="33" name="TextBox 32"/>
           <p:cNvSpPr txBox="1"/>
           <p:nvPr/>
         </p:nvSpPr>
@@ -33487,7 +37379,7 @@
       </p:sp>
       <p:sp>
         <p:nvSpPr>
-          <p:cNvPr id="33" name="TextBox 32"/>
+          <p:cNvPr id="34" name="TextBox 33"/>
           <p:cNvSpPr txBox="1"/>
           <p:nvPr/>
         </p:nvSpPr>
@@ -33526,7 +37418,7 @@
       </p:sp>
       <p:sp>
         <p:nvSpPr>
-          <p:cNvPr id="34" name="Rectangle 33"/>
+          <p:cNvPr id="35" name="Rectangle 34"/>
           <p:cNvSpPr/>
           <p:nvPr/>
         </p:nvSpPr>
@@ -33570,7 +37462,7 @@
       </p:sp>
       <p:sp>
         <p:nvSpPr>
-          <p:cNvPr id="35" name="Rectangle 34"/>
+          <p:cNvPr id="36" name="Rectangle 35"/>
           <p:cNvSpPr/>
           <p:nvPr/>
         </p:nvSpPr>
@@ -33614,7 +37506,7 @@
       </p:sp>
       <p:sp>
         <p:nvSpPr>
-          <p:cNvPr id="36" name="TextBox 35"/>
+          <p:cNvPr id="37" name="TextBox 36"/>
           <p:cNvSpPr txBox="1"/>
           <p:nvPr/>
         </p:nvSpPr>
@@ -33653,7 +37545,7 @@
       </p:sp>
       <p:sp>
         <p:nvSpPr>
-          <p:cNvPr id="37" name="TextBox 36"/>
+          <p:cNvPr id="38" name="TextBox 37"/>
           <p:cNvSpPr txBox="1"/>
           <p:nvPr/>
         </p:nvSpPr>
@@ -33692,7 +37584,7 @@
       </p:sp>
       <p:sp>
         <p:nvSpPr>
-          <p:cNvPr id="38" name="Rectangle 37"/>
+          <p:cNvPr id="39" name="Rectangle 38"/>
           <p:cNvSpPr/>
           <p:nvPr/>
         </p:nvSpPr>
@@ -33736,7 +37628,7 @@
       </p:sp>
       <p:sp>
         <p:nvSpPr>
-          <p:cNvPr id="39" name="Rectangle 38"/>
+          <p:cNvPr id="40" name="Rectangle 39"/>
           <p:cNvSpPr/>
           <p:nvPr/>
         </p:nvSpPr>
@@ -33780,7 +37672,7 @@
       </p:sp>
       <p:sp>
         <p:nvSpPr>
-          <p:cNvPr id="40" name="TextBox 39"/>
+          <p:cNvPr id="41" name="TextBox 40"/>
           <p:cNvSpPr txBox="1"/>
           <p:nvPr/>
         </p:nvSpPr>
@@ -33819,7 +37711,7 @@
       </p:sp>
       <p:sp>
         <p:nvSpPr>
-          <p:cNvPr id="41" name="TextBox 40"/>
+          <p:cNvPr id="42" name="TextBox 41"/>
           <p:cNvSpPr txBox="1"/>
           <p:nvPr/>
         </p:nvSpPr>
@@ -33858,7 +37750,7 @@
       </p:sp>
       <p:sp>
         <p:nvSpPr>
-          <p:cNvPr id="42" name="Rectangle 41"/>
+          <p:cNvPr id="43" name="Rectangle 42"/>
           <p:cNvSpPr/>
           <p:nvPr/>
         </p:nvSpPr>
@@ -33902,7 +37794,7 @@
       </p:sp>
       <p:sp>
         <p:nvSpPr>
-          <p:cNvPr id="43" name="Rectangle 42"/>
+          <p:cNvPr id="44" name="Rectangle 43"/>
           <p:cNvSpPr/>
           <p:nvPr/>
         </p:nvSpPr>
@@ -33946,7 +37838,7 @@
       </p:sp>
       <p:sp>
         <p:nvSpPr>
-          <p:cNvPr id="44" name="TextBox 43"/>
+          <p:cNvPr id="45" name="TextBox 44"/>
           <p:cNvSpPr txBox="1"/>
           <p:nvPr/>
         </p:nvSpPr>
@@ -33985,7 +37877,7 @@
       </p:sp>
       <p:sp>
         <p:nvSpPr>
-          <p:cNvPr id="45" name="TextBox 44"/>
+          <p:cNvPr id="46" name="TextBox 45"/>
           <p:cNvSpPr txBox="1"/>
           <p:nvPr/>
         </p:nvSpPr>
@@ -34814,8 +38706,8 @@
         </p:nvSpPr>
         <p:spPr>
           <a:xfrm>
-            <a:off x="4892040" y="1234440"/>
-            <a:ext cx="1920240" cy="384048"/>
+            <a:off x="4114800" y="1234440"/>
+            <a:ext cx="1554480" cy="384048"/>
           </a:xfrm>
           <a:prstGeom prst="roundRect">
             <a:avLst/>
@@ -34867,8 +38759,61 @@
         </p:nvSpPr>
         <p:spPr>
           <a:xfrm>
-            <a:off x="7040880" y="1234440"/>
-            <a:ext cx="2880360" cy="384048"/>
+            <a:off x="5806440" y="1234440"/>
+            <a:ext cx="2194560" cy="384048"/>
+          </a:xfrm>
+          <a:prstGeom prst="roundRect">
+            <a:avLst/>
+          </a:prstGeom>
+          <a:solidFill>
+            <a:srgbClr val="C98A1B"/>
+          </a:solidFill>
+          <a:ln>
+            <a:noFill/>
+          </a:ln>
+          <a:effectLst/>
+        </p:spPr>
+        <p:style>
+          <a:lnRef idx="1">
+            <a:schemeClr val="accent1"/>
+          </a:lnRef>
+          <a:fillRef idx="3">
+            <a:schemeClr val="accent1"/>
+          </a:fillRef>
+          <a:effectRef idx="2">
+            <a:schemeClr val="accent1"/>
+          </a:effectRef>
+          <a:fontRef idx="minor">
+            <a:schemeClr val="lt1"/>
+          </a:fontRef>
+        </p:style>
+        <p:txBody>
+          <a:bodyPr rtlCol="0" anchor="ctr" wrap="square" lIns="50800" rIns="50800" tIns="12700" bIns="12700"/>
+          <a:lstStyle/>
+          <a:p>
+            <a:pPr algn="ctr"/>
+            <a:r>
+              <a:rPr sz="1050" b="1">
+                <a:solidFill>
+                  <a:srgbClr val="FFFFFF"/>
+                </a:solidFill>
+                <a:latin typeface="Meiryo"/>
+              </a:rPr>
+              <a:t>10月見込み：△</a:t>
+            </a:r>
+          </a:p>
+        </p:txBody>
+      </p:sp>
+      <p:sp>
+        <p:nvSpPr>
+          <p:cNvPr id="22" name="Rounded Rectangle 21"/>
+          <p:cNvSpPr/>
+          <p:nvPr/>
+        </p:nvSpPr>
+        <p:spPr>
+          <a:xfrm>
+            <a:off x="8138160" y="1234440"/>
+            <a:ext cx="3200400" cy="384048"/>
           </a:xfrm>
           <a:prstGeom prst="roundRect">
             <a:avLst/>
@@ -34914,7 +38859,7 @@
       </p:sp>
       <p:sp>
         <p:nvSpPr>
-          <p:cNvPr id="22" name="Rectangle 21"/>
+          <p:cNvPr id="23" name="Rectangle 22"/>
           <p:cNvSpPr/>
           <p:nvPr/>
         </p:nvSpPr>
@@ -34958,7 +38903,7 @@
       </p:sp>
       <p:sp>
         <p:nvSpPr>
-          <p:cNvPr id="23" name="Rectangle 22"/>
+          <p:cNvPr id="24" name="Rectangle 23"/>
           <p:cNvSpPr/>
           <p:nvPr/>
         </p:nvSpPr>
@@ -35002,7 +38947,7 @@
       </p:sp>
       <p:sp>
         <p:nvSpPr>
-          <p:cNvPr id="24" name="TextBox 23"/>
+          <p:cNvPr id="25" name="TextBox 24"/>
           <p:cNvSpPr txBox="1"/>
           <p:nvPr/>
         </p:nvSpPr>
@@ -35041,7 +38986,7 @@
       </p:sp>
       <p:sp>
         <p:nvSpPr>
-          <p:cNvPr id="25" name="TextBox 24"/>
+          <p:cNvPr id="26" name="TextBox 25"/>
           <p:cNvSpPr txBox="1"/>
           <p:nvPr/>
         </p:nvSpPr>
@@ -35080,7 +39025,7 @@
       </p:sp>
       <p:sp>
         <p:nvSpPr>
-          <p:cNvPr id="26" name="Rectangle 25"/>
+          <p:cNvPr id="27" name="Rectangle 26"/>
           <p:cNvSpPr/>
           <p:nvPr/>
         </p:nvSpPr>
@@ -35124,7 +39069,7 @@
       </p:sp>
       <p:sp>
         <p:nvSpPr>
-          <p:cNvPr id="27" name="Rectangle 26"/>
+          <p:cNvPr id="28" name="Rectangle 27"/>
           <p:cNvSpPr/>
           <p:nvPr/>
         </p:nvSpPr>
@@ -35168,7 +39113,7 @@
       </p:sp>
       <p:sp>
         <p:nvSpPr>
-          <p:cNvPr id="28" name="TextBox 27"/>
+          <p:cNvPr id="29" name="TextBox 28"/>
           <p:cNvSpPr txBox="1"/>
           <p:nvPr/>
         </p:nvSpPr>
@@ -35207,7 +39152,7 @@
       </p:sp>
       <p:sp>
         <p:nvSpPr>
-          <p:cNvPr id="29" name="TextBox 28"/>
+          <p:cNvPr id="30" name="TextBox 29"/>
           <p:cNvSpPr txBox="1"/>
           <p:nvPr/>
         </p:nvSpPr>
@@ -35246,7 +39191,7 @@
       </p:sp>
       <p:sp>
         <p:nvSpPr>
-          <p:cNvPr id="30" name="Rectangle 29"/>
+          <p:cNvPr id="31" name="Rectangle 30"/>
           <p:cNvSpPr/>
           <p:nvPr/>
         </p:nvSpPr>
@@ -35290,7 +39235,7 @@
       </p:sp>
       <p:sp>
         <p:nvSpPr>
-          <p:cNvPr id="31" name="Rectangle 30"/>
+          <p:cNvPr id="32" name="Rectangle 31"/>
           <p:cNvSpPr/>
           <p:nvPr/>
         </p:nvSpPr>
@@ -35334,7 +39279,7 @@
       </p:sp>
       <p:sp>
         <p:nvSpPr>
-          <p:cNvPr id="32" name="TextBox 31"/>
+          <p:cNvPr id="33" name="TextBox 32"/>
           <p:cNvSpPr txBox="1"/>
           <p:nvPr/>
         </p:nvSpPr>
@@ -35373,7 +39318,7 @@
       </p:sp>
       <p:sp>
         <p:nvSpPr>
-          <p:cNvPr id="33" name="TextBox 32"/>
+          <p:cNvPr id="34" name="TextBox 33"/>
           <p:cNvSpPr txBox="1"/>
           <p:nvPr/>
         </p:nvSpPr>
@@ -35412,7 +39357,7 @@
       </p:sp>
       <p:sp>
         <p:nvSpPr>
-          <p:cNvPr id="34" name="Rectangle 33"/>
+          <p:cNvPr id="35" name="Rectangle 34"/>
           <p:cNvSpPr/>
           <p:nvPr/>
         </p:nvSpPr>
@@ -35456,7 +39401,7 @@
       </p:sp>
       <p:sp>
         <p:nvSpPr>
-          <p:cNvPr id="35" name="Rectangle 34"/>
+          <p:cNvPr id="36" name="Rectangle 35"/>
           <p:cNvSpPr/>
           <p:nvPr/>
         </p:nvSpPr>
@@ -35500,7 +39445,7 @@
       </p:sp>
       <p:sp>
         <p:nvSpPr>
-          <p:cNvPr id="36" name="TextBox 35"/>
+          <p:cNvPr id="37" name="TextBox 36"/>
           <p:cNvSpPr txBox="1"/>
           <p:nvPr/>
         </p:nvSpPr>
@@ -35539,7 +39484,7 @@
       </p:sp>
       <p:sp>
         <p:nvSpPr>
-          <p:cNvPr id="37" name="TextBox 36"/>
+          <p:cNvPr id="38" name="TextBox 37"/>
           <p:cNvSpPr txBox="1"/>
           <p:nvPr/>
         </p:nvSpPr>
@@ -35578,7 +39523,7 @@
       </p:sp>
       <p:sp>
         <p:nvSpPr>
-          <p:cNvPr id="38" name="Rectangle 37"/>
+          <p:cNvPr id="39" name="Rectangle 38"/>
           <p:cNvSpPr/>
           <p:nvPr/>
         </p:nvSpPr>
@@ -35622,7 +39567,7 @@
       </p:sp>
       <p:sp>
         <p:nvSpPr>
-          <p:cNvPr id="39" name="Rectangle 38"/>
+          <p:cNvPr id="40" name="Rectangle 39"/>
           <p:cNvSpPr/>
           <p:nvPr/>
         </p:nvSpPr>
@@ -35666,7 +39611,7 @@
       </p:sp>
       <p:sp>
         <p:nvSpPr>
-          <p:cNvPr id="40" name="TextBox 39"/>
+          <p:cNvPr id="41" name="TextBox 40"/>
           <p:cNvSpPr txBox="1"/>
           <p:nvPr/>
         </p:nvSpPr>
@@ -35705,7 +39650,7 @@
       </p:sp>
       <p:sp>
         <p:nvSpPr>
-          <p:cNvPr id="41" name="TextBox 40"/>
+          <p:cNvPr id="42" name="TextBox 41"/>
           <p:cNvSpPr txBox="1"/>
           <p:nvPr/>
         </p:nvSpPr>
@@ -35744,7 +39689,7 @@
       </p:sp>
       <p:sp>
         <p:nvSpPr>
-          <p:cNvPr id="42" name="Rectangle 41"/>
+          <p:cNvPr id="43" name="Rectangle 42"/>
           <p:cNvSpPr/>
           <p:nvPr/>
         </p:nvSpPr>
@@ -35788,7 +39733,7 @@
       </p:sp>
       <p:sp>
         <p:nvSpPr>
-          <p:cNvPr id="43" name="Rectangle 42"/>
+          <p:cNvPr id="44" name="Rectangle 43"/>
           <p:cNvSpPr/>
           <p:nvPr/>
         </p:nvSpPr>
@@ -35832,7 +39777,7 @@
       </p:sp>
       <p:sp>
         <p:nvSpPr>
-          <p:cNvPr id="44" name="TextBox 43"/>
+          <p:cNvPr id="45" name="TextBox 44"/>
           <p:cNvSpPr txBox="1"/>
           <p:nvPr/>
         </p:nvSpPr>
@@ -35871,7 +39816,7 @@
       </p:sp>
       <p:sp>
         <p:nvSpPr>
-          <p:cNvPr id="45" name="TextBox 44"/>
+          <p:cNvPr id="46" name="TextBox 45"/>
           <p:cNvSpPr txBox="1"/>
           <p:nvPr/>
         </p:nvSpPr>

--- a/reports/CopilotStudio_ハッカソン_事前相談会②_状況報告_20260724.pptx
+++ b/reports/CopilotStudio_ハッカソン_事前相談会②_状況報告_20260724.pptx
@@ -5400,14 +5400,53 @@
       </p:sp>
       <p:sp>
         <p:nvSpPr>
-          <p:cNvPr id="23" name="Rectangle 22"/>
+          <p:cNvPr id="23" name="TextBox 22"/>
+          <p:cNvSpPr txBox="1"/>
+          <p:nvPr/>
+        </p:nvSpPr>
+        <p:spPr>
+          <a:xfrm>
+            <a:off x="502920" y="1691640"/>
+            <a:ext cx="11201400" cy="182880"/>
+          </a:xfrm>
+          <a:prstGeom prst="rect">
+            <a:avLst/>
+          </a:prstGeom>
+          <a:noFill/>
+        </p:spPr>
+        <p:txBody>
+          <a:bodyPr wrap="square" anchor="ctr" lIns="25400" rIns="25400" tIns="12700" bIns="12700">
+            <a:spAutoFit/>
+          </a:bodyPr>
+          <a:lstStyle/>
+          <a:p>
+            <a:pPr algn="l">
+              <a:lnSpc>
+                <a:spcPct val="100000"/>
+              </a:lnSpc>
+            </a:pPr>
+            <a:r>
+              <a:rPr sz="850" b="0" i="0">
+                <a:solidFill>
+                  <a:srgbClr val="252A31"/>
+                </a:solidFill>
+                <a:latin typeface="Meiryo"/>
+              </a:rPr>
+              <a:t>▶ 10月見込み（◎）の根拠：業務フロー・効果・構成が具体化。8月デモの道筋が明確。　｜　ボリューム（〜実業務利用）：中</a:t>
+            </a:r>
+          </a:p>
+        </p:txBody>
+      </p:sp>
+      <p:sp>
+        <p:nvSpPr>
+          <p:cNvPr id="24" name="Rectangle 23"/>
           <p:cNvSpPr/>
           <p:nvPr/>
         </p:nvSpPr>
         <p:spPr>
           <a:xfrm>
-            <a:off x="502920" y="1828800"/>
-            <a:ext cx="3593592" cy="1572768"/>
+            <a:off x="502920" y="1975104"/>
+            <a:ext cx="3593592" cy="1444752"/>
           </a:xfrm>
           <a:prstGeom prst="rect">
             <a:avLst/>
@@ -5444,13 +5483,13 @@
       </p:sp>
       <p:sp>
         <p:nvSpPr>
-          <p:cNvPr id="24" name="Rectangle 23"/>
+          <p:cNvPr id="25" name="Rectangle 24"/>
           <p:cNvSpPr/>
           <p:nvPr/>
         </p:nvSpPr>
         <p:spPr>
           <a:xfrm>
-            <a:off x="502920" y="1828800"/>
+            <a:off x="502920" y="1975104"/>
             <a:ext cx="3593592" cy="365760"/>
           </a:xfrm>
           <a:prstGeom prst="rect">
@@ -5488,13 +5527,13 @@
       </p:sp>
       <p:sp>
         <p:nvSpPr>
-          <p:cNvPr id="25" name="TextBox 24"/>
+          <p:cNvPr id="26" name="TextBox 25"/>
           <p:cNvSpPr txBox="1"/>
           <p:nvPr/>
         </p:nvSpPr>
         <p:spPr>
           <a:xfrm>
-            <a:off x="667512" y="1874520"/>
+            <a:off x="667512" y="2020824"/>
             <a:ext cx="3264408" cy="274320"/>
           </a:xfrm>
           <a:prstGeom prst="rect">
@@ -5527,14 +5566,14 @@
       </p:sp>
       <p:sp>
         <p:nvSpPr>
-          <p:cNvPr id="26" name="TextBox 25"/>
+          <p:cNvPr id="27" name="TextBox 26"/>
           <p:cNvSpPr txBox="1"/>
           <p:nvPr/>
         </p:nvSpPr>
         <p:spPr>
           <a:xfrm>
-            <a:off x="667512" y="2286000"/>
-            <a:ext cx="3264408" cy="1024128"/>
+            <a:off x="667512" y="2432304"/>
+            <a:ext cx="3264408" cy="896112"/>
           </a:xfrm>
           <a:prstGeom prst="rect">
             <a:avLst/>
@@ -5566,14 +5605,14 @@
       </p:sp>
       <p:sp>
         <p:nvSpPr>
-          <p:cNvPr id="27" name="Rectangle 26"/>
+          <p:cNvPr id="28" name="Rectangle 27"/>
           <p:cNvSpPr/>
           <p:nvPr/>
         </p:nvSpPr>
         <p:spPr>
           <a:xfrm>
-            <a:off x="4306824" y="1828800"/>
-            <a:ext cx="3593592" cy="1572768"/>
+            <a:off x="4306824" y="1975104"/>
+            <a:ext cx="3593592" cy="1444752"/>
           </a:xfrm>
           <a:prstGeom prst="rect">
             <a:avLst/>
@@ -5610,13 +5649,13 @@
       </p:sp>
       <p:sp>
         <p:nvSpPr>
-          <p:cNvPr id="28" name="Rectangle 27"/>
+          <p:cNvPr id="29" name="Rectangle 28"/>
           <p:cNvSpPr/>
           <p:nvPr/>
         </p:nvSpPr>
         <p:spPr>
           <a:xfrm>
-            <a:off x="4306824" y="1828800"/>
+            <a:off x="4306824" y="1975104"/>
             <a:ext cx="3593592" cy="365760"/>
           </a:xfrm>
           <a:prstGeom prst="rect">
@@ -5654,13 +5693,13 @@
       </p:sp>
       <p:sp>
         <p:nvSpPr>
-          <p:cNvPr id="29" name="TextBox 28"/>
+          <p:cNvPr id="30" name="TextBox 29"/>
           <p:cNvSpPr txBox="1"/>
           <p:nvPr/>
         </p:nvSpPr>
         <p:spPr>
           <a:xfrm>
-            <a:off x="4471416" y="1874520"/>
+            <a:off x="4471416" y="2020824"/>
             <a:ext cx="3264408" cy="274320"/>
           </a:xfrm>
           <a:prstGeom prst="rect">
@@ -5693,14 +5732,14 @@
       </p:sp>
       <p:sp>
         <p:nvSpPr>
-          <p:cNvPr id="30" name="TextBox 29"/>
+          <p:cNvPr id="31" name="TextBox 30"/>
           <p:cNvSpPr txBox="1"/>
           <p:nvPr/>
         </p:nvSpPr>
         <p:spPr>
           <a:xfrm>
-            <a:off x="4471416" y="2286000"/>
-            <a:ext cx="3264408" cy="1024128"/>
+            <a:off x="4471416" y="2432304"/>
+            <a:ext cx="3264408" cy="896112"/>
           </a:xfrm>
           <a:prstGeom prst="rect">
             <a:avLst/>
@@ -5732,14 +5771,14 @@
       </p:sp>
       <p:sp>
         <p:nvSpPr>
-          <p:cNvPr id="31" name="Rectangle 30"/>
+          <p:cNvPr id="32" name="Rectangle 31"/>
           <p:cNvSpPr/>
           <p:nvPr/>
         </p:nvSpPr>
         <p:spPr>
           <a:xfrm>
-            <a:off x="8110728" y="1828800"/>
-            <a:ext cx="3593592" cy="1572768"/>
+            <a:off x="8110728" y="1975104"/>
+            <a:ext cx="3593592" cy="1444752"/>
           </a:xfrm>
           <a:prstGeom prst="rect">
             <a:avLst/>
@@ -5776,13 +5815,13 @@
       </p:sp>
       <p:sp>
         <p:nvSpPr>
-          <p:cNvPr id="32" name="Rectangle 31"/>
+          <p:cNvPr id="33" name="Rectangle 32"/>
           <p:cNvSpPr/>
           <p:nvPr/>
         </p:nvSpPr>
         <p:spPr>
           <a:xfrm>
-            <a:off x="8110728" y="1828800"/>
+            <a:off x="8110728" y="1975104"/>
             <a:ext cx="3593592" cy="365760"/>
           </a:xfrm>
           <a:prstGeom prst="rect">
@@ -5820,13 +5859,13 @@
       </p:sp>
       <p:sp>
         <p:nvSpPr>
-          <p:cNvPr id="33" name="TextBox 32"/>
+          <p:cNvPr id="34" name="TextBox 33"/>
           <p:cNvSpPr txBox="1"/>
           <p:nvPr/>
         </p:nvSpPr>
         <p:spPr>
           <a:xfrm>
-            <a:off x="8275320" y="1874520"/>
+            <a:off x="8275320" y="2020824"/>
             <a:ext cx="3264408" cy="274320"/>
           </a:xfrm>
           <a:prstGeom prst="rect">
@@ -5859,14 +5898,14 @@
       </p:sp>
       <p:sp>
         <p:nvSpPr>
-          <p:cNvPr id="34" name="TextBox 33"/>
+          <p:cNvPr id="35" name="TextBox 34"/>
           <p:cNvSpPr txBox="1"/>
           <p:nvPr/>
         </p:nvSpPr>
         <p:spPr>
           <a:xfrm>
-            <a:off x="8275320" y="2286000"/>
-            <a:ext cx="3264408" cy="1024128"/>
+            <a:off x="8275320" y="2432304"/>
+            <a:ext cx="3264408" cy="896112"/>
           </a:xfrm>
           <a:prstGeom prst="rect">
             <a:avLst/>
@@ -5898,7 +5937,7 @@
       </p:sp>
       <p:sp>
         <p:nvSpPr>
-          <p:cNvPr id="35" name="Rectangle 34"/>
+          <p:cNvPr id="36" name="Rectangle 35"/>
           <p:cNvSpPr/>
           <p:nvPr/>
         </p:nvSpPr>
@@ -5942,7 +5981,7 @@
       </p:sp>
       <p:sp>
         <p:nvSpPr>
-          <p:cNvPr id="36" name="Rectangle 35"/>
+          <p:cNvPr id="37" name="Rectangle 36"/>
           <p:cNvSpPr/>
           <p:nvPr/>
         </p:nvSpPr>
@@ -5986,7 +6025,7 @@
       </p:sp>
       <p:sp>
         <p:nvSpPr>
-          <p:cNvPr id="37" name="TextBox 36"/>
+          <p:cNvPr id="38" name="TextBox 37"/>
           <p:cNvSpPr txBox="1"/>
           <p:nvPr/>
         </p:nvSpPr>
@@ -6025,7 +6064,7 @@
       </p:sp>
       <p:sp>
         <p:nvSpPr>
-          <p:cNvPr id="38" name="TextBox 37"/>
+          <p:cNvPr id="39" name="TextBox 38"/>
           <p:cNvSpPr txBox="1"/>
           <p:nvPr/>
         </p:nvSpPr>
@@ -6064,7 +6103,7 @@
       </p:sp>
       <p:sp>
         <p:nvSpPr>
-          <p:cNvPr id="39" name="Rectangle 38"/>
+          <p:cNvPr id="40" name="Rectangle 39"/>
           <p:cNvSpPr/>
           <p:nvPr/>
         </p:nvSpPr>
@@ -6108,7 +6147,7 @@
       </p:sp>
       <p:sp>
         <p:nvSpPr>
-          <p:cNvPr id="40" name="Rectangle 39"/>
+          <p:cNvPr id="41" name="Rectangle 40"/>
           <p:cNvSpPr/>
           <p:nvPr/>
         </p:nvSpPr>
@@ -6152,7 +6191,7 @@
       </p:sp>
       <p:sp>
         <p:nvSpPr>
-          <p:cNvPr id="41" name="TextBox 40"/>
+          <p:cNvPr id="42" name="TextBox 41"/>
           <p:cNvSpPr txBox="1"/>
           <p:nvPr/>
         </p:nvSpPr>
@@ -6191,7 +6230,7 @@
       </p:sp>
       <p:sp>
         <p:nvSpPr>
-          <p:cNvPr id="42" name="TextBox 41"/>
+          <p:cNvPr id="43" name="TextBox 42"/>
           <p:cNvSpPr txBox="1"/>
           <p:nvPr/>
         </p:nvSpPr>
@@ -6230,7 +6269,7 @@
       </p:sp>
       <p:sp>
         <p:nvSpPr>
-          <p:cNvPr id="43" name="Rectangle 42"/>
+          <p:cNvPr id="44" name="Rectangle 43"/>
           <p:cNvSpPr/>
           <p:nvPr/>
         </p:nvSpPr>
@@ -6274,7 +6313,7 @@
       </p:sp>
       <p:sp>
         <p:nvSpPr>
-          <p:cNvPr id="44" name="Rectangle 43"/>
+          <p:cNvPr id="45" name="Rectangle 44"/>
           <p:cNvSpPr/>
           <p:nvPr/>
         </p:nvSpPr>
@@ -6318,7 +6357,7 @@
       </p:sp>
       <p:sp>
         <p:nvSpPr>
-          <p:cNvPr id="45" name="TextBox 44"/>
+          <p:cNvPr id="46" name="TextBox 45"/>
           <p:cNvSpPr txBox="1"/>
           <p:nvPr/>
         </p:nvSpPr>
@@ -6357,7 +6396,7 @@
       </p:sp>
       <p:sp>
         <p:nvSpPr>
-          <p:cNvPr id="46" name="TextBox 45"/>
+          <p:cNvPr id="47" name="TextBox 46"/>
           <p:cNvSpPr txBox="1"/>
           <p:nvPr/>
         </p:nvSpPr>
@@ -7339,14 +7378,53 @@
       </p:sp>
       <p:sp>
         <p:nvSpPr>
-          <p:cNvPr id="23" name="Rectangle 22"/>
+          <p:cNvPr id="23" name="TextBox 22"/>
+          <p:cNvSpPr txBox="1"/>
+          <p:nvPr/>
+        </p:nvSpPr>
+        <p:spPr>
+          <a:xfrm>
+            <a:off x="502920" y="1691640"/>
+            <a:ext cx="11201400" cy="182880"/>
+          </a:xfrm>
+          <a:prstGeom prst="rect">
+            <a:avLst/>
+          </a:prstGeom>
+          <a:noFill/>
+        </p:spPr>
+        <p:txBody>
+          <a:bodyPr wrap="square" anchor="ctr" lIns="25400" rIns="25400" tIns="12700" bIns="12700">
+            <a:spAutoFit/>
+          </a:bodyPr>
+          <a:lstStyle/>
+          <a:p>
+            <a:pPr algn="l">
+              <a:lnSpc>
+                <a:spcPct val="100000"/>
+              </a:lnSpc>
+            </a:pPr>
+            <a:r>
+              <a:rPr sz="850" b="0" i="0">
+                <a:solidFill>
+                  <a:srgbClr val="252A31"/>
+                </a:solidFill>
+                <a:latin typeface="Meiryo"/>
+              </a:rPr>
+              <a:t>▶ 10月見込み（○）の根拠：構成は明確。ファイル収集/PPT生成/会議通知の役割分担を分けて検証すれば発表可（第2回未実施）。　｜　ボリューム（〜実業務利用）：大</a:t>
+            </a:r>
+          </a:p>
+        </p:txBody>
+      </p:sp>
+      <p:sp>
+        <p:nvSpPr>
+          <p:cNvPr id="24" name="Rectangle 23"/>
           <p:cNvSpPr/>
           <p:nvPr/>
         </p:nvSpPr>
         <p:spPr>
           <a:xfrm>
-            <a:off x="502920" y="1828800"/>
-            <a:ext cx="3593592" cy="1572768"/>
+            <a:off x="502920" y="1975104"/>
+            <a:ext cx="3593592" cy="1444752"/>
           </a:xfrm>
           <a:prstGeom prst="rect">
             <a:avLst/>
@@ -7383,13 +7461,13 @@
       </p:sp>
       <p:sp>
         <p:nvSpPr>
-          <p:cNvPr id="24" name="Rectangle 23"/>
+          <p:cNvPr id="25" name="Rectangle 24"/>
           <p:cNvSpPr/>
           <p:nvPr/>
         </p:nvSpPr>
         <p:spPr>
           <a:xfrm>
-            <a:off x="502920" y="1828800"/>
+            <a:off x="502920" y="1975104"/>
             <a:ext cx="3593592" cy="365760"/>
           </a:xfrm>
           <a:prstGeom prst="rect">
@@ -7427,13 +7505,13 @@
       </p:sp>
       <p:sp>
         <p:nvSpPr>
-          <p:cNvPr id="25" name="TextBox 24"/>
+          <p:cNvPr id="26" name="TextBox 25"/>
           <p:cNvSpPr txBox="1"/>
           <p:nvPr/>
         </p:nvSpPr>
         <p:spPr>
           <a:xfrm>
-            <a:off x="667512" y="1874520"/>
+            <a:off x="667512" y="2020824"/>
             <a:ext cx="3264408" cy="274320"/>
           </a:xfrm>
           <a:prstGeom prst="rect">
@@ -7466,14 +7544,14 @@
       </p:sp>
       <p:sp>
         <p:nvSpPr>
-          <p:cNvPr id="26" name="TextBox 25"/>
+          <p:cNvPr id="27" name="TextBox 26"/>
           <p:cNvSpPr txBox="1"/>
           <p:nvPr/>
         </p:nvSpPr>
         <p:spPr>
           <a:xfrm>
-            <a:off x="667512" y="2286000"/>
-            <a:ext cx="3264408" cy="1024128"/>
+            <a:off x="667512" y="2432304"/>
+            <a:ext cx="3264408" cy="896112"/>
           </a:xfrm>
           <a:prstGeom prst="rect">
             <a:avLst/>
@@ -7505,14 +7583,14 @@
       </p:sp>
       <p:sp>
         <p:nvSpPr>
-          <p:cNvPr id="27" name="Rectangle 26"/>
+          <p:cNvPr id="28" name="Rectangle 27"/>
           <p:cNvSpPr/>
           <p:nvPr/>
         </p:nvSpPr>
         <p:spPr>
           <a:xfrm>
-            <a:off x="4306824" y="1828800"/>
-            <a:ext cx="3593592" cy="1572768"/>
+            <a:off x="4306824" y="1975104"/>
+            <a:ext cx="3593592" cy="1444752"/>
           </a:xfrm>
           <a:prstGeom prst="rect">
             <a:avLst/>
@@ -7549,13 +7627,13 @@
       </p:sp>
       <p:sp>
         <p:nvSpPr>
-          <p:cNvPr id="28" name="Rectangle 27"/>
+          <p:cNvPr id="29" name="Rectangle 28"/>
           <p:cNvSpPr/>
           <p:nvPr/>
         </p:nvSpPr>
         <p:spPr>
           <a:xfrm>
-            <a:off x="4306824" y="1828800"/>
+            <a:off x="4306824" y="1975104"/>
             <a:ext cx="3593592" cy="365760"/>
           </a:xfrm>
           <a:prstGeom prst="rect">
@@ -7593,13 +7671,13 @@
       </p:sp>
       <p:sp>
         <p:nvSpPr>
-          <p:cNvPr id="29" name="TextBox 28"/>
+          <p:cNvPr id="30" name="TextBox 29"/>
           <p:cNvSpPr txBox="1"/>
           <p:nvPr/>
         </p:nvSpPr>
         <p:spPr>
           <a:xfrm>
-            <a:off x="4471416" y="1874520"/>
+            <a:off x="4471416" y="2020824"/>
             <a:ext cx="3264408" cy="274320"/>
           </a:xfrm>
           <a:prstGeom prst="rect">
@@ -7632,14 +7710,14 @@
       </p:sp>
       <p:sp>
         <p:nvSpPr>
-          <p:cNvPr id="30" name="TextBox 29"/>
+          <p:cNvPr id="31" name="TextBox 30"/>
           <p:cNvSpPr txBox="1"/>
           <p:nvPr/>
         </p:nvSpPr>
         <p:spPr>
           <a:xfrm>
-            <a:off x="4471416" y="2286000"/>
-            <a:ext cx="3264408" cy="1024128"/>
+            <a:off x="4471416" y="2432304"/>
+            <a:ext cx="3264408" cy="896112"/>
           </a:xfrm>
           <a:prstGeom prst="rect">
             <a:avLst/>
@@ -7671,14 +7749,14 @@
       </p:sp>
       <p:sp>
         <p:nvSpPr>
-          <p:cNvPr id="31" name="Rectangle 30"/>
+          <p:cNvPr id="32" name="Rectangle 31"/>
           <p:cNvSpPr/>
           <p:nvPr/>
         </p:nvSpPr>
         <p:spPr>
           <a:xfrm>
-            <a:off x="8110728" y="1828800"/>
-            <a:ext cx="3593592" cy="1572768"/>
+            <a:off x="8110728" y="1975104"/>
+            <a:ext cx="3593592" cy="1444752"/>
           </a:xfrm>
           <a:prstGeom prst="rect">
             <a:avLst/>
@@ -7715,13 +7793,13 @@
       </p:sp>
       <p:sp>
         <p:nvSpPr>
-          <p:cNvPr id="32" name="Rectangle 31"/>
+          <p:cNvPr id="33" name="Rectangle 32"/>
           <p:cNvSpPr/>
           <p:nvPr/>
         </p:nvSpPr>
         <p:spPr>
           <a:xfrm>
-            <a:off x="8110728" y="1828800"/>
+            <a:off x="8110728" y="1975104"/>
             <a:ext cx="3593592" cy="365760"/>
           </a:xfrm>
           <a:prstGeom prst="rect">
@@ -7759,13 +7837,13 @@
       </p:sp>
       <p:sp>
         <p:nvSpPr>
-          <p:cNvPr id="33" name="TextBox 32"/>
+          <p:cNvPr id="34" name="TextBox 33"/>
           <p:cNvSpPr txBox="1"/>
           <p:nvPr/>
         </p:nvSpPr>
         <p:spPr>
           <a:xfrm>
-            <a:off x="8275320" y="1874520"/>
+            <a:off x="8275320" y="2020824"/>
             <a:ext cx="3264408" cy="274320"/>
           </a:xfrm>
           <a:prstGeom prst="rect">
@@ -7798,14 +7876,14 @@
       </p:sp>
       <p:sp>
         <p:nvSpPr>
-          <p:cNvPr id="34" name="TextBox 33"/>
+          <p:cNvPr id="35" name="TextBox 34"/>
           <p:cNvSpPr txBox="1"/>
           <p:nvPr/>
         </p:nvSpPr>
         <p:spPr>
           <a:xfrm>
-            <a:off x="8275320" y="2286000"/>
-            <a:ext cx="3264408" cy="1024128"/>
+            <a:off x="8275320" y="2432304"/>
+            <a:ext cx="3264408" cy="896112"/>
           </a:xfrm>
           <a:prstGeom prst="rect">
             <a:avLst/>
@@ -7837,7 +7915,7 @@
       </p:sp>
       <p:sp>
         <p:nvSpPr>
-          <p:cNvPr id="35" name="Rectangle 34"/>
+          <p:cNvPr id="36" name="Rectangle 35"/>
           <p:cNvSpPr/>
           <p:nvPr/>
         </p:nvSpPr>
@@ -7881,7 +7959,7 @@
       </p:sp>
       <p:sp>
         <p:nvSpPr>
-          <p:cNvPr id="36" name="Rectangle 35"/>
+          <p:cNvPr id="37" name="Rectangle 36"/>
           <p:cNvSpPr/>
           <p:nvPr/>
         </p:nvSpPr>
@@ -7925,7 +8003,7 @@
       </p:sp>
       <p:sp>
         <p:nvSpPr>
-          <p:cNvPr id="37" name="TextBox 36"/>
+          <p:cNvPr id="38" name="TextBox 37"/>
           <p:cNvSpPr txBox="1"/>
           <p:nvPr/>
         </p:nvSpPr>
@@ -7964,7 +8042,7 @@
       </p:sp>
       <p:sp>
         <p:nvSpPr>
-          <p:cNvPr id="38" name="TextBox 37"/>
+          <p:cNvPr id="39" name="TextBox 38"/>
           <p:cNvSpPr txBox="1"/>
           <p:nvPr/>
         </p:nvSpPr>
@@ -8003,7 +8081,7 @@
       </p:sp>
       <p:sp>
         <p:nvSpPr>
-          <p:cNvPr id="39" name="Rectangle 38"/>
+          <p:cNvPr id="40" name="Rectangle 39"/>
           <p:cNvSpPr/>
           <p:nvPr/>
         </p:nvSpPr>
@@ -8047,7 +8125,7 @@
       </p:sp>
       <p:sp>
         <p:nvSpPr>
-          <p:cNvPr id="40" name="Rectangle 39"/>
+          <p:cNvPr id="41" name="Rectangle 40"/>
           <p:cNvSpPr/>
           <p:nvPr/>
         </p:nvSpPr>
@@ -8091,7 +8169,7 @@
       </p:sp>
       <p:sp>
         <p:nvSpPr>
-          <p:cNvPr id="41" name="TextBox 40"/>
+          <p:cNvPr id="42" name="TextBox 41"/>
           <p:cNvSpPr txBox="1"/>
           <p:nvPr/>
         </p:nvSpPr>
@@ -8130,7 +8208,7 @@
       </p:sp>
       <p:sp>
         <p:nvSpPr>
-          <p:cNvPr id="42" name="TextBox 41"/>
+          <p:cNvPr id="43" name="TextBox 42"/>
           <p:cNvSpPr txBox="1"/>
           <p:nvPr/>
         </p:nvSpPr>
@@ -8169,7 +8247,7 @@
       </p:sp>
       <p:sp>
         <p:nvSpPr>
-          <p:cNvPr id="43" name="Rectangle 42"/>
+          <p:cNvPr id="44" name="Rectangle 43"/>
           <p:cNvSpPr/>
           <p:nvPr/>
         </p:nvSpPr>
@@ -8213,7 +8291,7 @@
       </p:sp>
       <p:sp>
         <p:nvSpPr>
-          <p:cNvPr id="44" name="Rectangle 43"/>
+          <p:cNvPr id="45" name="Rectangle 44"/>
           <p:cNvSpPr/>
           <p:nvPr/>
         </p:nvSpPr>
@@ -8257,7 +8335,7 @@
       </p:sp>
       <p:sp>
         <p:nvSpPr>
-          <p:cNvPr id="45" name="TextBox 44"/>
+          <p:cNvPr id="46" name="TextBox 45"/>
           <p:cNvSpPr txBox="1"/>
           <p:nvPr/>
         </p:nvSpPr>
@@ -8296,7 +8374,7 @@
       </p:sp>
       <p:sp>
         <p:nvSpPr>
-          <p:cNvPr id="46" name="TextBox 45"/>
+          <p:cNvPr id="47" name="TextBox 46"/>
           <p:cNvSpPr txBox="1"/>
           <p:nvPr/>
         </p:nvSpPr>
@@ -9278,14 +9356,53 @@
       </p:sp>
       <p:sp>
         <p:nvSpPr>
-          <p:cNvPr id="23" name="Rectangle 22"/>
+          <p:cNvPr id="23" name="TextBox 22"/>
+          <p:cNvSpPr txBox="1"/>
+          <p:nvPr/>
+        </p:nvSpPr>
+        <p:spPr>
+          <a:xfrm>
+            <a:off x="502920" y="1691640"/>
+            <a:ext cx="11201400" cy="182880"/>
+          </a:xfrm>
+          <a:prstGeom prst="rect">
+            <a:avLst/>
+          </a:prstGeom>
+          <a:noFill/>
+        </p:spPr>
+        <p:txBody>
+          <a:bodyPr wrap="square" anchor="ctr" lIns="25400" rIns="25400" tIns="12700" bIns="12700">
+            <a:spAutoFit/>
+          </a:bodyPr>
+          <a:lstStyle/>
+          <a:p>
+            <a:pPr algn="l">
+              <a:lnSpc>
+                <a:spcPct val="100000"/>
+              </a:lnSpc>
+            </a:pPr>
+            <a:r>
+              <a:rPr sz="850" b="0" i="0">
+                <a:solidFill>
+                  <a:srgbClr val="252A31"/>
+                </a:solidFill>
+                <a:latin typeface="Meiryo"/>
+              </a:rPr>
+              <a:t>▶ 10月見込み（◎）の根拠：固定ナレッジ＋入力照合の構成が明確で実現性が高い（第2回未実施）。　｜　ボリューム（〜実業務利用）：中</a:t>
+            </a:r>
+          </a:p>
+        </p:txBody>
+      </p:sp>
+      <p:sp>
+        <p:nvSpPr>
+          <p:cNvPr id="24" name="Rectangle 23"/>
           <p:cNvSpPr/>
           <p:nvPr/>
         </p:nvSpPr>
         <p:spPr>
           <a:xfrm>
-            <a:off x="502920" y="1828800"/>
-            <a:ext cx="3593592" cy="1572768"/>
+            <a:off x="502920" y="1975104"/>
+            <a:ext cx="3593592" cy="1444752"/>
           </a:xfrm>
           <a:prstGeom prst="rect">
             <a:avLst/>
@@ -9322,13 +9439,13 @@
       </p:sp>
       <p:sp>
         <p:nvSpPr>
-          <p:cNvPr id="24" name="Rectangle 23"/>
+          <p:cNvPr id="25" name="Rectangle 24"/>
           <p:cNvSpPr/>
           <p:nvPr/>
         </p:nvSpPr>
         <p:spPr>
           <a:xfrm>
-            <a:off x="502920" y="1828800"/>
+            <a:off x="502920" y="1975104"/>
             <a:ext cx="3593592" cy="365760"/>
           </a:xfrm>
           <a:prstGeom prst="rect">
@@ -9366,13 +9483,13 @@
       </p:sp>
       <p:sp>
         <p:nvSpPr>
-          <p:cNvPr id="25" name="TextBox 24"/>
+          <p:cNvPr id="26" name="TextBox 25"/>
           <p:cNvSpPr txBox="1"/>
           <p:nvPr/>
         </p:nvSpPr>
         <p:spPr>
           <a:xfrm>
-            <a:off x="667512" y="1874520"/>
+            <a:off x="667512" y="2020824"/>
             <a:ext cx="3264408" cy="274320"/>
           </a:xfrm>
           <a:prstGeom prst="rect">
@@ -9405,14 +9522,14 @@
       </p:sp>
       <p:sp>
         <p:nvSpPr>
-          <p:cNvPr id="26" name="TextBox 25"/>
+          <p:cNvPr id="27" name="TextBox 26"/>
           <p:cNvSpPr txBox="1"/>
           <p:nvPr/>
         </p:nvSpPr>
         <p:spPr>
           <a:xfrm>
-            <a:off x="667512" y="2286000"/>
-            <a:ext cx="3264408" cy="1024128"/>
+            <a:off x="667512" y="2432304"/>
+            <a:ext cx="3264408" cy="896112"/>
           </a:xfrm>
           <a:prstGeom prst="rect">
             <a:avLst/>
@@ -9444,14 +9561,14 @@
       </p:sp>
       <p:sp>
         <p:nvSpPr>
-          <p:cNvPr id="27" name="Rectangle 26"/>
+          <p:cNvPr id="28" name="Rectangle 27"/>
           <p:cNvSpPr/>
           <p:nvPr/>
         </p:nvSpPr>
         <p:spPr>
           <a:xfrm>
-            <a:off x="4306824" y="1828800"/>
-            <a:ext cx="3593592" cy="1572768"/>
+            <a:off x="4306824" y="1975104"/>
+            <a:ext cx="3593592" cy="1444752"/>
           </a:xfrm>
           <a:prstGeom prst="rect">
             <a:avLst/>
@@ -9488,13 +9605,13 @@
       </p:sp>
       <p:sp>
         <p:nvSpPr>
-          <p:cNvPr id="28" name="Rectangle 27"/>
+          <p:cNvPr id="29" name="Rectangle 28"/>
           <p:cNvSpPr/>
           <p:nvPr/>
         </p:nvSpPr>
         <p:spPr>
           <a:xfrm>
-            <a:off x="4306824" y="1828800"/>
+            <a:off x="4306824" y="1975104"/>
             <a:ext cx="3593592" cy="365760"/>
           </a:xfrm>
           <a:prstGeom prst="rect">
@@ -9532,13 +9649,13 @@
       </p:sp>
       <p:sp>
         <p:nvSpPr>
-          <p:cNvPr id="29" name="TextBox 28"/>
+          <p:cNvPr id="30" name="TextBox 29"/>
           <p:cNvSpPr txBox="1"/>
           <p:nvPr/>
         </p:nvSpPr>
         <p:spPr>
           <a:xfrm>
-            <a:off x="4471416" y="1874520"/>
+            <a:off x="4471416" y="2020824"/>
             <a:ext cx="3264408" cy="274320"/>
           </a:xfrm>
           <a:prstGeom prst="rect">
@@ -9571,14 +9688,14 @@
       </p:sp>
       <p:sp>
         <p:nvSpPr>
-          <p:cNvPr id="30" name="TextBox 29"/>
+          <p:cNvPr id="31" name="TextBox 30"/>
           <p:cNvSpPr txBox="1"/>
           <p:nvPr/>
         </p:nvSpPr>
         <p:spPr>
           <a:xfrm>
-            <a:off x="4471416" y="2286000"/>
-            <a:ext cx="3264408" cy="1024128"/>
+            <a:off x="4471416" y="2432304"/>
+            <a:ext cx="3264408" cy="896112"/>
           </a:xfrm>
           <a:prstGeom prst="rect">
             <a:avLst/>
@@ -9610,14 +9727,14 @@
       </p:sp>
       <p:sp>
         <p:nvSpPr>
-          <p:cNvPr id="31" name="Rectangle 30"/>
+          <p:cNvPr id="32" name="Rectangle 31"/>
           <p:cNvSpPr/>
           <p:nvPr/>
         </p:nvSpPr>
         <p:spPr>
           <a:xfrm>
-            <a:off x="8110728" y="1828800"/>
-            <a:ext cx="3593592" cy="1572768"/>
+            <a:off x="8110728" y="1975104"/>
+            <a:ext cx="3593592" cy="1444752"/>
           </a:xfrm>
           <a:prstGeom prst="rect">
             <a:avLst/>
@@ -9654,13 +9771,13 @@
       </p:sp>
       <p:sp>
         <p:nvSpPr>
-          <p:cNvPr id="32" name="Rectangle 31"/>
+          <p:cNvPr id="33" name="Rectangle 32"/>
           <p:cNvSpPr/>
           <p:nvPr/>
         </p:nvSpPr>
         <p:spPr>
           <a:xfrm>
-            <a:off x="8110728" y="1828800"/>
+            <a:off x="8110728" y="1975104"/>
             <a:ext cx="3593592" cy="365760"/>
           </a:xfrm>
           <a:prstGeom prst="rect">
@@ -9698,13 +9815,13 @@
       </p:sp>
       <p:sp>
         <p:nvSpPr>
-          <p:cNvPr id="33" name="TextBox 32"/>
+          <p:cNvPr id="34" name="TextBox 33"/>
           <p:cNvSpPr txBox="1"/>
           <p:nvPr/>
         </p:nvSpPr>
         <p:spPr>
           <a:xfrm>
-            <a:off x="8275320" y="1874520"/>
+            <a:off x="8275320" y="2020824"/>
             <a:ext cx="3264408" cy="274320"/>
           </a:xfrm>
           <a:prstGeom prst="rect">
@@ -9737,14 +9854,14 @@
       </p:sp>
       <p:sp>
         <p:nvSpPr>
-          <p:cNvPr id="34" name="TextBox 33"/>
+          <p:cNvPr id="35" name="TextBox 34"/>
           <p:cNvSpPr txBox="1"/>
           <p:nvPr/>
         </p:nvSpPr>
         <p:spPr>
           <a:xfrm>
-            <a:off x="8275320" y="2286000"/>
-            <a:ext cx="3264408" cy="1024128"/>
+            <a:off x="8275320" y="2432304"/>
+            <a:ext cx="3264408" cy="896112"/>
           </a:xfrm>
           <a:prstGeom prst="rect">
             <a:avLst/>
@@ -9776,7 +9893,7 @@
       </p:sp>
       <p:sp>
         <p:nvSpPr>
-          <p:cNvPr id="35" name="Rectangle 34"/>
+          <p:cNvPr id="36" name="Rectangle 35"/>
           <p:cNvSpPr/>
           <p:nvPr/>
         </p:nvSpPr>
@@ -9820,7 +9937,7 @@
       </p:sp>
       <p:sp>
         <p:nvSpPr>
-          <p:cNvPr id="36" name="Rectangle 35"/>
+          <p:cNvPr id="37" name="Rectangle 36"/>
           <p:cNvSpPr/>
           <p:nvPr/>
         </p:nvSpPr>
@@ -9864,7 +9981,7 @@
       </p:sp>
       <p:sp>
         <p:nvSpPr>
-          <p:cNvPr id="37" name="TextBox 36"/>
+          <p:cNvPr id="38" name="TextBox 37"/>
           <p:cNvSpPr txBox="1"/>
           <p:nvPr/>
         </p:nvSpPr>
@@ -9903,7 +10020,7 @@
       </p:sp>
       <p:sp>
         <p:nvSpPr>
-          <p:cNvPr id="38" name="TextBox 37"/>
+          <p:cNvPr id="39" name="TextBox 38"/>
           <p:cNvSpPr txBox="1"/>
           <p:nvPr/>
         </p:nvSpPr>
@@ -9942,7 +10059,7 @@
       </p:sp>
       <p:sp>
         <p:nvSpPr>
-          <p:cNvPr id="39" name="Rectangle 38"/>
+          <p:cNvPr id="40" name="Rectangle 39"/>
           <p:cNvSpPr/>
           <p:nvPr/>
         </p:nvSpPr>
@@ -9986,7 +10103,7 @@
       </p:sp>
       <p:sp>
         <p:nvSpPr>
-          <p:cNvPr id="40" name="Rectangle 39"/>
+          <p:cNvPr id="41" name="Rectangle 40"/>
           <p:cNvSpPr/>
           <p:nvPr/>
         </p:nvSpPr>
@@ -10030,7 +10147,7 @@
       </p:sp>
       <p:sp>
         <p:nvSpPr>
-          <p:cNvPr id="41" name="TextBox 40"/>
+          <p:cNvPr id="42" name="TextBox 41"/>
           <p:cNvSpPr txBox="1"/>
           <p:nvPr/>
         </p:nvSpPr>
@@ -10069,7 +10186,7 @@
       </p:sp>
       <p:sp>
         <p:nvSpPr>
-          <p:cNvPr id="42" name="TextBox 41"/>
+          <p:cNvPr id="43" name="TextBox 42"/>
           <p:cNvSpPr txBox="1"/>
           <p:nvPr/>
         </p:nvSpPr>
@@ -10108,7 +10225,7 @@
       </p:sp>
       <p:sp>
         <p:nvSpPr>
-          <p:cNvPr id="43" name="Rectangle 42"/>
+          <p:cNvPr id="44" name="Rectangle 43"/>
           <p:cNvSpPr/>
           <p:nvPr/>
         </p:nvSpPr>
@@ -10152,7 +10269,7 @@
       </p:sp>
       <p:sp>
         <p:nvSpPr>
-          <p:cNvPr id="44" name="Rectangle 43"/>
+          <p:cNvPr id="45" name="Rectangle 44"/>
           <p:cNvSpPr/>
           <p:nvPr/>
         </p:nvSpPr>
@@ -10196,7 +10313,7 @@
       </p:sp>
       <p:sp>
         <p:nvSpPr>
-          <p:cNvPr id="45" name="TextBox 44"/>
+          <p:cNvPr id="46" name="TextBox 45"/>
           <p:cNvSpPr txBox="1"/>
           <p:nvPr/>
         </p:nvSpPr>
@@ -10235,7 +10352,7 @@
       </p:sp>
       <p:sp>
         <p:nvSpPr>
-          <p:cNvPr id="46" name="TextBox 45"/>
+          <p:cNvPr id="47" name="TextBox 46"/>
           <p:cNvSpPr txBox="1"/>
           <p:nvPr/>
         </p:nvSpPr>
@@ -11217,14 +11334,53 @@
       </p:sp>
       <p:sp>
         <p:nvSpPr>
-          <p:cNvPr id="23" name="Rectangle 22"/>
+          <p:cNvPr id="23" name="TextBox 22"/>
+          <p:cNvSpPr txBox="1"/>
+          <p:nvPr/>
+        </p:nvSpPr>
+        <p:spPr>
+          <a:xfrm>
+            <a:off x="502920" y="1691640"/>
+            <a:ext cx="11201400" cy="182880"/>
+          </a:xfrm>
+          <a:prstGeom prst="rect">
+            <a:avLst/>
+          </a:prstGeom>
+          <a:noFill/>
+        </p:spPr>
+        <p:txBody>
+          <a:bodyPr wrap="square" anchor="ctr" lIns="25400" rIns="25400" tIns="12700" bIns="12700">
+            <a:spAutoFit/>
+          </a:bodyPr>
+          <a:lstStyle/>
+          <a:p>
+            <a:pPr algn="l">
+              <a:lnSpc>
+                <a:spcPct val="100000"/>
+              </a:lnSpc>
+            </a:pPr>
+            <a:r>
+              <a:rPr sz="850" b="0" i="0">
+                <a:solidFill>
+                  <a:srgbClr val="252A31"/>
+                </a:solidFill>
+                <a:latin typeface="Meiryo"/>
+              </a:rPr>
+              <a:t>▶ 10月見込み（○）の根拠：会議調整/タスク抽出のどちらを軸にするか決めれば1本デモ可（第2回未実施）。　｜　ボリューム（〜実業務利用）：中</a:t>
+            </a:r>
+          </a:p>
+        </p:txBody>
+      </p:sp>
+      <p:sp>
+        <p:nvSpPr>
+          <p:cNvPr id="24" name="Rectangle 23"/>
           <p:cNvSpPr/>
           <p:nvPr/>
         </p:nvSpPr>
         <p:spPr>
           <a:xfrm>
-            <a:off x="502920" y="1828800"/>
-            <a:ext cx="3593592" cy="1572768"/>
+            <a:off x="502920" y="1975104"/>
+            <a:ext cx="3593592" cy="1444752"/>
           </a:xfrm>
           <a:prstGeom prst="rect">
             <a:avLst/>
@@ -11261,13 +11417,13 @@
       </p:sp>
       <p:sp>
         <p:nvSpPr>
-          <p:cNvPr id="24" name="Rectangle 23"/>
+          <p:cNvPr id="25" name="Rectangle 24"/>
           <p:cNvSpPr/>
           <p:nvPr/>
         </p:nvSpPr>
         <p:spPr>
           <a:xfrm>
-            <a:off x="502920" y="1828800"/>
+            <a:off x="502920" y="1975104"/>
             <a:ext cx="3593592" cy="365760"/>
           </a:xfrm>
           <a:prstGeom prst="rect">
@@ -11305,13 +11461,13 @@
       </p:sp>
       <p:sp>
         <p:nvSpPr>
-          <p:cNvPr id="25" name="TextBox 24"/>
+          <p:cNvPr id="26" name="TextBox 25"/>
           <p:cNvSpPr txBox="1"/>
           <p:nvPr/>
         </p:nvSpPr>
         <p:spPr>
           <a:xfrm>
-            <a:off x="667512" y="1874520"/>
+            <a:off x="667512" y="2020824"/>
             <a:ext cx="3264408" cy="274320"/>
           </a:xfrm>
           <a:prstGeom prst="rect">
@@ -11344,14 +11500,14 @@
       </p:sp>
       <p:sp>
         <p:nvSpPr>
-          <p:cNvPr id="26" name="TextBox 25"/>
+          <p:cNvPr id="27" name="TextBox 26"/>
           <p:cNvSpPr txBox="1"/>
           <p:nvPr/>
         </p:nvSpPr>
         <p:spPr>
           <a:xfrm>
-            <a:off x="667512" y="2286000"/>
-            <a:ext cx="3264408" cy="1024128"/>
+            <a:off x="667512" y="2432304"/>
+            <a:ext cx="3264408" cy="896112"/>
           </a:xfrm>
           <a:prstGeom prst="rect">
             <a:avLst/>
@@ -11383,14 +11539,14 @@
       </p:sp>
       <p:sp>
         <p:nvSpPr>
-          <p:cNvPr id="27" name="Rectangle 26"/>
+          <p:cNvPr id="28" name="Rectangle 27"/>
           <p:cNvSpPr/>
           <p:nvPr/>
         </p:nvSpPr>
         <p:spPr>
           <a:xfrm>
-            <a:off x="4306824" y="1828800"/>
-            <a:ext cx="3593592" cy="1572768"/>
+            <a:off x="4306824" y="1975104"/>
+            <a:ext cx="3593592" cy="1444752"/>
           </a:xfrm>
           <a:prstGeom prst="rect">
             <a:avLst/>
@@ -11427,13 +11583,13 @@
       </p:sp>
       <p:sp>
         <p:nvSpPr>
-          <p:cNvPr id="28" name="Rectangle 27"/>
+          <p:cNvPr id="29" name="Rectangle 28"/>
           <p:cNvSpPr/>
           <p:nvPr/>
         </p:nvSpPr>
         <p:spPr>
           <a:xfrm>
-            <a:off x="4306824" y="1828800"/>
+            <a:off x="4306824" y="1975104"/>
             <a:ext cx="3593592" cy="365760"/>
           </a:xfrm>
           <a:prstGeom prst="rect">
@@ -11471,13 +11627,13 @@
       </p:sp>
       <p:sp>
         <p:nvSpPr>
-          <p:cNvPr id="29" name="TextBox 28"/>
+          <p:cNvPr id="30" name="TextBox 29"/>
           <p:cNvSpPr txBox="1"/>
           <p:nvPr/>
         </p:nvSpPr>
         <p:spPr>
           <a:xfrm>
-            <a:off x="4471416" y="1874520"/>
+            <a:off x="4471416" y="2020824"/>
             <a:ext cx="3264408" cy="274320"/>
           </a:xfrm>
           <a:prstGeom prst="rect">
@@ -11510,14 +11666,14 @@
       </p:sp>
       <p:sp>
         <p:nvSpPr>
-          <p:cNvPr id="30" name="TextBox 29"/>
+          <p:cNvPr id="31" name="TextBox 30"/>
           <p:cNvSpPr txBox="1"/>
           <p:nvPr/>
         </p:nvSpPr>
         <p:spPr>
           <a:xfrm>
-            <a:off x="4471416" y="2286000"/>
-            <a:ext cx="3264408" cy="1024128"/>
+            <a:off x="4471416" y="2432304"/>
+            <a:ext cx="3264408" cy="896112"/>
           </a:xfrm>
           <a:prstGeom prst="rect">
             <a:avLst/>
@@ -11549,14 +11705,14 @@
       </p:sp>
       <p:sp>
         <p:nvSpPr>
-          <p:cNvPr id="31" name="Rectangle 30"/>
+          <p:cNvPr id="32" name="Rectangle 31"/>
           <p:cNvSpPr/>
           <p:nvPr/>
         </p:nvSpPr>
         <p:spPr>
           <a:xfrm>
-            <a:off x="8110728" y="1828800"/>
-            <a:ext cx="3593592" cy="1572768"/>
+            <a:off x="8110728" y="1975104"/>
+            <a:ext cx="3593592" cy="1444752"/>
           </a:xfrm>
           <a:prstGeom prst="rect">
             <a:avLst/>
@@ -11593,13 +11749,13 @@
       </p:sp>
       <p:sp>
         <p:nvSpPr>
-          <p:cNvPr id="32" name="Rectangle 31"/>
+          <p:cNvPr id="33" name="Rectangle 32"/>
           <p:cNvSpPr/>
           <p:nvPr/>
         </p:nvSpPr>
         <p:spPr>
           <a:xfrm>
-            <a:off x="8110728" y="1828800"/>
+            <a:off x="8110728" y="1975104"/>
             <a:ext cx="3593592" cy="365760"/>
           </a:xfrm>
           <a:prstGeom prst="rect">
@@ -11637,13 +11793,13 @@
       </p:sp>
       <p:sp>
         <p:nvSpPr>
-          <p:cNvPr id="33" name="TextBox 32"/>
+          <p:cNvPr id="34" name="TextBox 33"/>
           <p:cNvSpPr txBox="1"/>
           <p:nvPr/>
         </p:nvSpPr>
         <p:spPr>
           <a:xfrm>
-            <a:off x="8275320" y="1874520"/>
+            <a:off x="8275320" y="2020824"/>
             <a:ext cx="3264408" cy="274320"/>
           </a:xfrm>
           <a:prstGeom prst="rect">
@@ -11676,14 +11832,14 @@
       </p:sp>
       <p:sp>
         <p:nvSpPr>
-          <p:cNvPr id="34" name="TextBox 33"/>
+          <p:cNvPr id="35" name="TextBox 34"/>
           <p:cNvSpPr txBox="1"/>
           <p:nvPr/>
         </p:nvSpPr>
         <p:spPr>
           <a:xfrm>
-            <a:off x="8275320" y="2286000"/>
-            <a:ext cx="3264408" cy="1024128"/>
+            <a:off x="8275320" y="2432304"/>
+            <a:ext cx="3264408" cy="896112"/>
           </a:xfrm>
           <a:prstGeom prst="rect">
             <a:avLst/>
@@ -11715,7 +11871,7 @@
       </p:sp>
       <p:sp>
         <p:nvSpPr>
-          <p:cNvPr id="35" name="Rectangle 34"/>
+          <p:cNvPr id="36" name="Rectangle 35"/>
           <p:cNvSpPr/>
           <p:nvPr/>
         </p:nvSpPr>
@@ -11759,7 +11915,7 @@
       </p:sp>
       <p:sp>
         <p:nvSpPr>
-          <p:cNvPr id="36" name="Rectangle 35"/>
+          <p:cNvPr id="37" name="Rectangle 36"/>
           <p:cNvSpPr/>
           <p:nvPr/>
         </p:nvSpPr>
@@ -11803,7 +11959,7 @@
       </p:sp>
       <p:sp>
         <p:nvSpPr>
-          <p:cNvPr id="37" name="TextBox 36"/>
+          <p:cNvPr id="38" name="TextBox 37"/>
           <p:cNvSpPr txBox="1"/>
           <p:nvPr/>
         </p:nvSpPr>
@@ -11842,7 +11998,7 @@
       </p:sp>
       <p:sp>
         <p:nvSpPr>
-          <p:cNvPr id="38" name="TextBox 37"/>
+          <p:cNvPr id="39" name="TextBox 38"/>
           <p:cNvSpPr txBox="1"/>
           <p:nvPr/>
         </p:nvSpPr>
@@ -11881,7 +12037,7 @@
       </p:sp>
       <p:sp>
         <p:nvSpPr>
-          <p:cNvPr id="39" name="Rectangle 38"/>
+          <p:cNvPr id="40" name="Rectangle 39"/>
           <p:cNvSpPr/>
           <p:nvPr/>
         </p:nvSpPr>
@@ -11925,7 +12081,7 @@
       </p:sp>
       <p:sp>
         <p:nvSpPr>
-          <p:cNvPr id="40" name="Rectangle 39"/>
+          <p:cNvPr id="41" name="Rectangle 40"/>
           <p:cNvSpPr/>
           <p:nvPr/>
         </p:nvSpPr>
@@ -11969,7 +12125,7 @@
       </p:sp>
       <p:sp>
         <p:nvSpPr>
-          <p:cNvPr id="41" name="TextBox 40"/>
+          <p:cNvPr id="42" name="TextBox 41"/>
           <p:cNvSpPr txBox="1"/>
           <p:nvPr/>
         </p:nvSpPr>
@@ -12008,7 +12164,7 @@
       </p:sp>
       <p:sp>
         <p:nvSpPr>
-          <p:cNvPr id="42" name="TextBox 41"/>
+          <p:cNvPr id="43" name="TextBox 42"/>
           <p:cNvSpPr txBox="1"/>
           <p:nvPr/>
         </p:nvSpPr>
@@ -12047,7 +12203,7 @@
       </p:sp>
       <p:sp>
         <p:nvSpPr>
-          <p:cNvPr id="43" name="Rectangle 42"/>
+          <p:cNvPr id="44" name="Rectangle 43"/>
           <p:cNvSpPr/>
           <p:nvPr/>
         </p:nvSpPr>
@@ -12091,7 +12247,7 @@
       </p:sp>
       <p:sp>
         <p:nvSpPr>
-          <p:cNvPr id="44" name="Rectangle 43"/>
+          <p:cNvPr id="45" name="Rectangle 44"/>
           <p:cNvSpPr/>
           <p:nvPr/>
         </p:nvSpPr>
@@ -12135,7 +12291,7 @@
       </p:sp>
       <p:sp>
         <p:nvSpPr>
-          <p:cNvPr id="45" name="TextBox 44"/>
+          <p:cNvPr id="46" name="TextBox 45"/>
           <p:cNvSpPr txBox="1"/>
           <p:nvPr/>
         </p:nvSpPr>
@@ -12174,7 +12330,7 @@
       </p:sp>
       <p:sp>
         <p:nvSpPr>
-          <p:cNvPr id="46" name="TextBox 45"/>
+          <p:cNvPr id="47" name="TextBox 46"/>
           <p:cNvSpPr txBox="1"/>
           <p:nvPr/>
         </p:nvSpPr>
@@ -13063,7 +13219,7 @@
             <a:avLst/>
           </a:prstGeom>
           <a:solidFill>
-            <a:srgbClr val="C98A1B"/>
+            <a:srgbClr val="2E8B9E"/>
           </a:solidFill>
           <a:ln>
             <a:noFill/>
@@ -13096,7 +13252,7 @@
                 </a:solidFill>
                 <a:latin typeface="Meiryo"/>
               </a:rPr>
-              <a:t>10月見込み：△</a:t>
+              <a:t>10月見込み：○</a:t>
             </a:r>
           </a:p>
         </p:txBody>
@@ -13156,14 +13312,53 @@
       </p:sp>
       <p:sp>
         <p:nvSpPr>
-          <p:cNvPr id="23" name="Rectangle 22"/>
+          <p:cNvPr id="23" name="TextBox 22"/>
+          <p:cNvSpPr txBox="1"/>
+          <p:nvPr/>
+        </p:nvSpPr>
+        <p:spPr>
+          <a:xfrm>
+            <a:off x="502920" y="1691640"/>
+            <a:ext cx="11201400" cy="182880"/>
+          </a:xfrm>
+          <a:prstGeom prst="rect">
+            <a:avLst/>
+          </a:prstGeom>
+          <a:noFill/>
+        </p:spPr>
+        <p:txBody>
+          <a:bodyPr wrap="square" anchor="ctr" lIns="25400" rIns="25400" tIns="12700" bIns="12700">
+            <a:spAutoFit/>
+          </a:bodyPr>
+          <a:lstStyle/>
+          <a:p>
+            <a:pPr algn="l">
+              <a:lnSpc>
+                <a:spcPct val="100000"/>
+              </a:lnSpc>
+            </a:pPr>
+            <a:r>
+              <a:rPr sz="850" b="0" i="0">
+                <a:solidFill>
+                  <a:srgbClr val="252A31"/>
+                </a:solidFill>
+                <a:latin typeface="Meiryo"/>
+              </a:rPr>
+              <a:t>▶ 10月見込み（○）の根拠：管理ツール構想は明確。社外秘/連携は別論点化し、メール検知→管理表→下書きに絞れば発表可（第2回未実施）。　｜　ボリューム（〜実業務利用）：大</a:t>
+            </a:r>
+          </a:p>
+        </p:txBody>
+      </p:sp>
+      <p:sp>
+        <p:nvSpPr>
+          <p:cNvPr id="24" name="Rectangle 23"/>
           <p:cNvSpPr/>
           <p:nvPr/>
         </p:nvSpPr>
         <p:spPr>
           <a:xfrm>
-            <a:off x="502920" y="1828800"/>
-            <a:ext cx="3593592" cy="1572768"/>
+            <a:off x="502920" y="1975104"/>
+            <a:ext cx="3593592" cy="1444752"/>
           </a:xfrm>
           <a:prstGeom prst="rect">
             <a:avLst/>
@@ -13200,13 +13395,13 @@
       </p:sp>
       <p:sp>
         <p:nvSpPr>
-          <p:cNvPr id="24" name="Rectangle 23"/>
+          <p:cNvPr id="25" name="Rectangle 24"/>
           <p:cNvSpPr/>
           <p:nvPr/>
         </p:nvSpPr>
         <p:spPr>
           <a:xfrm>
-            <a:off x="502920" y="1828800"/>
+            <a:off x="502920" y="1975104"/>
             <a:ext cx="3593592" cy="365760"/>
           </a:xfrm>
           <a:prstGeom prst="rect">
@@ -13244,13 +13439,13 @@
       </p:sp>
       <p:sp>
         <p:nvSpPr>
-          <p:cNvPr id="25" name="TextBox 24"/>
+          <p:cNvPr id="26" name="TextBox 25"/>
           <p:cNvSpPr txBox="1"/>
           <p:nvPr/>
         </p:nvSpPr>
         <p:spPr>
           <a:xfrm>
-            <a:off x="667512" y="1874520"/>
+            <a:off x="667512" y="2020824"/>
             <a:ext cx="3264408" cy="274320"/>
           </a:xfrm>
           <a:prstGeom prst="rect">
@@ -13283,14 +13478,14 @@
       </p:sp>
       <p:sp>
         <p:nvSpPr>
-          <p:cNvPr id="26" name="TextBox 25"/>
+          <p:cNvPr id="27" name="TextBox 26"/>
           <p:cNvSpPr txBox="1"/>
           <p:nvPr/>
         </p:nvSpPr>
         <p:spPr>
           <a:xfrm>
-            <a:off x="667512" y="2286000"/>
-            <a:ext cx="3264408" cy="1024128"/>
+            <a:off x="667512" y="2432304"/>
+            <a:ext cx="3264408" cy="896112"/>
           </a:xfrm>
           <a:prstGeom prst="rect">
             <a:avLst/>
@@ -13322,14 +13517,14 @@
       </p:sp>
       <p:sp>
         <p:nvSpPr>
-          <p:cNvPr id="27" name="Rectangle 26"/>
+          <p:cNvPr id="28" name="Rectangle 27"/>
           <p:cNvSpPr/>
           <p:nvPr/>
         </p:nvSpPr>
         <p:spPr>
           <a:xfrm>
-            <a:off x="4306824" y="1828800"/>
-            <a:ext cx="3593592" cy="1572768"/>
+            <a:off x="4306824" y="1975104"/>
+            <a:ext cx="3593592" cy="1444752"/>
           </a:xfrm>
           <a:prstGeom prst="rect">
             <a:avLst/>
@@ -13366,13 +13561,13 @@
       </p:sp>
       <p:sp>
         <p:nvSpPr>
-          <p:cNvPr id="28" name="Rectangle 27"/>
+          <p:cNvPr id="29" name="Rectangle 28"/>
           <p:cNvSpPr/>
           <p:nvPr/>
         </p:nvSpPr>
         <p:spPr>
           <a:xfrm>
-            <a:off x="4306824" y="1828800"/>
+            <a:off x="4306824" y="1975104"/>
             <a:ext cx="3593592" cy="365760"/>
           </a:xfrm>
           <a:prstGeom prst="rect">
@@ -13410,13 +13605,13 @@
       </p:sp>
       <p:sp>
         <p:nvSpPr>
-          <p:cNvPr id="29" name="TextBox 28"/>
+          <p:cNvPr id="30" name="TextBox 29"/>
           <p:cNvSpPr txBox="1"/>
           <p:nvPr/>
         </p:nvSpPr>
         <p:spPr>
           <a:xfrm>
-            <a:off x="4471416" y="1874520"/>
+            <a:off x="4471416" y="2020824"/>
             <a:ext cx="3264408" cy="274320"/>
           </a:xfrm>
           <a:prstGeom prst="rect">
@@ -13449,14 +13644,14 @@
       </p:sp>
       <p:sp>
         <p:nvSpPr>
-          <p:cNvPr id="30" name="TextBox 29"/>
+          <p:cNvPr id="31" name="TextBox 30"/>
           <p:cNvSpPr txBox="1"/>
           <p:nvPr/>
         </p:nvSpPr>
         <p:spPr>
           <a:xfrm>
-            <a:off x="4471416" y="2286000"/>
-            <a:ext cx="3264408" cy="1024128"/>
+            <a:off x="4471416" y="2432304"/>
+            <a:ext cx="3264408" cy="896112"/>
           </a:xfrm>
           <a:prstGeom prst="rect">
             <a:avLst/>
@@ -13488,14 +13683,14 @@
       </p:sp>
       <p:sp>
         <p:nvSpPr>
-          <p:cNvPr id="31" name="Rectangle 30"/>
+          <p:cNvPr id="32" name="Rectangle 31"/>
           <p:cNvSpPr/>
           <p:nvPr/>
         </p:nvSpPr>
         <p:spPr>
           <a:xfrm>
-            <a:off x="8110728" y="1828800"/>
-            <a:ext cx="3593592" cy="1572768"/>
+            <a:off x="8110728" y="1975104"/>
+            <a:ext cx="3593592" cy="1444752"/>
           </a:xfrm>
           <a:prstGeom prst="rect">
             <a:avLst/>
@@ -13532,13 +13727,13 @@
       </p:sp>
       <p:sp>
         <p:nvSpPr>
-          <p:cNvPr id="32" name="Rectangle 31"/>
+          <p:cNvPr id="33" name="Rectangle 32"/>
           <p:cNvSpPr/>
           <p:nvPr/>
         </p:nvSpPr>
         <p:spPr>
           <a:xfrm>
-            <a:off x="8110728" y="1828800"/>
+            <a:off x="8110728" y="1975104"/>
             <a:ext cx="3593592" cy="365760"/>
           </a:xfrm>
           <a:prstGeom prst="rect">
@@ -13576,13 +13771,13 @@
       </p:sp>
       <p:sp>
         <p:nvSpPr>
-          <p:cNvPr id="33" name="TextBox 32"/>
+          <p:cNvPr id="34" name="TextBox 33"/>
           <p:cNvSpPr txBox="1"/>
           <p:nvPr/>
         </p:nvSpPr>
         <p:spPr>
           <a:xfrm>
-            <a:off x="8275320" y="1874520"/>
+            <a:off x="8275320" y="2020824"/>
             <a:ext cx="3264408" cy="274320"/>
           </a:xfrm>
           <a:prstGeom prst="rect">
@@ -13615,14 +13810,14 @@
       </p:sp>
       <p:sp>
         <p:nvSpPr>
-          <p:cNvPr id="34" name="TextBox 33"/>
+          <p:cNvPr id="35" name="TextBox 34"/>
           <p:cNvSpPr txBox="1"/>
           <p:nvPr/>
         </p:nvSpPr>
         <p:spPr>
           <a:xfrm>
-            <a:off x="8275320" y="2286000"/>
-            <a:ext cx="3264408" cy="1024128"/>
+            <a:off x="8275320" y="2432304"/>
+            <a:ext cx="3264408" cy="896112"/>
           </a:xfrm>
           <a:prstGeom prst="rect">
             <a:avLst/>
@@ -13654,7 +13849,7 @@
       </p:sp>
       <p:sp>
         <p:nvSpPr>
-          <p:cNvPr id="35" name="Rectangle 34"/>
+          <p:cNvPr id="36" name="Rectangle 35"/>
           <p:cNvSpPr/>
           <p:nvPr/>
         </p:nvSpPr>
@@ -13698,7 +13893,7 @@
       </p:sp>
       <p:sp>
         <p:nvSpPr>
-          <p:cNvPr id="36" name="Rectangle 35"/>
+          <p:cNvPr id="37" name="Rectangle 36"/>
           <p:cNvSpPr/>
           <p:nvPr/>
         </p:nvSpPr>
@@ -13742,7 +13937,7 @@
       </p:sp>
       <p:sp>
         <p:nvSpPr>
-          <p:cNvPr id="37" name="TextBox 36"/>
+          <p:cNvPr id="38" name="TextBox 37"/>
           <p:cNvSpPr txBox="1"/>
           <p:nvPr/>
         </p:nvSpPr>
@@ -13781,7 +13976,7 @@
       </p:sp>
       <p:sp>
         <p:nvSpPr>
-          <p:cNvPr id="38" name="TextBox 37"/>
+          <p:cNvPr id="39" name="TextBox 38"/>
           <p:cNvSpPr txBox="1"/>
           <p:nvPr/>
         </p:nvSpPr>
@@ -13820,7 +14015,7 @@
       </p:sp>
       <p:sp>
         <p:nvSpPr>
-          <p:cNvPr id="39" name="Rectangle 38"/>
+          <p:cNvPr id="40" name="Rectangle 39"/>
           <p:cNvSpPr/>
           <p:nvPr/>
         </p:nvSpPr>
@@ -13864,7 +14059,7 @@
       </p:sp>
       <p:sp>
         <p:nvSpPr>
-          <p:cNvPr id="40" name="Rectangle 39"/>
+          <p:cNvPr id="41" name="Rectangle 40"/>
           <p:cNvSpPr/>
           <p:nvPr/>
         </p:nvSpPr>
@@ -13908,7 +14103,7 @@
       </p:sp>
       <p:sp>
         <p:nvSpPr>
-          <p:cNvPr id="41" name="TextBox 40"/>
+          <p:cNvPr id="42" name="TextBox 41"/>
           <p:cNvSpPr txBox="1"/>
           <p:nvPr/>
         </p:nvSpPr>
@@ -13947,7 +14142,7 @@
       </p:sp>
       <p:sp>
         <p:nvSpPr>
-          <p:cNvPr id="42" name="TextBox 41"/>
+          <p:cNvPr id="43" name="TextBox 42"/>
           <p:cNvSpPr txBox="1"/>
           <p:nvPr/>
         </p:nvSpPr>
@@ -13986,7 +14181,7 @@
       </p:sp>
       <p:sp>
         <p:nvSpPr>
-          <p:cNvPr id="43" name="Rectangle 42"/>
+          <p:cNvPr id="44" name="Rectangle 43"/>
           <p:cNvSpPr/>
           <p:nvPr/>
         </p:nvSpPr>
@@ -14030,7 +14225,7 @@
       </p:sp>
       <p:sp>
         <p:nvSpPr>
-          <p:cNvPr id="44" name="Rectangle 43"/>
+          <p:cNvPr id="45" name="Rectangle 44"/>
           <p:cNvSpPr/>
           <p:nvPr/>
         </p:nvSpPr>
@@ -14074,7 +14269,7 @@
       </p:sp>
       <p:sp>
         <p:nvSpPr>
-          <p:cNvPr id="45" name="TextBox 44"/>
+          <p:cNvPr id="46" name="TextBox 45"/>
           <p:cNvSpPr txBox="1"/>
           <p:nvPr/>
         </p:nvSpPr>
@@ -14113,7 +14308,7 @@
       </p:sp>
       <p:sp>
         <p:nvSpPr>
-          <p:cNvPr id="46" name="TextBox 45"/>
+          <p:cNvPr id="47" name="TextBox 46"/>
           <p:cNvSpPr txBox="1"/>
           <p:nvPr/>
         </p:nvSpPr>
@@ -15095,14 +15290,53 @@
       </p:sp>
       <p:sp>
         <p:nvSpPr>
-          <p:cNvPr id="23" name="Rectangle 22"/>
+          <p:cNvPr id="23" name="TextBox 22"/>
+          <p:cNvSpPr txBox="1"/>
+          <p:nvPr/>
+        </p:nvSpPr>
+        <p:spPr>
+          <a:xfrm>
+            <a:off x="502920" y="1691640"/>
+            <a:ext cx="11201400" cy="182880"/>
+          </a:xfrm>
+          <a:prstGeom prst="rect">
+            <a:avLst/>
+          </a:prstGeom>
+          <a:noFill/>
+        </p:spPr>
+        <p:txBody>
+          <a:bodyPr wrap="square" anchor="ctr" lIns="25400" rIns="25400" tIns="12700" bIns="12700">
+            <a:spAutoFit/>
+          </a:bodyPr>
+          <a:lstStyle/>
+          <a:p>
+            <a:pPr algn="l">
+              <a:lnSpc>
+                <a:spcPct val="100000"/>
+              </a:lnSpc>
+            </a:pPr>
+            <a:r>
+              <a:rPr sz="850" b="0" i="0">
+                <a:solidFill>
+                  <a:srgbClr val="252A31"/>
+                </a:solidFill>
+                <a:latin typeface="Meiryo"/>
+              </a:rPr>
+              <a:t>▶ 10月見込み（○）の根拠：構成は明確。トランスクリプト権限とドラフト品質の検証を進めれば発表可。　｜　ボリューム（〜実業務利用）：中</a:t>
+            </a:r>
+          </a:p>
+        </p:txBody>
+      </p:sp>
+      <p:sp>
+        <p:nvSpPr>
+          <p:cNvPr id="24" name="Rectangle 23"/>
           <p:cNvSpPr/>
           <p:nvPr/>
         </p:nvSpPr>
         <p:spPr>
           <a:xfrm>
-            <a:off x="502920" y="1828800"/>
-            <a:ext cx="3593592" cy="1572768"/>
+            <a:off x="502920" y="1975104"/>
+            <a:ext cx="3593592" cy="1444752"/>
           </a:xfrm>
           <a:prstGeom prst="rect">
             <a:avLst/>
@@ -15139,13 +15373,13 @@
       </p:sp>
       <p:sp>
         <p:nvSpPr>
-          <p:cNvPr id="24" name="Rectangle 23"/>
+          <p:cNvPr id="25" name="Rectangle 24"/>
           <p:cNvSpPr/>
           <p:nvPr/>
         </p:nvSpPr>
         <p:spPr>
           <a:xfrm>
-            <a:off x="502920" y="1828800"/>
+            <a:off x="502920" y="1975104"/>
             <a:ext cx="3593592" cy="365760"/>
           </a:xfrm>
           <a:prstGeom prst="rect">
@@ -15183,13 +15417,13 @@
       </p:sp>
       <p:sp>
         <p:nvSpPr>
-          <p:cNvPr id="25" name="TextBox 24"/>
+          <p:cNvPr id="26" name="TextBox 25"/>
           <p:cNvSpPr txBox="1"/>
           <p:nvPr/>
         </p:nvSpPr>
         <p:spPr>
           <a:xfrm>
-            <a:off x="667512" y="1874520"/>
+            <a:off x="667512" y="2020824"/>
             <a:ext cx="3264408" cy="274320"/>
           </a:xfrm>
           <a:prstGeom prst="rect">
@@ -15222,14 +15456,14 @@
       </p:sp>
       <p:sp>
         <p:nvSpPr>
-          <p:cNvPr id="26" name="TextBox 25"/>
+          <p:cNvPr id="27" name="TextBox 26"/>
           <p:cNvSpPr txBox="1"/>
           <p:nvPr/>
         </p:nvSpPr>
         <p:spPr>
           <a:xfrm>
-            <a:off x="667512" y="2286000"/>
-            <a:ext cx="3264408" cy="1024128"/>
+            <a:off x="667512" y="2432304"/>
+            <a:ext cx="3264408" cy="896112"/>
           </a:xfrm>
           <a:prstGeom prst="rect">
             <a:avLst/>
@@ -15261,14 +15495,14 @@
       </p:sp>
       <p:sp>
         <p:nvSpPr>
-          <p:cNvPr id="27" name="Rectangle 26"/>
+          <p:cNvPr id="28" name="Rectangle 27"/>
           <p:cNvSpPr/>
           <p:nvPr/>
         </p:nvSpPr>
         <p:spPr>
           <a:xfrm>
-            <a:off x="4306824" y="1828800"/>
-            <a:ext cx="3593592" cy="1572768"/>
+            <a:off x="4306824" y="1975104"/>
+            <a:ext cx="3593592" cy="1444752"/>
           </a:xfrm>
           <a:prstGeom prst="rect">
             <a:avLst/>
@@ -15305,13 +15539,13 @@
       </p:sp>
       <p:sp>
         <p:nvSpPr>
-          <p:cNvPr id="28" name="Rectangle 27"/>
+          <p:cNvPr id="29" name="Rectangle 28"/>
           <p:cNvSpPr/>
           <p:nvPr/>
         </p:nvSpPr>
         <p:spPr>
           <a:xfrm>
-            <a:off x="4306824" y="1828800"/>
+            <a:off x="4306824" y="1975104"/>
             <a:ext cx="3593592" cy="365760"/>
           </a:xfrm>
           <a:prstGeom prst="rect">
@@ -15349,13 +15583,13 @@
       </p:sp>
       <p:sp>
         <p:nvSpPr>
-          <p:cNvPr id="29" name="TextBox 28"/>
+          <p:cNvPr id="30" name="TextBox 29"/>
           <p:cNvSpPr txBox="1"/>
           <p:nvPr/>
         </p:nvSpPr>
         <p:spPr>
           <a:xfrm>
-            <a:off x="4471416" y="1874520"/>
+            <a:off x="4471416" y="2020824"/>
             <a:ext cx="3264408" cy="274320"/>
           </a:xfrm>
           <a:prstGeom prst="rect">
@@ -15388,14 +15622,14 @@
       </p:sp>
       <p:sp>
         <p:nvSpPr>
-          <p:cNvPr id="30" name="TextBox 29"/>
+          <p:cNvPr id="31" name="TextBox 30"/>
           <p:cNvSpPr txBox="1"/>
           <p:nvPr/>
         </p:nvSpPr>
         <p:spPr>
           <a:xfrm>
-            <a:off x="4471416" y="2286000"/>
-            <a:ext cx="3264408" cy="1024128"/>
+            <a:off x="4471416" y="2432304"/>
+            <a:ext cx="3264408" cy="896112"/>
           </a:xfrm>
           <a:prstGeom prst="rect">
             <a:avLst/>
@@ -15427,14 +15661,14 @@
       </p:sp>
       <p:sp>
         <p:nvSpPr>
-          <p:cNvPr id="31" name="Rectangle 30"/>
+          <p:cNvPr id="32" name="Rectangle 31"/>
           <p:cNvSpPr/>
           <p:nvPr/>
         </p:nvSpPr>
         <p:spPr>
           <a:xfrm>
-            <a:off x="8110728" y="1828800"/>
-            <a:ext cx="3593592" cy="1572768"/>
+            <a:off x="8110728" y="1975104"/>
+            <a:ext cx="3593592" cy="1444752"/>
           </a:xfrm>
           <a:prstGeom prst="rect">
             <a:avLst/>
@@ -15471,13 +15705,13 @@
       </p:sp>
       <p:sp>
         <p:nvSpPr>
-          <p:cNvPr id="32" name="Rectangle 31"/>
+          <p:cNvPr id="33" name="Rectangle 32"/>
           <p:cNvSpPr/>
           <p:nvPr/>
         </p:nvSpPr>
         <p:spPr>
           <a:xfrm>
-            <a:off x="8110728" y="1828800"/>
+            <a:off x="8110728" y="1975104"/>
             <a:ext cx="3593592" cy="365760"/>
           </a:xfrm>
           <a:prstGeom prst="rect">
@@ -15515,13 +15749,13 @@
       </p:sp>
       <p:sp>
         <p:nvSpPr>
-          <p:cNvPr id="33" name="TextBox 32"/>
+          <p:cNvPr id="34" name="TextBox 33"/>
           <p:cNvSpPr txBox="1"/>
           <p:nvPr/>
         </p:nvSpPr>
         <p:spPr>
           <a:xfrm>
-            <a:off x="8275320" y="1874520"/>
+            <a:off x="8275320" y="2020824"/>
             <a:ext cx="3264408" cy="274320"/>
           </a:xfrm>
           <a:prstGeom prst="rect">
@@ -15554,14 +15788,14 @@
       </p:sp>
       <p:sp>
         <p:nvSpPr>
-          <p:cNvPr id="34" name="TextBox 33"/>
+          <p:cNvPr id="35" name="TextBox 34"/>
           <p:cNvSpPr txBox="1"/>
           <p:nvPr/>
         </p:nvSpPr>
         <p:spPr>
           <a:xfrm>
-            <a:off x="8275320" y="2286000"/>
-            <a:ext cx="3264408" cy="1024128"/>
+            <a:off x="8275320" y="2432304"/>
+            <a:ext cx="3264408" cy="896112"/>
           </a:xfrm>
           <a:prstGeom prst="rect">
             <a:avLst/>
@@ -15593,7 +15827,7 @@
       </p:sp>
       <p:sp>
         <p:nvSpPr>
-          <p:cNvPr id="35" name="Rectangle 34"/>
+          <p:cNvPr id="36" name="Rectangle 35"/>
           <p:cNvSpPr/>
           <p:nvPr/>
         </p:nvSpPr>
@@ -15637,7 +15871,7 @@
       </p:sp>
       <p:sp>
         <p:nvSpPr>
-          <p:cNvPr id="36" name="Rectangle 35"/>
+          <p:cNvPr id="37" name="Rectangle 36"/>
           <p:cNvSpPr/>
           <p:nvPr/>
         </p:nvSpPr>
@@ -15681,7 +15915,7 @@
       </p:sp>
       <p:sp>
         <p:nvSpPr>
-          <p:cNvPr id="37" name="TextBox 36"/>
+          <p:cNvPr id="38" name="TextBox 37"/>
           <p:cNvSpPr txBox="1"/>
           <p:nvPr/>
         </p:nvSpPr>
@@ -15720,7 +15954,7 @@
       </p:sp>
       <p:sp>
         <p:nvSpPr>
-          <p:cNvPr id="38" name="TextBox 37"/>
+          <p:cNvPr id="39" name="TextBox 38"/>
           <p:cNvSpPr txBox="1"/>
           <p:nvPr/>
         </p:nvSpPr>
@@ -15759,7 +15993,7 @@
       </p:sp>
       <p:sp>
         <p:nvSpPr>
-          <p:cNvPr id="39" name="Rectangle 38"/>
+          <p:cNvPr id="40" name="Rectangle 39"/>
           <p:cNvSpPr/>
           <p:nvPr/>
         </p:nvSpPr>
@@ -15803,7 +16037,7 @@
       </p:sp>
       <p:sp>
         <p:nvSpPr>
-          <p:cNvPr id="40" name="Rectangle 39"/>
+          <p:cNvPr id="41" name="Rectangle 40"/>
           <p:cNvSpPr/>
           <p:nvPr/>
         </p:nvSpPr>
@@ -15847,7 +16081,7 @@
       </p:sp>
       <p:sp>
         <p:nvSpPr>
-          <p:cNvPr id="41" name="TextBox 40"/>
+          <p:cNvPr id="42" name="TextBox 41"/>
           <p:cNvSpPr txBox="1"/>
           <p:nvPr/>
         </p:nvSpPr>
@@ -15886,7 +16120,7 @@
       </p:sp>
       <p:sp>
         <p:nvSpPr>
-          <p:cNvPr id="42" name="TextBox 41"/>
+          <p:cNvPr id="43" name="TextBox 42"/>
           <p:cNvSpPr txBox="1"/>
           <p:nvPr/>
         </p:nvSpPr>
@@ -15925,7 +16159,7 @@
       </p:sp>
       <p:sp>
         <p:nvSpPr>
-          <p:cNvPr id="43" name="Rectangle 42"/>
+          <p:cNvPr id="44" name="Rectangle 43"/>
           <p:cNvSpPr/>
           <p:nvPr/>
         </p:nvSpPr>
@@ -15969,7 +16203,7 @@
       </p:sp>
       <p:sp>
         <p:nvSpPr>
-          <p:cNvPr id="44" name="Rectangle 43"/>
+          <p:cNvPr id="45" name="Rectangle 44"/>
           <p:cNvSpPr/>
           <p:nvPr/>
         </p:nvSpPr>
@@ -16013,7 +16247,7 @@
       </p:sp>
       <p:sp>
         <p:nvSpPr>
-          <p:cNvPr id="45" name="TextBox 44"/>
+          <p:cNvPr id="46" name="TextBox 45"/>
           <p:cNvSpPr txBox="1"/>
           <p:nvPr/>
         </p:nvSpPr>
@@ -16052,7 +16286,7 @@
       </p:sp>
       <p:sp>
         <p:nvSpPr>
-          <p:cNvPr id="46" name="TextBox 45"/>
+          <p:cNvPr id="47" name="TextBox 46"/>
           <p:cNvSpPr txBox="1"/>
           <p:nvPr/>
         </p:nvSpPr>
@@ -17034,14 +17268,53 @@
       </p:sp>
       <p:sp>
         <p:nvSpPr>
-          <p:cNvPr id="23" name="Rectangle 22"/>
+          <p:cNvPr id="23" name="TextBox 22"/>
+          <p:cNvSpPr txBox="1"/>
+          <p:nvPr/>
+        </p:nvSpPr>
+        <p:spPr>
+          <a:xfrm>
+            <a:off x="502920" y="1691640"/>
+            <a:ext cx="11201400" cy="182880"/>
+          </a:xfrm>
+          <a:prstGeom prst="rect">
+            <a:avLst/>
+          </a:prstGeom>
+          <a:noFill/>
+        </p:spPr>
+        <p:txBody>
+          <a:bodyPr wrap="square" anchor="ctr" lIns="25400" rIns="25400" tIns="12700" bIns="12700">
+            <a:spAutoFit/>
+          </a:bodyPr>
+          <a:lstStyle/>
+          <a:p>
+            <a:pPr algn="l">
+              <a:lnSpc>
+                <a:spcPct val="100000"/>
+              </a:lnSpc>
+            </a:pPr>
+            <a:r>
+              <a:rPr sz="850" b="0" i="0">
+                <a:solidFill>
+                  <a:srgbClr val="252A31"/>
+                </a:solidFill>
+                <a:latin typeface="Meiryo"/>
+              </a:rPr>
+              <a:t>▶ 10月見込み（○）の根拠：構成・前提は明確。FAQ整備・本番移行・運用項目の洗い出しを進めれば発表可。　｜　ボリューム（〜実業務利用）：大</a:t>
+            </a:r>
+          </a:p>
+        </p:txBody>
+      </p:sp>
+      <p:sp>
+        <p:nvSpPr>
+          <p:cNvPr id="24" name="Rectangle 23"/>
           <p:cNvSpPr/>
           <p:nvPr/>
         </p:nvSpPr>
         <p:spPr>
           <a:xfrm>
-            <a:off x="502920" y="1828800"/>
-            <a:ext cx="3593592" cy="1572768"/>
+            <a:off x="502920" y="1975104"/>
+            <a:ext cx="3593592" cy="1444752"/>
           </a:xfrm>
           <a:prstGeom prst="rect">
             <a:avLst/>
@@ -17078,13 +17351,13 @@
       </p:sp>
       <p:sp>
         <p:nvSpPr>
-          <p:cNvPr id="24" name="Rectangle 23"/>
+          <p:cNvPr id="25" name="Rectangle 24"/>
           <p:cNvSpPr/>
           <p:nvPr/>
         </p:nvSpPr>
         <p:spPr>
           <a:xfrm>
-            <a:off x="502920" y="1828800"/>
+            <a:off x="502920" y="1975104"/>
             <a:ext cx="3593592" cy="365760"/>
           </a:xfrm>
           <a:prstGeom prst="rect">
@@ -17122,13 +17395,13 @@
       </p:sp>
       <p:sp>
         <p:nvSpPr>
-          <p:cNvPr id="25" name="TextBox 24"/>
+          <p:cNvPr id="26" name="TextBox 25"/>
           <p:cNvSpPr txBox="1"/>
           <p:nvPr/>
         </p:nvSpPr>
         <p:spPr>
           <a:xfrm>
-            <a:off x="667512" y="1874520"/>
+            <a:off x="667512" y="2020824"/>
             <a:ext cx="3264408" cy="274320"/>
           </a:xfrm>
           <a:prstGeom prst="rect">
@@ -17161,14 +17434,14 @@
       </p:sp>
       <p:sp>
         <p:nvSpPr>
-          <p:cNvPr id="26" name="TextBox 25"/>
+          <p:cNvPr id="27" name="TextBox 26"/>
           <p:cNvSpPr txBox="1"/>
           <p:nvPr/>
         </p:nvSpPr>
         <p:spPr>
           <a:xfrm>
-            <a:off x="667512" y="2286000"/>
-            <a:ext cx="3264408" cy="1024128"/>
+            <a:off x="667512" y="2432304"/>
+            <a:ext cx="3264408" cy="896112"/>
           </a:xfrm>
           <a:prstGeom prst="rect">
             <a:avLst/>
@@ -17200,14 +17473,14 @@
       </p:sp>
       <p:sp>
         <p:nvSpPr>
-          <p:cNvPr id="27" name="Rectangle 26"/>
+          <p:cNvPr id="28" name="Rectangle 27"/>
           <p:cNvSpPr/>
           <p:nvPr/>
         </p:nvSpPr>
         <p:spPr>
           <a:xfrm>
-            <a:off x="4306824" y="1828800"/>
-            <a:ext cx="3593592" cy="1572768"/>
+            <a:off x="4306824" y="1975104"/>
+            <a:ext cx="3593592" cy="1444752"/>
           </a:xfrm>
           <a:prstGeom prst="rect">
             <a:avLst/>
@@ -17244,13 +17517,13 @@
       </p:sp>
       <p:sp>
         <p:nvSpPr>
-          <p:cNvPr id="28" name="Rectangle 27"/>
+          <p:cNvPr id="29" name="Rectangle 28"/>
           <p:cNvSpPr/>
           <p:nvPr/>
         </p:nvSpPr>
         <p:spPr>
           <a:xfrm>
-            <a:off x="4306824" y="1828800"/>
+            <a:off x="4306824" y="1975104"/>
             <a:ext cx="3593592" cy="365760"/>
           </a:xfrm>
           <a:prstGeom prst="rect">
@@ -17288,13 +17561,13 @@
       </p:sp>
       <p:sp>
         <p:nvSpPr>
-          <p:cNvPr id="29" name="TextBox 28"/>
+          <p:cNvPr id="30" name="TextBox 29"/>
           <p:cNvSpPr txBox="1"/>
           <p:nvPr/>
         </p:nvSpPr>
         <p:spPr>
           <a:xfrm>
-            <a:off x="4471416" y="1874520"/>
+            <a:off x="4471416" y="2020824"/>
             <a:ext cx="3264408" cy="274320"/>
           </a:xfrm>
           <a:prstGeom prst="rect">
@@ -17327,14 +17600,14 @@
       </p:sp>
       <p:sp>
         <p:nvSpPr>
-          <p:cNvPr id="30" name="TextBox 29"/>
+          <p:cNvPr id="31" name="TextBox 30"/>
           <p:cNvSpPr txBox="1"/>
           <p:nvPr/>
         </p:nvSpPr>
         <p:spPr>
           <a:xfrm>
-            <a:off x="4471416" y="2286000"/>
-            <a:ext cx="3264408" cy="1024128"/>
+            <a:off x="4471416" y="2432304"/>
+            <a:ext cx="3264408" cy="896112"/>
           </a:xfrm>
           <a:prstGeom prst="rect">
             <a:avLst/>
@@ -17366,14 +17639,14 @@
       </p:sp>
       <p:sp>
         <p:nvSpPr>
-          <p:cNvPr id="31" name="Rectangle 30"/>
+          <p:cNvPr id="32" name="Rectangle 31"/>
           <p:cNvSpPr/>
           <p:nvPr/>
         </p:nvSpPr>
         <p:spPr>
           <a:xfrm>
-            <a:off x="8110728" y="1828800"/>
-            <a:ext cx="3593592" cy="1572768"/>
+            <a:off x="8110728" y="1975104"/>
+            <a:ext cx="3593592" cy="1444752"/>
           </a:xfrm>
           <a:prstGeom prst="rect">
             <a:avLst/>
@@ -17410,13 +17683,13 @@
       </p:sp>
       <p:sp>
         <p:nvSpPr>
-          <p:cNvPr id="32" name="Rectangle 31"/>
+          <p:cNvPr id="33" name="Rectangle 32"/>
           <p:cNvSpPr/>
           <p:nvPr/>
         </p:nvSpPr>
         <p:spPr>
           <a:xfrm>
-            <a:off x="8110728" y="1828800"/>
+            <a:off x="8110728" y="1975104"/>
             <a:ext cx="3593592" cy="365760"/>
           </a:xfrm>
           <a:prstGeom prst="rect">
@@ -17454,13 +17727,13 @@
       </p:sp>
       <p:sp>
         <p:nvSpPr>
-          <p:cNvPr id="33" name="TextBox 32"/>
+          <p:cNvPr id="34" name="TextBox 33"/>
           <p:cNvSpPr txBox="1"/>
           <p:nvPr/>
         </p:nvSpPr>
         <p:spPr>
           <a:xfrm>
-            <a:off x="8275320" y="1874520"/>
+            <a:off x="8275320" y="2020824"/>
             <a:ext cx="3264408" cy="274320"/>
           </a:xfrm>
           <a:prstGeom prst="rect">
@@ -17493,14 +17766,14 @@
       </p:sp>
       <p:sp>
         <p:nvSpPr>
-          <p:cNvPr id="34" name="TextBox 33"/>
+          <p:cNvPr id="35" name="TextBox 34"/>
           <p:cNvSpPr txBox="1"/>
           <p:nvPr/>
         </p:nvSpPr>
         <p:spPr>
           <a:xfrm>
-            <a:off x="8275320" y="2286000"/>
-            <a:ext cx="3264408" cy="1024128"/>
+            <a:off x="8275320" y="2432304"/>
+            <a:ext cx="3264408" cy="896112"/>
           </a:xfrm>
           <a:prstGeom prst="rect">
             <a:avLst/>
@@ -17532,7 +17805,7 @@
       </p:sp>
       <p:sp>
         <p:nvSpPr>
-          <p:cNvPr id="35" name="Rectangle 34"/>
+          <p:cNvPr id="36" name="Rectangle 35"/>
           <p:cNvSpPr/>
           <p:nvPr/>
         </p:nvSpPr>
@@ -17576,7 +17849,7 @@
       </p:sp>
       <p:sp>
         <p:nvSpPr>
-          <p:cNvPr id="36" name="Rectangle 35"/>
+          <p:cNvPr id="37" name="Rectangle 36"/>
           <p:cNvSpPr/>
           <p:nvPr/>
         </p:nvSpPr>
@@ -17620,7 +17893,7 @@
       </p:sp>
       <p:sp>
         <p:nvSpPr>
-          <p:cNvPr id="37" name="TextBox 36"/>
+          <p:cNvPr id="38" name="TextBox 37"/>
           <p:cNvSpPr txBox="1"/>
           <p:nvPr/>
         </p:nvSpPr>
@@ -17659,7 +17932,7 @@
       </p:sp>
       <p:sp>
         <p:nvSpPr>
-          <p:cNvPr id="38" name="TextBox 37"/>
+          <p:cNvPr id="39" name="TextBox 38"/>
           <p:cNvSpPr txBox="1"/>
           <p:nvPr/>
         </p:nvSpPr>
@@ -17698,7 +17971,7 @@
       </p:sp>
       <p:sp>
         <p:nvSpPr>
-          <p:cNvPr id="39" name="Rectangle 38"/>
+          <p:cNvPr id="40" name="Rectangle 39"/>
           <p:cNvSpPr/>
           <p:nvPr/>
         </p:nvSpPr>
@@ -17742,7 +18015,7 @@
       </p:sp>
       <p:sp>
         <p:nvSpPr>
-          <p:cNvPr id="40" name="Rectangle 39"/>
+          <p:cNvPr id="41" name="Rectangle 40"/>
           <p:cNvSpPr/>
           <p:nvPr/>
         </p:nvSpPr>
@@ -17786,7 +18059,7 @@
       </p:sp>
       <p:sp>
         <p:nvSpPr>
-          <p:cNvPr id="41" name="TextBox 40"/>
+          <p:cNvPr id="42" name="TextBox 41"/>
           <p:cNvSpPr txBox="1"/>
           <p:nvPr/>
         </p:nvSpPr>
@@ -17825,7 +18098,7 @@
       </p:sp>
       <p:sp>
         <p:nvSpPr>
-          <p:cNvPr id="42" name="TextBox 41"/>
+          <p:cNvPr id="43" name="TextBox 42"/>
           <p:cNvSpPr txBox="1"/>
           <p:nvPr/>
         </p:nvSpPr>
@@ -17864,7 +18137,7 @@
       </p:sp>
       <p:sp>
         <p:nvSpPr>
-          <p:cNvPr id="43" name="Rectangle 42"/>
+          <p:cNvPr id="44" name="Rectangle 43"/>
           <p:cNvSpPr/>
           <p:nvPr/>
         </p:nvSpPr>
@@ -17908,7 +18181,7 @@
       </p:sp>
       <p:sp>
         <p:nvSpPr>
-          <p:cNvPr id="44" name="Rectangle 43"/>
+          <p:cNvPr id="45" name="Rectangle 44"/>
           <p:cNvSpPr/>
           <p:nvPr/>
         </p:nvSpPr>
@@ -17952,7 +18225,7 @@
       </p:sp>
       <p:sp>
         <p:nvSpPr>
-          <p:cNvPr id="45" name="TextBox 44"/>
+          <p:cNvPr id="46" name="TextBox 45"/>
           <p:cNvSpPr txBox="1"/>
           <p:nvPr/>
         </p:nvSpPr>
@@ -17991,7 +18264,7 @@
       </p:sp>
       <p:sp>
         <p:nvSpPr>
-          <p:cNvPr id="46" name="TextBox 45"/>
+          <p:cNvPr id="47" name="TextBox 46"/>
           <p:cNvSpPr txBox="1"/>
           <p:nvPr/>
         </p:nvSpPr>
@@ -18508,8 +18781,8 @@
         </p:nvSpPr>
         <p:spPr>
           <a:xfrm>
-            <a:off x="502920" y="1463040"/>
-            <a:ext cx="11247120" cy="457200"/>
+            <a:off x="502920" y="1444752"/>
+            <a:ext cx="11247120" cy="512064"/>
           </a:xfrm>
           <a:prstGeom prst="rect">
             <a:avLst/>
@@ -18524,17 +18797,33 @@
           <a:p>
             <a:pPr algn="l">
               <a:lnSpc>
-                <a:spcPct val="110000"/>
+                <a:spcPct val="112000"/>
               </a:lnSpc>
             </a:pPr>
             <a:r>
-              <a:rPr sz="900" b="0" i="0">
+              <a:rPr sz="860" b="0" i="0">
                 <a:solidFill>
                   <a:srgbClr val="6B7480"/>
                 </a:solidFill>
                 <a:latin typeface="Meiryo"/>
               </a:rPr>
-              <a:t>進捗レベル ▶ Lv1:未絞込／Lv2:2案まで／Lv3:1案確定・理解途上／Lv4:To-Be・アーキ具体化／Lv5:定量効果まで概ね完成　／　10月見込み ◎:順調 ○:概ね ○ △:要フォロー　（第2回実施済＝1・2・3・4・5・10・11）</a:t>
+              <a:t>進捗レベル ▶ Lv1:未絞込／Lv2:2案まで／Lv3:1案確定・理解途上／Lv4:To-Be・アーキ具体化／Lv5:定量効果まで概ね完成　（第2回実施済＝1・2・3・4・5・10・11）</a:t>
+            </a:r>
+          </a:p>
+          <a:p>
+            <a:pPr algn="l">
+              <a:lnSpc>
+                <a:spcPct val="112000"/>
+              </a:lnSpc>
+            </a:pPr>
+            <a:r>
+              <a:rPr sz="860" b="0" i="0">
+                <a:solidFill>
+                  <a:srgbClr val="6B7480"/>
+                </a:solidFill>
+                <a:latin typeface="Meiryo"/>
+              </a:rPr>
+              <a:t>10月見込み（基準＝10月デモに向けた道筋の明確さ）▶ ◎:道筋明確・自走可／○:壁打ち・スコープ調整で間に合う／△:要フォロー（作るものが未確定・再設計中）</a:t>
             </a:r>
           </a:p>
         </p:txBody>
@@ -19206,11 +19495,11 @@
                       <a:r>
                         <a:rPr sz="900" b="1">
                           <a:solidFill>
-                            <a:srgbClr val="C98A1B"/>
+                            <a:srgbClr val="2E8B9E"/>
                           </a:solidFill>
                           <a:latin typeface="Meiryo"/>
                         </a:rPr>
-                        <a:t>△ 要フォロー</a:t>
+                        <a:t>○ 概ね順調</a:t>
                       </a:r>
                     </a:p>
                   </a:txBody>
@@ -20190,11 +20479,11 @@
                       <a:r>
                         <a:rPr sz="900" b="1">
                           <a:solidFill>
-                            <a:srgbClr val="C98A1B"/>
+                            <a:srgbClr val="2E8B9E"/>
                           </a:solidFill>
                           <a:latin typeface="Meiryo"/>
                         </a:rPr>
-                        <a:t>△ 要フォロー</a:t>
+                        <a:t>○ 概ね順調</a:t>
                       </a:r>
                     </a:p>
                   </a:txBody>
@@ -23614,7 +23903,7 @@
                 </a:solidFill>
                 <a:latin typeface="Meiryo"/>
               </a:rPr>
-              <a:t>DIFFICULTY &amp; APPS ｜ チーム別比較</a:t>
+              <a:t>APPS ・ DIFFICULTY ・ VOLUME ｜ チーム別比較</a:t>
             </a:r>
           </a:p>
         </p:txBody>
@@ -23653,7 +23942,7 @@
                 </a:solidFill>
                 <a:latin typeface="Meiryo"/>
               </a:rPr>
-              <a:t>難易度・使用アプリの比較</a:t>
+              <a:t>使用アプリ（想定）・難易度・ボリュームの比較</a:t>
             </a:r>
           </a:p>
         </p:txBody>
@@ -23827,8 +24116,8 @@
         </p:nvSpPr>
         <p:spPr>
           <a:xfrm>
-            <a:off x="502920" y="1115568"/>
-            <a:ext cx="11247120" cy="384048"/>
+            <a:off x="502920" y="1097280"/>
+            <a:ext cx="11247120" cy="457200"/>
           </a:xfrm>
           <a:prstGeom prst="rect">
             <a:avLst/>
@@ -23847,13 +24136,13 @@
               </a:lnSpc>
             </a:pPr>
             <a:r>
-              <a:rPr sz="1000" b="0" i="0">
+              <a:rPr sz="950" b="0" i="0">
                 <a:solidFill>
                   <a:srgbClr val="252A31"/>
                 </a:solidFill>
                 <a:latin typeface="Meiryo"/>
               </a:rPr>
-              <a:t>各チームの使用アプリを列（アプリ別）で可視化し、難易度・アプリ数（ボリューム）とあわせて比較（メンター担当検討の材料）。色タイル＝使用アプリ。全チームがCopilot Studioを使用。</a:t>
+              <a:t>各チームの取り組みに対して「想定される」使用アプリ（企画書＋相談会ベースの予想）を列で可視化し、難易度・ボリュームを併記（メンター担当検討の材料）。色タイル＝使用アプリ。全チームがCopilot Studioを使用。</a:t>
             </a:r>
           </a:p>
         </p:txBody>
@@ -24351,29 +24640,13 @@
                         </a:lnSpc>
                       </a:pPr>
                       <a:r>
-                        <a:rPr sz="750" b="1">
+                        <a:rPr sz="700" b="1">
                           <a:solidFill>
                             <a:srgbClr val="FFFFFF"/>
                           </a:solidFill>
                           <a:latin typeface="Meiryo"/>
                         </a:rPr>
-                        <a:t>アプリ</a:t>
-                      </a:r>
-                    </a:p>
-                    <a:p>
-                      <a:pPr algn="ctr">
-                        <a:lnSpc>
-                          <a:spcPct val="98000"/>
-                        </a:lnSpc>
-                      </a:pPr>
-                      <a:r>
-                        <a:rPr sz="750" b="1">
-                          <a:solidFill>
-                            <a:srgbClr val="FFFFFF"/>
-                          </a:solidFill>
-                          <a:latin typeface="Meiryo"/>
-                        </a:rPr>
-                        <a:t>数</a:t>
+                        <a:t>ボリューム</a:t>
                       </a:r>
                     </a:p>
                   </a:txBody>
@@ -24747,13 +25020,13 @@
                         </a:lnSpc>
                       </a:pPr>
                       <a:r>
-                        <a:rPr sz="950" b="1">
+                        <a:rPr sz="850" b="1">
                           <a:solidFill>
-                            <a:srgbClr val="1F385C"/>
+                            <a:srgbClr val="2E8B9E"/>
                           </a:solidFill>
                           <a:latin typeface="Meiryo"/>
                         </a:rPr>
-                        <a:t>3</a:t>
+                        <a:t>中</a:t>
                       </a:r>
                     </a:p>
                   </a:txBody>
@@ -25127,13 +25400,13 @@
                         </a:lnSpc>
                       </a:pPr>
                       <a:r>
-                        <a:rPr sz="950" b="1">
+                        <a:rPr sz="850" b="1">
                           <a:solidFill>
-                            <a:srgbClr val="1F385C"/>
+                            <a:srgbClr val="2E8B9E"/>
                           </a:solidFill>
                           <a:latin typeface="Meiryo"/>
                         </a:rPr>
-                        <a:t>4</a:t>
+                        <a:t>中</a:t>
                       </a:r>
                     </a:p>
                   </a:txBody>
@@ -25507,13 +25780,13 @@
                         </a:lnSpc>
                       </a:pPr>
                       <a:r>
-                        <a:rPr sz="950" b="1">
+                        <a:rPr sz="850" b="1">
                           <a:solidFill>
-                            <a:srgbClr val="1F385C"/>
+                            <a:srgbClr val="E8833A"/>
                           </a:solidFill>
                           <a:latin typeface="Meiryo"/>
                         </a:rPr>
-                        <a:t>5</a:t>
+                        <a:t>大</a:t>
                       </a:r>
                     </a:p>
                   </a:txBody>
@@ -25887,13 +26160,13 @@
                         </a:lnSpc>
                       </a:pPr>
                       <a:r>
-                        <a:rPr sz="950" b="1">
+                        <a:rPr sz="850" b="1">
                           <a:solidFill>
-                            <a:srgbClr val="1F385C"/>
+                            <a:srgbClr val="C98A1B"/>
                           </a:solidFill>
                           <a:latin typeface="Meiryo"/>
                         </a:rPr>
-                        <a:t>6</a:t>
+                        <a:t>中〜大</a:t>
                       </a:r>
                     </a:p>
                   </a:txBody>
@@ -26267,13 +26540,13 @@
                         </a:lnSpc>
                       </a:pPr>
                       <a:r>
-                        <a:rPr sz="950" b="1">
+                        <a:rPr sz="850" b="1">
                           <a:solidFill>
-                            <a:srgbClr val="1F385C"/>
+                            <a:srgbClr val="2E8B9E"/>
                           </a:solidFill>
                           <a:latin typeface="Meiryo"/>
                         </a:rPr>
-                        <a:t>4</a:t>
+                        <a:t>中</a:t>
                       </a:r>
                     </a:p>
                   </a:txBody>
@@ -26647,13 +26920,13 @@
                         </a:lnSpc>
                       </a:pPr>
                       <a:r>
-                        <a:rPr sz="950" b="1">
+                        <a:rPr sz="850" b="1">
                           <a:solidFill>
-                            <a:srgbClr val="1F385C"/>
+                            <a:srgbClr val="E8833A"/>
                           </a:solidFill>
                           <a:latin typeface="Meiryo"/>
                         </a:rPr>
-                        <a:t>6</a:t>
+                        <a:t>大</a:t>
                       </a:r>
                     </a:p>
                   </a:txBody>
@@ -27027,13 +27300,13 @@
                         </a:lnSpc>
                       </a:pPr>
                       <a:r>
-                        <a:rPr sz="950" b="1">
+                        <a:rPr sz="850" b="1">
                           <a:solidFill>
-                            <a:srgbClr val="1F385C"/>
+                            <a:srgbClr val="2E8B9E"/>
                           </a:solidFill>
                           <a:latin typeface="Meiryo"/>
                         </a:rPr>
-                        <a:t>4</a:t>
+                        <a:t>中</a:t>
                       </a:r>
                     </a:p>
                   </a:txBody>
@@ -27407,13 +27680,13 @@
                         </a:lnSpc>
                       </a:pPr>
                       <a:r>
-                        <a:rPr sz="950" b="1">
+                        <a:rPr sz="850" b="1">
                           <a:solidFill>
-                            <a:srgbClr val="1F385C"/>
+                            <a:srgbClr val="2E8B9E"/>
                           </a:solidFill>
                           <a:latin typeface="Meiryo"/>
                         </a:rPr>
-                        <a:t>5</a:t>
+                        <a:t>中</a:t>
                       </a:r>
                     </a:p>
                   </a:txBody>
@@ -27787,13 +28060,13 @@
                         </a:lnSpc>
                       </a:pPr>
                       <a:r>
-                        <a:rPr sz="950" b="1">
+                        <a:rPr sz="850" b="1">
                           <a:solidFill>
-                            <a:srgbClr val="1F385C"/>
+                            <a:srgbClr val="E8833A"/>
                           </a:solidFill>
                           <a:latin typeface="Meiryo"/>
                         </a:rPr>
-                        <a:t>7</a:t>
+                        <a:t>大</a:t>
                       </a:r>
                     </a:p>
                   </a:txBody>
@@ -28167,13 +28440,13 @@
                         </a:lnSpc>
                       </a:pPr>
                       <a:r>
-                        <a:rPr sz="950" b="1">
+                        <a:rPr sz="850" b="1">
                           <a:solidFill>
-                            <a:srgbClr val="1F385C"/>
+                            <a:srgbClr val="2E8B9E"/>
                           </a:solidFill>
                           <a:latin typeface="Meiryo"/>
                         </a:rPr>
-                        <a:t>4</a:t>
+                        <a:t>中</a:t>
                       </a:r>
                     </a:p>
                   </a:txBody>
@@ -28547,13 +28820,13 @@
                         </a:lnSpc>
                       </a:pPr>
                       <a:r>
-                        <a:rPr sz="950" b="1">
+                        <a:rPr sz="850" b="1">
                           <a:solidFill>
-                            <a:srgbClr val="1F385C"/>
+                            <a:srgbClr val="E8833A"/>
                           </a:solidFill>
                           <a:latin typeface="Meiryo"/>
                         </a:rPr>
-                        <a:t>3</a:t>
+                        <a:t>大</a:t>
                       </a:r>
                     </a:p>
                   </a:txBody>
@@ -28576,8 +28849,8 @@
         </p:nvSpPr>
         <p:spPr>
           <a:xfrm>
-            <a:off x="502920" y="5916168"/>
-            <a:ext cx="11201400" cy="457200"/>
+            <a:off x="502920" y="5897880"/>
+            <a:ext cx="11201400" cy="603504"/>
           </a:xfrm>
           <a:prstGeom prst="rect">
             <a:avLst/>
@@ -28620,8 +28893,8 @@
         </p:nvSpPr>
         <p:spPr>
           <a:xfrm>
-            <a:off x="731520" y="5925312"/>
-            <a:ext cx="10789920" cy="438912"/>
+            <a:off x="704088" y="5925312"/>
+            <a:ext cx="10835640" cy="566928"/>
           </a:xfrm>
           <a:prstGeom prst="rect">
             <a:avLst/>
@@ -28629,24 +28902,40 @@
           <a:noFill/>
         </p:spPr>
         <p:txBody>
-          <a:bodyPr wrap="square" anchor="ctr" lIns="25400" rIns="25400" tIns="12700" bIns="12700">
+          <a:bodyPr wrap="square" anchor="t" lIns="25400" rIns="25400" tIns="12700" bIns="12700">
             <a:spAutoFit/>
           </a:bodyPr>
           <a:lstStyle/>
           <a:p>
             <a:pPr algn="l">
               <a:lnSpc>
-                <a:spcPct val="100000"/>
+                <a:spcPct val="112000"/>
               </a:lnSpc>
             </a:pPr>
             <a:r>
-              <a:rPr sz="900" b="0" i="0">
+              <a:rPr sz="830" b="0" i="0">
                 <a:solidFill>
                   <a:srgbClr val="252A31"/>
                 </a:solidFill>
                 <a:latin typeface="Meiryo"/>
               </a:rPr>
-              <a:t>●＝使用アプリ（列見出しの色が各アプリ）。「アプリ数」＝使用アプリの種類数（実装ボリュームの目安）。難易度・見込みは暫定評価・要調整。</a:t>
+              <a:t>●＝想定される使用アプリ（列見出しの色＝各アプリ）。全チームがCopilot Studioを使用。</a:t>
+            </a:r>
+          </a:p>
+          <a:p>
+            <a:pPr algn="l">
+              <a:lnSpc>
+                <a:spcPct val="112000"/>
+              </a:lnSpc>
+            </a:pPr>
+            <a:r>
+              <a:rPr sz="830" b="0" i="0">
+                <a:solidFill>
+                  <a:srgbClr val="252A31"/>
+                </a:solidFill>
+                <a:latin typeface="Meiryo"/>
+              </a:rPr>
+              <a:t>「ボリューム」＝企画着手〜実業務での利用開始（リリース）までに必要な総作業量（開発対象＝エージェント/フロー＋読み込むナレッジ/資料の整備＋連携・権限・本番移行・運用/展開）。10月デモではなく実運用まで／小・中・大で暫定評価。</a:t>
             </a:r>
           </a:p>
         </p:txBody>
@@ -31038,7 +31327,7 @@
                 </a:solidFill>
                 <a:latin typeface="Meiryo"/>
               </a:rPr>
-              <a:t>フォローが必要なチーム</a:t>
+              <a:t>留意・支援が必要なチーム</a:t>
             </a:r>
           </a:p>
         </p:txBody>
@@ -31121,7 +31410,7 @@
                 </a:solidFill>
                 <a:latin typeface="Meiryo"/>
               </a:rPr>
-              <a:t>T4：外部Web参照禁止で企画価値の中核が揺らぎ、再設計が必要。</a:t>
+              <a:t>T4：外部Web参照禁止で企画の中核が抵触し再設計中。作るものの再定義が最優先（唯一の△）。</a:t>
             </a:r>
           </a:p>
         </p:txBody>
@@ -31204,7 +31493,7 @@
                 </a:solidFill>
                 <a:latin typeface="Meiryo"/>
               </a:rPr>
-              <a:t>T3・9：Salesforce・社外秘・外部/共有サーバ等の扱いが重要論点。</a:t>
+              <a:t>T3・9：難易度・ボリュームが大。データのOK/NG整理とスコープ設定が前提（道筋はあり）。</a:t>
             </a:r>
           </a:p>
         </p:txBody>
@@ -31287,7 +31576,7 @@
                 </a:solidFill>
                 <a:latin typeface="Meiryo"/>
               </a:rPr>
-              <a:t>T1・2・6：構築ステップ・プロンプト例・アプリ使い分けの具体化支援が必要。</a:t>
+              <a:t>T1・2・6：開発手順の型・プロンプト見本・アプリ使い分けの提供で加速。</a:t>
             </a:r>
           </a:p>
         </p:txBody>
@@ -33042,14 +33331,53 @@
       </p:sp>
       <p:sp>
         <p:nvSpPr>
-          <p:cNvPr id="23" name="Rectangle 22"/>
+          <p:cNvPr id="23" name="TextBox 22"/>
+          <p:cNvSpPr txBox="1"/>
+          <p:nvPr/>
+        </p:nvSpPr>
+        <p:spPr>
+          <a:xfrm>
+            <a:off x="502920" y="1691640"/>
+            <a:ext cx="11201400" cy="182880"/>
+          </a:xfrm>
+          <a:prstGeom prst="rect">
+            <a:avLst/>
+          </a:prstGeom>
+          <a:noFill/>
+        </p:spPr>
+        <p:txBody>
+          <a:bodyPr wrap="square" anchor="ctr" lIns="25400" rIns="25400" tIns="12700" bIns="12700">
+            <a:spAutoFit/>
+          </a:bodyPr>
+          <a:lstStyle/>
+          <a:p>
+            <a:pPr algn="l">
+              <a:lnSpc>
+                <a:spcPct val="100000"/>
+              </a:lnSpc>
+            </a:pPr>
+            <a:r>
+              <a:rPr sz="850" b="0" i="0">
+                <a:solidFill>
+                  <a:srgbClr val="252A31"/>
+                </a:solidFill>
+                <a:latin typeface="Meiryo"/>
+              </a:rPr>
+              <a:t>▶ 10月見込み（○）の根拠：アプリ像は明確。開発手順の型と事務局のスケジュール提示があれば自走可（壁打ちで解消）。　｜　ボリューム（〜実業務利用）：中</a:t>
+            </a:r>
+          </a:p>
+        </p:txBody>
+      </p:sp>
+      <p:sp>
+        <p:nvSpPr>
+          <p:cNvPr id="24" name="Rectangle 23"/>
           <p:cNvSpPr/>
           <p:nvPr/>
         </p:nvSpPr>
         <p:spPr>
           <a:xfrm>
-            <a:off x="502920" y="1828800"/>
-            <a:ext cx="3593592" cy="1572768"/>
+            <a:off x="502920" y="1975104"/>
+            <a:ext cx="3593592" cy="1444752"/>
           </a:xfrm>
           <a:prstGeom prst="rect">
             <a:avLst/>
@@ -33086,13 +33414,13 @@
       </p:sp>
       <p:sp>
         <p:nvSpPr>
-          <p:cNvPr id="24" name="Rectangle 23"/>
+          <p:cNvPr id="25" name="Rectangle 24"/>
           <p:cNvSpPr/>
           <p:nvPr/>
         </p:nvSpPr>
         <p:spPr>
           <a:xfrm>
-            <a:off x="502920" y="1828800"/>
+            <a:off x="502920" y="1975104"/>
             <a:ext cx="3593592" cy="365760"/>
           </a:xfrm>
           <a:prstGeom prst="rect">
@@ -33130,13 +33458,13 @@
       </p:sp>
       <p:sp>
         <p:nvSpPr>
-          <p:cNvPr id="25" name="TextBox 24"/>
+          <p:cNvPr id="26" name="TextBox 25"/>
           <p:cNvSpPr txBox="1"/>
           <p:nvPr/>
         </p:nvSpPr>
         <p:spPr>
           <a:xfrm>
-            <a:off x="667512" y="1874520"/>
+            <a:off x="667512" y="2020824"/>
             <a:ext cx="3264408" cy="274320"/>
           </a:xfrm>
           <a:prstGeom prst="rect">
@@ -33169,14 +33497,14 @@
       </p:sp>
       <p:sp>
         <p:nvSpPr>
-          <p:cNvPr id="26" name="TextBox 25"/>
+          <p:cNvPr id="27" name="TextBox 26"/>
           <p:cNvSpPr txBox="1"/>
           <p:nvPr/>
         </p:nvSpPr>
         <p:spPr>
           <a:xfrm>
-            <a:off x="667512" y="2286000"/>
-            <a:ext cx="3264408" cy="1024128"/>
+            <a:off x="667512" y="2432304"/>
+            <a:ext cx="3264408" cy="896112"/>
           </a:xfrm>
           <a:prstGeom prst="rect">
             <a:avLst/>
@@ -33208,14 +33536,14 @@
       </p:sp>
       <p:sp>
         <p:nvSpPr>
-          <p:cNvPr id="27" name="Rectangle 26"/>
+          <p:cNvPr id="28" name="Rectangle 27"/>
           <p:cNvSpPr/>
           <p:nvPr/>
         </p:nvSpPr>
         <p:spPr>
           <a:xfrm>
-            <a:off x="4306824" y="1828800"/>
-            <a:ext cx="3593592" cy="1572768"/>
+            <a:off x="4306824" y="1975104"/>
+            <a:ext cx="3593592" cy="1444752"/>
           </a:xfrm>
           <a:prstGeom prst="rect">
             <a:avLst/>
@@ -33252,13 +33580,13 @@
       </p:sp>
       <p:sp>
         <p:nvSpPr>
-          <p:cNvPr id="28" name="Rectangle 27"/>
+          <p:cNvPr id="29" name="Rectangle 28"/>
           <p:cNvSpPr/>
           <p:nvPr/>
         </p:nvSpPr>
         <p:spPr>
           <a:xfrm>
-            <a:off x="4306824" y="1828800"/>
+            <a:off x="4306824" y="1975104"/>
             <a:ext cx="3593592" cy="365760"/>
           </a:xfrm>
           <a:prstGeom prst="rect">
@@ -33296,13 +33624,13 @@
       </p:sp>
       <p:sp>
         <p:nvSpPr>
-          <p:cNvPr id="29" name="TextBox 28"/>
+          <p:cNvPr id="30" name="TextBox 29"/>
           <p:cNvSpPr txBox="1"/>
           <p:nvPr/>
         </p:nvSpPr>
         <p:spPr>
           <a:xfrm>
-            <a:off x="4471416" y="1874520"/>
+            <a:off x="4471416" y="2020824"/>
             <a:ext cx="3264408" cy="274320"/>
           </a:xfrm>
           <a:prstGeom prst="rect">
@@ -33335,14 +33663,14 @@
       </p:sp>
       <p:sp>
         <p:nvSpPr>
-          <p:cNvPr id="30" name="TextBox 29"/>
+          <p:cNvPr id="31" name="TextBox 30"/>
           <p:cNvSpPr txBox="1"/>
           <p:nvPr/>
         </p:nvSpPr>
         <p:spPr>
           <a:xfrm>
-            <a:off x="4471416" y="2286000"/>
-            <a:ext cx="3264408" cy="1024128"/>
+            <a:off x="4471416" y="2432304"/>
+            <a:ext cx="3264408" cy="896112"/>
           </a:xfrm>
           <a:prstGeom prst="rect">
             <a:avLst/>
@@ -33374,14 +33702,14 @@
       </p:sp>
       <p:sp>
         <p:nvSpPr>
-          <p:cNvPr id="31" name="Rectangle 30"/>
+          <p:cNvPr id="32" name="Rectangle 31"/>
           <p:cNvSpPr/>
           <p:nvPr/>
         </p:nvSpPr>
         <p:spPr>
           <a:xfrm>
-            <a:off x="8110728" y="1828800"/>
-            <a:ext cx="3593592" cy="1572768"/>
+            <a:off x="8110728" y="1975104"/>
+            <a:ext cx="3593592" cy="1444752"/>
           </a:xfrm>
           <a:prstGeom prst="rect">
             <a:avLst/>
@@ -33418,13 +33746,13 @@
       </p:sp>
       <p:sp>
         <p:nvSpPr>
-          <p:cNvPr id="32" name="Rectangle 31"/>
+          <p:cNvPr id="33" name="Rectangle 32"/>
           <p:cNvSpPr/>
           <p:nvPr/>
         </p:nvSpPr>
         <p:spPr>
           <a:xfrm>
-            <a:off x="8110728" y="1828800"/>
+            <a:off x="8110728" y="1975104"/>
             <a:ext cx="3593592" cy="365760"/>
           </a:xfrm>
           <a:prstGeom prst="rect">
@@ -33462,13 +33790,13 @@
       </p:sp>
       <p:sp>
         <p:nvSpPr>
-          <p:cNvPr id="33" name="TextBox 32"/>
+          <p:cNvPr id="34" name="TextBox 33"/>
           <p:cNvSpPr txBox="1"/>
           <p:nvPr/>
         </p:nvSpPr>
         <p:spPr>
           <a:xfrm>
-            <a:off x="8275320" y="1874520"/>
+            <a:off x="8275320" y="2020824"/>
             <a:ext cx="3264408" cy="274320"/>
           </a:xfrm>
           <a:prstGeom prst="rect">
@@ -33501,14 +33829,14 @@
       </p:sp>
       <p:sp>
         <p:nvSpPr>
-          <p:cNvPr id="34" name="TextBox 33"/>
+          <p:cNvPr id="35" name="TextBox 34"/>
           <p:cNvSpPr txBox="1"/>
           <p:nvPr/>
         </p:nvSpPr>
         <p:spPr>
           <a:xfrm>
-            <a:off x="8275320" y="2286000"/>
-            <a:ext cx="3264408" cy="1024128"/>
+            <a:off x="8275320" y="2432304"/>
+            <a:ext cx="3264408" cy="896112"/>
           </a:xfrm>
           <a:prstGeom prst="rect">
             <a:avLst/>
@@ -33540,7 +33868,7 @@
       </p:sp>
       <p:sp>
         <p:nvSpPr>
-          <p:cNvPr id="35" name="Rectangle 34"/>
+          <p:cNvPr id="36" name="Rectangle 35"/>
           <p:cNvSpPr/>
           <p:nvPr/>
         </p:nvSpPr>
@@ -33584,7 +33912,7 @@
       </p:sp>
       <p:sp>
         <p:nvSpPr>
-          <p:cNvPr id="36" name="Rectangle 35"/>
+          <p:cNvPr id="37" name="Rectangle 36"/>
           <p:cNvSpPr/>
           <p:nvPr/>
         </p:nvSpPr>
@@ -33628,7 +33956,7 @@
       </p:sp>
       <p:sp>
         <p:nvSpPr>
-          <p:cNvPr id="37" name="TextBox 36"/>
+          <p:cNvPr id="38" name="TextBox 37"/>
           <p:cNvSpPr txBox="1"/>
           <p:nvPr/>
         </p:nvSpPr>
@@ -33667,7 +33995,7 @@
       </p:sp>
       <p:sp>
         <p:nvSpPr>
-          <p:cNvPr id="38" name="TextBox 37"/>
+          <p:cNvPr id="39" name="TextBox 38"/>
           <p:cNvSpPr txBox="1"/>
           <p:nvPr/>
         </p:nvSpPr>
@@ -33706,7 +34034,7 @@
       </p:sp>
       <p:sp>
         <p:nvSpPr>
-          <p:cNvPr id="39" name="Rectangle 38"/>
+          <p:cNvPr id="40" name="Rectangle 39"/>
           <p:cNvSpPr/>
           <p:nvPr/>
         </p:nvSpPr>
@@ -33750,7 +34078,7 @@
       </p:sp>
       <p:sp>
         <p:nvSpPr>
-          <p:cNvPr id="40" name="Rectangle 39"/>
+          <p:cNvPr id="41" name="Rectangle 40"/>
           <p:cNvSpPr/>
           <p:nvPr/>
         </p:nvSpPr>
@@ -33794,7 +34122,7 @@
       </p:sp>
       <p:sp>
         <p:nvSpPr>
-          <p:cNvPr id="41" name="TextBox 40"/>
+          <p:cNvPr id="42" name="TextBox 41"/>
           <p:cNvSpPr txBox="1"/>
           <p:nvPr/>
         </p:nvSpPr>
@@ -33833,7 +34161,7 @@
       </p:sp>
       <p:sp>
         <p:nvSpPr>
-          <p:cNvPr id="42" name="TextBox 41"/>
+          <p:cNvPr id="43" name="TextBox 42"/>
           <p:cNvSpPr txBox="1"/>
           <p:nvPr/>
         </p:nvSpPr>
@@ -33872,7 +34200,7 @@
       </p:sp>
       <p:sp>
         <p:nvSpPr>
-          <p:cNvPr id="43" name="Rectangle 42"/>
+          <p:cNvPr id="44" name="Rectangle 43"/>
           <p:cNvSpPr/>
           <p:nvPr/>
         </p:nvSpPr>
@@ -33916,7 +34244,7 @@
       </p:sp>
       <p:sp>
         <p:nvSpPr>
-          <p:cNvPr id="44" name="Rectangle 43"/>
+          <p:cNvPr id="45" name="Rectangle 44"/>
           <p:cNvSpPr/>
           <p:nvPr/>
         </p:nvSpPr>
@@ -33960,7 +34288,7 @@
       </p:sp>
       <p:sp>
         <p:nvSpPr>
-          <p:cNvPr id="45" name="TextBox 44"/>
+          <p:cNvPr id="46" name="TextBox 45"/>
           <p:cNvSpPr txBox="1"/>
           <p:nvPr/>
         </p:nvSpPr>
@@ -33999,7 +34327,7 @@
       </p:sp>
       <p:sp>
         <p:nvSpPr>
-          <p:cNvPr id="46" name="TextBox 45"/>
+          <p:cNvPr id="47" name="TextBox 46"/>
           <p:cNvSpPr txBox="1"/>
           <p:nvPr/>
         </p:nvSpPr>
@@ -34981,14 +35309,53 @@
       </p:sp>
       <p:sp>
         <p:nvSpPr>
-          <p:cNvPr id="23" name="Rectangle 22"/>
+          <p:cNvPr id="23" name="TextBox 22"/>
+          <p:cNvSpPr txBox="1"/>
+          <p:nvPr/>
+        </p:nvSpPr>
+        <p:spPr>
+          <a:xfrm>
+            <a:off x="502920" y="1691640"/>
+            <a:ext cx="11201400" cy="182880"/>
+          </a:xfrm>
+          <a:prstGeom prst="rect">
+            <a:avLst/>
+          </a:prstGeom>
+          <a:noFill/>
+        </p:spPr>
+        <p:txBody>
+          <a:bodyPr wrap="square" anchor="ctr" lIns="25400" rIns="25400" tIns="12700" bIns="12700">
+            <a:spAutoFit/>
+          </a:bodyPr>
+          <a:lstStyle/>
+          <a:p>
+            <a:pPr algn="l">
+              <a:lnSpc>
+                <a:spcPct val="100000"/>
+              </a:lnSpc>
+            </a:pPr>
+            <a:r>
+              <a:rPr sz="850" b="0" i="0">
+                <a:solidFill>
+                  <a:srgbClr val="252A31"/>
+                </a:solidFill>
+                <a:latin typeface="Meiryo"/>
+              </a:rPr>
+              <a:t>▶ 10月見込み（○）の根拠：対象エラーと回答テンプレを絞ればMVP化可。プロンプト見本で加速。　｜　ボリューム（〜実業務利用）：中</a:t>
+            </a:r>
+          </a:p>
+        </p:txBody>
+      </p:sp>
+      <p:sp>
+        <p:nvSpPr>
+          <p:cNvPr id="24" name="Rectangle 23"/>
           <p:cNvSpPr/>
           <p:nvPr/>
         </p:nvSpPr>
         <p:spPr>
           <a:xfrm>
-            <a:off x="502920" y="1828800"/>
-            <a:ext cx="3593592" cy="1572768"/>
+            <a:off x="502920" y="1975104"/>
+            <a:ext cx="3593592" cy="1444752"/>
           </a:xfrm>
           <a:prstGeom prst="rect">
             <a:avLst/>
@@ -35025,13 +35392,13 @@
       </p:sp>
       <p:sp>
         <p:nvSpPr>
-          <p:cNvPr id="24" name="Rectangle 23"/>
+          <p:cNvPr id="25" name="Rectangle 24"/>
           <p:cNvSpPr/>
           <p:nvPr/>
         </p:nvSpPr>
         <p:spPr>
           <a:xfrm>
-            <a:off x="502920" y="1828800"/>
+            <a:off x="502920" y="1975104"/>
             <a:ext cx="3593592" cy="365760"/>
           </a:xfrm>
           <a:prstGeom prst="rect">
@@ -35069,13 +35436,13 @@
       </p:sp>
       <p:sp>
         <p:nvSpPr>
-          <p:cNvPr id="25" name="TextBox 24"/>
+          <p:cNvPr id="26" name="TextBox 25"/>
           <p:cNvSpPr txBox="1"/>
           <p:nvPr/>
         </p:nvSpPr>
         <p:spPr>
           <a:xfrm>
-            <a:off x="667512" y="1874520"/>
+            <a:off x="667512" y="2020824"/>
             <a:ext cx="3264408" cy="274320"/>
           </a:xfrm>
           <a:prstGeom prst="rect">
@@ -35108,14 +35475,14 @@
       </p:sp>
       <p:sp>
         <p:nvSpPr>
-          <p:cNvPr id="26" name="TextBox 25"/>
+          <p:cNvPr id="27" name="TextBox 26"/>
           <p:cNvSpPr txBox="1"/>
           <p:nvPr/>
         </p:nvSpPr>
         <p:spPr>
           <a:xfrm>
-            <a:off x="667512" y="2286000"/>
-            <a:ext cx="3264408" cy="1024128"/>
+            <a:off x="667512" y="2432304"/>
+            <a:ext cx="3264408" cy="896112"/>
           </a:xfrm>
           <a:prstGeom prst="rect">
             <a:avLst/>
@@ -35147,14 +35514,14 @@
       </p:sp>
       <p:sp>
         <p:nvSpPr>
-          <p:cNvPr id="27" name="Rectangle 26"/>
+          <p:cNvPr id="28" name="Rectangle 27"/>
           <p:cNvSpPr/>
           <p:nvPr/>
         </p:nvSpPr>
         <p:spPr>
           <a:xfrm>
-            <a:off x="4306824" y="1828800"/>
-            <a:ext cx="3593592" cy="1572768"/>
+            <a:off x="4306824" y="1975104"/>
+            <a:ext cx="3593592" cy="1444752"/>
           </a:xfrm>
           <a:prstGeom prst="rect">
             <a:avLst/>
@@ -35191,13 +35558,13 @@
       </p:sp>
       <p:sp>
         <p:nvSpPr>
-          <p:cNvPr id="28" name="Rectangle 27"/>
+          <p:cNvPr id="29" name="Rectangle 28"/>
           <p:cNvSpPr/>
           <p:nvPr/>
         </p:nvSpPr>
         <p:spPr>
           <a:xfrm>
-            <a:off x="4306824" y="1828800"/>
+            <a:off x="4306824" y="1975104"/>
             <a:ext cx="3593592" cy="365760"/>
           </a:xfrm>
           <a:prstGeom prst="rect">
@@ -35235,13 +35602,13 @@
       </p:sp>
       <p:sp>
         <p:nvSpPr>
-          <p:cNvPr id="29" name="TextBox 28"/>
+          <p:cNvPr id="30" name="TextBox 29"/>
           <p:cNvSpPr txBox="1"/>
           <p:nvPr/>
         </p:nvSpPr>
         <p:spPr>
           <a:xfrm>
-            <a:off x="4471416" y="1874520"/>
+            <a:off x="4471416" y="2020824"/>
             <a:ext cx="3264408" cy="274320"/>
           </a:xfrm>
           <a:prstGeom prst="rect">
@@ -35274,14 +35641,14 @@
       </p:sp>
       <p:sp>
         <p:nvSpPr>
-          <p:cNvPr id="30" name="TextBox 29"/>
+          <p:cNvPr id="31" name="TextBox 30"/>
           <p:cNvSpPr txBox="1"/>
           <p:nvPr/>
         </p:nvSpPr>
         <p:spPr>
           <a:xfrm>
-            <a:off x="4471416" y="2286000"/>
-            <a:ext cx="3264408" cy="1024128"/>
+            <a:off x="4471416" y="2432304"/>
+            <a:ext cx="3264408" cy="896112"/>
           </a:xfrm>
           <a:prstGeom prst="rect">
             <a:avLst/>
@@ -35313,14 +35680,14 @@
       </p:sp>
       <p:sp>
         <p:nvSpPr>
-          <p:cNvPr id="31" name="Rectangle 30"/>
+          <p:cNvPr id="32" name="Rectangle 31"/>
           <p:cNvSpPr/>
           <p:nvPr/>
         </p:nvSpPr>
         <p:spPr>
           <a:xfrm>
-            <a:off x="8110728" y="1828800"/>
-            <a:ext cx="3593592" cy="1572768"/>
+            <a:off x="8110728" y="1975104"/>
+            <a:ext cx="3593592" cy="1444752"/>
           </a:xfrm>
           <a:prstGeom prst="rect">
             <a:avLst/>
@@ -35357,13 +35724,13 @@
       </p:sp>
       <p:sp>
         <p:nvSpPr>
-          <p:cNvPr id="32" name="Rectangle 31"/>
+          <p:cNvPr id="33" name="Rectangle 32"/>
           <p:cNvSpPr/>
           <p:nvPr/>
         </p:nvSpPr>
         <p:spPr>
           <a:xfrm>
-            <a:off x="8110728" y="1828800"/>
+            <a:off x="8110728" y="1975104"/>
             <a:ext cx="3593592" cy="365760"/>
           </a:xfrm>
           <a:prstGeom prst="rect">
@@ -35401,13 +35768,13 @@
       </p:sp>
       <p:sp>
         <p:nvSpPr>
-          <p:cNvPr id="33" name="TextBox 32"/>
+          <p:cNvPr id="34" name="TextBox 33"/>
           <p:cNvSpPr txBox="1"/>
           <p:nvPr/>
         </p:nvSpPr>
         <p:spPr>
           <a:xfrm>
-            <a:off x="8275320" y="1874520"/>
+            <a:off x="8275320" y="2020824"/>
             <a:ext cx="3264408" cy="274320"/>
           </a:xfrm>
           <a:prstGeom prst="rect">
@@ -35440,14 +35807,14 @@
       </p:sp>
       <p:sp>
         <p:nvSpPr>
-          <p:cNvPr id="34" name="TextBox 33"/>
+          <p:cNvPr id="35" name="TextBox 34"/>
           <p:cNvSpPr txBox="1"/>
           <p:nvPr/>
         </p:nvSpPr>
         <p:spPr>
           <a:xfrm>
-            <a:off x="8275320" y="2286000"/>
-            <a:ext cx="3264408" cy="1024128"/>
+            <a:off x="8275320" y="2432304"/>
+            <a:ext cx="3264408" cy="896112"/>
           </a:xfrm>
           <a:prstGeom prst="rect">
             <a:avLst/>
@@ -35479,7 +35846,7 @@
       </p:sp>
       <p:sp>
         <p:nvSpPr>
-          <p:cNvPr id="35" name="Rectangle 34"/>
+          <p:cNvPr id="36" name="Rectangle 35"/>
           <p:cNvSpPr/>
           <p:nvPr/>
         </p:nvSpPr>
@@ -35523,7 +35890,7 @@
       </p:sp>
       <p:sp>
         <p:nvSpPr>
-          <p:cNvPr id="36" name="Rectangle 35"/>
+          <p:cNvPr id="37" name="Rectangle 36"/>
           <p:cNvSpPr/>
           <p:nvPr/>
         </p:nvSpPr>
@@ -35567,7 +35934,7 @@
       </p:sp>
       <p:sp>
         <p:nvSpPr>
-          <p:cNvPr id="37" name="TextBox 36"/>
+          <p:cNvPr id="38" name="TextBox 37"/>
           <p:cNvSpPr txBox="1"/>
           <p:nvPr/>
         </p:nvSpPr>
@@ -35606,7 +35973,7 @@
       </p:sp>
       <p:sp>
         <p:nvSpPr>
-          <p:cNvPr id="38" name="TextBox 37"/>
+          <p:cNvPr id="39" name="TextBox 38"/>
           <p:cNvSpPr txBox="1"/>
           <p:nvPr/>
         </p:nvSpPr>
@@ -35645,7 +36012,7 @@
       </p:sp>
       <p:sp>
         <p:nvSpPr>
-          <p:cNvPr id="39" name="Rectangle 38"/>
+          <p:cNvPr id="40" name="Rectangle 39"/>
           <p:cNvSpPr/>
           <p:nvPr/>
         </p:nvSpPr>
@@ -35689,7 +36056,7 @@
       </p:sp>
       <p:sp>
         <p:nvSpPr>
-          <p:cNvPr id="40" name="Rectangle 39"/>
+          <p:cNvPr id="41" name="Rectangle 40"/>
           <p:cNvSpPr/>
           <p:nvPr/>
         </p:nvSpPr>
@@ -35733,7 +36100,7 @@
       </p:sp>
       <p:sp>
         <p:nvSpPr>
-          <p:cNvPr id="41" name="TextBox 40"/>
+          <p:cNvPr id="42" name="TextBox 41"/>
           <p:cNvSpPr txBox="1"/>
           <p:nvPr/>
         </p:nvSpPr>
@@ -35772,7 +36139,7 @@
       </p:sp>
       <p:sp>
         <p:nvSpPr>
-          <p:cNvPr id="42" name="TextBox 41"/>
+          <p:cNvPr id="43" name="TextBox 42"/>
           <p:cNvSpPr txBox="1"/>
           <p:nvPr/>
         </p:nvSpPr>
@@ -35811,7 +36178,7 @@
       </p:sp>
       <p:sp>
         <p:nvSpPr>
-          <p:cNvPr id="43" name="Rectangle 42"/>
+          <p:cNvPr id="44" name="Rectangle 43"/>
           <p:cNvSpPr/>
           <p:nvPr/>
         </p:nvSpPr>
@@ -35855,7 +36222,7 @@
       </p:sp>
       <p:sp>
         <p:nvSpPr>
-          <p:cNvPr id="44" name="Rectangle 43"/>
+          <p:cNvPr id="45" name="Rectangle 44"/>
           <p:cNvSpPr/>
           <p:nvPr/>
         </p:nvSpPr>
@@ -35899,7 +36266,7 @@
       </p:sp>
       <p:sp>
         <p:nvSpPr>
-          <p:cNvPr id="45" name="TextBox 44"/>
+          <p:cNvPr id="46" name="TextBox 45"/>
           <p:cNvSpPr txBox="1"/>
           <p:nvPr/>
         </p:nvSpPr>
@@ -35938,7 +36305,7 @@
       </p:sp>
       <p:sp>
         <p:nvSpPr>
-          <p:cNvPr id="46" name="TextBox 45"/>
+          <p:cNvPr id="47" name="TextBox 46"/>
           <p:cNvSpPr txBox="1"/>
           <p:nvPr/>
         </p:nvSpPr>
@@ -36827,7 +37194,7 @@
             <a:avLst/>
           </a:prstGeom>
           <a:solidFill>
-            <a:srgbClr val="C98A1B"/>
+            <a:srgbClr val="2E8B9E"/>
           </a:solidFill>
           <a:ln>
             <a:noFill/>
@@ -36860,7 +37227,7 @@
                 </a:solidFill>
                 <a:latin typeface="Meiryo"/>
               </a:rPr>
-              <a:t>10月見込み：△</a:t>
+              <a:t>10月見込み：○</a:t>
             </a:r>
           </a:p>
         </p:txBody>
@@ -36920,14 +37287,53 @@
       </p:sp>
       <p:sp>
         <p:nvSpPr>
-          <p:cNvPr id="23" name="Rectangle 22"/>
+          <p:cNvPr id="23" name="TextBox 22"/>
+          <p:cNvSpPr txBox="1"/>
+          <p:nvPr/>
+        </p:nvSpPr>
+        <p:spPr>
+          <a:xfrm>
+            <a:off x="502920" y="1691640"/>
+            <a:ext cx="11201400" cy="182880"/>
+          </a:xfrm>
+          <a:prstGeom prst="rect">
+            <a:avLst/>
+          </a:prstGeom>
+          <a:noFill/>
+        </p:spPr>
+        <p:txBody>
+          <a:bodyPr wrap="square" anchor="ctr" lIns="25400" rIns="25400" tIns="12700" bIns="12700">
+            <a:spAutoFit/>
+          </a:bodyPr>
+          <a:lstStyle/>
+          <a:p>
+            <a:pPr algn="l">
+              <a:lnSpc>
+                <a:spcPct val="100000"/>
+              </a:lnSpc>
+            </a:pPr>
+            <a:r>
+              <a:rPr sz="850" b="0" i="0">
+                <a:solidFill>
+                  <a:srgbClr val="252A31"/>
+                </a:solidFill>
+                <a:latin typeface="Meiryo"/>
+              </a:rPr>
+              <a:t>▶ 10月見込み（○）の根拠：エージェント構想は明確。使用データのOK/NGを整理しスコープを絞れば発表可（ボリューム大）。　｜　ボリューム（〜実業務利用）：大</a:t>
+            </a:r>
+          </a:p>
+        </p:txBody>
+      </p:sp>
+      <p:sp>
+        <p:nvSpPr>
+          <p:cNvPr id="24" name="Rectangle 23"/>
           <p:cNvSpPr/>
           <p:nvPr/>
         </p:nvSpPr>
         <p:spPr>
           <a:xfrm>
-            <a:off x="502920" y="1828800"/>
-            <a:ext cx="3593592" cy="1572768"/>
+            <a:off x="502920" y="1975104"/>
+            <a:ext cx="3593592" cy="1444752"/>
           </a:xfrm>
           <a:prstGeom prst="rect">
             <a:avLst/>
@@ -36964,13 +37370,13 @@
       </p:sp>
       <p:sp>
         <p:nvSpPr>
-          <p:cNvPr id="24" name="Rectangle 23"/>
+          <p:cNvPr id="25" name="Rectangle 24"/>
           <p:cNvSpPr/>
           <p:nvPr/>
         </p:nvSpPr>
         <p:spPr>
           <a:xfrm>
-            <a:off x="502920" y="1828800"/>
+            <a:off x="502920" y="1975104"/>
             <a:ext cx="3593592" cy="365760"/>
           </a:xfrm>
           <a:prstGeom prst="rect">
@@ -37008,13 +37414,13 @@
       </p:sp>
       <p:sp>
         <p:nvSpPr>
-          <p:cNvPr id="25" name="TextBox 24"/>
+          <p:cNvPr id="26" name="TextBox 25"/>
           <p:cNvSpPr txBox="1"/>
           <p:nvPr/>
         </p:nvSpPr>
         <p:spPr>
           <a:xfrm>
-            <a:off x="667512" y="1874520"/>
+            <a:off x="667512" y="2020824"/>
             <a:ext cx="3264408" cy="274320"/>
           </a:xfrm>
           <a:prstGeom prst="rect">
@@ -37047,14 +37453,14 @@
       </p:sp>
       <p:sp>
         <p:nvSpPr>
-          <p:cNvPr id="26" name="TextBox 25"/>
+          <p:cNvPr id="27" name="TextBox 26"/>
           <p:cNvSpPr txBox="1"/>
           <p:nvPr/>
         </p:nvSpPr>
         <p:spPr>
           <a:xfrm>
-            <a:off x="667512" y="2286000"/>
-            <a:ext cx="3264408" cy="1024128"/>
+            <a:off x="667512" y="2432304"/>
+            <a:ext cx="3264408" cy="896112"/>
           </a:xfrm>
           <a:prstGeom prst="rect">
             <a:avLst/>
@@ -37086,14 +37492,14 @@
       </p:sp>
       <p:sp>
         <p:nvSpPr>
-          <p:cNvPr id="27" name="Rectangle 26"/>
+          <p:cNvPr id="28" name="Rectangle 27"/>
           <p:cNvSpPr/>
           <p:nvPr/>
         </p:nvSpPr>
         <p:spPr>
           <a:xfrm>
-            <a:off x="4306824" y="1828800"/>
-            <a:ext cx="3593592" cy="1572768"/>
+            <a:off x="4306824" y="1975104"/>
+            <a:ext cx="3593592" cy="1444752"/>
           </a:xfrm>
           <a:prstGeom prst="rect">
             <a:avLst/>
@@ -37130,13 +37536,13 @@
       </p:sp>
       <p:sp>
         <p:nvSpPr>
-          <p:cNvPr id="28" name="Rectangle 27"/>
+          <p:cNvPr id="29" name="Rectangle 28"/>
           <p:cNvSpPr/>
           <p:nvPr/>
         </p:nvSpPr>
         <p:spPr>
           <a:xfrm>
-            <a:off x="4306824" y="1828800"/>
+            <a:off x="4306824" y="1975104"/>
             <a:ext cx="3593592" cy="365760"/>
           </a:xfrm>
           <a:prstGeom prst="rect">
@@ -37174,13 +37580,13 @@
       </p:sp>
       <p:sp>
         <p:nvSpPr>
-          <p:cNvPr id="29" name="TextBox 28"/>
+          <p:cNvPr id="30" name="TextBox 29"/>
           <p:cNvSpPr txBox="1"/>
           <p:nvPr/>
         </p:nvSpPr>
         <p:spPr>
           <a:xfrm>
-            <a:off x="4471416" y="1874520"/>
+            <a:off x="4471416" y="2020824"/>
             <a:ext cx="3264408" cy="274320"/>
           </a:xfrm>
           <a:prstGeom prst="rect">
@@ -37213,14 +37619,14 @@
       </p:sp>
       <p:sp>
         <p:nvSpPr>
-          <p:cNvPr id="30" name="TextBox 29"/>
+          <p:cNvPr id="31" name="TextBox 30"/>
           <p:cNvSpPr txBox="1"/>
           <p:nvPr/>
         </p:nvSpPr>
         <p:spPr>
           <a:xfrm>
-            <a:off x="4471416" y="2286000"/>
-            <a:ext cx="3264408" cy="1024128"/>
+            <a:off x="4471416" y="2432304"/>
+            <a:ext cx="3264408" cy="896112"/>
           </a:xfrm>
           <a:prstGeom prst="rect">
             <a:avLst/>
@@ -37252,14 +37658,14 @@
       </p:sp>
       <p:sp>
         <p:nvSpPr>
-          <p:cNvPr id="31" name="Rectangle 30"/>
+          <p:cNvPr id="32" name="Rectangle 31"/>
           <p:cNvSpPr/>
           <p:nvPr/>
         </p:nvSpPr>
         <p:spPr>
           <a:xfrm>
-            <a:off x="8110728" y="1828800"/>
-            <a:ext cx="3593592" cy="1572768"/>
+            <a:off x="8110728" y="1975104"/>
+            <a:ext cx="3593592" cy="1444752"/>
           </a:xfrm>
           <a:prstGeom prst="rect">
             <a:avLst/>
@@ -37296,13 +37702,13 @@
       </p:sp>
       <p:sp>
         <p:nvSpPr>
-          <p:cNvPr id="32" name="Rectangle 31"/>
+          <p:cNvPr id="33" name="Rectangle 32"/>
           <p:cNvSpPr/>
           <p:nvPr/>
         </p:nvSpPr>
         <p:spPr>
           <a:xfrm>
-            <a:off x="8110728" y="1828800"/>
+            <a:off x="8110728" y="1975104"/>
             <a:ext cx="3593592" cy="365760"/>
           </a:xfrm>
           <a:prstGeom prst="rect">
@@ -37340,13 +37746,13 @@
       </p:sp>
       <p:sp>
         <p:nvSpPr>
-          <p:cNvPr id="33" name="TextBox 32"/>
+          <p:cNvPr id="34" name="TextBox 33"/>
           <p:cNvSpPr txBox="1"/>
           <p:nvPr/>
         </p:nvSpPr>
         <p:spPr>
           <a:xfrm>
-            <a:off x="8275320" y="1874520"/>
+            <a:off x="8275320" y="2020824"/>
             <a:ext cx="3264408" cy="274320"/>
           </a:xfrm>
           <a:prstGeom prst="rect">
@@ -37379,14 +37785,14 @@
       </p:sp>
       <p:sp>
         <p:nvSpPr>
-          <p:cNvPr id="34" name="TextBox 33"/>
+          <p:cNvPr id="35" name="TextBox 34"/>
           <p:cNvSpPr txBox="1"/>
           <p:nvPr/>
         </p:nvSpPr>
         <p:spPr>
           <a:xfrm>
-            <a:off x="8275320" y="2286000"/>
-            <a:ext cx="3264408" cy="1024128"/>
+            <a:off x="8275320" y="2432304"/>
+            <a:ext cx="3264408" cy="896112"/>
           </a:xfrm>
           <a:prstGeom prst="rect">
             <a:avLst/>
@@ -37418,7 +37824,7 @@
       </p:sp>
       <p:sp>
         <p:nvSpPr>
-          <p:cNvPr id="35" name="Rectangle 34"/>
+          <p:cNvPr id="36" name="Rectangle 35"/>
           <p:cNvSpPr/>
           <p:nvPr/>
         </p:nvSpPr>
@@ -37462,7 +37868,7 @@
       </p:sp>
       <p:sp>
         <p:nvSpPr>
-          <p:cNvPr id="36" name="Rectangle 35"/>
+          <p:cNvPr id="37" name="Rectangle 36"/>
           <p:cNvSpPr/>
           <p:nvPr/>
         </p:nvSpPr>
@@ -37506,7 +37912,7 @@
       </p:sp>
       <p:sp>
         <p:nvSpPr>
-          <p:cNvPr id="37" name="TextBox 36"/>
+          <p:cNvPr id="38" name="TextBox 37"/>
           <p:cNvSpPr txBox="1"/>
           <p:nvPr/>
         </p:nvSpPr>
@@ -37545,7 +37951,7 @@
       </p:sp>
       <p:sp>
         <p:nvSpPr>
-          <p:cNvPr id="38" name="TextBox 37"/>
+          <p:cNvPr id="39" name="TextBox 38"/>
           <p:cNvSpPr txBox="1"/>
           <p:nvPr/>
         </p:nvSpPr>
@@ -37584,7 +37990,7 @@
       </p:sp>
       <p:sp>
         <p:nvSpPr>
-          <p:cNvPr id="39" name="Rectangle 38"/>
+          <p:cNvPr id="40" name="Rectangle 39"/>
           <p:cNvSpPr/>
           <p:nvPr/>
         </p:nvSpPr>
@@ -37628,7 +38034,7 @@
       </p:sp>
       <p:sp>
         <p:nvSpPr>
-          <p:cNvPr id="40" name="Rectangle 39"/>
+          <p:cNvPr id="41" name="Rectangle 40"/>
           <p:cNvSpPr/>
           <p:nvPr/>
         </p:nvSpPr>
@@ -37672,7 +38078,7 @@
       </p:sp>
       <p:sp>
         <p:nvSpPr>
-          <p:cNvPr id="41" name="TextBox 40"/>
+          <p:cNvPr id="42" name="TextBox 41"/>
           <p:cNvSpPr txBox="1"/>
           <p:nvPr/>
         </p:nvSpPr>
@@ -37711,7 +38117,7 @@
       </p:sp>
       <p:sp>
         <p:nvSpPr>
-          <p:cNvPr id="42" name="TextBox 41"/>
+          <p:cNvPr id="43" name="TextBox 42"/>
           <p:cNvSpPr txBox="1"/>
           <p:nvPr/>
         </p:nvSpPr>
@@ -37750,7 +38156,7 @@
       </p:sp>
       <p:sp>
         <p:nvSpPr>
-          <p:cNvPr id="43" name="Rectangle 42"/>
+          <p:cNvPr id="44" name="Rectangle 43"/>
           <p:cNvSpPr/>
           <p:nvPr/>
         </p:nvSpPr>
@@ -37794,7 +38200,7 @@
       </p:sp>
       <p:sp>
         <p:nvSpPr>
-          <p:cNvPr id="44" name="Rectangle 43"/>
+          <p:cNvPr id="45" name="Rectangle 44"/>
           <p:cNvSpPr/>
           <p:nvPr/>
         </p:nvSpPr>
@@ -37838,7 +38244,7 @@
       </p:sp>
       <p:sp>
         <p:nvSpPr>
-          <p:cNvPr id="45" name="TextBox 44"/>
+          <p:cNvPr id="46" name="TextBox 45"/>
           <p:cNvSpPr txBox="1"/>
           <p:nvPr/>
         </p:nvSpPr>
@@ -37877,7 +38283,7 @@
       </p:sp>
       <p:sp>
         <p:nvSpPr>
-          <p:cNvPr id="46" name="TextBox 45"/>
+          <p:cNvPr id="47" name="TextBox 46"/>
           <p:cNvSpPr txBox="1"/>
           <p:nvPr/>
         </p:nvSpPr>
@@ -38859,14 +39265,53 @@
       </p:sp>
       <p:sp>
         <p:nvSpPr>
-          <p:cNvPr id="23" name="Rectangle 22"/>
+          <p:cNvPr id="23" name="TextBox 22"/>
+          <p:cNvSpPr txBox="1"/>
+          <p:nvPr/>
+        </p:nvSpPr>
+        <p:spPr>
+          <a:xfrm>
+            <a:off x="502920" y="1691640"/>
+            <a:ext cx="11201400" cy="182880"/>
+          </a:xfrm>
+          <a:prstGeom prst="rect">
+            <a:avLst/>
+          </a:prstGeom>
+          <a:noFill/>
+        </p:spPr>
+        <p:txBody>
+          <a:bodyPr wrap="square" anchor="ctr" lIns="25400" rIns="25400" tIns="12700" bIns="12700">
+            <a:spAutoFit/>
+          </a:bodyPr>
+          <a:lstStyle/>
+          <a:p>
+            <a:pPr algn="l">
+              <a:lnSpc>
+                <a:spcPct val="100000"/>
+              </a:lnSpc>
+            </a:pPr>
+            <a:r>
+              <a:rPr sz="850" b="0" i="0">
+                <a:solidFill>
+                  <a:srgbClr val="252A31"/>
+                </a:solidFill>
+                <a:latin typeface="Meiryo"/>
+              </a:rPr>
+              <a:t>▶ 10月見込み（△）の根拠：外部Web参照禁止で企画の中核が抵触。代替ユースケースが未確定で再設計中＝作るものが定まっていない。　｜　ボリューム（〜実業務利用）：中〜大</a:t>
+            </a:r>
+          </a:p>
+        </p:txBody>
+      </p:sp>
+      <p:sp>
+        <p:nvSpPr>
+          <p:cNvPr id="24" name="Rectangle 23"/>
           <p:cNvSpPr/>
           <p:nvPr/>
         </p:nvSpPr>
         <p:spPr>
           <a:xfrm>
-            <a:off x="502920" y="1828800"/>
-            <a:ext cx="3593592" cy="1572768"/>
+            <a:off x="502920" y="1975104"/>
+            <a:ext cx="3593592" cy="1444752"/>
           </a:xfrm>
           <a:prstGeom prst="rect">
             <a:avLst/>
@@ -38903,13 +39348,13 @@
       </p:sp>
       <p:sp>
         <p:nvSpPr>
-          <p:cNvPr id="24" name="Rectangle 23"/>
+          <p:cNvPr id="25" name="Rectangle 24"/>
           <p:cNvSpPr/>
           <p:nvPr/>
         </p:nvSpPr>
         <p:spPr>
           <a:xfrm>
-            <a:off x="502920" y="1828800"/>
+            <a:off x="502920" y="1975104"/>
             <a:ext cx="3593592" cy="365760"/>
           </a:xfrm>
           <a:prstGeom prst="rect">
@@ -38947,13 +39392,13 @@
       </p:sp>
       <p:sp>
         <p:nvSpPr>
-          <p:cNvPr id="25" name="TextBox 24"/>
+          <p:cNvPr id="26" name="TextBox 25"/>
           <p:cNvSpPr txBox="1"/>
           <p:nvPr/>
         </p:nvSpPr>
         <p:spPr>
           <a:xfrm>
-            <a:off x="667512" y="1874520"/>
+            <a:off x="667512" y="2020824"/>
             <a:ext cx="3264408" cy="274320"/>
           </a:xfrm>
           <a:prstGeom prst="rect">
@@ -38986,14 +39431,14 @@
       </p:sp>
       <p:sp>
         <p:nvSpPr>
-          <p:cNvPr id="26" name="TextBox 25"/>
+          <p:cNvPr id="27" name="TextBox 26"/>
           <p:cNvSpPr txBox="1"/>
           <p:nvPr/>
         </p:nvSpPr>
         <p:spPr>
           <a:xfrm>
-            <a:off x="667512" y="2286000"/>
-            <a:ext cx="3264408" cy="1024128"/>
+            <a:off x="667512" y="2432304"/>
+            <a:ext cx="3264408" cy="896112"/>
           </a:xfrm>
           <a:prstGeom prst="rect">
             <a:avLst/>
@@ -39025,14 +39470,14 @@
       </p:sp>
       <p:sp>
         <p:nvSpPr>
-          <p:cNvPr id="27" name="Rectangle 26"/>
+          <p:cNvPr id="28" name="Rectangle 27"/>
           <p:cNvSpPr/>
           <p:nvPr/>
         </p:nvSpPr>
         <p:spPr>
           <a:xfrm>
-            <a:off x="4306824" y="1828800"/>
-            <a:ext cx="3593592" cy="1572768"/>
+            <a:off x="4306824" y="1975104"/>
+            <a:ext cx="3593592" cy="1444752"/>
           </a:xfrm>
           <a:prstGeom prst="rect">
             <a:avLst/>
@@ -39069,13 +39514,13 @@
       </p:sp>
       <p:sp>
         <p:nvSpPr>
-          <p:cNvPr id="28" name="Rectangle 27"/>
+          <p:cNvPr id="29" name="Rectangle 28"/>
           <p:cNvSpPr/>
           <p:nvPr/>
         </p:nvSpPr>
         <p:spPr>
           <a:xfrm>
-            <a:off x="4306824" y="1828800"/>
+            <a:off x="4306824" y="1975104"/>
             <a:ext cx="3593592" cy="365760"/>
           </a:xfrm>
           <a:prstGeom prst="rect">
@@ -39113,13 +39558,13 @@
       </p:sp>
       <p:sp>
         <p:nvSpPr>
-          <p:cNvPr id="29" name="TextBox 28"/>
+          <p:cNvPr id="30" name="TextBox 29"/>
           <p:cNvSpPr txBox="1"/>
           <p:nvPr/>
         </p:nvSpPr>
         <p:spPr>
           <a:xfrm>
-            <a:off x="4471416" y="1874520"/>
+            <a:off x="4471416" y="2020824"/>
             <a:ext cx="3264408" cy="274320"/>
           </a:xfrm>
           <a:prstGeom prst="rect">
@@ -39152,14 +39597,14 @@
       </p:sp>
       <p:sp>
         <p:nvSpPr>
-          <p:cNvPr id="30" name="TextBox 29"/>
+          <p:cNvPr id="31" name="TextBox 30"/>
           <p:cNvSpPr txBox="1"/>
           <p:nvPr/>
         </p:nvSpPr>
         <p:spPr>
           <a:xfrm>
-            <a:off x="4471416" y="2286000"/>
-            <a:ext cx="3264408" cy="1024128"/>
+            <a:off x="4471416" y="2432304"/>
+            <a:ext cx="3264408" cy="896112"/>
           </a:xfrm>
           <a:prstGeom prst="rect">
             <a:avLst/>
@@ -39191,14 +39636,14 @@
       </p:sp>
       <p:sp>
         <p:nvSpPr>
-          <p:cNvPr id="31" name="Rectangle 30"/>
+          <p:cNvPr id="32" name="Rectangle 31"/>
           <p:cNvSpPr/>
           <p:nvPr/>
         </p:nvSpPr>
         <p:spPr>
           <a:xfrm>
-            <a:off x="8110728" y="1828800"/>
-            <a:ext cx="3593592" cy="1572768"/>
+            <a:off x="8110728" y="1975104"/>
+            <a:ext cx="3593592" cy="1444752"/>
           </a:xfrm>
           <a:prstGeom prst="rect">
             <a:avLst/>
@@ -39235,13 +39680,13 @@
       </p:sp>
       <p:sp>
         <p:nvSpPr>
-          <p:cNvPr id="32" name="Rectangle 31"/>
+          <p:cNvPr id="33" name="Rectangle 32"/>
           <p:cNvSpPr/>
           <p:nvPr/>
         </p:nvSpPr>
         <p:spPr>
           <a:xfrm>
-            <a:off x="8110728" y="1828800"/>
+            <a:off x="8110728" y="1975104"/>
             <a:ext cx="3593592" cy="365760"/>
           </a:xfrm>
           <a:prstGeom prst="rect">
@@ -39279,13 +39724,13 @@
       </p:sp>
       <p:sp>
         <p:nvSpPr>
-          <p:cNvPr id="33" name="TextBox 32"/>
+          <p:cNvPr id="34" name="TextBox 33"/>
           <p:cNvSpPr txBox="1"/>
           <p:nvPr/>
         </p:nvSpPr>
         <p:spPr>
           <a:xfrm>
-            <a:off x="8275320" y="1874520"/>
+            <a:off x="8275320" y="2020824"/>
             <a:ext cx="3264408" cy="274320"/>
           </a:xfrm>
           <a:prstGeom prst="rect">
@@ -39318,14 +39763,14 @@
       </p:sp>
       <p:sp>
         <p:nvSpPr>
-          <p:cNvPr id="34" name="TextBox 33"/>
+          <p:cNvPr id="35" name="TextBox 34"/>
           <p:cNvSpPr txBox="1"/>
           <p:nvPr/>
         </p:nvSpPr>
         <p:spPr>
           <a:xfrm>
-            <a:off x="8275320" y="2286000"/>
-            <a:ext cx="3264408" cy="1024128"/>
+            <a:off x="8275320" y="2432304"/>
+            <a:ext cx="3264408" cy="896112"/>
           </a:xfrm>
           <a:prstGeom prst="rect">
             <a:avLst/>
@@ -39357,7 +39802,7 @@
       </p:sp>
       <p:sp>
         <p:nvSpPr>
-          <p:cNvPr id="35" name="Rectangle 34"/>
+          <p:cNvPr id="36" name="Rectangle 35"/>
           <p:cNvSpPr/>
           <p:nvPr/>
         </p:nvSpPr>
@@ -39401,7 +39846,7 @@
       </p:sp>
       <p:sp>
         <p:nvSpPr>
-          <p:cNvPr id="36" name="Rectangle 35"/>
+          <p:cNvPr id="37" name="Rectangle 36"/>
           <p:cNvSpPr/>
           <p:nvPr/>
         </p:nvSpPr>
@@ -39445,7 +39890,7 @@
       </p:sp>
       <p:sp>
         <p:nvSpPr>
-          <p:cNvPr id="37" name="TextBox 36"/>
+          <p:cNvPr id="38" name="TextBox 37"/>
           <p:cNvSpPr txBox="1"/>
           <p:nvPr/>
         </p:nvSpPr>
@@ -39484,7 +39929,7 @@
       </p:sp>
       <p:sp>
         <p:nvSpPr>
-          <p:cNvPr id="38" name="TextBox 37"/>
+          <p:cNvPr id="39" name="TextBox 38"/>
           <p:cNvSpPr txBox="1"/>
           <p:nvPr/>
         </p:nvSpPr>
@@ -39523,7 +39968,7 @@
       </p:sp>
       <p:sp>
         <p:nvSpPr>
-          <p:cNvPr id="39" name="Rectangle 38"/>
+          <p:cNvPr id="40" name="Rectangle 39"/>
           <p:cNvSpPr/>
           <p:nvPr/>
         </p:nvSpPr>
@@ -39567,7 +40012,7 @@
       </p:sp>
       <p:sp>
         <p:nvSpPr>
-          <p:cNvPr id="40" name="Rectangle 39"/>
+          <p:cNvPr id="41" name="Rectangle 40"/>
           <p:cNvSpPr/>
           <p:nvPr/>
         </p:nvSpPr>
@@ -39611,7 +40056,7 @@
       </p:sp>
       <p:sp>
         <p:nvSpPr>
-          <p:cNvPr id="41" name="TextBox 40"/>
+          <p:cNvPr id="42" name="TextBox 41"/>
           <p:cNvSpPr txBox="1"/>
           <p:nvPr/>
         </p:nvSpPr>
@@ -39650,7 +40095,7 @@
       </p:sp>
       <p:sp>
         <p:nvSpPr>
-          <p:cNvPr id="42" name="TextBox 41"/>
+          <p:cNvPr id="43" name="TextBox 42"/>
           <p:cNvSpPr txBox="1"/>
           <p:nvPr/>
         </p:nvSpPr>
@@ -39689,7 +40134,7 @@
       </p:sp>
       <p:sp>
         <p:nvSpPr>
-          <p:cNvPr id="43" name="Rectangle 42"/>
+          <p:cNvPr id="44" name="Rectangle 43"/>
           <p:cNvSpPr/>
           <p:nvPr/>
         </p:nvSpPr>
@@ -39733,7 +40178,7 @@
       </p:sp>
       <p:sp>
         <p:nvSpPr>
-          <p:cNvPr id="44" name="Rectangle 43"/>
+          <p:cNvPr id="45" name="Rectangle 44"/>
           <p:cNvSpPr/>
           <p:nvPr/>
         </p:nvSpPr>
@@ -39777,7 +40222,7 @@
       </p:sp>
       <p:sp>
         <p:nvSpPr>
-          <p:cNvPr id="45" name="TextBox 44"/>
+          <p:cNvPr id="46" name="TextBox 45"/>
           <p:cNvSpPr txBox="1"/>
           <p:nvPr/>
         </p:nvSpPr>
@@ -39816,7 +40261,7 @@
       </p:sp>
       <p:sp>
         <p:nvSpPr>
-          <p:cNvPr id="46" name="TextBox 45"/>
+          <p:cNvPr id="47" name="TextBox 46"/>
           <p:cNvSpPr txBox="1"/>
           <p:nvPr/>
         </p:nvSpPr>

--- a/reports/CopilotStudio_ハッカソン_事前相談会②_状況報告_20260724.pptx
+++ b/reports/CopilotStudio_ハッカソン_事前相談会②_状況報告_20260724.pptx
@@ -29168,7 +29168,7 @@
                 </a:solidFill>
                 <a:latin typeface="Meiryo"/>
               </a:rPr>
-              <a:t>ISSUE CATEGORIZATION ｜ 横断的な論点</a:t>
+              <a:t>ISSUE SUMMARY ｜ 第2回の論点</a:t>
             </a:r>
           </a:p>
         </p:txBody>
@@ -29207,7 +29207,7 @@
                 </a:solidFill>
                 <a:latin typeface="Meiryo"/>
               </a:rPr>
-              <a:t>質疑で挙がった課題の整理</a:t>
+              <a:t>質疑で挙がった課題 ― 大きく3点</a:t>
             </a:r>
           </a:p>
         </p:txBody>
@@ -29381,7 +29381,7 @@
         </p:nvSpPr>
         <p:spPr>
           <a:xfrm>
-            <a:off x="502920" y="1152144"/>
+            <a:off x="502920" y="1170432"/>
             <a:ext cx="11247120" cy="320040"/>
           </a:xfrm>
           <a:prstGeom prst="rect">
@@ -29401,807 +29401,33 @@
               </a:lnSpc>
             </a:pPr>
             <a:r>
-              <a:rPr sz="1100" b="0" i="0">
+              <a:rPr sz="1200" b="0" i="0">
                 <a:solidFill>
                   <a:srgbClr val="252A31"/>
                 </a:solidFill>
                 <a:latin typeface="Meiryo"/>
               </a:rPr>
-              <a:t>第2回の相談会（チーム1・2・3・4・5・10・11）で実際に挙がった論点のみを整理。構築に向けた具体的な進め方・制約・展開に関する相談が中心。</a:t>
-            </a:r>
-          </a:p>
-        </p:txBody>
-      </p:sp>
-      <p:graphicFrame>
-        <p:nvGraphicFramePr>
-          <p:cNvPr id="13" name="Table 12"/>
-          <p:cNvGraphicFramePr>
-            <a:graphicFrameLocks noGrp="1"/>
-          </p:cNvGraphicFramePr>
-          <p:nvPr/>
-        </p:nvGraphicFramePr>
-        <p:xfrm>
-          <a:off x="502920" y="1554480"/>
-          <a:ext cx="11201399" cy="3090672"/>
-        </p:xfrm>
-        <a:graphic>
-          <a:graphicData uri="http://schemas.openxmlformats.org/drawingml/2006/table">
-            <a:tbl>
-              <a:tblPr firstRow="1" bandRow="1">
-                <a:tableStyleId>{5C22544A-7EE6-4342-B048-85BDC9FD1C3A}</a:tableStyleId>
-              </a:tblPr>
-              <a:tblGrid>
-                <a:gridCol w="3749039"/>
-                <a:gridCol w="5897880"/>
-                <a:gridCol w="1554480"/>
-              </a:tblGrid>
-              <a:tr h="310896">
-                <a:tc>
-                  <a:txBody>
-                    <a:bodyPr wrap="square"/>
-                    <a:lstStyle/>
-                    <a:p>
-                      <a:pPr algn="ctr">
-                        <a:lnSpc>
-                          <a:spcPct val="98000"/>
-                        </a:lnSpc>
-                      </a:pPr>
-                      <a:r>
-                        <a:rPr sz="1000" b="1">
-                          <a:solidFill>
-                            <a:srgbClr val="FFFFFF"/>
-                          </a:solidFill>
-                          <a:latin typeface="Meiryo"/>
-                        </a:rPr>
-                        <a:t>カテゴリ（第2回で挙がった論点）</a:t>
-                      </a:r>
-                    </a:p>
-                  </a:txBody>
-                  <a:tcPr marL="63500" marR="63500" marT="25400" marB="25400" anchor="ctr">
-                    <a:solidFill>
-                      <a:srgbClr val="2E8B9E"/>
-                    </a:solidFill>
-                  </a:tcPr>
-                </a:tc>
-                <a:tc>
-                  <a:txBody>
-                    <a:bodyPr wrap="square"/>
-                    <a:lstStyle/>
-                    <a:p>
-                      <a:pPr algn="ctr">
-                        <a:lnSpc>
-                          <a:spcPct val="98000"/>
-                        </a:lnSpc>
-                      </a:pPr>
-                      <a:r>
-                        <a:rPr sz="1000" b="1">
-                          <a:solidFill>
-                            <a:srgbClr val="FFFFFF"/>
-                          </a:solidFill>
-                          <a:latin typeface="Meiryo"/>
-                        </a:rPr>
-                        <a:t>主な内容</a:t>
-                      </a:r>
-                    </a:p>
-                  </a:txBody>
-                  <a:tcPr marL="63500" marR="63500" marT="25400" marB="25400" anchor="ctr">
-                    <a:solidFill>
-                      <a:srgbClr val="2E8B9E"/>
-                    </a:solidFill>
-                  </a:tcPr>
-                </a:tc>
-                <a:tc>
-                  <a:txBody>
-                    <a:bodyPr wrap="square"/>
-                    <a:lstStyle/>
-                    <a:p>
-                      <a:pPr algn="ctr">
-                        <a:lnSpc>
-                          <a:spcPct val="98000"/>
-                        </a:lnSpc>
-                      </a:pPr>
-                      <a:r>
-                        <a:rPr sz="1000" b="1">
-                          <a:solidFill>
-                            <a:srgbClr val="FFFFFF"/>
-                          </a:solidFill>
-                          <a:latin typeface="Meiryo"/>
-                        </a:rPr>
-                        <a:t>該当チーム</a:t>
-                      </a:r>
-                    </a:p>
-                  </a:txBody>
-                  <a:tcPr marL="63500" marR="63500" marT="25400" marB="25400" anchor="ctr">
-                    <a:solidFill>
-                      <a:srgbClr val="2E8B9E"/>
-                    </a:solidFill>
-                  </a:tcPr>
-                </a:tc>
-              </a:tr>
-              <a:tr h="347472">
-                <a:tc>
-                  <a:txBody>
-                    <a:bodyPr wrap="square"/>
-                    <a:lstStyle/>
-                    <a:p>
-                      <a:pPr algn="l">
-                        <a:lnSpc>
-                          <a:spcPct val="98000"/>
-                        </a:lnSpc>
-                      </a:pPr>
-                      <a:r>
-                        <a:rPr sz="930" b="1">
-                          <a:solidFill>
-                            <a:srgbClr val="1F385C"/>
-                          </a:solidFill>
-                          <a:latin typeface="Meiryo"/>
-                        </a:rPr>
-                        <a:t>外部サイト参照・Web検索の制約／案の再設計</a:t>
-                      </a:r>
-                    </a:p>
-                  </a:txBody>
-                  <a:tcPr marL="63500" marR="63500" marT="25400" marB="25400" anchor="ctr">
-                    <a:solidFill>
-                      <a:srgbClr val="FFFFFF"/>
-                    </a:solidFill>
-                  </a:tcPr>
-                </a:tc>
-                <a:tc>
-                  <a:txBody>
-                    <a:bodyPr wrap="square"/>
-                    <a:lstStyle/>
-                    <a:p>
-                      <a:pPr algn="l">
-                        <a:lnSpc>
-                          <a:spcPct val="98000"/>
-                        </a:lnSpc>
-                      </a:pPr>
-                      <a:r>
-                        <a:rPr sz="880" b="0">
-                          <a:solidFill>
-                            <a:srgbClr val="252A31"/>
-                          </a:solidFill>
-                          <a:latin typeface="Meiryo"/>
-                        </a:rPr>
-                        <a:t>外部Web・IR情報の取得は原則禁止（相手先サーバ負荷・訴訟リスク）。抵触する案は練り直しが必要。代替は事前取得してナレッジ化。</a:t>
-                      </a:r>
-                    </a:p>
-                  </a:txBody>
-                  <a:tcPr marL="63500" marR="63500" marT="25400" marB="25400" anchor="ctr">
-                    <a:solidFill>
-                      <a:srgbClr val="FFFFFF"/>
-                    </a:solidFill>
-                  </a:tcPr>
-                </a:tc>
-                <a:tc>
-                  <a:txBody>
-                    <a:bodyPr wrap="square"/>
-                    <a:lstStyle/>
-                    <a:p>
-                      <a:pPr algn="ctr">
-                        <a:lnSpc>
-                          <a:spcPct val="98000"/>
-                        </a:lnSpc>
-                      </a:pPr>
-                      <a:r>
-                        <a:rPr sz="900" b="1">
-                          <a:solidFill>
-                            <a:srgbClr val="252A31"/>
-                          </a:solidFill>
-                          <a:latin typeface="Meiryo"/>
-                        </a:rPr>
-                        <a:t>3, 4</a:t>
-                      </a:r>
-                    </a:p>
-                  </a:txBody>
-                  <a:tcPr marL="63500" marR="63500" marT="25400" marB="25400" anchor="ctr">
-                    <a:solidFill>
-                      <a:srgbClr val="FFFFFF"/>
-                    </a:solidFill>
-                  </a:tcPr>
-                </a:tc>
-              </a:tr>
-              <a:tr h="347472">
-                <a:tc>
-                  <a:txBody>
-                    <a:bodyPr wrap="square"/>
-                    <a:lstStyle/>
-                    <a:p>
-                      <a:pPr algn="l">
-                        <a:lnSpc>
-                          <a:spcPct val="98000"/>
-                        </a:lnSpc>
-                      </a:pPr>
-                      <a:r>
-                        <a:rPr sz="930" b="1">
-                          <a:solidFill>
-                            <a:srgbClr val="1F385C"/>
-                          </a:solidFill>
-                          <a:latin typeface="Meiryo"/>
-                        </a:rPr>
-                        <a:t>開発の進め方・基本フォーマット／スケジュール提示</a:t>
-                      </a:r>
-                    </a:p>
-                  </a:txBody>
-                  <a:tcPr marL="63500" marR="63500" marT="25400" marB="25400" anchor="ctr">
-                    <a:solidFill>
-                      <a:srgbClr val="F2F4F7"/>
-                    </a:solidFill>
-                  </a:tcPr>
-                </a:tc>
-                <a:tc>
-                  <a:txBody>
-                    <a:bodyPr wrap="square"/>
-                    <a:lstStyle/>
-                    <a:p>
-                      <a:pPr algn="l">
-                        <a:lnSpc>
-                          <a:spcPct val="98000"/>
-                        </a:lnSpc>
-                      </a:pPr>
-                      <a:r>
-                        <a:rPr sz="880" b="0">
-                          <a:solidFill>
-                            <a:srgbClr val="252A31"/>
-                          </a:solidFill>
-                          <a:latin typeface="Meiryo"/>
-                        </a:rPr>
-                        <a:t>何を優先しどの手順で進めるかの基本フォーマットが欲しい。8〜9月のスケジュール案内の要望。</a:t>
-                      </a:r>
-                    </a:p>
-                  </a:txBody>
-                  <a:tcPr marL="63500" marR="63500" marT="25400" marB="25400" anchor="ctr">
-                    <a:solidFill>
-                      <a:srgbClr val="F2F4F7"/>
-                    </a:solidFill>
-                  </a:tcPr>
-                </a:tc>
-                <a:tc>
-                  <a:txBody>
-                    <a:bodyPr wrap="square"/>
-                    <a:lstStyle/>
-                    <a:p>
-                      <a:pPr algn="ctr">
-                        <a:lnSpc>
-                          <a:spcPct val="98000"/>
-                        </a:lnSpc>
-                      </a:pPr>
-                      <a:r>
-                        <a:rPr sz="900" b="1">
-                          <a:solidFill>
-                            <a:srgbClr val="252A31"/>
-                          </a:solidFill>
-                          <a:latin typeface="Meiryo"/>
-                        </a:rPr>
-                        <a:t>1, 5</a:t>
-                      </a:r>
-                    </a:p>
-                  </a:txBody>
-                  <a:tcPr marL="63500" marR="63500" marT="25400" marB="25400" anchor="ctr">
-                    <a:solidFill>
-                      <a:srgbClr val="F2F4F7"/>
-                    </a:solidFill>
-                  </a:tcPr>
-                </a:tc>
-              </a:tr>
-              <a:tr h="347472">
-                <a:tc>
-                  <a:txBody>
-                    <a:bodyPr wrap="square"/>
-                    <a:lstStyle/>
-                    <a:p>
-                      <a:pPr algn="l">
-                        <a:lnSpc>
-                          <a:spcPct val="98000"/>
-                        </a:lnSpc>
-                      </a:pPr>
-                      <a:r>
-                        <a:rPr sz="930" b="1">
-                          <a:solidFill>
-                            <a:srgbClr val="1F385C"/>
-                          </a:solidFill>
-                          <a:latin typeface="Meiryo"/>
-                        </a:rPr>
-                        <a:t>設計相談の進め方・プロンプト見本</a:t>
-                      </a:r>
-                    </a:p>
-                  </a:txBody>
-                  <a:tcPr marL="63500" marR="63500" marT="25400" marB="25400" anchor="ctr">
-                    <a:solidFill>
-                      <a:srgbClr val="FFFFFF"/>
-                    </a:solidFill>
-                  </a:tcPr>
-                </a:tc>
-                <a:tc>
-                  <a:txBody>
-                    <a:bodyPr wrap="square"/>
-                    <a:lstStyle/>
-                    <a:p>
-                      <a:pPr algn="l">
-                        <a:lnSpc>
-                          <a:spcPct val="98000"/>
-                        </a:lnSpc>
-                      </a:pPr>
-                      <a:r>
-                        <a:rPr sz="880" b="0">
-                          <a:solidFill>
-                            <a:srgbClr val="252A31"/>
-                          </a:solidFill>
-                          <a:latin typeface="Meiryo"/>
-                        </a:rPr>
-                        <a:t>成果物の作り方・使うアプリ・設定をCopilotチャットで相談する型と、プロンプト見本の提供要望。</a:t>
-                      </a:r>
-                    </a:p>
-                  </a:txBody>
-                  <a:tcPr marL="63500" marR="63500" marT="25400" marB="25400" anchor="ctr">
-                    <a:solidFill>
-                      <a:srgbClr val="FFFFFF"/>
-                    </a:solidFill>
-                  </a:tcPr>
-                </a:tc>
-                <a:tc>
-                  <a:txBody>
-                    <a:bodyPr wrap="square"/>
-                    <a:lstStyle/>
-                    <a:p>
-                      <a:pPr algn="ctr">
-                        <a:lnSpc>
-                          <a:spcPct val="98000"/>
-                        </a:lnSpc>
-                      </a:pPr>
-                      <a:r>
-                        <a:rPr sz="900" b="1">
-                          <a:solidFill>
-                            <a:srgbClr val="252A31"/>
-                          </a:solidFill>
-                          <a:latin typeface="Meiryo"/>
-                        </a:rPr>
-                        <a:t>1, 2</a:t>
-                      </a:r>
-                    </a:p>
-                  </a:txBody>
-                  <a:tcPr marL="63500" marR="63500" marT="25400" marB="25400" anchor="ctr">
-                    <a:solidFill>
-                      <a:srgbClr val="FFFFFF"/>
-                    </a:solidFill>
-                  </a:tcPr>
-                </a:tc>
-              </a:tr>
-              <a:tr h="347472">
-                <a:tc>
-                  <a:txBody>
-                    <a:bodyPr wrap="square"/>
-                    <a:lstStyle/>
-                    <a:p>
-                      <a:pPr algn="l">
-                        <a:lnSpc>
-                          <a:spcPct val="98000"/>
-                        </a:lnSpc>
-                      </a:pPr>
-                      <a:r>
-                        <a:rPr sz="930" b="1">
-                          <a:solidFill>
-                            <a:srgbClr val="1F385C"/>
-                          </a:solidFill>
-                          <a:latin typeface="Meiryo"/>
-                        </a:rPr>
-                        <a:t>8月デモ設計・効果の見極め</a:t>
-                      </a:r>
-                    </a:p>
-                  </a:txBody>
-                  <a:tcPr marL="63500" marR="63500" marT="25400" marB="25400" anchor="ctr">
-                    <a:solidFill>
-                      <a:srgbClr val="F2F4F7"/>
-                    </a:solidFill>
-                  </a:tcPr>
-                </a:tc>
-                <a:tc>
-                  <a:txBody>
-                    <a:bodyPr wrap="square"/>
-                    <a:lstStyle/>
-                    <a:p>
-                      <a:pPr algn="l">
-                        <a:lnSpc>
-                          <a:spcPct val="98000"/>
-                        </a:lnSpc>
-                      </a:pPr>
-                      <a:r>
-                        <a:rPr sz="880" b="0">
-                          <a:solidFill>
-                            <a:srgbClr val="252A31"/>
-                          </a:solidFill>
-                          <a:latin typeface="Meiryo"/>
-                        </a:rPr>
-                        <a:t>タスク列を仮決め→サンプル数件→Automateで一本通すMVP。整形/ドラフトのみで効果が出るかの見極め。</a:t>
-                      </a:r>
-                    </a:p>
-                  </a:txBody>
-                  <a:tcPr marL="63500" marR="63500" marT="25400" marB="25400" anchor="ctr">
-                    <a:solidFill>
-                      <a:srgbClr val="F2F4F7"/>
-                    </a:solidFill>
-                  </a:tcPr>
-                </a:tc>
-                <a:tc>
-                  <a:txBody>
-                    <a:bodyPr wrap="square"/>
-                    <a:lstStyle/>
-                    <a:p>
-                      <a:pPr algn="ctr">
-                        <a:lnSpc>
-                          <a:spcPct val="98000"/>
-                        </a:lnSpc>
-                      </a:pPr>
-                      <a:r>
-                        <a:rPr sz="900" b="1">
-                          <a:solidFill>
-                            <a:srgbClr val="252A31"/>
-                          </a:solidFill>
-                          <a:latin typeface="Meiryo"/>
-                        </a:rPr>
-                        <a:t>4, 5</a:t>
-                      </a:r>
-                    </a:p>
-                  </a:txBody>
-                  <a:tcPr marL="63500" marR="63500" marT="25400" marB="25400" anchor="ctr">
-                    <a:solidFill>
-                      <a:srgbClr val="F2F4F7"/>
-                    </a:solidFill>
-                  </a:tcPr>
-                </a:tc>
-              </a:tr>
-              <a:tr h="347472">
-                <a:tc>
-                  <a:txBody>
-                    <a:bodyPr wrap="square"/>
-                    <a:lstStyle/>
-                    <a:p>
-                      <a:pPr algn="l">
-                        <a:lnSpc>
-                          <a:spcPct val="98000"/>
-                        </a:lnSpc>
-                      </a:pPr>
-                      <a:r>
-                        <a:rPr sz="930" b="1">
-                          <a:solidFill>
-                            <a:srgbClr val="1F385C"/>
-                          </a:solidFill>
-                          <a:latin typeface="Meiryo"/>
-                        </a:rPr>
-                        <a:t>Copilot回答の信頼性・検証</a:t>
-                      </a:r>
-                    </a:p>
-                  </a:txBody>
-                  <a:tcPr marL="63500" marR="63500" marT="25400" marB="25400" anchor="ctr">
-                    <a:solidFill>
-                      <a:srgbClr val="FFFFFF"/>
-                    </a:solidFill>
-                  </a:tcPr>
-                </a:tc>
-                <a:tc>
-                  <a:txBody>
-                    <a:bodyPr wrap="square"/>
-                    <a:lstStyle/>
-                    <a:p>
-                      <a:pPr algn="l">
-                        <a:lnSpc>
-                          <a:spcPct val="98000"/>
-                        </a:lnSpc>
-                      </a:pPr>
-                      <a:r>
-                        <a:rPr sz="880" b="0">
-                          <a:solidFill>
-                            <a:srgbClr val="252A31"/>
-                          </a:solidFill>
-                          <a:latin typeface="Meiryo"/>
-                        </a:rPr>
-                        <a:t>Copilotチャットの回答をそのまま信じてよいか。根拠提示を求め、画面操作・実検証で精度を確認。</a:t>
-                      </a:r>
-                    </a:p>
-                  </a:txBody>
-                  <a:tcPr marL="63500" marR="63500" marT="25400" marB="25400" anchor="ctr">
-                    <a:solidFill>
-                      <a:srgbClr val="FFFFFF"/>
-                    </a:solidFill>
-                  </a:tcPr>
-                </a:tc>
-                <a:tc>
-                  <a:txBody>
-                    <a:bodyPr wrap="square"/>
-                    <a:lstStyle/>
-                    <a:p>
-                      <a:pPr algn="ctr">
-                        <a:lnSpc>
-                          <a:spcPct val="98000"/>
-                        </a:lnSpc>
-                      </a:pPr>
-                      <a:r>
-                        <a:rPr sz="900" b="1">
-                          <a:solidFill>
-                            <a:srgbClr val="252A31"/>
-                          </a:solidFill>
-                          <a:latin typeface="Meiryo"/>
-                        </a:rPr>
-                        <a:t>10</a:t>
-                      </a:r>
-                    </a:p>
-                  </a:txBody>
-                  <a:tcPr marL="63500" marR="63500" marT="25400" marB="25400" anchor="ctr">
-                    <a:solidFill>
-                      <a:srgbClr val="FFFFFF"/>
-                    </a:solidFill>
-                  </a:tcPr>
-                </a:tc>
-              </a:tr>
-              <a:tr h="347472">
-                <a:tc>
-                  <a:txBody>
-                    <a:bodyPr wrap="square"/>
-                    <a:lstStyle/>
-                    <a:p>
-                      <a:pPr algn="l">
-                        <a:lnSpc>
-                          <a:spcPct val="98000"/>
-                        </a:lnSpc>
-                      </a:pPr>
-                      <a:r>
-                        <a:rPr sz="930" b="1">
-                          <a:solidFill>
-                            <a:srgbClr val="1F385C"/>
-                          </a:solidFill>
-                          <a:latin typeface="Meiryo"/>
-                        </a:rPr>
-                        <a:t>本番環境移行・展開時期・社内申請フロー</a:t>
-                      </a:r>
-                    </a:p>
-                  </a:txBody>
-                  <a:tcPr marL="63500" marR="63500" marT="25400" marB="25400" anchor="ctr">
-                    <a:solidFill>
-                      <a:srgbClr val="F2F4F7"/>
-                    </a:solidFill>
-                  </a:tcPr>
-                </a:tc>
-                <a:tc>
-                  <a:txBody>
-                    <a:bodyPr wrap="square"/>
-                    <a:lstStyle/>
-                    <a:p>
-                      <a:pPr algn="l">
-                        <a:lnSpc>
-                          <a:spcPct val="98000"/>
-                        </a:lnSpc>
-                      </a:pPr>
-                      <a:r>
-                        <a:rPr sz="880" b="0">
-                          <a:solidFill>
-                            <a:srgbClr val="252A31"/>
-                          </a:solidFill>
-                          <a:latin typeface="Meiryo"/>
-                        </a:rPr>
-                        <a:t>開発環境→本番環境移行の申請/決裁フロー、年度末（3月末）展開を見据えたスピード感・フェーズ設定。</a:t>
-                      </a:r>
-                    </a:p>
-                  </a:txBody>
-                  <a:tcPr marL="63500" marR="63500" marT="25400" marB="25400" anchor="ctr">
-                    <a:solidFill>
-                      <a:srgbClr val="F2F4F7"/>
-                    </a:solidFill>
-                  </a:tcPr>
-                </a:tc>
-                <a:tc>
-                  <a:txBody>
-                    <a:bodyPr wrap="square"/>
-                    <a:lstStyle/>
-                    <a:p>
-                      <a:pPr algn="ctr">
-                        <a:lnSpc>
-                          <a:spcPct val="98000"/>
-                        </a:lnSpc>
-                      </a:pPr>
-                      <a:r>
-                        <a:rPr sz="900" b="1">
-                          <a:solidFill>
-                            <a:srgbClr val="252A31"/>
-                          </a:solidFill>
-                          <a:latin typeface="Meiryo"/>
-                        </a:rPr>
-                        <a:t>11</a:t>
-                      </a:r>
-                    </a:p>
-                  </a:txBody>
-                  <a:tcPr marL="63500" marR="63500" marT="25400" marB="25400" anchor="ctr">
-                    <a:solidFill>
-                      <a:srgbClr val="F2F4F7"/>
-                    </a:solidFill>
-                  </a:tcPr>
-                </a:tc>
-              </a:tr>
-              <a:tr h="347472">
-                <a:tc>
-                  <a:txBody>
-                    <a:bodyPr wrap="square"/>
-                    <a:lstStyle/>
-                    <a:p>
-                      <a:pPr algn="l">
-                        <a:lnSpc>
-                          <a:spcPct val="98000"/>
-                        </a:lnSpc>
-                      </a:pPr>
-                      <a:r>
-                        <a:rPr sz="930" b="1">
-                          <a:solidFill>
-                            <a:srgbClr val="1F385C"/>
-                          </a:solidFill>
-                          <a:latin typeface="Meiryo"/>
-                        </a:rPr>
-                        <a:t>手順書・利用ルール／運用保守</a:t>
-                      </a:r>
-                    </a:p>
-                  </a:txBody>
-                  <a:tcPr marL="63500" marR="63500" marT="25400" marB="25400" anchor="ctr">
-                    <a:solidFill>
-                      <a:srgbClr val="FFFFFF"/>
-                    </a:solidFill>
-                  </a:tcPr>
-                </a:tc>
-                <a:tc>
-                  <a:txBody>
-                    <a:bodyPr wrap="square"/>
-                    <a:lstStyle/>
-                    <a:p>
-                      <a:pPr algn="l">
-                        <a:lnSpc>
-                          <a:spcPct val="98000"/>
-                        </a:lnSpc>
-                      </a:pPr>
-                      <a:r>
-                        <a:rPr sz="880" b="0">
-                          <a:solidFill>
-                            <a:srgbClr val="252A31"/>
-                          </a:solidFill>
-                          <a:latin typeface="Meiryo"/>
-                        </a:rPr>
-                        <a:t>手順書・利用ルールの整備時期（項目出し・全量把握が重要）。Copilot Studio更新に伴う運用保守の懸念。</a:t>
-                      </a:r>
-                    </a:p>
-                  </a:txBody>
-                  <a:tcPr marL="63500" marR="63500" marT="25400" marB="25400" anchor="ctr">
-                    <a:solidFill>
-                      <a:srgbClr val="FFFFFF"/>
-                    </a:solidFill>
-                  </a:tcPr>
-                </a:tc>
-                <a:tc>
-                  <a:txBody>
-                    <a:bodyPr wrap="square"/>
-                    <a:lstStyle/>
-                    <a:p>
-                      <a:pPr algn="ctr">
-                        <a:lnSpc>
-                          <a:spcPct val="98000"/>
-                        </a:lnSpc>
-                      </a:pPr>
-                      <a:r>
-                        <a:rPr sz="900" b="1">
-                          <a:solidFill>
-                            <a:srgbClr val="252A31"/>
-                          </a:solidFill>
-                          <a:latin typeface="Meiryo"/>
-                        </a:rPr>
-                        <a:t>5, 11</a:t>
-                      </a:r>
-                    </a:p>
-                  </a:txBody>
-                  <a:tcPr marL="63500" marR="63500" marT="25400" marB="25400" anchor="ctr">
-                    <a:solidFill>
-                      <a:srgbClr val="FFFFFF"/>
-                    </a:solidFill>
-                  </a:tcPr>
-                </a:tc>
-              </a:tr>
-              <a:tr h="347472">
-                <a:tc>
-                  <a:txBody>
-                    <a:bodyPr wrap="square"/>
-                    <a:lstStyle/>
-                    <a:p>
-                      <a:pPr algn="l">
-                        <a:lnSpc>
-                          <a:spcPct val="98000"/>
-                        </a:lnSpc>
-                      </a:pPr>
-                      <a:r>
-                        <a:rPr sz="930" b="1">
-                          <a:solidFill>
-                            <a:srgbClr val="1F385C"/>
-                          </a:solidFill>
-                          <a:latin typeface="Meiryo"/>
-                        </a:rPr>
-                        <a:t>メンター制・今後の進め方</a:t>
-                      </a:r>
-                    </a:p>
-                  </a:txBody>
-                  <a:tcPr marL="63500" marR="63500" marT="25400" marB="25400" anchor="ctr">
-                    <a:solidFill>
-                      <a:srgbClr val="F2F4F7"/>
-                    </a:solidFill>
-                  </a:tcPr>
-                </a:tc>
-                <a:tc>
-                  <a:txBody>
-                    <a:bodyPr wrap="square"/>
-                    <a:lstStyle/>
-                    <a:p>
-                      <a:pPr algn="l">
-                        <a:lnSpc>
-                          <a:spcPct val="98000"/>
-                        </a:lnSpc>
-                      </a:pPr>
-                      <a:r>
-                        <a:rPr sz="880" b="0">
-                          <a:solidFill>
-                            <a:srgbClr val="252A31"/>
-                          </a:solidFill>
-                          <a:latin typeface="Meiryo"/>
-                        </a:rPr>
-                        <a:t>8月以降のメンター定例（週次/隔週）の進め方を事務局から案内予定。</a:t>
-                      </a:r>
-                    </a:p>
-                  </a:txBody>
-                  <a:tcPr marL="63500" marR="63500" marT="25400" marB="25400" anchor="ctr">
-                    <a:solidFill>
-                      <a:srgbClr val="F2F4F7"/>
-                    </a:solidFill>
-                  </a:tcPr>
-                </a:tc>
-                <a:tc>
-                  <a:txBody>
-                    <a:bodyPr wrap="square"/>
-                    <a:lstStyle/>
-                    <a:p>
-                      <a:pPr algn="ctr">
-                        <a:lnSpc>
-                          <a:spcPct val="98000"/>
-                        </a:lnSpc>
-                      </a:pPr>
-                      <a:r>
-                        <a:rPr sz="900" b="1">
-                          <a:solidFill>
-                            <a:srgbClr val="252A31"/>
-                          </a:solidFill>
-                          <a:latin typeface="Meiryo"/>
-                        </a:rPr>
-                        <a:t>2, 10</a:t>
-                      </a:r>
-                    </a:p>
-                  </a:txBody>
-                  <a:tcPr marL="63500" marR="63500" marT="25400" marB="25400" anchor="ctr">
-                    <a:solidFill>
-                      <a:srgbClr val="F2F4F7"/>
-                    </a:solidFill>
-                  </a:tcPr>
-                </a:tc>
-              </a:tr>
-            </a:tbl>
-          </a:graphicData>
-        </a:graphic>
-      </p:graphicFrame>
-      <p:sp>
-        <p:nvSpPr>
-          <p:cNvPr id="14" name="Rectangle 13"/>
+              <a:t>第2回（チーム1・2・3・4・5・10・11）で挙がった論点は、大きく次の3点に整理できる。</a:t>
+            </a:r>
+          </a:p>
+        </p:txBody>
+      </p:sp>
+      <p:sp>
+        <p:nvSpPr>
+          <p:cNvPr id="13" name="Rectangle 12"/>
           <p:cNvSpPr/>
           <p:nvPr/>
         </p:nvSpPr>
         <p:spPr>
           <a:xfrm>
-            <a:off x="502920" y="4754880"/>
-            <a:ext cx="11201400" cy="566928"/>
-          </a:xfrm>
-          <a:prstGeom prst="rect">
-            <a:avLst/>
-          </a:prstGeom>
-          <a:solidFill>
-            <a:srgbClr val="FCF1E6"/>
+            <a:off x="502920" y="1645920"/>
+            <a:ext cx="11201400" cy="1490472"/>
+          </a:xfrm>
+          <a:prstGeom prst="rect">
+            <a:avLst/>
+          </a:prstGeom>
+          <a:solidFill>
+            <a:srgbClr val="F2F4F7"/>
           </a:solidFill>
           <a:ln>
             <a:noFill/>
@@ -30232,14 +29458,14 @@
       </p:sp>
       <p:sp>
         <p:nvSpPr>
-          <p:cNvPr id="15" name="Rectangle 14"/>
+          <p:cNvPr id="14" name="Rectangle 13"/>
           <p:cNvSpPr/>
           <p:nvPr/>
         </p:nvSpPr>
         <p:spPr>
           <a:xfrm>
-            <a:off x="502920" y="4754880"/>
-            <a:ext cx="118872" cy="566928"/>
+            <a:off x="502920" y="1645920"/>
+            <a:ext cx="2880360" cy="1490472"/>
           </a:xfrm>
           <a:prstGeom prst="rect">
             <a:avLst/>
@@ -30276,14 +29502,53 @@
       </p:sp>
       <p:sp>
         <p:nvSpPr>
+          <p:cNvPr id="15" name="TextBox 14"/>
+          <p:cNvSpPr txBox="1"/>
+          <p:nvPr/>
+        </p:nvSpPr>
+        <p:spPr>
+          <a:xfrm>
+            <a:off x="640080" y="1645920"/>
+            <a:ext cx="777240" cy="1490472"/>
+          </a:xfrm>
+          <a:prstGeom prst="rect">
+            <a:avLst/>
+          </a:prstGeom>
+          <a:noFill/>
+        </p:spPr>
+        <p:txBody>
+          <a:bodyPr wrap="square" anchor="ctr" lIns="25400" rIns="25400" tIns="12700" bIns="12700">
+            <a:spAutoFit/>
+          </a:bodyPr>
+          <a:lstStyle/>
+          <a:p>
+            <a:pPr algn="ctr">
+              <a:lnSpc>
+                <a:spcPct val="100000"/>
+              </a:lnSpc>
+            </a:pPr>
+            <a:r>
+              <a:rPr sz="3200" b="1" i="0">
+                <a:solidFill>
+                  <a:srgbClr val="FFFFFF"/>
+                </a:solidFill>
+                <a:latin typeface="Meiryo"/>
+              </a:rPr>
+              <a:t>1</a:t>
+            </a:r>
+          </a:p>
+        </p:txBody>
+      </p:sp>
+      <p:sp>
+        <p:nvSpPr>
           <p:cNvPr id="16" name="TextBox 15"/>
           <p:cNvSpPr txBox="1"/>
           <p:nvPr/>
         </p:nvSpPr>
         <p:spPr>
           <a:xfrm>
-            <a:off x="777240" y="4782312"/>
-            <a:ext cx="10698480" cy="530352"/>
+            <a:off x="1417320" y="1645920"/>
+            <a:ext cx="1874519" cy="1490472"/>
           </a:xfrm>
           <a:prstGeom prst="rect">
             <a:avLst/>
@@ -30302,13 +29567,1126 @@
               </a:lnSpc>
             </a:pPr>
             <a:r>
-              <a:rPr sz="1050" b="1" i="0">
+              <a:rPr sz="1350" b="1" i="0">
+                <a:solidFill>
+                  <a:srgbClr val="FFFFFF"/>
+                </a:solidFill>
+                <a:latin typeface="Meiryo"/>
+              </a:rPr>
+              <a:t>ガバナンス・制約</a:t>
+            </a:r>
+          </a:p>
+        </p:txBody>
+      </p:sp>
+      <p:sp>
+        <p:nvSpPr>
+          <p:cNvPr id="17" name="Rectangle 16"/>
+          <p:cNvSpPr/>
+          <p:nvPr/>
+        </p:nvSpPr>
+        <p:spPr>
+          <a:xfrm>
+            <a:off x="3611880" y="1810512"/>
+            <a:ext cx="91440" cy="91440"/>
+          </a:xfrm>
+          <a:prstGeom prst="rect">
+            <a:avLst/>
+          </a:prstGeom>
+          <a:solidFill>
+            <a:srgbClr val="E8833A"/>
+          </a:solidFill>
+          <a:ln>
+            <a:noFill/>
+          </a:ln>
+          <a:effectLst/>
+        </p:spPr>
+        <p:style>
+          <a:lnRef idx="1">
+            <a:schemeClr val="accent1"/>
+          </a:lnRef>
+          <a:fillRef idx="3">
+            <a:schemeClr val="accent1"/>
+          </a:fillRef>
+          <a:effectRef idx="2">
+            <a:schemeClr val="accent1"/>
+          </a:effectRef>
+          <a:fontRef idx="minor">
+            <a:schemeClr val="lt1"/>
+          </a:fontRef>
+        </p:style>
+        <p:txBody>
+          <a:bodyPr rtlCol="0" anchor="ctr"/>
+          <a:lstStyle/>
+          <a:p>
+            <a:pPr algn="ctr"/>
+          </a:p>
+        </p:txBody>
+      </p:sp>
+      <p:sp>
+        <p:nvSpPr>
+          <p:cNvPr id="18" name="TextBox 17"/>
+          <p:cNvSpPr txBox="1"/>
+          <p:nvPr/>
+        </p:nvSpPr>
+        <p:spPr>
+          <a:xfrm>
+            <a:off x="3794760" y="1728216"/>
+            <a:ext cx="7818120" cy="292608"/>
+          </a:xfrm>
+          <a:prstGeom prst="rect">
+            <a:avLst/>
+          </a:prstGeom>
+          <a:noFill/>
+        </p:spPr>
+        <p:txBody>
+          <a:bodyPr wrap="square" anchor="t" lIns="25400" rIns="25400" tIns="12700" bIns="12700">
+            <a:spAutoFit/>
+          </a:bodyPr>
+          <a:lstStyle/>
+          <a:p>
+            <a:pPr algn="l">
+              <a:lnSpc>
+                <a:spcPct val="100000"/>
+              </a:lnSpc>
+            </a:pPr>
+            <a:r>
+              <a:rPr sz="980" b="0" i="0">
                 <a:solidFill>
                   <a:srgbClr val="252A31"/>
                 </a:solidFill>
                 <a:latin typeface="Meiryo"/>
               </a:rPr>
-              <a:t>▲ 重要：外部Web参照・M365外システム連携・個人情報/機密情報の取り扱いはガイドライン上の制約がある。これらに依存する案は抵触時に再設計が必要となるため、可否は早めに事務局へ確認を（第2回ではチーム3・4が該当）。</a:t>
+              <a:t>外部Web参照・M365外連携・機密情報は原則NG。依存する案は再設計が必要　… T3・T4</a:t>
+            </a:r>
+          </a:p>
+        </p:txBody>
+      </p:sp>
+      <p:sp>
+        <p:nvSpPr>
+          <p:cNvPr id="19" name="Rectangle 18"/>
+          <p:cNvSpPr/>
+          <p:nvPr/>
+        </p:nvSpPr>
+        <p:spPr>
+          <a:xfrm>
+            <a:off x="3611880" y="2093976"/>
+            <a:ext cx="91440" cy="91440"/>
+          </a:xfrm>
+          <a:prstGeom prst="rect">
+            <a:avLst/>
+          </a:prstGeom>
+          <a:solidFill>
+            <a:srgbClr val="E8833A"/>
+          </a:solidFill>
+          <a:ln>
+            <a:noFill/>
+          </a:ln>
+          <a:effectLst/>
+        </p:spPr>
+        <p:style>
+          <a:lnRef idx="1">
+            <a:schemeClr val="accent1"/>
+          </a:lnRef>
+          <a:fillRef idx="3">
+            <a:schemeClr val="accent1"/>
+          </a:fillRef>
+          <a:effectRef idx="2">
+            <a:schemeClr val="accent1"/>
+          </a:effectRef>
+          <a:fontRef idx="minor">
+            <a:schemeClr val="lt1"/>
+          </a:fontRef>
+        </p:style>
+        <p:txBody>
+          <a:bodyPr rtlCol="0" anchor="ctr"/>
+          <a:lstStyle/>
+          <a:p>
+            <a:pPr algn="ctr"/>
+          </a:p>
+        </p:txBody>
+      </p:sp>
+      <p:sp>
+        <p:nvSpPr>
+          <p:cNvPr id="20" name="TextBox 19"/>
+          <p:cNvSpPr txBox="1"/>
+          <p:nvPr/>
+        </p:nvSpPr>
+        <p:spPr>
+          <a:xfrm>
+            <a:off x="3794760" y="2011680"/>
+            <a:ext cx="7818120" cy="292608"/>
+          </a:xfrm>
+          <a:prstGeom prst="rect">
+            <a:avLst/>
+          </a:prstGeom>
+          <a:noFill/>
+        </p:spPr>
+        <p:txBody>
+          <a:bodyPr wrap="square" anchor="t" lIns="25400" rIns="25400" tIns="12700" bIns="12700">
+            <a:spAutoFit/>
+          </a:bodyPr>
+          <a:lstStyle/>
+          <a:p>
+            <a:pPr algn="l">
+              <a:lnSpc>
+                <a:spcPct val="100000"/>
+              </a:lnSpc>
+            </a:pPr>
+            <a:r>
+              <a:rPr sz="980" b="0" i="0">
+                <a:solidFill>
+                  <a:srgbClr val="252A31"/>
+                </a:solidFill>
+                <a:latin typeface="Meiryo"/>
+              </a:rPr>
+              <a:t>開発環境→本番環境への移行は、社内の申請/決裁フローを要確認　… T11</a:t>
+            </a:r>
+          </a:p>
+        </p:txBody>
+      </p:sp>
+      <p:sp>
+        <p:nvSpPr>
+          <p:cNvPr id="21" name="TextBox 20"/>
+          <p:cNvSpPr txBox="1"/>
+          <p:nvPr/>
+        </p:nvSpPr>
+        <p:spPr>
+          <a:xfrm>
+            <a:off x="3611880" y="2834640"/>
+            <a:ext cx="7863840" cy="274320"/>
+          </a:xfrm>
+          <a:prstGeom prst="rect">
+            <a:avLst/>
+          </a:prstGeom>
+          <a:noFill/>
+        </p:spPr>
+        <p:txBody>
+          <a:bodyPr wrap="square" anchor="t" lIns="25400" rIns="25400" tIns="12700" bIns="12700">
+            <a:spAutoFit/>
+          </a:bodyPr>
+          <a:lstStyle/>
+          <a:p>
+            <a:pPr algn="l">
+              <a:lnSpc>
+                <a:spcPct val="100000"/>
+              </a:lnSpc>
+            </a:pPr>
+            <a:r>
+              <a:rPr sz="950" b="1" i="0">
+                <a:solidFill>
+                  <a:srgbClr val="E8833A"/>
+                </a:solidFill>
+                <a:latin typeface="Meiryo"/>
+              </a:rPr>
+              <a:t>▶ 事務局：可否判断を早期に。抵触時は案が頓挫するため最優先で確認。</a:t>
+            </a:r>
+          </a:p>
+        </p:txBody>
+      </p:sp>
+      <p:sp>
+        <p:nvSpPr>
+          <p:cNvPr id="22" name="Rectangle 21"/>
+          <p:cNvSpPr/>
+          <p:nvPr/>
+        </p:nvSpPr>
+        <p:spPr>
+          <a:xfrm>
+            <a:off x="502920" y="3291840"/>
+            <a:ext cx="11201400" cy="1490472"/>
+          </a:xfrm>
+          <a:prstGeom prst="rect">
+            <a:avLst/>
+          </a:prstGeom>
+          <a:solidFill>
+            <a:srgbClr val="F2F4F7"/>
+          </a:solidFill>
+          <a:ln>
+            <a:noFill/>
+          </a:ln>
+          <a:effectLst/>
+        </p:spPr>
+        <p:style>
+          <a:lnRef idx="1">
+            <a:schemeClr val="accent1"/>
+          </a:lnRef>
+          <a:fillRef idx="3">
+            <a:schemeClr val="accent1"/>
+          </a:fillRef>
+          <a:effectRef idx="2">
+            <a:schemeClr val="accent1"/>
+          </a:effectRef>
+          <a:fontRef idx="minor">
+            <a:schemeClr val="lt1"/>
+          </a:fontRef>
+        </p:style>
+        <p:txBody>
+          <a:bodyPr rtlCol="0" anchor="ctr"/>
+          <a:lstStyle/>
+          <a:p>
+            <a:pPr algn="ctr"/>
+          </a:p>
+        </p:txBody>
+      </p:sp>
+      <p:sp>
+        <p:nvSpPr>
+          <p:cNvPr id="23" name="Rectangle 22"/>
+          <p:cNvSpPr/>
+          <p:nvPr/>
+        </p:nvSpPr>
+        <p:spPr>
+          <a:xfrm>
+            <a:off x="502920" y="3291840"/>
+            <a:ext cx="2880360" cy="1490472"/>
+          </a:xfrm>
+          <a:prstGeom prst="rect">
+            <a:avLst/>
+          </a:prstGeom>
+          <a:solidFill>
+            <a:srgbClr val="1F385C"/>
+          </a:solidFill>
+          <a:ln>
+            <a:noFill/>
+          </a:ln>
+          <a:effectLst/>
+        </p:spPr>
+        <p:style>
+          <a:lnRef idx="1">
+            <a:schemeClr val="accent1"/>
+          </a:lnRef>
+          <a:fillRef idx="3">
+            <a:schemeClr val="accent1"/>
+          </a:fillRef>
+          <a:effectRef idx="2">
+            <a:schemeClr val="accent1"/>
+          </a:effectRef>
+          <a:fontRef idx="minor">
+            <a:schemeClr val="lt1"/>
+          </a:fontRef>
+        </p:style>
+        <p:txBody>
+          <a:bodyPr rtlCol="0" anchor="ctr"/>
+          <a:lstStyle/>
+          <a:p>
+            <a:pPr algn="ctr"/>
+          </a:p>
+        </p:txBody>
+      </p:sp>
+      <p:sp>
+        <p:nvSpPr>
+          <p:cNvPr id="24" name="TextBox 23"/>
+          <p:cNvSpPr txBox="1"/>
+          <p:nvPr/>
+        </p:nvSpPr>
+        <p:spPr>
+          <a:xfrm>
+            <a:off x="640080" y="3291840"/>
+            <a:ext cx="777240" cy="1490472"/>
+          </a:xfrm>
+          <a:prstGeom prst="rect">
+            <a:avLst/>
+          </a:prstGeom>
+          <a:noFill/>
+        </p:spPr>
+        <p:txBody>
+          <a:bodyPr wrap="square" anchor="ctr" lIns="25400" rIns="25400" tIns="12700" bIns="12700">
+            <a:spAutoFit/>
+          </a:bodyPr>
+          <a:lstStyle/>
+          <a:p>
+            <a:pPr algn="ctr">
+              <a:lnSpc>
+                <a:spcPct val="100000"/>
+              </a:lnSpc>
+            </a:pPr>
+            <a:r>
+              <a:rPr sz="3200" b="1" i="0">
+                <a:solidFill>
+                  <a:srgbClr val="FFFFFF"/>
+                </a:solidFill>
+                <a:latin typeface="Meiryo"/>
+              </a:rPr>
+              <a:t>2</a:t>
+            </a:r>
+          </a:p>
+        </p:txBody>
+      </p:sp>
+      <p:sp>
+        <p:nvSpPr>
+          <p:cNvPr id="25" name="TextBox 24"/>
+          <p:cNvSpPr txBox="1"/>
+          <p:nvPr/>
+        </p:nvSpPr>
+        <p:spPr>
+          <a:xfrm>
+            <a:off x="1417320" y="3291840"/>
+            <a:ext cx="1874519" cy="1490472"/>
+          </a:xfrm>
+          <a:prstGeom prst="rect">
+            <a:avLst/>
+          </a:prstGeom>
+          <a:noFill/>
+        </p:spPr>
+        <p:txBody>
+          <a:bodyPr wrap="square" anchor="ctr" lIns="25400" rIns="25400" tIns="12700" bIns="12700">
+            <a:spAutoFit/>
+          </a:bodyPr>
+          <a:lstStyle/>
+          <a:p>
+            <a:pPr algn="l">
+              <a:lnSpc>
+                <a:spcPct val="105000"/>
+              </a:lnSpc>
+            </a:pPr>
+            <a:r>
+              <a:rPr sz="1350" b="1" i="0">
+                <a:solidFill>
+                  <a:srgbClr val="FFFFFF"/>
+                </a:solidFill>
+                <a:latin typeface="Meiryo"/>
+              </a:rPr>
+              <a:t>構築の進め方</a:t>
+            </a:r>
+          </a:p>
+        </p:txBody>
+      </p:sp>
+      <p:sp>
+        <p:nvSpPr>
+          <p:cNvPr id="26" name="Rectangle 25"/>
+          <p:cNvSpPr/>
+          <p:nvPr/>
+        </p:nvSpPr>
+        <p:spPr>
+          <a:xfrm>
+            <a:off x="3611880" y="3456432"/>
+            <a:ext cx="91440" cy="91440"/>
+          </a:xfrm>
+          <a:prstGeom prst="rect">
+            <a:avLst/>
+          </a:prstGeom>
+          <a:solidFill>
+            <a:srgbClr val="1F385C"/>
+          </a:solidFill>
+          <a:ln>
+            <a:noFill/>
+          </a:ln>
+          <a:effectLst/>
+        </p:spPr>
+        <p:style>
+          <a:lnRef idx="1">
+            <a:schemeClr val="accent1"/>
+          </a:lnRef>
+          <a:fillRef idx="3">
+            <a:schemeClr val="accent1"/>
+          </a:fillRef>
+          <a:effectRef idx="2">
+            <a:schemeClr val="accent1"/>
+          </a:effectRef>
+          <a:fontRef idx="minor">
+            <a:schemeClr val="lt1"/>
+          </a:fontRef>
+        </p:style>
+        <p:txBody>
+          <a:bodyPr rtlCol="0" anchor="ctr"/>
+          <a:lstStyle/>
+          <a:p>
+            <a:pPr algn="ctr"/>
+          </a:p>
+        </p:txBody>
+      </p:sp>
+      <p:sp>
+        <p:nvSpPr>
+          <p:cNvPr id="27" name="TextBox 26"/>
+          <p:cNvSpPr txBox="1"/>
+          <p:nvPr/>
+        </p:nvSpPr>
+        <p:spPr>
+          <a:xfrm>
+            <a:off x="3794760" y="3374136"/>
+            <a:ext cx="7818120" cy="292608"/>
+          </a:xfrm>
+          <a:prstGeom prst="rect">
+            <a:avLst/>
+          </a:prstGeom>
+          <a:noFill/>
+        </p:spPr>
+        <p:txBody>
+          <a:bodyPr wrap="square" anchor="t" lIns="25400" rIns="25400" tIns="12700" bIns="12700">
+            <a:spAutoFit/>
+          </a:bodyPr>
+          <a:lstStyle/>
+          <a:p>
+            <a:pPr algn="l">
+              <a:lnSpc>
+                <a:spcPct val="100000"/>
+              </a:lnSpc>
+            </a:pPr>
+            <a:r>
+              <a:rPr sz="980" b="0" i="0">
+                <a:solidFill>
+                  <a:srgbClr val="252A31"/>
+                </a:solidFill>
+                <a:latin typeface="Meiryo"/>
+              </a:rPr>
+              <a:t>開発の基本フォーマット・手順、8〜9月スケジュールの提示　… T1・T5</a:t>
+            </a:r>
+          </a:p>
+        </p:txBody>
+      </p:sp>
+      <p:sp>
+        <p:nvSpPr>
+          <p:cNvPr id="28" name="Rectangle 27"/>
+          <p:cNvSpPr/>
+          <p:nvPr/>
+        </p:nvSpPr>
+        <p:spPr>
+          <a:xfrm>
+            <a:off x="3611880" y="3739896"/>
+            <a:ext cx="91440" cy="91440"/>
+          </a:xfrm>
+          <a:prstGeom prst="rect">
+            <a:avLst/>
+          </a:prstGeom>
+          <a:solidFill>
+            <a:srgbClr val="1F385C"/>
+          </a:solidFill>
+          <a:ln>
+            <a:noFill/>
+          </a:ln>
+          <a:effectLst/>
+        </p:spPr>
+        <p:style>
+          <a:lnRef idx="1">
+            <a:schemeClr val="accent1"/>
+          </a:lnRef>
+          <a:fillRef idx="3">
+            <a:schemeClr val="accent1"/>
+          </a:fillRef>
+          <a:effectRef idx="2">
+            <a:schemeClr val="accent1"/>
+          </a:effectRef>
+          <a:fontRef idx="minor">
+            <a:schemeClr val="lt1"/>
+          </a:fontRef>
+        </p:style>
+        <p:txBody>
+          <a:bodyPr rtlCol="0" anchor="ctr"/>
+          <a:lstStyle/>
+          <a:p>
+            <a:pPr algn="ctr"/>
+          </a:p>
+        </p:txBody>
+      </p:sp>
+      <p:sp>
+        <p:nvSpPr>
+          <p:cNvPr id="29" name="TextBox 28"/>
+          <p:cNvSpPr txBox="1"/>
+          <p:nvPr/>
+        </p:nvSpPr>
+        <p:spPr>
+          <a:xfrm>
+            <a:off x="3794760" y="3657600"/>
+            <a:ext cx="7818120" cy="292608"/>
+          </a:xfrm>
+          <a:prstGeom prst="rect">
+            <a:avLst/>
+          </a:prstGeom>
+          <a:noFill/>
+        </p:spPr>
+        <p:txBody>
+          <a:bodyPr wrap="square" anchor="t" lIns="25400" rIns="25400" tIns="12700" bIns="12700">
+            <a:spAutoFit/>
+          </a:bodyPr>
+          <a:lstStyle/>
+          <a:p>
+            <a:pPr algn="l">
+              <a:lnSpc>
+                <a:spcPct val="100000"/>
+              </a:lnSpc>
+            </a:pPr>
+            <a:r>
+              <a:rPr sz="980" b="0" i="0">
+                <a:solidFill>
+                  <a:srgbClr val="252A31"/>
+                </a:solidFill>
+                <a:latin typeface="Meiryo"/>
+              </a:rPr>
+              <a:t>設計相談の型／プロンプト見本の提供　… T1・T2</a:t>
+            </a:r>
+          </a:p>
+        </p:txBody>
+      </p:sp>
+      <p:sp>
+        <p:nvSpPr>
+          <p:cNvPr id="30" name="Rectangle 29"/>
+          <p:cNvSpPr/>
+          <p:nvPr/>
+        </p:nvSpPr>
+        <p:spPr>
+          <a:xfrm>
+            <a:off x="3611880" y="4023360"/>
+            <a:ext cx="91440" cy="91440"/>
+          </a:xfrm>
+          <a:prstGeom prst="rect">
+            <a:avLst/>
+          </a:prstGeom>
+          <a:solidFill>
+            <a:srgbClr val="1F385C"/>
+          </a:solidFill>
+          <a:ln>
+            <a:noFill/>
+          </a:ln>
+          <a:effectLst/>
+        </p:spPr>
+        <p:style>
+          <a:lnRef idx="1">
+            <a:schemeClr val="accent1"/>
+          </a:lnRef>
+          <a:fillRef idx="3">
+            <a:schemeClr val="accent1"/>
+          </a:fillRef>
+          <a:effectRef idx="2">
+            <a:schemeClr val="accent1"/>
+          </a:effectRef>
+          <a:fontRef idx="minor">
+            <a:schemeClr val="lt1"/>
+          </a:fontRef>
+        </p:style>
+        <p:txBody>
+          <a:bodyPr rtlCol="0" anchor="ctr"/>
+          <a:lstStyle/>
+          <a:p>
+            <a:pPr algn="ctr"/>
+          </a:p>
+        </p:txBody>
+      </p:sp>
+      <p:sp>
+        <p:nvSpPr>
+          <p:cNvPr id="31" name="TextBox 30"/>
+          <p:cNvSpPr txBox="1"/>
+          <p:nvPr/>
+        </p:nvSpPr>
+        <p:spPr>
+          <a:xfrm>
+            <a:off x="3794760" y="3941064"/>
+            <a:ext cx="7818120" cy="292608"/>
+          </a:xfrm>
+          <a:prstGeom prst="rect">
+            <a:avLst/>
+          </a:prstGeom>
+          <a:noFill/>
+        </p:spPr>
+        <p:txBody>
+          <a:bodyPr wrap="square" anchor="t" lIns="25400" rIns="25400" tIns="12700" bIns="12700">
+            <a:spAutoFit/>
+          </a:bodyPr>
+          <a:lstStyle/>
+          <a:p>
+            <a:pPr algn="l">
+              <a:lnSpc>
+                <a:spcPct val="100000"/>
+              </a:lnSpc>
+            </a:pPr>
+            <a:r>
+              <a:rPr sz="980" b="0" i="0">
+                <a:solidFill>
+                  <a:srgbClr val="252A31"/>
+                </a:solidFill>
+                <a:latin typeface="Meiryo"/>
+              </a:rPr>
+              <a:t>Copilotの回答は鵜呑みにせず、根拠提示・実検証で精度確認　… T10</a:t>
+            </a:r>
+          </a:p>
+        </p:txBody>
+      </p:sp>
+      <p:sp>
+        <p:nvSpPr>
+          <p:cNvPr id="32" name="TextBox 31"/>
+          <p:cNvSpPr txBox="1"/>
+          <p:nvPr/>
+        </p:nvSpPr>
+        <p:spPr>
+          <a:xfrm>
+            <a:off x="3611880" y="4480560"/>
+            <a:ext cx="7863840" cy="274320"/>
+          </a:xfrm>
+          <a:prstGeom prst="rect">
+            <a:avLst/>
+          </a:prstGeom>
+          <a:noFill/>
+        </p:spPr>
+        <p:txBody>
+          <a:bodyPr wrap="square" anchor="t" lIns="25400" rIns="25400" tIns="12700" bIns="12700">
+            <a:spAutoFit/>
+          </a:bodyPr>
+          <a:lstStyle/>
+          <a:p>
+            <a:pPr algn="l">
+              <a:lnSpc>
+                <a:spcPct val="100000"/>
+              </a:lnSpc>
+            </a:pPr>
+            <a:r>
+              <a:rPr sz="950" b="1" i="0">
+                <a:solidFill>
+                  <a:srgbClr val="1F385C"/>
+                </a:solidFill>
+                <a:latin typeface="Meiryo"/>
+              </a:rPr>
+              <a:t>▶ 事務局：進め方の型・スケジュール・プロンプト見本を配布。</a:t>
+            </a:r>
+          </a:p>
+        </p:txBody>
+      </p:sp>
+      <p:sp>
+        <p:nvSpPr>
+          <p:cNvPr id="33" name="Rectangle 32"/>
+          <p:cNvSpPr/>
+          <p:nvPr/>
+        </p:nvSpPr>
+        <p:spPr>
+          <a:xfrm>
+            <a:off x="502920" y="4937760"/>
+            <a:ext cx="11201400" cy="1490472"/>
+          </a:xfrm>
+          <a:prstGeom prst="rect">
+            <a:avLst/>
+          </a:prstGeom>
+          <a:solidFill>
+            <a:srgbClr val="F2F4F7"/>
+          </a:solidFill>
+          <a:ln>
+            <a:noFill/>
+          </a:ln>
+          <a:effectLst/>
+        </p:spPr>
+        <p:style>
+          <a:lnRef idx="1">
+            <a:schemeClr val="accent1"/>
+          </a:lnRef>
+          <a:fillRef idx="3">
+            <a:schemeClr val="accent1"/>
+          </a:fillRef>
+          <a:effectRef idx="2">
+            <a:schemeClr val="accent1"/>
+          </a:effectRef>
+          <a:fontRef idx="minor">
+            <a:schemeClr val="lt1"/>
+          </a:fontRef>
+        </p:style>
+        <p:txBody>
+          <a:bodyPr rtlCol="0" anchor="ctr"/>
+          <a:lstStyle/>
+          <a:p>
+            <a:pPr algn="ctr"/>
+          </a:p>
+        </p:txBody>
+      </p:sp>
+      <p:sp>
+        <p:nvSpPr>
+          <p:cNvPr id="34" name="Rectangle 33"/>
+          <p:cNvSpPr/>
+          <p:nvPr/>
+        </p:nvSpPr>
+        <p:spPr>
+          <a:xfrm>
+            <a:off x="502920" y="4937760"/>
+            <a:ext cx="2880360" cy="1490472"/>
+          </a:xfrm>
+          <a:prstGeom prst="rect">
+            <a:avLst/>
+          </a:prstGeom>
+          <a:solidFill>
+            <a:srgbClr val="2E8B9E"/>
+          </a:solidFill>
+          <a:ln>
+            <a:noFill/>
+          </a:ln>
+          <a:effectLst/>
+        </p:spPr>
+        <p:style>
+          <a:lnRef idx="1">
+            <a:schemeClr val="accent1"/>
+          </a:lnRef>
+          <a:fillRef idx="3">
+            <a:schemeClr val="accent1"/>
+          </a:fillRef>
+          <a:effectRef idx="2">
+            <a:schemeClr val="accent1"/>
+          </a:effectRef>
+          <a:fontRef idx="minor">
+            <a:schemeClr val="lt1"/>
+          </a:fontRef>
+        </p:style>
+        <p:txBody>
+          <a:bodyPr rtlCol="0" anchor="ctr"/>
+          <a:lstStyle/>
+          <a:p>
+            <a:pPr algn="ctr"/>
+          </a:p>
+        </p:txBody>
+      </p:sp>
+      <p:sp>
+        <p:nvSpPr>
+          <p:cNvPr id="35" name="TextBox 34"/>
+          <p:cNvSpPr txBox="1"/>
+          <p:nvPr/>
+        </p:nvSpPr>
+        <p:spPr>
+          <a:xfrm>
+            <a:off x="640080" y="4937760"/>
+            <a:ext cx="777240" cy="1490472"/>
+          </a:xfrm>
+          <a:prstGeom prst="rect">
+            <a:avLst/>
+          </a:prstGeom>
+          <a:noFill/>
+        </p:spPr>
+        <p:txBody>
+          <a:bodyPr wrap="square" anchor="ctr" lIns="25400" rIns="25400" tIns="12700" bIns="12700">
+            <a:spAutoFit/>
+          </a:bodyPr>
+          <a:lstStyle/>
+          <a:p>
+            <a:pPr algn="ctr">
+              <a:lnSpc>
+                <a:spcPct val="100000"/>
+              </a:lnSpc>
+            </a:pPr>
+            <a:r>
+              <a:rPr sz="3200" b="1" i="0">
+                <a:solidFill>
+                  <a:srgbClr val="FFFFFF"/>
+                </a:solidFill>
+                <a:latin typeface="Meiryo"/>
+              </a:rPr>
+              <a:t>3</a:t>
+            </a:r>
+          </a:p>
+        </p:txBody>
+      </p:sp>
+      <p:sp>
+        <p:nvSpPr>
+          <p:cNvPr id="36" name="TextBox 35"/>
+          <p:cNvSpPr txBox="1"/>
+          <p:nvPr/>
+        </p:nvSpPr>
+        <p:spPr>
+          <a:xfrm>
+            <a:off x="1417320" y="4937760"/>
+            <a:ext cx="1874519" cy="1490472"/>
+          </a:xfrm>
+          <a:prstGeom prst="rect">
+            <a:avLst/>
+          </a:prstGeom>
+          <a:noFill/>
+        </p:spPr>
+        <p:txBody>
+          <a:bodyPr wrap="square" anchor="ctr" lIns="25400" rIns="25400" tIns="12700" bIns="12700">
+            <a:spAutoFit/>
+          </a:bodyPr>
+          <a:lstStyle/>
+          <a:p>
+            <a:pPr algn="l">
+              <a:lnSpc>
+                <a:spcPct val="105000"/>
+              </a:lnSpc>
+            </a:pPr>
+            <a:r>
+              <a:rPr sz="1350" b="1" i="0">
+                <a:solidFill>
+                  <a:srgbClr val="FFFFFF"/>
+                </a:solidFill>
+                <a:latin typeface="Meiryo"/>
+              </a:rPr>
+              <a:t>展開・運用（10月以降）</a:t>
+            </a:r>
+          </a:p>
+        </p:txBody>
+      </p:sp>
+      <p:sp>
+        <p:nvSpPr>
+          <p:cNvPr id="37" name="Rectangle 36"/>
+          <p:cNvSpPr/>
+          <p:nvPr/>
+        </p:nvSpPr>
+        <p:spPr>
+          <a:xfrm>
+            <a:off x="3611880" y="5102352"/>
+            <a:ext cx="91440" cy="91440"/>
+          </a:xfrm>
+          <a:prstGeom prst="rect">
+            <a:avLst/>
+          </a:prstGeom>
+          <a:solidFill>
+            <a:srgbClr val="2E8B9E"/>
+          </a:solidFill>
+          <a:ln>
+            <a:noFill/>
+          </a:ln>
+          <a:effectLst/>
+        </p:spPr>
+        <p:style>
+          <a:lnRef idx="1">
+            <a:schemeClr val="accent1"/>
+          </a:lnRef>
+          <a:fillRef idx="3">
+            <a:schemeClr val="accent1"/>
+          </a:fillRef>
+          <a:effectRef idx="2">
+            <a:schemeClr val="accent1"/>
+          </a:effectRef>
+          <a:fontRef idx="minor">
+            <a:schemeClr val="lt1"/>
+          </a:fontRef>
+        </p:style>
+        <p:txBody>
+          <a:bodyPr rtlCol="0" anchor="ctr"/>
+          <a:lstStyle/>
+          <a:p>
+            <a:pPr algn="ctr"/>
+          </a:p>
+        </p:txBody>
+      </p:sp>
+      <p:sp>
+        <p:nvSpPr>
+          <p:cNvPr id="38" name="TextBox 37"/>
+          <p:cNvSpPr txBox="1"/>
+          <p:nvPr/>
+        </p:nvSpPr>
+        <p:spPr>
+          <a:xfrm>
+            <a:off x="3794760" y="5020056"/>
+            <a:ext cx="7818120" cy="292608"/>
+          </a:xfrm>
+          <a:prstGeom prst="rect">
+            <a:avLst/>
+          </a:prstGeom>
+          <a:noFill/>
+        </p:spPr>
+        <p:txBody>
+          <a:bodyPr wrap="square" anchor="t" lIns="25400" rIns="25400" tIns="12700" bIns="12700">
+            <a:spAutoFit/>
+          </a:bodyPr>
+          <a:lstStyle/>
+          <a:p>
+            <a:pPr algn="l">
+              <a:lnSpc>
+                <a:spcPct val="100000"/>
+              </a:lnSpc>
+            </a:pPr>
+            <a:r>
+              <a:rPr sz="980" b="0" i="0">
+                <a:solidFill>
+                  <a:srgbClr val="252A31"/>
+                </a:solidFill>
+                <a:latin typeface="Meiryo"/>
+              </a:rPr>
+              <a:t>8月デモは「一本通し」でスコープを絞る／効果の見極め　… T4・T5</a:t>
+            </a:r>
+          </a:p>
+        </p:txBody>
+      </p:sp>
+      <p:sp>
+        <p:nvSpPr>
+          <p:cNvPr id="39" name="Rectangle 38"/>
+          <p:cNvSpPr/>
+          <p:nvPr/>
+        </p:nvSpPr>
+        <p:spPr>
+          <a:xfrm>
+            <a:off x="3611880" y="5385816"/>
+            <a:ext cx="91440" cy="91440"/>
+          </a:xfrm>
+          <a:prstGeom prst="rect">
+            <a:avLst/>
+          </a:prstGeom>
+          <a:solidFill>
+            <a:srgbClr val="2E8B9E"/>
+          </a:solidFill>
+          <a:ln>
+            <a:noFill/>
+          </a:ln>
+          <a:effectLst/>
+        </p:spPr>
+        <p:style>
+          <a:lnRef idx="1">
+            <a:schemeClr val="accent1"/>
+          </a:lnRef>
+          <a:fillRef idx="3">
+            <a:schemeClr val="accent1"/>
+          </a:fillRef>
+          <a:effectRef idx="2">
+            <a:schemeClr val="accent1"/>
+          </a:effectRef>
+          <a:fontRef idx="minor">
+            <a:schemeClr val="lt1"/>
+          </a:fontRef>
+        </p:style>
+        <p:txBody>
+          <a:bodyPr rtlCol="0" anchor="ctr"/>
+          <a:lstStyle/>
+          <a:p>
+            <a:pPr algn="ctr"/>
+          </a:p>
+        </p:txBody>
+      </p:sp>
+      <p:sp>
+        <p:nvSpPr>
+          <p:cNvPr id="40" name="TextBox 39"/>
+          <p:cNvSpPr txBox="1"/>
+          <p:nvPr/>
+        </p:nvSpPr>
+        <p:spPr>
+          <a:xfrm>
+            <a:off x="3794760" y="5303520"/>
+            <a:ext cx="7818120" cy="292608"/>
+          </a:xfrm>
+          <a:prstGeom prst="rect">
+            <a:avLst/>
+          </a:prstGeom>
+          <a:noFill/>
+        </p:spPr>
+        <p:txBody>
+          <a:bodyPr wrap="square" anchor="t" lIns="25400" rIns="25400" tIns="12700" bIns="12700">
+            <a:spAutoFit/>
+          </a:bodyPr>
+          <a:lstStyle/>
+          <a:p>
+            <a:pPr algn="l">
+              <a:lnSpc>
+                <a:spcPct val="100000"/>
+              </a:lnSpc>
+            </a:pPr>
+            <a:r>
+              <a:rPr sz="980" b="0" i="0">
+                <a:solidFill>
+                  <a:srgbClr val="252A31"/>
+                </a:solidFill>
+                <a:latin typeface="Meiryo"/>
+              </a:rPr>
+              <a:t>手順書・利用ルールの整備（項目出し・全量把握）と更新に伴う運用保守　… T5・T11</a:t>
+            </a:r>
+          </a:p>
+        </p:txBody>
+      </p:sp>
+      <p:sp>
+        <p:nvSpPr>
+          <p:cNvPr id="41" name="Rectangle 40"/>
+          <p:cNvSpPr/>
+          <p:nvPr/>
+        </p:nvSpPr>
+        <p:spPr>
+          <a:xfrm>
+            <a:off x="3611880" y="5669280"/>
+            <a:ext cx="91440" cy="91440"/>
+          </a:xfrm>
+          <a:prstGeom prst="rect">
+            <a:avLst/>
+          </a:prstGeom>
+          <a:solidFill>
+            <a:srgbClr val="2E8B9E"/>
+          </a:solidFill>
+          <a:ln>
+            <a:noFill/>
+          </a:ln>
+          <a:effectLst/>
+        </p:spPr>
+        <p:style>
+          <a:lnRef idx="1">
+            <a:schemeClr val="accent1"/>
+          </a:lnRef>
+          <a:fillRef idx="3">
+            <a:schemeClr val="accent1"/>
+          </a:fillRef>
+          <a:effectRef idx="2">
+            <a:schemeClr val="accent1"/>
+          </a:effectRef>
+          <a:fontRef idx="minor">
+            <a:schemeClr val="lt1"/>
+          </a:fontRef>
+        </p:style>
+        <p:txBody>
+          <a:bodyPr rtlCol="0" anchor="ctr"/>
+          <a:lstStyle/>
+          <a:p>
+            <a:pPr algn="ctr"/>
+          </a:p>
+        </p:txBody>
+      </p:sp>
+      <p:sp>
+        <p:nvSpPr>
+          <p:cNvPr id="42" name="TextBox 41"/>
+          <p:cNvSpPr txBox="1"/>
+          <p:nvPr/>
+        </p:nvSpPr>
+        <p:spPr>
+          <a:xfrm>
+            <a:off x="3794760" y="5586984"/>
+            <a:ext cx="7818120" cy="292608"/>
+          </a:xfrm>
+          <a:prstGeom prst="rect">
+            <a:avLst/>
+          </a:prstGeom>
+          <a:noFill/>
+        </p:spPr>
+        <p:txBody>
+          <a:bodyPr wrap="square" anchor="t" lIns="25400" rIns="25400" tIns="12700" bIns="12700">
+            <a:spAutoFit/>
+          </a:bodyPr>
+          <a:lstStyle/>
+          <a:p>
+            <a:pPr algn="l">
+              <a:lnSpc>
+                <a:spcPct val="100000"/>
+              </a:lnSpc>
+            </a:pPr>
+            <a:r>
+              <a:rPr sz="980" b="0" i="0">
+                <a:solidFill>
+                  <a:srgbClr val="252A31"/>
+                </a:solidFill>
+                <a:latin typeface="Meiryo"/>
+              </a:rPr>
+              <a:t>メンター定例（週次/隔週）の進め方を案内　… T2・T10</a:t>
+            </a:r>
+          </a:p>
+        </p:txBody>
+      </p:sp>
+      <p:sp>
+        <p:nvSpPr>
+          <p:cNvPr id="43" name="TextBox 42"/>
+          <p:cNvSpPr txBox="1"/>
+          <p:nvPr/>
+        </p:nvSpPr>
+        <p:spPr>
+          <a:xfrm>
+            <a:off x="3611880" y="6126480"/>
+            <a:ext cx="7863840" cy="274320"/>
+          </a:xfrm>
+          <a:prstGeom prst="rect">
+            <a:avLst/>
+          </a:prstGeom>
+          <a:noFill/>
+        </p:spPr>
+        <p:txBody>
+          <a:bodyPr wrap="square" anchor="t" lIns="25400" rIns="25400" tIns="12700" bIns="12700">
+            <a:spAutoFit/>
+          </a:bodyPr>
+          <a:lstStyle/>
+          <a:p>
+            <a:pPr algn="l">
+              <a:lnSpc>
+                <a:spcPct val="100000"/>
+              </a:lnSpc>
+            </a:pPr>
+            <a:r>
+              <a:rPr sz="950" b="1" i="0">
+                <a:solidFill>
+                  <a:srgbClr val="2E8B9E"/>
+                </a:solidFill>
+                <a:latin typeface="Meiryo"/>
+              </a:rPr>
+              <a:t>▶ 事務局：展開・運用の枠組みとメンター定例を案内。</a:t>
             </a:r>
           </a:p>
         </p:txBody>
@@ -30754,8 +31132,8 @@
         </p:nvSpPr>
         <p:spPr>
           <a:xfrm>
-            <a:off x="502920" y="1234440"/>
-            <a:ext cx="11201400" cy="1051560"/>
+            <a:off x="502920" y="1280160"/>
+            <a:ext cx="11201400" cy="777240"/>
           </a:xfrm>
           <a:prstGeom prst="rect">
             <a:avLst/>
@@ -30798,8 +31176,8 @@
         </p:nvSpPr>
         <p:spPr>
           <a:xfrm>
-            <a:off x="822960" y="1371600"/>
-            <a:ext cx="10607040" cy="777240"/>
+            <a:off x="822960" y="1325880"/>
+            <a:ext cx="10607040" cy="685800"/>
           </a:xfrm>
           <a:prstGeom prst="rect">
             <a:avLst/>
@@ -30814,17 +31192,17 @@
           <a:p>
             <a:pPr algn="l">
               <a:lnSpc>
-                <a:spcPct val="118000"/>
+                <a:spcPct val="100000"/>
               </a:lnSpc>
             </a:pPr>
             <a:r>
-              <a:rPr sz="1350" b="1" i="0">
+              <a:rPr sz="1400" b="1" i="0">
                 <a:solidFill>
                   <a:srgbClr val="FFFFFF"/>
                 </a:solidFill>
                 <a:latin typeface="Meiryo"/>
               </a:rPr>
-              <a:t>第1回→第2回で「未集約」チームは解消し、各チームが構築フェーズの具体論点へ移行。一方、外部Web参照・M365外連携・ファイル格納場所など、実装前に事務局判断が必要な論点が明確化した。</a:t>
+              <a:t>全チームが企画書提出を経て構築フェーズへ移行。大半は10月発表に向け順調で、要フォローはT4のみ。</a:t>
             </a:r>
           </a:p>
         </p:txBody>
@@ -30837,8 +31215,8 @@
         </p:nvSpPr>
         <p:spPr>
           <a:xfrm>
-            <a:off x="502920" y="2542032"/>
-            <a:ext cx="3611880" cy="2423160"/>
+            <a:off x="502920" y="2331720"/>
+            <a:ext cx="2743200" cy="1783080"/>
           </a:xfrm>
           <a:prstGeom prst="rect">
             <a:avLst/>
@@ -30881,8 +31259,8 @@
         </p:nvSpPr>
         <p:spPr>
           <a:xfrm>
-            <a:off x="502920" y="2542032"/>
-            <a:ext cx="3611880" cy="502920"/>
+            <a:off x="502920" y="2331720"/>
+            <a:ext cx="2743200" cy="457200"/>
           </a:xfrm>
           <a:prstGeom prst="rect">
             <a:avLst/>
@@ -30925,8 +31303,8 @@
         </p:nvSpPr>
         <p:spPr>
           <a:xfrm>
-            <a:off x="704088" y="2615184"/>
-            <a:ext cx="3209544" cy="365760"/>
+            <a:off x="502920" y="2386584"/>
+            <a:ext cx="2743200" cy="365760"/>
           </a:xfrm>
           <a:prstGeom prst="rect">
             <a:avLst/>
@@ -30939,7 +31317,7 @@
           </a:bodyPr>
           <a:lstStyle/>
           <a:p>
-            <a:pPr algn="l">
+            <a:pPr algn="ctr">
               <a:lnSpc>
                 <a:spcPct val="100000"/>
               </a:lnSpc>
@@ -30951,27 +31329,144 @@
                 </a:solidFill>
                 <a:latin typeface="Meiryo"/>
               </a:rPr>
-              <a:t>先行・順調なチーム</a:t>
-            </a:r>
-          </a:p>
-        </p:txBody>
-      </p:sp>
-      <p:sp>
-        <p:nvSpPr>
-          <p:cNvPr id="17" name="Rectangle 16"/>
+              <a:t>◎ 先行</a:t>
+            </a:r>
+          </a:p>
+        </p:txBody>
+      </p:sp>
+      <p:sp>
+        <p:nvSpPr>
+          <p:cNvPr id="17" name="TextBox 16"/>
+          <p:cNvSpPr txBox="1"/>
+          <p:nvPr/>
+        </p:nvSpPr>
+        <p:spPr>
+          <a:xfrm>
+            <a:off x="502920" y="2898648"/>
+            <a:ext cx="2743200" cy="457200"/>
+          </a:xfrm>
+          <a:prstGeom prst="rect">
+            <a:avLst/>
+          </a:prstGeom>
+          <a:noFill/>
+        </p:spPr>
+        <p:txBody>
+          <a:bodyPr wrap="square" anchor="t" lIns="25400" rIns="25400" tIns="12700" bIns="12700">
+            <a:spAutoFit/>
+          </a:bodyPr>
+          <a:lstStyle/>
+          <a:p>
+            <a:pPr algn="ctr">
+              <a:lnSpc>
+                <a:spcPct val="100000"/>
+              </a:lnSpc>
+            </a:pPr>
+            <a:r>
+              <a:rPr sz="2100" b="1" i="0">
+                <a:solidFill>
+                  <a:srgbClr val="1F385C"/>
+                </a:solidFill>
+                <a:latin typeface="Meiryo"/>
+              </a:rPr>
+              <a:t>2チーム</a:t>
+            </a:r>
+          </a:p>
+        </p:txBody>
+      </p:sp>
+      <p:sp>
+        <p:nvSpPr>
+          <p:cNvPr id="18" name="TextBox 17"/>
+          <p:cNvSpPr txBox="1"/>
+          <p:nvPr/>
+        </p:nvSpPr>
+        <p:spPr>
+          <a:xfrm>
+            <a:off x="685800" y="3374135"/>
+            <a:ext cx="2377440" cy="274320"/>
+          </a:xfrm>
+          <a:prstGeom prst="rect">
+            <a:avLst/>
+          </a:prstGeom>
+          <a:noFill/>
+        </p:spPr>
+        <p:txBody>
+          <a:bodyPr wrap="square" anchor="t" lIns="25400" rIns="25400" tIns="12700" bIns="12700">
+            <a:spAutoFit/>
+          </a:bodyPr>
+          <a:lstStyle/>
+          <a:p>
+            <a:pPr algn="ctr">
+              <a:lnSpc>
+                <a:spcPct val="100000"/>
+              </a:lnSpc>
+            </a:pPr>
+            <a:r>
+              <a:rPr sz="1000" b="1" i="0">
+                <a:solidFill>
+                  <a:srgbClr val="252A31"/>
+                </a:solidFill>
+                <a:latin typeface="Meiryo"/>
+              </a:rPr>
+              <a:t>T5・T7</a:t>
+            </a:r>
+          </a:p>
+        </p:txBody>
+      </p:sp>
+      <p:sp>
+        <p:nvSpPr>
+          <p:cNvPr id="19" name="TextBox 18"/>
+          <p:cNvSpPr txBox="1"/>
+          <p:nvPr/>
+        </p:nvSpPr>
+        <p:spPr>
+          <a:xfrm>
+            <a:off x="685800" y="3648456"/>
+            <a:ext cx="2377440" cy="411480"/>
+          </a:xfrm>
+          <a:prstGeom prst="rect">
+            <a:avLst/>
+          </a:prstGeom>
+          <a:noFill/>
+        </p:spPr>
+        <p:txBody>
+          <a:bodyPr wrap="square" anchor="t" lIns="25400" rIns="25400" tIns="12700" bIns="12700">
+            <a:spAutoFit/>
+          </a:bodyPr>
+          <a:lstStyle/>
+          <a:p>
+            <a:pPr algn="ctr">
+              <a:lnSpc>
+                <a:spcPct val="105000"/>
+              </a:lnSpc>
+            </a:pPr>
+            <a:r>
+              <a:rPr sz="900" b="0" i="0">
+                <a:solidFill>
+                  <a:srgbClr val="6B7480"/>
+                </a:solidFill>
+                <a:latin typeface="Meiryo"/>
+              </a:rPr>
+              <a:t>構成・効果まで具体化</a:t>
+            </a:r>
+          </a:p>
+        </p:txBody>
+      </p:sp>
+      <p:sp>
+        <p:nvSpPr>
+          <p:cNvPr id="20" name="Rectangle 19"/>
           <p:cNvSpPr/>
           <p:nvPr/>
         </p:nvSpPr>
         <p:spPr>
           <a:xfrm>
-            <a:off x="704088" y="3255264"/>
-            <a:ext cx="91440" cy="91440"/>
-          </a:xfrm>
-          <a:prstGeom prst="rect">
-            <a:avLst/>
-          </a:prstGeom>
-          <a:solidFill>
-            <a:srgbClr val="3F8F5B"/>
+            <a:off x="3383280" y="2331720"/>
+            <a:ext cx="4892040" cy="1783080"/>
+          </a:xfrm>
+          <a:prstGeom prst="rect">
+            <a:avLst/>
+          </a:prstGeom>
+          <a:solidFill>
+            <a:srgbClr val="F2F4F7"/>
           </a:solidFill>
           <a:ln>
             <a:noFill/>
@@ -31002,59 +31497,20 @@
       </p:sp>
       <p:sp>
         <p:nvSpPr>
-          <p:cNvPr id="18" name="TextBox 17"/>
-          <p:cNvSpPr txBox="1"/>
-          <p:nvPr/>
-        </p:nvSpPr>
-        <p:spPr>
-          <a:xfrm>
-            <a:off x="886968" y="3163824"/>
-            <a:ext cx="3063240" cy="640080"/>
-          </a:xfrm>
-          <a:prstGeom prst="rect">
-            <a:avLst/>
-          </a:prstGeom>
-          <a:noFill/>
-        </p:spPr>
-        <p:txBody>
-          <a:bodyPr wrap="square" anchor="t" lIns="25400" rIns="25400" tIns="12700" bIns="12700">
-            <a:spAutoFit/>
-          </a:bodyPr>
-          <a:lstStyle/>
-          <a:p>
-            <a:pPr algn="l">
-              <a:lnSpc>
-                <a:spcPct val="105000"/>
-              </a:lnSpc>
-            </a:pPr>
-            <a:r>
-              <a:rPr sz="1000" b="0" i="0">
-                <a:solidFill>
-                  <a:srgbClr val="252A31"/>
-                </a:solidFill>
-                <a:latin typeface="Meiryo"/>
-              </a:rPr>
-              <a:t>T5：業務フロー・効果試算・M365標準活用が具体化。8月デモ化に着手可能。</a:t>
-            </a:r>
-          </a:p>
-        </p:txBody>
-      </p:sp>
-      <p:sp>
-        <p:nvSpPr>
-          <p:cNvPr id="19" name="Rectangle 18"/>
+          <p:cNvPr id="21" name="Rectangle 20"/>
           <p:cNvSpPr/>
           <p:nvPr/>
         </p:nvSpPr>
         <p:spPr>
           <a:xfrm>
-            <a:off x="704088" y="3822192"/>
-            <a:ext cx="91440" cy="91440"/>
-          </a:xfrm>
-          <a:prstGeom prst="rect">
-            <a:avLst/>
-          </a:prstGeom>
-          <a:solidFill>
-            <a:srgbClr val="3F8F5B"/>
+            <a:off x="3383280" y="2331720"/>
+            <a:ext cx="4892040" cy="457200"/>
+          </a:xfrm>
+          <a:prstGeom prst="rect">
+            <a:avLst/>
+          </a:prstGeom>
+          <a:solidFill>
+            <a:srgbClr val="2E8B9E"/>
           </a:solidFill>
           <a:ln>
             <a:noFill/>
@@ -31085,224 +31541,14 @@
       </p:sp>
       <p:sp>
         <p:nvSpPr>
-          <p:cNvPr id="20" name="TextBox 19"/>
-          <p:cNvSpPr txBox="1"/>
-          <p:nvPr/>
-        </p:nvSpPr>
-        <p:spPr>
-          <a:xfrm>
-            <a:off x="886968" y="3730752"/>
-            <a:ext cx="3063240" cy="640080"/>
-          </a:xfrm>
-          <a:prstGeom prst="rect">
-            <a:avLst/>
-          </a:prstGeom>
-          <a:noFill/>
-        </p:spPr>
-        <p:txBody>
-          <a:bodyPr wrap="square" anchor="t" lIns="25400" rIns="25400" tIns="12700" bIns="12700">
-            <a:spAutoFit/>
-          </a:bodyPr>
-          <a:lstStyle/>
-          <a:p>
-            <a:pPr algn="l">
-              <a:lnSpc>
-                <a:spcPct val="105000"/>
-              </a:lnSpc>
-            </a:pPr>
-            <a:r>
-              <a:rPr sz="1000" b="0" i="0">
-                <a:solidFill>
-                  <a:srgbClr val="252A31"/>
-                </a:solidFill>
-                <a:latin typeface="Meiryo"/>
-              </a:rPr>
-              <a:t>T7：固定ナレッジ＋入力ファイル照合の構成が明確。</a:t>
-            </a:r>
-          </a:p>
-        </p:txBody>
-      </p:sp>
-      <p:sp>
-        <p:nvSpPr>
-          <p:cNvPr id="21" name="Rectangle 20"/>
-          <p:cNvSpPr/>
-          <p:nvPr/>
-        </p:nvSpPr>
-        <p:spPr>
-          <a:xfrm>
-            <a:off x="704088" y="4389120"/>
-            <a:ext cx="91440" cy="91440"/>
-          </a:xfrm>
-          <a:prstGeom prst="rect">
-            <a:avLst/>
-          </a:prstGeom>
-          <a:solidFill>
-            <a:srgbClr val="3F8F5B"/>
-          </a:solidFill>
-          <a:ln>
-            <a:noFill/>
-          </a:ln>
-          <a:effectLst/>
-        </p:spPr>
-        <p:style>
-          <a:lnRef idx="1">
-            <a:schemeClr val="accent1"/>
-          </a:lnRef>
-          <a:fillRef idx="3">
-            <a:schemeClr val="accent1"/>
-          </a:fillRef>
-          <a:effectRef idx="2">
-            <a:schemeClr val="accent1"/>
-          </a:effectRef>
-          <a:fontRef idx="minor">
-            <a:schemeClr val="lt1"/>
-          </a:fontRef>
-        </p:style>
-        <p:txBody>
-          <a:bodyPr rtlCol="0" anchor="ctr"/>
-          <a:lstStyle/>
-          <a:p>
-            <a:pPr algn="ctr"/>
-          </a:p>
-        </p:txBody>
-      </p:sp>
-      <p:sp>
-        <p:nvSpPr>
           <p:cNvPr id="22" name="TextBox 21"/>
           <p:cNvSpPr txBox="1"/>
           <p:nvPr/>
         </p:nvSpPr>
         <p:spPr>
           <a:xfrm>
-            <a:off x="886968" y="4297680"/>
-            <a:ext cx="3063240" cy="640080"/>
-          </a:xfrm>
-          <a:prstGeom prst="rect">
-            <a:avLst/>
-          </a:prstGeom>
-          <a:noFill/>
-        </p:spPr>
-        <p:txBody>
-          <a:bodyPr wrap="square" anchor="t" lIns="25400" rIns="25400" tIns="12700" bIns="12700">
-            <a:spAutoFit/>
-          </a:bodyPr>
-          <a:lstStyle/>
-          <a:p>
-            <a:pPr algn="l">
-              <a:lnSpc>
-                <a:spcPct val="105000"/>
-              </a:lnSpc>
-            </a:pPr>
-            <a:r>
-              <a:rPr sz="1000" b="0" i="0">
-                <a:solidFill>
-                  <a:srgbClr val="252A31"/>
-                </a:solidFill>
-                <a:latin typeface="Meiryo"/>
-              </a:rPr>
-              <a:t>T10・11：構成・前提は見えており、権限・運用項目の洗い出しが次フェーズ。</a:t>
-            </a:r>
-          </a:p>
-        </p:txBody>
-      </p:sp>
-      <p:sp>
-        <p:nvSpPr>
-          <p:cNvPr id="23" name="Rectangle 22"/>
-          <p:cNvSpPr/>
-          <p:nvPr/>
-        </p:nvSpPr>
-        <p:spPr>
-          <a:xfrm>
-            <a:off x="4297680" y="2542032"/>
-            <a:ext cx="3611880" cy="2423160"/>
-          </a:xfrm>
-          <a:prstGeom prst="rect">
-            <a:avLst/>
-          </a:prstGeom>
-          <a:solidFill>
-            <a:srgbClr val="F2F4F7"/>
-          </a:solidFill>
-          <a:ln>
-            <a:noFill/>
-          </a:ln>
-          <a:effectLst/>
-        </p:spPr>
-        <p:style>
-          <a:lnRef idx="1">
-            <a:schemeClr val="accent1"/>
-          </a:lnRef>
-          <a:fillRef idx="3">
-            <a:schemeClr val="accent1"/>
-          </a:fillRef>
-          <a:effectRef idx="2">
-            <a:schemeClr val="accent1"/>
-          </a:effectRef>
-          <a:fontRef idx="minor">
-            <a:schemeClr val="lt1"/>
-          </a:fontRef>
-        </p:style>
-        <p:txBody>
-          <a:bodyPr rtlCol="0" anchor="ctr"/>
-          <a:lstStyle/>
-          <a:p>
-            <a:pPr algn="ctr"/>
-          </a:p>
-        </p:txBody>
-      </p:sp>
-      <p:sp>
-        <p:nvSpPr>
-          <p:cNvPr id="24" name="Rectangle 23"/>
-          <p:cNvSpPr/>
-          <p:nvPr/>
-        </p:nvSpPr>
-        <p:spPr>
-          <a:xfrm>
-            <a:off x="4297680" y="2542032"/>
-            <a:ext cx="3611880" cy="502920"/>
-          </a:xfrm>
-          <a:prstGeom prst="rect">
-            <a:avLst/>
-          </a:prstGeom>
-          <a:solidFill>
-            <a:srgbClr val="C98A1B"/>
-          </a:solidFill>
-          <a:ln>
-            <a:noFill/>
-          </a:ln>
-          <a:effectLst/>
-        </p:spPr>
-        <p:style>
-          <a:lnRef idx="1">
-            <a:schemeClr val="accent1"/>
-          </a:lnRef>
-          <a:fillRef idx="3">
-            <a:schemeClr val="accent1"/>
-          </a:fillRef>
-          <a:effectRef idx="2">
-            <a:schemeClr val="accent1"/>
-          </a:effectRef>
-          <a:fontRef idx="minor">
-            <a:schemeClr val="lt1"/>
-          </a:fontRef>
-        </p:style>
-        <p:txBody>
-          <a:bodyPr rtlCol="0" anchor="ctr"/>
-          <a:lstStyle/>
-          <a:p>
-            <a:pPr algn="ctr"/>
-          </a:p>
-        </p:txBody>
-      </p:sp>
-      <p:sp>
-        <p:nvSpPr>
-          <p:cNvPr id="25" name="TextBox 24"/>
-          <p:cNvSpPr txBox="1"/>
-          <p:nvPr/>
-        </p:nvSpPr>
-        <p:spPr>
-          <a:xfrm>
-            <a:off x="4498848" y="2615184"/>
-            <a:ext cx="3209544" cy="365760"/>
+            <a:off x="3383280" y="2386584"/>
+            <a:ext cx="4892040" cy="365760"/>
           </a:xfrm>
           <a:prstGeom prst="rect">
             <a:avLst/>
@@ -31315,7 +31561,7 @@
           </a:bodyPr>
           <a:lstStyle/>
           <a:p>
-            <a:pPr algn="l">
+            <a:pPr algn="ctr">
               <a:lnSpc>
                 <a:spcPct val="100000"/>
               </a:lnSpc>
@@ -31327,7 +31573,140 @@
                 </a:solidFill>
                 <a:latin typeface="Meiryo"/>
               </a:rPr>
-              <a:t>留意・支援が必要なチーム</a:t>
+              <a:t>○ 概ね順調</a:t>
+            </a:r>
+          </a:p>
+        </p:txBody>
+      </p:sp>
+      <p:sp>
+        <p:nvSpPr>
+          <p:cNvPr id="23" name="TextBox 22"/>
+          <p:cNvSpPr txBox="1"/>
+          <p:nvPr/>
+        </p:nvSpPr>
+        <p:spPr>
+          <a:xfrm>
+            <a:off x="3383280" y="2898648"/>
+            <a:ext cx="4892040" cy="457200"/>
+          </a:xfrm>
+          <a:prstGeom prst="rect">
+            <a:avLst/>
+          </a:prstGeom>
+          <a:noFill/>
+        </p:spPr>
+        <p:txBody>
+          <a:bodyPr wrap="square" anchor="t" lIns="25400" rIns="25400" tIns="12700" bIns="12700">
+            <a:spAutoFit/>
+          </a:bodyPr>
+          <a:lstStyle/>
+          <a:p>
+            <a:pPr algn="ctr">
+              <a:lnSpc>
+                <a:spcPct val="100000"/>
+              </a:lnSpc>
+            </a:pPr>
+            <a:r>
+              <a:rPr sz="2100" b="1" i="0">
+                <a:solidFill>
+                  <a:srgbClr val="1F385C"/>
+                </a:solidFill>
+                <a:latin typeface="Meiryo"/>
+              </a:rPr>
+              <a:t>8チーム</a:t>
+            </a:r>
+          </a:p>
+        </p:txBody>
+      </p:sp>
+      <p:sp>
+        <p:nvSpPr>
+          <p:cNvPr id="24" name="TextBox 23"/>
+          <p:cNvSpPr txBox="1"/>
+          <p:nvPr/>
+        </p:nvSpPr>
+        <p:spPr>
+          <a:xfrm>
+            <a:off x="3566160" y="3374135"/>
+            <a:ext cx="4526280" cy="274320"/>
+          </a:xfrm>
+          <a:prstGeom prst="rect">
+            <a:avLst/>
+          </a:prstGeom>
+          <a:noFill/>
+        </p:spPr>
+        <p:txBody>
+          <a:bodyPr wrap="square" anchor="t" lIns="25400" rIns="25400" tIns="12700" bIns="12700">
+            <a:spAutoFit/>
+          </a:bodyPr>
+          <a:lstStyle/>
+          <a:p>
+            <a:pPr algn="ctr">
+              <a:lnSpc>
+                <a:spcPct val="100000"/>
+              </a:lnSpc>
+            </a:pPr>
+            <a:r>
+              <a:rPr sz="1000" b="1" i="0">
+                <a:solidFill>
+                  <a:srgbClr val="252A31"/>
+                </a:solidFill>
+                <a:latin typeface="Meiryo"/>
+              </a:rPr>
+              <a:t>T1・2・3・6・8・9・10・11</a:t>
+            </a:r>
+          </a:p>
+        </p:txBody>
+      </p:sp>
+      <p:sp>
+        <p:nvSpPr>
+          <p:cNvPr id="25" name="TextBox 24"/>
+          <p:cNvSpPr txBox="1"/>
+          <p:nvPr/>
+        </p:nvSpPr>
+        <p:spPr>
+          <a:xfrm>
+            <a:off x="3566160" y="3648456"/>
+            <a:ext cx="4526280" cy="411480"/>
+          </a:xfrm>
+          <a:prstGeom prst="rect">
+            <a:avLst/>
+          </a:prstGeom>
+          <a:noFill/>
+        </p:spPr>
+        <p:txBody>
+          <a:bodyPr wrap="square" anchor="t" lIns="25400" rIns="25400" tIns="12700" bIns="12700">
+            <a:spAutoFit/>
+          </a:bodyPr>
+          <a:lstStyle/>
+          <a:p>
+            <a:pPr algn="ctr">
+              <a:lnSpc>
+                <a:spcPct val="105000"/>
+              </a:lnSpc>
+            </a:pPr>
+            <a:r>
+              <a:rPr sz="900" b="0" i="0">
+                <a:solidFill>
+                  <a:srgbClr val="6B7480"/>
+                </a:solidFill>
+                <a:latin typeface="Meiryo"/>
+              </a:rPr>
+              <a:t>壁打ち・スコープ調整で</a:t>
+            </a:r>
+          </a:p>
+          <a:p>
+            <a:pPr algn="ctr">
+              <a:lnSpc>
+                <a:spcPct val="105000"/>
+              </a:lnSpc>
+            </a:pPr>
+            <a:r>
+              <a:rPr sz="900" b="0" i="0">
+                <a:solidFill>
+                  <a:srgbClr val="6B7480"/>
+                </a:solidFill>
+                <a:latin typeface="Meiryo"/>
+              </a:rPr>
+              <a:t>発表に間に合う見込み</a:t>
             </a:r>
           </a:p>
         </p:txBody>
@@ -31340,14 +31719,14 @@
         </p:nvSpPr>
         <p:spPr>
           <a:xfrm>
-            <a:off x="4498848" y="3255264"/>
-            <a:ext cx="91440" cy="91440"/>
-          </a:xfrm>
-          <a:prstGeom prst="rect">
-            <a:avLst/>
-          </a:prstGeom>
-          <a:solidFill>
-            <a:srgbClr val="C98A1B"/>
+            <a:off x="8458200" y="2331720"/>
+            <a:ext cx="3246120" cy="1783080"/>
+          </a:xfrm>
+          <a:prstGeom prst="rect">
+            <a:avLst/>
+          </a:prstGeom>
+          <a:solidFill>
+            <a:srgbClr val="F2F4F7"/>
           </a:solidFill>
           <a:ln>
             <a:noFill/>
@@ -31378,53 +31757,14 @@
       </p:sp>
       <p:sp>
         <p:nvSpPr>
-          <p:cNvPr id="27" name="TextBox 26"/>
-          <p:cNvSpPr txBox="1"/>
-          <p:nvPr/>
-        </p:nvSpPr>
-        <p:spPr>
-          <a:xfrm>
-            <a:off x="4681728" y="3163824"/>
-            <a:ext cx="3063240" cy="640080"/>
-          </a:xfrm>
-          <a:prstGeom prst="rect">
-            <a:avLst/>
-          </a:prstGeom>
-          <a:noFill/>
-        </p:spPr>
-        <p:txBody>
-          <a:bodyPr wrap="square" anchor="t" lIns="25400" rIns="25400" tIns="12700" bIns="12700">
-            <a:spAutoFit/>
-          </a:bodyPr>
-          <a:lstStyle/>
-          <a:p>
-            <a:pPr algn="l">
-              <a:lnSpc>
-                <a:spcPct val="105000"/>
-              </a:lnSpc>
-            </a:pPr>
-            <a:r>
-              <a:rPr sz="1000" b="0" i="0">
-                <a:solidFill>
-                  <a:srgbClr val="252A31"/>
-                </a:solidFill>
-                <a:latin typeface="Meiryo"/>
-              </a:rPr>
-              <a:t>T4：外部Web参照禁止で企画の中核が抵触し再設計中。作るものの再定義が最優先（唯一の△）。</a:t>
-            </a:r>
-          </a:p>
-        </p:txBody>
-      </p:sp>
-      <p:sp>
-        <p:nvSpPr>
-          <p:cNvPr id="28" name="Rectangle 27"/>
+          <p:cNvPr id="27" name="Rectangle 26"/>
           <p:cNvSpPr/>
           <p:nvPr/>
         </p:nvSpPr>
         <p:spPr>
           <a:xfrm>
-            <a:off x="4498848" y="3822192"/>
-            <a:ext cx="91440" cy="91440"/>
+            <a:off x="8458200" y="2331720"/>
+            <a:ext cx="3246120" cy="457200"/>
           </a:xfrm>
           <a:prstGeom prst="rect">
             <a:avLst/>
@@ -31461,224 +31801,14 @@
       </p:sp>
       <p:sp>
         <p:nvSpPr>
-          <p:cNvPr id="29" name="TextBox 28"/>
+          <p:cNvPr id="28" name="TextBox 27"/>
           <p:cNvSpPr txBox="1"/>
           <p:nvPr/>
         </p:nvSpPr>
         <p:spPr>
           <a:xfrm>
-            <a:off x="4681728" y="3730752"/>
-            <a:ext cx="3063240" cy="640080"/>
-          </a:xfrm>
-          <a:prstGeom prst="rect">
-            <a:avLst/>
-          </a:prstGeom>
-          <a:noFill/>
-        </p:spPr>
-        <p:txBody>
-          <a:bodyPr wrap="square" anchor="t" lIns="25400" rIns="25400" tIns="12700" bIns="12700">
-            <a:spAutoFit/>
-          </a:bodyPr>
-          <a:lstStyle/>
-          <a:p>
-            <a:pPr algn="l">
-              <a:lnSpc>
-                <a:spcPct val="105000"/>
-              </a:lnSpc>
-            </a:pPr>
-            <a:r>
-              <a:rPr sz="1000" b="0" i="0">
-                <a:solidFill>
-                  <a:srgbClr val="252A31"/>
-                </a:solidFill>
-                <a:latin typeface="Meiryo"/>
-              </a:rPr>
-              <a:t>T3・9：難易度・ボリュームが大。データのOK/NG整理とスコープ設定が前提（道筋はあり）。</a:t>
-            </a:r>
-          </a:p>
-        </p:txBody>
-      </p:sp>
-      <p:sp>
-        <p:nvSpPr>
-          <p:cNvPr id="30" name="Rectangle 29"/>
-          <p:cNvSpPr/>
-          <p:nvPr/>
-        </p:nvSpPr>
-        <p:spPr>
-          <a:xfrm>
-            <a:off x="4498848" y="4389120"/>
-            <a:ext cx="91440" cy="91440"/>
-          </a:xfrm>
-          <a:prstGeom prst="rect">
-            <a:avLst/>
-          </a:prstGeom>
-          <a:solidFill>
-            <a:srgbClr val="C98A1B"/>
-          </a:solidFill>
-          <a:ln>
-            <a:noFill/>
-          </a:ln>
-          <a:effectLst/>
-        </p:spPr>
-        <p:style>
-          <a:lnRef idx="1">
-            <a:schemeClr val="accent1"/>
-          </a:lnRef>
-          <a:fillRef idx="3">
-            <a:schemeClr val="accent1"/>
-          </a:fillRef>
-          <a:effectRef idx="2">
-            <a:schemeClr val="accent1"/>
-          </a:effectRef>
-          <a:fontRef idx="minor">
-            <a:schemeClr val="lt1"/>
-          </a:fontRef>
-        </p:style>
-        <p:txBody>
-          <a:bodyPr rtlCol="0" anchor="ctr"/>
-          <a:lstStyle/>
-          <a:p>
-            <a:pPr algn="ctr"/>
-          </a:p>
-        </p:txBody>
-      </p:sp>
-      <p:sp>
-        <p:nvSpPr>
-          <p:cNvPr id="31" name="TextBox 30"/>
-          <p:cNvSpPr txBox="1"/>
-          <p:nvPr/>
-        </p:nvSpPr>
-        <p:spPr>
-          <a:xfrm>
-            <a:off x="4681728" y="4297680"/>
-            <a:ext cx="3063240" cy="640080"/>
-          </a:xfrm>
-          <a:prstGeom prst="rect">
-            <a:avLst/>
-          </a:prstGeom>
-          <a:noFill/>
-        </p:spPr>
-        <p:txBody>
-          <a:bodyPr wrap="square" anchor="t" lIns="25400" rIns="25400" tIns="12700" bIns="12700">
-            <a:spAutoFit/>
-          </a:bodyPr>
-          <a:lstStyle/>
-          <a:p>
-            <a:pPr algn="l">
-              <a:lnSpc>
-                <a:spcPct val="105000"/>
-              </a:lnSpc>
-            </a:pPr>
-            <a:r>
-              <a:rPr sz="1000" b="0" i="0">
-                <a:solidFill>
-                  <a:srgbClr val="252A31"/>
-                </a:solidFill>
-                <a:latin typeface="Meiryo"/>
-              </a:rPr>
-              <a:t>T1・2・6：開発手順の型・プロンプト見本・アプリ使い分けの提供で加速。</a:t>
-            </a:r>
-          </a:p>
-        </p:txBody>
-      </p:sp>
-      <p:sp>
-        <p:nvSpPr>
-          <p:cNvPr id="32" name="Rectangle 31"/>
-          <p:cNvSpPr/>
-          <p:nvPr/>
-        </p:nvSpPr>
-        <p:spPr>
-          <a:xfrm>
-            <a:off x="8092440" y="2542032"/>
-            <a:ext cx="3611880" cy="2423160"/>
-          </a:xfrm>
-          <a:prstGeom prst="rect">
-            <a:avLst/>
-          </a:prstGeom>
-          <a:solidFill>
-            <a:srgbClr val="F2F4F7"/>
-          </a:solidFill>
-          <a:ln>
-            <a:noFill/>
-          </a:ln>
-          <a:effectLst/>
-        </p:spPr>
-        <p:style>
-          <a:lnRef idx="1">
-            <a:schemeClr val="accent1"/>
-          </a:lnRef>
-          <a:fillRef idx="3">
-            <a:schemeClr val="accent1"/>
-          </a:fillRef>
-          <a:effectRef idx="2">
-            <a:schemeClr val="accent1"/>
-          </a:effectRef>
-          <a:fontRef idx="minor">
-            <a:schemeClr val="lt1"/>
-          </a:fontRef>
-        </p:style>
-        <p:txBody>
-          <a:bodyPr rtlCol="0" anchor="ctr"/>
-          <a:lstStyle/>
-          <a:p>
-            <a:pPr algn="ctr"/>
-          </a:p>
-        </p:txBody>
-      </p:sp>
-      <p:sp>
-        <p:nvSpPr>
-          <p:cNvPr id="33" name="Rectangle 32"/>
-          <p:cNvSpPr/>
-          <p:nvPr/>
-        </p:nvSpPr>
-        <p:spPr>
-          <a:xfrm>
-            <a:off x="8092440" y="2542032"/>
-            <a:ext cx="3611880" cy="502920"/>
-          </a:xfrm>
-          <a:prstGeom prst="rect">
-            <a:avLst/>
-          </a:prstGeom>
-          <a:solidFill>
-            <a:srgbClr val="2E8B9E"/>
-          </a:solidFill>
-          <a:ln>
-            <a:noFill/>
-          </a:ln>
-          <a:effectLst/>
-        </p:spPr>
-        <p:style>
-          <a:lnRef idx="1">
-            <a:schemeClr val="accent1"/>
-          </a:lnRef>
-          <a:fillRef idx="3">
-            <a:schemeClr val="accent1"/>
-          </a:fillRef>
-          <a:effectRef idx="2">
-            <a:schemeClr val="accent1"/>
-          </a:effectRef>
-          <a:fontRef idx="minor">
-            <a:schemeClr val="lt1"/>
-          </a:fontRef>
-        </p:style>
-        <p:txBody>
-          <a:bodyPr rtlCol="0" anchor="ctr"/>
-          <a:lstStyle/>
-          <a:p>
-            <a:pPr algn="ctr"/>
-          </a:p>
-        </p:txBody>
-      </p:sp>
-      <p:sp>
-        <p:nvSpPr>
-          <p:cNvPr id="34" name="TextBox 33"/>
-          <p:cNvSpPr txBox="1"/>
-          <p:nvPr/>
-        </p:nvSpPr>
-        <p:spPr>
-          <a:xfrm>
-            <a:off x="8293608" y="2615184"/>
-            <a:ext cx="3209544" cy="365760"/>
+            <a:off x="8458200" y="2386584"/>
+            <a:ext cx="3246120" cy="365760"/>
           </a:xfrm>
           <a:prstGeom prst="rect">
             <a:avLst/>
@@ -31691,7 +31821,7 @@
           </a:bodyPr>
           <a:lstStyle/>
           <a:p>
-            <a:pPr algn="l">
+            <a:pPr algn="ctr">
               <a:lnSpc>
                 <a:spcPct val="100000"/>
               </a:lnSpc>
@@ -31703,65 +31833,21 @@
                 </a:solidFill>
                 <a:latin typeface="Meiryo"/>
               </a:rPr>
-              <a:t>事務局からの提言</a:t>
-            </a:r>
-          </a:p>
-        </p:txBody>
-      </p:sp>
-      <p:sp>
-        <p:nvSpPr>
-          <p:cNvPr id="35" name="Rectangle 34"/>
-          <p:cNvSpPr/>
-          <p:nvPr/>
-        </p:nvSpPr>
-        <p:spPr>
-          <a:xfrm>
-            <a:off x="8293608" y="3255264"/>
-            <a:ext cx="91440" cy="91440"/>
-          </a:xfrm>
-          <a:prstGeom prst="rect">
-            <a:avLst/>
-          </a:prstGeom>
-          <a:solidFill>
-            <a:srgbClr val="2E8B9E"/>
-          </a:solidFill>
-          <a:ln>
-            <a:noFill/>
-          </a:ln>
-          <a:effectLst/>
-        </p:spPr>
-        <p:style>
-          <a:lnRef idx="1">
-            <a:schemeClr val="accent1"/>
-          </a:lnRef>
-          <a:fillRef idx="3">
-            <a:schemeClr val="accent1"/>
-          </a:fillRef>
-          <a:effectRef idx="2">
-            <a:schemeClr val="accent1"/>
-          </a:effectRef>
-          <a:fontRef idx="minor">
-            <a:schemeClr val="lt1"/>
-          </a:fontRef>
-        </p:style>
-        <p:txBody>
-          <a:bodyPr rtlCol="0" anchor="ctr"/>
-          <a:lstStyle/>
-          <a:p>
-            <a:pPr algn="ctr"/>
-          </a:p>
-        </p:txBody>
-      </p:sp>
-      <p:sp>
-        <p:nvSpPr>
-          <p:cNvPr id="36" name="TextBox 35"/>
+              <a:t>△ 要フォロー</a:t>
+            </a:r>
+          </a:p>
+        </p:txBody>
+      </p:sp>
+      <p:sp>
+        <p:nvSpPr>
+          <p:cNvPr id="29" name="TextBox 28"/>
           <p:cNvSpPr txBox="1"/>
           <p:nvPr/>
         </p:nvSpPr>
         <p:spPr>
           <a:xfrm>
-            <a:off x="8476488" y="3163824"/>
-            <a:ext cx="3063240" cy="640080"/>
+            <a:off x="8458200" y="2898648"/>
+            <a:ext cx="3246120" cy="457200"/>
           </a:xfrm>
           <a:prstGeom prst="rect">
             <a:avLst/>
@@ -31774,77 +31860,72 @@
           </a:bodyPr>
           <a:lstStyle/>
           <a:p>
-            <a:pPr algn="l">
+            <a:pPr algn="ctr">
               <a:lnSpc>
-                <a:spcPct val="105000"/>
+                <a:spcPct val="100000"/>
               </a:lnSpc>
             </a:pPr>
             <a:r>
-              <a:rPr sz="1000" b="0" i="0">
+              <a:rPr sz="2100" b="1" i="0">
+                <a:solidFill>
+                  <a:srgbClr val="1F385C"/>
+                </a:solidFill>
+                <a:latin typeface="Meiryo"/>
+              </a:rPr>
+              <a:t>1チーム</a:t>
+            </a:r>
+          </a:p>
+        </p:txBody>
+      </p:sp>
+      <p:sp>
+        <p:nvSpPr>
+          <p:cNvPr id="30" name="TextBox 29"/>
+          <p:cNvSpPr txBox="1"/>
+          <p:nvPr/>
+        </p:nvSpPr>
+        <p:spPr>
+          <a:xfrm>
+            <a:off x="8641080" y="3374135"/>
+            <a:ext cx="2880360" cy="274320"/>
+          </a:xfrm>
+          <a:prstGeom prst="rect">
+            <a:avLst/>
+          </a:prstGeom>
+          <a:noFill/>
+        </p:spPr>
+        <p:txBody>
+          <a:bodyPr wrap="square" anchor="t" lIns="25400" rIns="25400" tIns="12700" bIns="12700">
+            <a:spAutoFit/>
+          </a:bodyPr>
+          <a:lstStyle/>
+          <a:p>
+            <a:pPr algn="ctr">
+              <a:lnSpc>
+                <a:spcPct val="100000"/>
+              </a:lnSpc>
+            </a:pPr>
+            <a:r>
+              <a:rPr sz="1000" b="1" i="0">
                 <a:solidFill>
                   <a:srgbClr val="252A31"/>
                 </a:solidFill>
                 <a:latin typeface="Meiryo"/>
               </a:rPr>
-              <a:t>ガバナンス判断を早めに（外部Web・M365外連携・社外秘ファイル読込）。</a:t>
-            </a:r>
-          </a:p>
-        </p:txBody>
-      </p:sp>
-      <p:sp>
-        <p:nvSpPr>
-          <p:cNvPr id="37" name="Rectangle 36"/>
-          <p:cNvSpPr/>
-          <p:nvPr/>
-        </p:nvSpPr>
-        <p:spPr>
-          <a:xfrm>
-            <a:off x="8293608" y="3822192"/>
-            <a:ext cx="91440" cy="91440"/>
-          </a:xfrm>
-          <a:prstGeom prst="rect">
-            <a:avLst/>
-          </a:prstGeom>
-          <a:solidFill>
-            <a:srgbClr val="2E8B9E"/>
-          </a:solidFill>
-          <a:ln>
-            <a:noFill/>
-          </a:ln>
-          <a:effectLst/>
-        </p:spPr>
-        <p:style>
-          <a:lnRef idx="1">
-            <a:schemeClr val="accent1"/>
-          </a:lnRef>
-          <a:fillRef idx="3">
-            <a:schemeClr val="accent1"/>
-          </a:fillRef>
-          <a:effectRef idx="2">
-            <a:schemeClr val="accent1"/>
-          </a:effectRef>
-          <a:fontRef idx="minor">
-            <a:schemeClr val="lt1"/>
-          </a:fontRef>
-        </p:style>
-        <p:txBody>
-          <a:bodyPr rtlCol="0" anchor="ctr"/>
-          <a:lstStyle/>
-          <a:p>
-            <a:pPr algn="ctr"/>
-          </a:p>
-        </p:txBody>
-      </p:sp>
-      <p:sp>
-        <p:nvSpPr>
-          <p:cNvPr id="38" name="TextBox 37"/>
+              <a:t>T4</a:t>
+            </a:r>
+          </a:p>
+        </p:txBody>
+      </p:sp>
+      <p:sp>
+        <p:nvSpPr>
+          <p:cNvPr id="31" name="TextBox 30"/>
           <p:cNvSpPr txBox="1"/>
           <p:nvPr/>
         </p:nvSpPr>
         <p:spPr>
           <a:xfrm>
-            <a:off x="8476488" y="3730752"/>
-            <a:ext cx="3063240" cy="640080"/>
+            <a:off x="8641080" y="3648456"/>
+            <a:ext cx="2880360" cy="411480"/>
           </a:xfrm>
           <a:prstGeom prst="rect">
             <a:avLst/>
@@ -31857,109 +31938,81 @@
           </a:bodyPr>
           <a:lstStyle/>
           <a:p>
-            <a:pPr algn="l">
+            <a:pPr algn="ctr">
               <a:lnSpc>
                 <a:spcPct val="105000"/>
               </a:lnSpc>
             </a:pPr>
             <a:r>
-              <a:rPr sz="1000" b="0" i="0">
+              <a:rPr sz="900" b="0" i="0">
                 <a:solidFill>
-                  <a:srgbClr val="252A31"/>
+                  <a:srgbClr val="6B7480"/>
                 </a:solidFill>
                 <a:latin typeface="Meiryo"/>
               </a:rPr>
-              <a:t>8月は「一本通るデモ」優先。入力→処理→出力の流れを示す。</a:t>
-            </a:r>
-          </a:p>
-        </p:txBody>
-      </p:sp>
-      <p:sp>
-        <p:nvSpPr>
-          <p:cNvPr id="39" name="Rectangle 38"/>
-          <p:cNvSpPr/>
-          <p:nvPr/>
-        </p:nvSpPr>
-        <p:spPr>
-          <a:xfrm>
-            <a:off x="8293608" y="4389120"/>
-            <a:ext cx="91440" cy="91440"/>
-          </a:xfrm>
-          <a:prstGeom prst="rect">
-            <a:avLst/>
-          </a:prstGeom>
-          <a:solidFill>
-            <a:srgbClr val="2E8B9E"/>
-          </a:solidFill>
-          <a:ln>
-            <a:noFill/>
-          </a:ln>
-          <a:effectLst/>
-        </p:spPr>
-        <p:style>
-          <a:lnRef idx="1">
-            <a:schemeClr val="accent1"/>
-          </a:lnRef>
-          <a:fillRef idx="3">
-            <a:schemeClr val="accent1"/>
-          </a:fillRef>
-          <a:effectRef idx="2">
-            <a:schemeClr val="accent1"/>
-          </a:effectRef>
-          <a:fontRef idx="minor">
-            <a:schemeClr val="lt1"/>
-          </a:fontRef>
-        </p:style>
-        <p:txBody>
-          <a:bodyPr rtlCol="0" anchor="ctr"/>
-          <a:lstStyle/>
-          <a:p>
-            <a:pPr algn="ctr"/>
-          </a:p>
-        </p:txBody>
-      </p:sp>
-      <p:sp>
-        <p:nvSpPr>
-          <p:cNvPr id="40" name="TextBox 39"/>
-          <p:cNvSpPr txBox="1"/>
-          <p:nvPr/>
-        </p:nvSpPr>
-        <p:spPr>
-          <a:xfrm>
-            <a:off x="8476488" y="4297680"/>
-            <a:ext cx="3063240" cy="640080"/>
-          </a:xfrm>
-          <a:prstGeom prst="rect">
-            <a:avLst/>
-          </a:prstGeom>
-          <a:noFill/>
-        </p:spPr>
-        <p:txBody>
-          <a:bodyPr wrap="square" anchor="t" lIns="25400" rIns="25400" tIns="12700" bIns="12700">
-            <a:spAutoFit/>
-          </a:bodyPr>
-          <a:lstStyle/>
-          <a:p>
-            <a:pPr algn="l">
+              <a:t>外部参照禁止で再設計中。</a:t>
+            </a:r>
+          </a:p>
+          <a:p>
+            <a:pPr algn="ctr">
               <a:lnSpc>
                 <a:spcPct val="105000"/>
               </a:lnSpc>
             </a:pPr>
             <a:r>
-              <a:rPr sz="1000" b="0" i="0">
+              <a:rPr sz="900" b="0" i="0">
                 <a:solidFill>
-                  <a:srgbClr val="252A31"/>
+                  <a:srgbClr val="6B7480"/>
                 </a:solidFill>
                 <a:latin typeface="Meiryo"/>
               </a:rPr>
-              <a:t>9月は発表資料・削減効果・運用項目・手順書/利用ルールの棚卸し。</a:t>
-            </a:r>
-          </a:p>
-        </p:txBody>
-      </p:sp>
-      <p:sp>
-        <p:nvSpPr>
-          <p:cNvPr id="41" name="TextBox 40"/>
+              <a:t>作るものの再定義が最優先</a:t>
+            </a:r>
+          </a:p>
+        </p:txBody>
+      </p:sp>
+      <p:sp>
+        <p:nvSpPr>
+          <p:cNvPr id="32" name="TextBox 31"/>
+          <p:cNvSpPr txBox="1"/>
+          <p:nvPr/>
+        </p:nvSpPr>
+        <p:spPr>
+          <a:xfrm>
+            <a:off x="502920" y="4315968"/>
+            <a:ext cx="11201400" cy="457200"/>
+          </a:xfrm>
+          <a:prstGeom prst="rect">
+            <a:avLst/>
+          </a:prstGeom>
+          <a:noFill/>
+        </p:spPr>
+        <p:txBody>
+          <a:bodyPr wrap="square" anchor="ctr" lIns="25400" rIns="25400" tIns="12700" bIns="12700">
+            <a:spAutoFit/>
+          </a:bodyPr>
+          <a:lstStyle/>
+          <a:p>
+            <a:pPr algn="l">
+              <a:lnSpc>
+                <a:spcPct val="100000"/>
+              </a:lnSpc>
+            </a:pPr>
+            <a:r>
+              <a:rPr sz="1150" b="1" i="0">
+                <a:solidFill>
+                  <a:srgbClr val="1F385C"/>
+                </a:solidFill>
+                <a:latin typeface="Meiryo"/>
+              </a:rPr>
+              <a:t>事務局の重点 ▶ ①ガバナンス判断の早期化　②進め方の型・スケジュール提示　③8月は「一本通し」デモに集中</a:t>
+            </a:r>
+          </a:p>
+        </p:txBody>
+      </p:sp>
+      <p:sp>
+        <p:nvSpPr>
+          <p:cNvPr id="33" name="TextBox 32"/>
           <p:cNvSpPr txBox="1"/>
           <p:nvPr/>
         </p:nvSpPr>
@@ -31998,7 +32051,7 @@
       </p:sp>
       <p:sp>
         <p:nvSpPr>
-          <p:cNvPr id="42" name="Chevron 41"/>
+          <p:cNvPr id="34" name="Chevron 33"/>
           <p:cNvSpPr/>
           <p:nvPr/>
         </p:nvSpPr>
@@ -32063,7 +32116,7 @@
       </p:sp>
       <p:sp>
         <p:nvSpPr>
-          <p:cNvPr id="43" name="Chevron 42"/>
+          <p:cNvPr id="35" name="Chevron 34"/>
           <p:cNvSpPr/>
           <p:nvPr/>
         </p:nvSpPr>
@@ -32128,7 +32181,7 @@
       </p:sp>
       <p:sp>
         <p:nvSpPr>
-          <p:cNvPr id="44" name="Chevron 43"/>
+          <p:cNvPr id="36" name="Chevron 35"/>
           <p:cNvSpPr/>
           <p:nvPr/>
         </p:nvSpPr>
@@ -32193,7 +32246,7 @@
       </p:sp>
       <p:sp>
         <p:nvSpPr>
-          <p:cNvPr id="45" name="Chevron 44"/>
+          <p:cNvPr id="37" name="Chevron 36"/>
           <p:cNvSpPr/>
           <p:nvPr/>
         </p:nvSpPr>
@@ -32258,7 +32311,7 @@
       </p:sp>
       <p:sp>
         <p:nvSpPr>
-          <p:cNvPr id="46" name="Chevron 45"/>
+          <p:cNvPr id="38" name="Chevron 37"/>
           <p:cNvSpPr/>
           <p:nvPr/>
         </p:nvSpPr>
@@ -32323,7 +32376,7 @@
       </p:sp>
       <p:sp>
         <p:nvSpPr>
-          <p:cNvPr id="47" name="Chevron 46"/>
+          <p:cNvPr id="39" name="Chevron 38"/>
           <p:cNvSpPr/>
           <p:nvPr/>
         </p:nvSpPr>
